--- a/presentations/b02-identity/B02_Identity_Narrated.pptx
+++ b/presentations/b02-identity/B02_Identity_Narrated.pptx
@@ -117,14 +117,14 @@
   <p:extLst>
     <p:ext uri="{521415D9-36F7-43E2-AB2F-B90AF26B5E84}">
       <p14:sectionLst xmlns:p14="http://schemas.microsoft.com/office/powerpoint/2010/main">
-        <p14:section name="Why identity matters" id="{36B658B9-63E0-0B5B-0BE2-A89FC06B46F9}">
+        <p14:section name="Why identity matters" id="{252D397D-F72B-6D7A-7C8D-65F278D89D7E}">
           <p14:sldIdLst>
             <p14:sldId id="256"/>
             <p14:sldId id="257"/>
             <p14:sldId id="258"/>
           </p14:sldIdLst>
         </p14:section>
-        <p14:section name="What changes" id="{AB1D69BD-30C9-C07E-F211-FD3127E8A71D}">
+        <p14:section name="What changes" id="{55052109-6183-7980-B9CE-AA6E0993BC8C}">
           <p14:sldIdLst>
             <p14:sldId id="259"/>
             <p14:sldId id="260"/>
@@ -132,19 +132,19 @@
             <p14:sldId id="262"/>
           </p14:sldIdLst>
         </p14:section>
-        <p14:section name="Who owns it" id="{88D589CD-7428-5AC1-C542-92FC8E6E5E4F}">
+        <p14:section name="Who owns it" id="{F2A4C398-C262-7B73-F8D9-8BA02308393D}">
           <p14:sldIdLst>
             <p14:sldId id="263"/>
           </p14:sldIdLst>
         </p14:section>
-        <p14:section name="How to do it" id="{F2DF7BCD-7E6E-2685-7605-EB5DB27C59D9}">
+        <p14:section name="How to do it" id="{FB486A26-0329-F58A-BA66-8CBA11CFD0E4}">
           <p14:sldIdLst>
             <p14:sldId id="264"/>
             <p14:sldId id="265"/>
             <p14:sldId id="266"/>
           </p14:sldIdLst>
         </p14:section>
-        <p14:section name="Backup" id="{E0A784E4-1F72-8198-80D8-B40E0AA8FEDC}">
+        <p14:section name="Backup" id="{47BD790A-5004-4587-2BC3-D31C63DFD5AA}">
           <p14:sldIdLst/>
         </p14:section>
       </p14:sectionLst>
@@ -181,7 +181,7 @@
     </p:spTree>
     <p:extLst>
       <p:ext uri="{BB962C8B-B14F-4D97-AF65-F5344CB8AC3E}">
-        <p14:creationId xmlns:p14="http://schemas.microsoft.com/office/powerpoint/2010/main" val="832381334"/>
+        <p14:creationId xmlns:p14="http://schemas.microsoft.com/office/powerpoint/2010/main" val="215066518"/>
       </p:ext>
     </p:extLst>
   </p:cSld>
@@ -327,7 +327,7 @@
           <a:p>
             <a:r>
               <a:rPr lang="en-US" dirty="0"/>
-              <a:t>[0:00–0:29]  This briefing comes from Book 02 of the Modernization Workbook, Identity and Directory: the move from Active Directory to Entra ID.
+              <a:t>[0:00–0:29]  This briefing comes from Book 02 of the Federal Modernization Workbook, Identity and Directory: the move from Active Directory to Entra ID.
 I'll take it through four questions. Why identity matters now. What actually changes when a directory moves to the cloud. Who has to own which decisions. And how to do it without losing the governance that twenty-five years of Active Directory quietly carried.
 The short version: this is not a directory upgrade. It decides whether every security control after it works.
 Workbook: Book 02, index.</a:t>
@@ -1544,7 +1544,7 @@
                   <a:schemeClr val="accent5"/>
                 </a:solidFill>
               </a:rPr>
-              <a:t>Modernization Workbook  ·  Book 02 Identity &amp; Directory</a:t>
+              <a:t>Federal Modernization Workbook  ·  Book 02 Identity &amp; Directory</a:t>
             </a:r>
             <a:endParaRPr lang="en-US" sz="1000" dirty="0"/>
           </a:p>
@@ -2034,7 +2034,87 @@
       </p:sp>
       <p:sp>
         <p:nvSpPr>
-          <p:cNvPr id="4" name="Agenda line"/>
+          <p:cNvPr id="4" name="Presenter"/>
+          <p:cNvSpPr txBox="1"/>
+          <p:nvPr/>
+        </p:nvSpPr>
+        <p:spPr>
+          <a:xfrm>
+            <a:off x="731520" y="5897880"/>
+            <a:ext cx="6858000" cy="365760"/>
+          </a:xfrm>
+          <a:prstGeom prst="rect">
+            <a:avLst/>
+          </a:prstGeom>
+          <a:noFill/>
+          <a:ln/>
+        </p:spPr>
+        <p:txBody>
+          <a:bodyPr wrap="square" lIns="0" tIns="0" rIns="0" bIns="0" rtlCol="0" anchor="ctr"/>
+          <a:lstStyle/>
+          <a:p>
+            <a:pPr marL="0" indent="0">
+              <a:buNone/>
+            </a:pPr>
+            <a:r>
+              <a:rPr lang="en-US" sz="1600" dirty="0">
+                <a:solidFill>
+                  <a:srgbClr val="64748B"/>
+                </a:solidFill>
+              </a:rPr>
+              <a:t>Presented by  </a:t>
+            </a:r>
+            <a:r>
+              <a:rPr lang="en-US" sz="1600" b="1" dirty="0">
+                <a:solidFill>
+                  <a:srgbClr val="1F2A44"/>
+                </a:solidFill>
+              </a:rPr>
+              <a:t>Michael F. Stratton</a:t>
+            </a:r>
+            <a:endParaRPr lang="en-US" sz="1600" dirty="0"/>
+          </a:p>
+        </p:txBody>
+      </p:sp>
+      <p:sp>
+        <p:nvSpPr>
+          <p:cNvPr id="5" name="Disclaimer"/>
+          <p:cNvSpPr txBox="1"/>
+          <p:nvPr/>
+        </p:nvSpPr>
+        <p:spPr>
+          <a:xfrm>
+            <a:off x="731520" y="6309360"/>
+            <a:ext cx="8686800" cy="274320"/>
+          </a:xfrm>
+          <a:prstGeom prst="rect">
+            <a:avLst/>
+          </a:prstGeom>
+          <a:noFill/>
+          <a:ln/>
+        </p:spPr>
+        <p:txBody>
+          <a:bodyPr wrap="square" lIns="0" tIns="0" rIns="0" bIns="0" rtlCol="0" anchor="ctr"/>
+          <a:lstStyle/>
+          <a:p>
+            <a:pPr marL="0" indent="0">
+              <a:buNone/>
+            </a:pPr>
+            <a:r>
+              <a:rPr lang="en-US" sz="1050" dirty="0">
+                <a:solidFill>
+                  <a:srgbClr val="64748B"/>
+                </a:solidFill>
+              </a:rPr>
+              <a:t>Not an official U.S. government publication. Independent technical analysis; not reviewed or endorsed by any federal agency.</a:t>
+            </a:r>
+            <a:endParaRPr lang="en-US" sz="1050" dirty="0"/>
+          </a:p>
+        </p:txBody>
+      </p:sp>
+      <p:sp>
+        <p:nvSpPr>
+          <p:cNvPr id="6" name="Agenda line"/>
           <p:cNvSpPr txBox="1"/>
           <p:nvPr/>
         </p:nvSpPr>
@@ -2118,7 +2198,7 @@
       </p:sp>
       <p:sp>
         <p:nvSpPr>
-          <p:cNvPr id="5" name="Series line"/>
+          <p:cNvPr id="7" name="Series line"/>
           <p:cNvSpPr txBox="1"/>
           <p:nvPr/>
         </p:nvSpPr>
@@ -2146,7 +2226,7 @@
                   <a:srgbClr val="1F2A44"/>
                 </a:solidFill>
               </a:rPr>
-              <a:t>Modernization Workbook</a:t>
+              <a:t>Federal Modernization Workbook</a:t>
             </a:r>
             <a:endParaRPr lang="en-US" sz="1600" dirty="0"/>
           </a:p>
@@ -2168,11 +2248,11 @@
       </p:sp>
       <p:pic>
         <p:nvPicPr>
-          <p:cNvPr id="6" name="Narration">
+          <p:cNvPr id="8" name="Narration" descr="Narration for this slide; captions available">
             <a:hlinkClick r:id="" action="ppaction://media"/>
             <a:extLst>
               <a:ext uri="{FF2B5EF4-FFF2-40B4-BE49-F238E27FC236}">
-                <a16:creationId xmlns:a16="http://schemas.microsoft.com/office/drawing/2014/main" id="{8F13AE23-2601-7E56-F9D9-5FBD72B2028B}"/>
+                <a16:creationId xmlns:a16="http://schemas.microsoft.com/office/drawing/2014/main" id="{7FE0509C-4C33-1C82-E704-D45EC6E383A0}"/>
               </a:ext>
             </a:extLst>
           </p:cNvPr>
@@ -2183,7 +2263,17 @@
             <a:audioFile r:link="rId2"/>
             <p:extLst>
               <p:ext uri="{DAA4B4D4-6D71-4841-9C94-3DE7FCFB9230}">
-                <p14:media xmlns:p14="http://schemas.microsoft.com/office/powerpoint/2010/main" r:embed="rId1"/>
+                <p14:media xmlns:p14="http://schemas.microsoft.com/office/powerpoint/2010/main" r:embed="rId1">
+                  <p14:extLst>
+                    <p:ext uri="{3AFAAA56-56D3-431D-BCD4-E75A35582382}">
+                      <p173:tracksInfo xmlns:p173="http://schemas.microsoft.com/office/powerpoint/2017/3/main" displayLoc="slide">
+                        <p173:trackLst>
+                          <p173:track id="{13E783A0-EAAA-44E9-A20A-5274C36BF11B}" label="English (captions)" lang="en-US" r:embed="rId6"/>
+                        </p173:trackLst>
+                      </p173:tracksInfo>
+                    </p:ext>
+                  </p14:extLst>
+                </p14:media>
               </p:ext>
             </p:extLst>
           </p:nvPr>
@@ -2211,10 +2301,10 @@
   </p:clrMapOvr>
   <mc:AlternateContent xmlns:mc="http://schemas.openxmlformats.org/markup-compatibility/2006">
     <mc:Choice xmlns:p14="http://schemas.microsoft.com/office/powerpoint/2010/main" Requires="p14">
-      <p:transition spd="slow" p14:dur="2000" advTm="30640"/>
+      <p:transition spd="slow" p14:dur="2000" advTm="31020"/>
     </mc:Choice>
     <mc:Fallback>
-      <p:transition spd="slow" advTm="30640"/>
+      <p:transition spd="slow" advTm="31020"/>
     </mc:Fallback>
   </mc:AlternateContent>
   <p:timing>
@@ -2248,9 +2338,9 @@
                                   <p:childTnLst>
                                     <p:cmd type="call" cmd="playFrom(0.0)">
                                       <p:cBhvr>
-                                        <p:cTn id="6" dur="29640" fill="hold"/>
+                                        <p:cTn id="6" dur="30024" fill="hold"/>
                                         <p:tgtEl>
-                                          <p:spTgt spid="6"/>
+                                          <p:spTgt spid="8"/>
                                         </p:tgtEl>
                                       </p:cBhvr>
                                     </p:cmd>
@@ -2350,7 +2440,13 @@
       </p:sp>
       <p:sp>
         <p:nvSpPr>
-          <p:cNvPr id="3" name="Tag How"/>
+          <p:cNvPr id="3" name="Tag How">
+            <a:extLst>
+              <a:ext uri="{C183D7F6-B498-43B3-948B-1728B52AA6E4}">
+                <adec:decorative xmlns:adec="http://schemas.microsoft.com/office/drawing/2017/decorative" val="1"/>
+              </a:ext>
+            </a:extLst>
+          </p:cNvPr>
           <p:cNvSpPr/>
           <p:nvPr/>
         </p:nvSpPr>
@@ -2413,7 +2509,13 @@
       </p:sp>
       <p:sp>
         <p:nvSpPr>
-          <p:cNvPr id="5" name="Phase 1"/>
+          <p:cNvPr id="5" name="Phase 1">
+            <a:extLst>
+              <a:ext uri="{C183D7F6-B498-43B3-948B-1728B52AA6E4}">
+                <adec:decorative xmlns:adec="http://schemas.microsoft.com/office/drawing/2017/decorative" val="1"/>
+              </a:ext>
+            </a:extLst>
+          </p:cNvPr>
           <p:cNvSpPr/>
           <p:nvPr/>
         </p:nvSpPr>
@@ -2491,7 +2593,13 @@
       </p:sp>
       <p:sp>
         <p:nvSpPr>
-          <p:cNvPr id="7" name="Phase 2"/>
+          <p:cNvPr id="7" name="Phase 2">
+            <a:extLst>
+              <a:ext uri="{C183D7F6-B498-43B3-948B-1728B52AA6E4}">
+                <adec:decorative xmlns:adec="http://schemas.microsoft.com/office/drawing/2017/decorative" val="1"/>
+              </a:ext>
+            </a:extLst>
+          </p:cNvPr>
           <p:cNvSpPr/>
           <p:nvPr/>
         </p:nvSpPr>
@@ -2569,7 +2677,13 @@
       </p:sp>
       <p:sp>
         <p:nvSpPr>
-          <p:cNvPr id="9" name="Phase 3"/>
+          <p:cNvPr id="9" name="Phase 3">
+            <a:extLst>
+              <a:ext uri="{C183D7F6-B498-43B3-948B-1728B52AA6E4}">
+                <adec:decorative xmlns:adec="http://schemas.microsoft.com/office/drawing/2017/decorative" val="1"/>
+              </a:ext>
+            </a:extLst>
+          </p:cNvPr>
           <p:cNvSpPr/>
           <p:nvPr/>
         </p:nvSpPr>
@@ -2647,7 +2761,13 @@
       </p:sp>
       <p:sp>
         <p:nvSpPr>
-          <p:cNvPr id="11" name="Phase 4"/>
+          <p:cNvPr id="11" name="Phase 4">
+            <a:extLst>
+              <a:ext uri="{C183D7F6-B498-43B3-948B-1728B52AA6E4}">
+                <adec:decorative xmlns:adec="http://schemas.microsoft.com/office/drawing/2017/decorative" val="1"/>
+              </a:ext>
+            </a:extLst>
+          </p:cNvPr>
           <p:cNvSpPr/>
           <p:nvPr/>
         </p:nvSpPr>
@@ -2725,7 +2845,13 @@
       </p:sp>
       <p:sp>
         <p:nvSpPr>
-          <p:cNvPr id="13" name="Phase 5"/>
+          <p:cNvPr id="13" name="Phase 5">
+            <a:extLst>
+              <a:ext uri="{C183D7F6-B498-43B3-948B-1728B52AA6E4}">
+                <adec:decorative xmlns:adec="http://schemas.microsoft.com/office/drawing/2017/decorative" val="1"/>
+              </a:ext>
+            </a:extLst>
+          </p:cNvPr>
           <p:cNvSpPr/>
           <p:nvPr/>
         </p:nvSpPr>
@@ -2803,7 +2929,13 @@
       </p:sp>
       <p:sp>
         <p:nvSpPr>
-          <p:cNvPr id="15" name="Bundle box"/>
+          <p:cNvPr id="15" name="Bundle box">
+            <a:extLst>
+              <a:ext uri="{C183D7F6-B498-43B3-948B-1728B52AA6E4}">
+                <adec:decorative xmlns:adec="http://schemas.microsoft.com/office/drawing/2017/decorative" val="1"/>
+              </a:ext>
+            </a:extLst>
+          </p:cNvPr>
           <p:cNvSpPr/>
           <p:nvPr/>
         </p:nvSpPr>
@@ -2837,7 +2969,13 @@
       </p:sp>
       <p:sp>
         <p:nvSpPr>
-          <p:cNvPr id="16" name="Icon FaFileShield"/>
+          <p:cNvPr id="16" name="Icon FaFileShield">
+            <a:extLst>
+              <a:ext uri="{C183D7F6-B498-43B3-948B-1728B52AA6E4}">
+                <adec:decorative xmlns:adec="http://schemas.microsoft.com/office/drawing/2017/decorative" val="1"/>
+              </a:ext>
+            </a:extLst>
+          </p:cNvPr>
           <p:cNvSpPr/>
           <p:nvPr/>
         </p:nvSpPr>
@@ -2862,7 +3000,13 @@
       </p:sp>
       <p:pic>
         <p:nvPicPr>
-          <p:cNvPr id="17" name="Image 0" descr="C:\Users\whale\git\mwb-b02\presentations\_build\icons\FaFileShield.png"/>
+          <p:cNvPr id="17" name="Image 0">
+            <a:extLst>
+              <a:ext uri="{C183D7F6-B498-43B3-948B-1728B52AA6E4}">
+                <adec:decorative xmlns:adec="http://schemas.microsoft.com/office/drawing/2017/decorative" val="1"/>
+              </a:ext>
+            </a:extLst>
+          </p:cNvPr>
           <p:cNvPicPr>
             <a:picLocks noChangeAspect="1"/>
           </p:cNvPicPr>
@@ -3033,7 +3177,13 @@
       </p:sp>
       <p:sp>
         <p:nvSpPr>
-          <p:cNvPr id="20" name="Framing"/>
+          <p:cNvPr id="20" name="Framing">
+            <a:extLst>
+              <a:ext uri="{C183D7F6-B498-43B3-948B-1728B52AA6E4}">
+                <adec:decorative xmlns:adec="http://schemas.microsoft.com/office/drawing/2017/decorative" val="1"/>
+              </a:ext>
+            </a:extLst>
+          </p:cNvPr>
           <p:cNvSpPr/>
           <p:nvPr/>
         </p:nvSpPr>
@@ -3067,7 +3217,13 @@
       </p:sp>
       <p:sp>
         <p:nvSpPr>
-          <p:cNvPr id="21" name="Icon FaBuilding"/>
+          <p:cNvPr id="21" name="Icon FaBuilding">
+            <a:extLst>
+              <a:ext uri="{C183D7F6-B498-43B3-948B-1728B52AA6E4}">
+                <adec:decorative xmlns:adec="http://schemas.microsoft.com/office/drawing/2017/decorative" val="1"/>
+              </a:ext>
+            </a:extLst>
+          </p:cNvPr>
           <p:cNvSpPr/>
           <p:nvPr/>
         </p:nvSpPr>
@@ -3092,7 +3248,13 @@
       </p:sp>
       <p:pic>
         <p:nvPicPr>
-          <p:cNvPr id="22" name="Image 1" descr="C:\Users\whale\git\mwb-b02\presentations\_build\icons\FaBuilding.png"/>
+          <p:cNvPr id="22" name="Image 1">
+            <a:extLst>
+              <a:ext uri="{C183D7F6-B498-43B3-948B-1728B52AA6E4}">
+                <adec:decorative xmlns:adec="http://schemas.microsoft.com/office/drawing/2017/decorative" val="1"/>
+              </a:ext>
+            </a:extLst>
+          </p:cNvPr>
           <p:cNvPicPr>
             <a:picLocks noChangeAspect="1"/>
           </p:cNvPicPr>
@@ -3241,11 +3403,11 @@
       </p:sp>
       <p:pic>
         <p:nvPicPr>
-          <p:cNvPr id="26" name="Narration">
+          <p:cNvPr id="26" name="Narration" descr="Narration for this slide; captions available">
             <a:hlinkClick r:id="" action="ppaction://media"/>
             <a:extLst>
               <a:ext uri="{FF2B5EF4-FFF2-40B4-BE49-F238E27FC236}">
-                <a16:creationId xmlns:a16="http://schemas.microsoft.com/office/drawing/2014/main" id="{AF28C65E-7D0B-C08D-CC24-D455345228C3}"/>
+                <a16:creationId xmlns:a16="http://schemas.microsoft.com/office/drawing/2014/main" id="{D17F26EF-8B81-B4D2-2717-822839907F5F}"/>
               </a:ext>
             </a:extLst>
           </p:cNvPr>
@@ -3256,7 +3418,17 @@
             <a:audioFile r:link="rId2"/>
             <p:extLst>
               <p:ext uri="{DAA4B4D4-6D71-4841-9C94-3DE7FCFB9230}">
-                <p14:media xmlns:p14="http://schemas.microsoft.com/office/powerpoint/2010/main" r:embed="rId1"/>
+                <p14:media xmlns:p14="http://schemas.microsoft.com/office/powerpoint/2010/main" r:embed="rId1">
+                  <p14:extLst>
+                    <p:ext uri="{3AFAAA56-56D3-431D-BCD4-E75A35582382}">
+                      <p173:tracksInfo xmlns:p173="http://schemas.microsoft.com/office/powerpoint/2017/3/main" displayLoc="slide">
+                        <p173:trackLst>
+                          <p173:track id="{3041292E-F641-4230-A558-62968ADA2093}" label="English (captions)" lang="en-US" r:embed="rId8"/>
+                        </p173:trackLst>
+                      </p173:tracksInfo>
+                    </p:ext>
+                  </p14:extLst>
+                </p14:media>
               </p:ext>
             </p:extLst>
           </p:nvPr>
@@ -3423,7 +3595,13 @@
       </p:sp>
       <p:sp>
         <p:nvSpPr>
-          <p:cNvPr id="3" name="Tag How"/>
+          <p:cNvPr id="3" name="Tag How">
+            <a:extLst>
+              <a:ext uri="{C183D7F6-B498-43B3-948B-1728B52AA6E4}">
+                <adec:decorative xmlns:adec="http://schemas.microsoft.com/office/drawing/2017/decorative" val="1"/>
+              </a:ext>
+            </a:extLst>
+          </p:cNvPr>
           <p:cNvSpPr/>
           <p:nvPr/>
         </p:nvSpPr>
@@ -3486,7 +3664,13 @@
       </p:sp>
       <p:sp>
         <p:nvSpPr>
-          <p:cNvPr id="5" name="Ask 1"/>
+          <p:cNvPr id="5" name="Ask 1">
+            <a:extLst>
+              <a:ext uri="{C183D7F6-B498-43B3-948B-1728B52AA6E4}">
+                <adec:decorative xmlns:adec="http://schemas.microsoft.com/office/drawing/2017/decorative" val="1"/>
+              </a:ext>
+            </a:extLst>
+          </p:cNvPr>
           <p:cNvSpPr/>
           <p:nvPr/>
         </p:nvSpPr>
@@ -3520,7 +3704,13 @@
       </p:sp>
       <p:sp>
         <p:nvSpPr>
-          <p:cNvPr id="6" name="Icon FaUserCheck"/>
+          <p:cNvPr id="6" name="Icon FaUserCheck">
+            <a:extLst>
+              <a:ext uri="{C183D7F6-B498-43B3-948B-1728B52AA6E4}">
+                <adec:decorative xmlns:adec="http://schemas.microsoft.com/office/drawing/2017/decorative" val="1"/>
+              </a:ext>
+            </a:extLst>
+          </p:cNvPr>
           <p:cNvSpPr/>
           <p:nvPr/>
         </p:nvSpPr>
@@ -3545,7 +3735,13 @@
       </p:sp>
       <p:pic>
         <p:nvPicPr>
-          <p:cNvPr id="7" name="Image 0" descr="C:\Users\whale\git\mwb-b02\presentations\_build\icons\FaUserCheck.png"/>
+          <p:cNvPr id="7" name="Image 0">
+            <a:extLst>
+              <a:ext uri="{C183D7F6-B498-43B3-948B-1728B52AA6E4}">
+                <adec:decorative xmlns:adec="http://schemas.microsoft.com/office/drawing/2017/decorative" val="1"/>
+              </a:ext>
+            </a:extLst>
+          </p:cNvPr>
           <p:cNvPicPr>
             <a:picLocks noChangeAspect="1"/>
           </p:cNvPicPr>
@@ -3622,7 +3818,13 @@
       </p:sp>
       <p:sp>
         <p:nvSpPr>
-          <p:cNvPr id="9" name="Ask 2"/>
+          <p:cNvPr id="9" name="Ask 2">
+            <a:extLst>
+              <a:ext uri="{C183D7F6-B498-43B3-948B-1728B52AA6E4}">
+                <adec:decorative xmlns:adec="http://schemas.microsoft.com/office/drawing/2017/decorative" val="1"/>
+              </a:ext>
+            </a:extLst>
+          </p:cNvPr>
           <p:cNvSpPr/>
           <p:nvPr/>
         </p:nvSpPr>
@@ -3656,7 +3858,13 @@
       </p:sp>
       <p:sp>
         <p:nvSpPr>
-          <p:cNvPr id="10" name="Icon FaListCheck"/>
+          <p:cNvPr id="10" name="Icon FaListCheck">
+            <a:extLst>
+              <a:ext uri="{C183D7F6-B498-43B3-948B-1728B52AA6E4}">
+                <adec:decorative xmlns:adec="http://schemas.microsoft.com/office/drawing/2017/decorative" val="1"/>
+              </a:ext>
+            </a:extLst>
+          </p:cNvPr>
           <p:cNvSpPr/>
           <p:nvPr/>
         </p:nvSpPr>
@@ -3681,7 +3889,13 @@
       </p:sp>
       <p:pic>
         <p:nvPicPr>
-          <p:cNvPr id="11" name="Image 1" descr="C:\Users\whale\git\mwb-b02\presentations\_build\icons\FaListCheck.png"/>
+          <p:cNvPr id="11" name="Image 1">
+            <a:extLst>
+              <a:ext uri="{C183D7F6-B498-43B3-948B-1728B52AA6E4}">
+                <adec:decorative xmlns:adec="http://schemas.microsoft.com/office/drawing/2017/decorative" val="1"/>
+              </a:ext>
+            </a:extLst>
+          </p:cNvPr>
           <p:cNvPicPr>
             <a:picLocks noChangeAspect="1"/>
           </p:cNvPicPr>
@@ -3758,7 +3972,13 @@
       </p:sp>
       <p:sp>
         <p:nvSpPr>
-          <p:cNvPr id="13" name="Ask 3"/>
+          <p:cNvPr id="13" name="Ask 3">
+            <a:extLst>
+              <a:ext uri="{C183D7F6-B498-43B3-948B-1728B52AA6E4}">
+                <adec:decorative xmlns:adec="http://schemas.microsoft.com/office/drawing/2017/decorative" val="1"/>
+              </a:ext>
+            </a:extLst>
+          </p:cNvPr>
           <p:cNvSpPr/>
           <p:nvPr/>
         </p:nvSpPr>
@@ -3792,7 +4012,13 @@
       </p:sp>
       <p:sp>
         <p:nvSpPr>
-          <p:cNvPr id="14" name="Icon FaUserClock"/>
+          <p:cNvPr id="14" name="Icon FaUserClock">
+            <a:extLst>
+              <a:ext uri="{C183D7F6-B498-43B3-948B-1728B52AA6E4}">
+                <adec:decorative xmlns:adec="http://schemas.microsoft.com/office/drawing/2017/decorative" val="1"/>
+              </a:ext>
+            </a:extLst>
+          </p:cNvPr>
           <p:cNvSpPr/>
           <p:nvPr/>
         </p:nvSpPr>
@@ -3817,7 +4043,13 @@
       </p:sp>
       <p:pic>
         <p:nvPicPr>
-          <p:cNvPr id="15" name="Image 2" descr="C:\Users\whale\git\mwb-b02\presentations\_build\icons\FaUserClock.png"/>
+          <p:cNvPr id="15" name="Image 2">
+            <a:extLst>
+              <a:ext uri="{C183D7F6-B498-43B3-948B-1728B52AA6E4}">
+                <adec:decorative xmlns:adec="http://schemas.microsoft.com/office/drawing/2017/decorative" val="1"/>
+              </a:ext>
+            </a:extLst>
+          </p:cNvPr>
           <p:cNvPicPr>
             <a:picLocks noChangeAspect="1"/>
           </p:cNvPicPr>
@@ -3894,7 +4126,13 @@
       </p:sp>
       <p:sp>
         <p:nvSpPr>
-          <p:cNvPr id="17" name="Ask 4"/>
+          <p:cNvPr id="17" name="Ask 4">
+            <a:extLst>
+              <a:ext uri="{C183D7F6-B498-43B3-948B-1728B52AA6E4}">
+                <adec:decorative xmlns:adec="http://schemas.microsoft.com/office/drawing/2017/decorative" val="1"/>
+              </a:ext>
+            </a:extLst>
+          </p:cNvPr>
           <p:cNvSpPr/>
           <p:nvPr/>
         </p:nvSpPr>
@@ -3928,7 +4166,13 @@
       </p:sp>
       <p:sp>
         <p:nvSpPr>
-          <p:cNvPr id="18" name="Icon FaFileShield"/>
+          <p:cNvPr id="18" name="Icon FaFileShield">
+            <a:extLst>
+              <a:ext uri="{C183D7F6-B498-43B3-948B-1728B52AA6E4}">
+                <adec:decorative xmlns:adec="http://schemas.microsoft.com/office/drawing/2017/decorative" val="1"/>
+              </a:ext>
+            </a:extLst>
+          </p:cNvPr>
           <p:cNvSpPr/>
           <p:nvPr/>
         </p:nvSpPr>
@@ -3953,7 +4197,13 @@
       </p:sp>
       <p:pic>
         <p:nvPicPr>
-          <p:cNvPr id="19" name="Image 3" descr="C:\Users\whale\git\mwb-b02\presentations\_build\icons\FaFileShield.png"/>
+          <p:cNvPr id="19" name="Image 3">
+            <a:extLst>
+              <a:ext uri="{C183D7F6-B498-43B3-948B-1728B52AA6E4}">
+                <adec:decorative xmlns:adec="http://schemas.microsoft.com/office/drawing/2017/decorative" val="1"/>
+              </a:ext>
+            </a:extLst>
+          </p:cNvPr>
           <p:cNvPicPr>
             <a:picLocks noChangeAspect="1"/>
           </p:cNvPicPr>
@@ -4030,7 +4280,13 @@
       </p:sp>
       <p:sp>
         <p:nvSpPr>
-          <p:cNvPr id="21" name="Close"/>
+          <p:cNvPr id="21" name="Close">
+            <a:extLst>
+              <a:ext uri="{C183D7F6-B498-43B3-948B-1728B52AA6E4}">
+                <adec:decorative xmlns:adec="http://schemas.microsoft.com/office/drawing/2017/decorative" val="1"/>
+              </a:ext>
+            </a:extLst>
+          </p:cNvPr>
           <p:cNvSpPr/>
           <p:nvPr/>
         </p:nvSpPr>
@@ -4064,7 +4320,13 @@
       </p:sp>
       <p:sp>
         <p:nvSpPr>
-          <p:cNvPr id="22" name="Icon FaBook"/>
+          <p:cNvPr id="22" name="Icon FaBook">
+            <a:extLst>
+              <a:ext uri="{C183D7F6-B498-43B3-948B-1728B52AA6E4}">
+                <adec:decorative xmlns:adec="http://schemas.microsoft.com/office/drawing/2017/decorative" val="1"/>
+              </a:ext>
+            </a:extLst>
+          </p:cNvPr>
           <p:cNvSpPr/>
           <p:nvPr/>
         </p:nvSpPr>
@@ -4089,7 +4351,13 @@
       </p:sp>
       <p:pic>
         <p:nvPicPr>
-          <p:cNvPr id="23" name="Image 4" descr="C:\Users\whale\git\mwb-b02\presentations\_build\icons\FaBook.png"/>
+          <p:cNvPr id="23" name="Image 4">
+            <a:extLst>
+              <a:ext uri="{C183D7F6-B498-43B3-948B-1728B52AA6E4}">
+                <adec:decorative xmlns:adec="http://schemas.microsoft.com/office/drawing/2017/decorative" val="1"/>
+              </a:ext>
+            </a:extLst>
+          </p:cNvPr>
           <p:cNvPicPr>
             <a:picLocks noChangeAspect="1"/>
           </p:cNvPicPr>
@@ -4202,11 +4470,11 @@
       </p:sp>
       <p:pic>
         <p:nvPicPr>
-          <p:cNvPr id="26" name="Narration">
+          <p:cNvPr id="26" name="Narration" descr="Narration for this slide; captions available">
             <a:hlinkClick r:id="" action="ppaction://media"/>
             <a:extLst>
               <a:ext uri="{FF2B5EF4-FFF2-40B4-BE49-F238E27FC236}">
-                <a16:creationId xmlns:a16="http://schemas.microsoft.com/office/drawing/2014/main" id="{C87575CA-9614-4CA2-A999-D9674D81B74A}"/>
+                <a16:creationId xmlns:a16="http://schemas.microsoft.com/office/drawing/2014/main" id="{5D0C1AEA-1085-5020-75A1-BBF2D497C3F6}"/>
               </a:ext>
             </a:extLst>
           </p:cNvPr>
@@ -4217,7 +4485,17 @@
             <a:audioFile r:link="rId2"/>
             <p:extLst>
               <p:ext uri="{DAA4B4D4-6D71-4841-9C94-3DE7FCFB9230}">
-                <p14:media xmlns:p14="http://schemas.microsoft.com/office/powerpoint/2010/main" r:embed="rId1"/>
+                <p14:media xmlns:p14="http://schemas.microsoft.com/office/powerpoint/2010/main" r:embed="rId1">
+                  <p14:extLst>
+                    <p:ext uri="{3AFAAA56-56D3-431D-BCD4-E75A35582382}">
+                      <p173:tracksInfo xmlns:p173="http://schemas.microsoft.com/office/powerpoint/2017/3/main" displayLoc="slide">
+                        <p173:trackLst>
+                          <p173:track id="{5737E283-3AB7-47C4-B7EA-CD72186C2FA0}" label="English (captions)" lang="en-US" r:embed="rId11"/>
+                        </p173:trackLst>
+                      </p173:tracksInfo>
+                    </p:ext>
+                  </p14:extLst>
+                </p14:media>
               </p:ext>
             </p:extLst>
           </p:nvPr>
@@ -4384,7 +4662,13 @@
       </p:sp>
       <p:sp>
         <p:nvSpPr>
-          <p:cNvPr id="3" name="Tag Why"/>
+          <p:cNvPr id="3" name="Tag Why">
+            <a:extLst>
+              <a:ext uri="{C183D7F6-B498-43B3-948B-1728B52AA6E4}">
+                <adec:decorative xmlns:adec="http://schemas.microsoft.com/office/drawing/2017/decorative" val="1"/>
+              </a:ext>
+            </a:extLst>
+          </p:cNvPr>
           <p:cNvSpPr/>
           <p:nvPr/>
         </p:nvSpPr>
@@ -4483,7 +4767,13 @@
       </p:sp>
       <p:sp>
         <p:nvSpPr>
-          <p:cNvPr id="6" name="Icon FaLandmark"/>
+          <p:cNvPr id="6" name="Icon FaLandmark">
+            <a:extLst>
+              <a:ext uri="{C183D7F6-B498-43B3-948B-1728B52AA6E4}">
+                <adec:decorative xmlns:adec="http://schemas.microsoft.com/office/drawing/2017/decorative" val="1"/>
+              </a:ext>
+            </a:extLst>
+          </p:cNvPr>
           <p:cNvSpPr/>
           <p:nvPr/>
         </p:nvSpPr>
@@ -4508,7 +4798,13 @@
       </p:sp>
       <p:pic>
         <p:nvPicPr>
-          <p:cNvPr id="7" name="Image 0" descr="C:\Users\whale\git\mwb-b02\presentations\_build\icons\FaLandmark.png"/>
+          <p:cNvPr id="7" name="Image 0">
+            <a:extLst>
+              <a:ext uri="{C183D7F6-B498-43B3-948B-1728B52AA6E4}">
+                <adec:decorative xmlns:adec="http://schemas.microsoft.com/office/drawing/2017/decorative" val="1"/>
+              </a:ext>
+            </a:extLst>
+          </p:cNvPr>
           <p:cNvPicPr>
             <a:picLocks noChangeAspect="1"/>
           </p:cNvPicPr>
@@ -4582,7 +4878,13 @@
       </p:sp>
       <p:sp>
         <p:nvSpPr>
-          <p:cNvPr id="9" name="Icon FaBook"/>
+          <p:cNvPr id="9" name="Icon FaBook">
+            <a:extLst>
+              <a:ext uri="{C183D7F6-B498-43B3-948B-1728B52AA6E4}">
+                <adec:decorative xmlns:adec="http://schemas.microsoft.com/office/drawing/2017/decorative" val="1"/>
+              </a:ext>
+            </a:extLst>
+          </p:cNvPr>
           <p:cNvSpPr/>
           <p:nvPr/>
         </p:nvSpPr>
@@ -4607,7 +4909,13 @@
       </p:sp>
       <p:pic>
         <p:nvPicPr>
-          <p:cNvPr id="10" name="Image 1" descr="C:\Users\whale\git\mwb-b02\presentations\_build\icons\FaBook.png"/>
+          <p:cNvPr id="10" name="Image 1">
+            <a:extLst>
+              <a:ext uri="{C183D7F6-B498-43B3-948B-1728B52AA6E4}">
+                <adec:decorative xmlns:adec="http://schemas.microsoft.com/office/drawing/2017/decorative" val="1"/>
+              </a:ext>
+            </a:extLst>
+          </p:cNvPr>
           <p:cNvPicPr>
             <a:picLocks noChangeAspect="1"/>
           </p:cNvPicPr>
@@ -4681,7 +4989,13 @@
       </p:sp>
       <p:sp>
         <p:nvSpPr>
-          <p:cNvPr id="12" name="Icon FaSitemap"/>
+          <p:cNvPr id="12" name="Icon FaSitemap">
+            <a:extLst>
+              <a:ext uri="{C183D7F6-B498-43B3-948B-1728B52AA6E4}">
+                <adec:decorative xmlns:adec="http://schemas.microsoft.com/office/drawing/2017/decorative" val="1"/>
+              </a:ext>
+            </a:extLst>
+          </p:cNvPr>
           <p:cNvSpPr/>
           <p:nvPr/>
         </p:nvSpPr>
@@ -4706,7 +5020,13 @@
       </p:sp>
       <p:pic>
         <p:nvPicPr>
-          <p:cNvPr id="13" name="Image 2" descr="C:\Users\whale\git\mwb-b02\presentations\_build\icons\FaSitemap.png"/>
+          <p:cNvPr id="13" name="Image 2">
+            <a:extLst>
+              <a:ext uri="{C183D7F6-B498-43B3-948B-1728B52AA6E4}">
+                <adec:decorative xmlns:adec="http://schemas.microsoft.com/office/drawing/2017/decorative" val="1"/>
+              </a:ext>
+            </a:extLst>
+          </p:cNvPr>
           <p:cNvPicPr>
             <a:picLocks noChangeAspect="1"/>
           </p:cNvPicPr>
@@ -4780,7 +5100,13 @@
       </p:sp>
       <p:sp>
         <p:nvSpPr>
-          <p:cNvPr id="15" name="Consequence box"/>
+          <p:cNvPr id="15" name="Consequence box">
+            <a:extLst>
+              <a:ext uri="{C183D7F6-B498-43B3-948B-1728B52AA6E4}">
+                <adec:decorative xmlns:adec="http://schemas.microsoft.com/office/drawing/2017/decorative" val="1"/>
+              </a:ext>
+            </a:extLst>
+          </p:cNvPr>
           <p:cNvSpPr/>
           <p:nvPr/>
         </p:nvSpPr>
@@ -4814,7 +5140,13 @@
       </p:sp>
       <p:sp>
         <p:nvSpPr>
-          <p:cNvPr id="16" name="Icon FaIdCard"/>
+          <p:cNvPr id="16" name="Icon FaIdCard">
+            <a:extLst>
+              <a:ext uri="{C183D7F6-B498-43B3-948B-1728B52AA6E4}">
+                <adec:decorative xmlns:adec="http://schemas.microsoft.com/office/drawing/2017/decorative" val="1"/>
+              </a:ext>
+            </a:extLst>
+          </p:cNvPr>
           <p:cNvSpPr/>
           <p:nvPr/>
         </p:nvSpPr>
@@ -4839,7 +5171,13 @@
       </p:sp>
       <p:pic>
         <p:nvPicPr>
-          <p:cNvPr id="17" name="Image 3" descr="C:\Users\whale\git\mwb-b02\presentations\_build\icons\FaIdCard.png"/>
+          <p:cNvPr id="17" name="Image 3">
+            <a:extLst>
+              <a:ext uri="{C183D7F6-B498-43B3-948B-1728B52AA6E4}">
+                <adec:decorative xmlns:adec="http://schemas.microsoft.com/office/drawing/2017/decorative" val="1"/>
+              </a:ext>
+            </a:extLst>
+          </p:cNvPr>
           <p:cNvPicPr>
             <a:picLocks noChangeAspect="1"/>
           </p:cNvPicPr>
@@ -5028,7 +5366,13 @@
       </p:sp>
       <p:sp>
         <p:nvSpPr>
-          <p:cNvPr id="21" name="Not an upgrade"/>
+          <p:cNvPr id="21" name="Not an upgrade">
+            <a:extLst>
+              <a:ext uri="{C183D7F6-B498-43B3-948B-1728B52AA6E4}">
+                <adec:decorative xmlns:adec="http://schemas.microsoft.com/office/drawing/2017/decorative" val="1"/>
+              </a:ext>
+            </a:extLst>
+          </p:cNvPr>
           <p:cNvSpPr/>
           <p:nvPr/>
         </p:nvSpPr>
@@ -5062,7 +5406,13 @@
       </p:sp>
       <p:sp>
         <p:nvSpPr>
-          <p:cNvPr id="22" name="Icon FaTriangleExclamation"/>
+          <p:cNvPr id="22" name="Icon FaTriangleExclamation">
+            <a:extLst>
+              <a:ext uri="{C183D7F6-B498-43B3-948B-1728B52AA6E4}">
+                <adec:decorative xmlns:adec="http://schemas.microsoft.com/office/drawing/2017/decorative" val="1"/>
+              </a:ext>
+            </a:extLst>
+          </p:cNvPr>
           <p:cNvSpPr/>
           <p:nvPr/>
         </p:nvSpPr>
@@ -5087,7 +5437,13 @@
       </p:sp>
       <p:pic>
         <p:nvPicPr>
-          <p:cNvPr id="23" name="Image 4" descr="C:\Users\whale\git\mwb-b02\presentations\_build\icons\FaTriangleExclamation.png"/>
+          <p:cNvPr id="23" name="Image 4">
+            <a:extLst>
+              <a:ext uri="{C183D7F6-B498-43B3-948B-1728B52AA6E4}">
+                <adec:decorative xmlns:adec="http://schemas.microsoft.com/office/drawing/2017/decorative" val="1"/>
+              </a:ext>
+            </a:extLst>
+          </p:cNvPr>
           <p:cNvPicPr>
             <a:picLocks noChangeAspect="1"/>
           </p:cNvPicPr>
@@ -5236,11 +5592,11 @@
       </p:sp>
       <p:pic>
         <p:nvPicPr>
-          <p:cNvPr id="27" name="Narration">
+          <p:cNvPr id="27" name="Narration" descr="Narration for this slide; captions available">
             <a:hlinkClick r:id="" action="ppaction://media"/>
             <a:extLst>
               <a:ext uri="{FF2B5EF4-FFF2-40B4-BE49-F238E27FC236}">
-                <a16:creationId xmlns:a16="http://schemas.microsoft.com/office/drawing/2014/main" id="{2BBF1DC9-9887-BC34-4BA4-9EFD1E2EE450}"/>
+                <a16:creationId xmlns:a16="http://schemas.microsoft.com/office/drawing/2014/main" id="{89A82CC7-7D64-0ACB-E99A-259EFC665200}"/>
               </a:ext>
             </a:extLst>
           </p:cNvPr>
@@ -5251,7 +5607,17 @@
             <a:audioFile r:link="rId2"/>
             <p:extLst>
               <p:ext uri="{DAA4B4D4-6D71-4841-9C94-3DE7FCFB9230}">
-                <p14:media xmlns:p14="http://schemas.microsoft.com/office/powerpoint/2010/main" r:embed="rId1"/>
+                <p14:media xmlns:p14="http://schemas.microsoft.com/office/powerpoint/2010/main" r:embed="rId1">
+                  <p14:extLst>
+                    <p:ext uri="{3AFAAA56-56D3-431D-BCD4-E75A35582382}">
+                      <p173:tracksInfo xmlns:p173="http://schemas.microsoft.com/office/powerpoint/2017/3/main" displayLoc="slide">
+                        <p173:trackLst>
+                          <p173:track id="{A7F21003-1F1B-4BEA-86EB-1C25FD729A2D}" label="English (captions)" lang="en-US" r:embed="rId11"/>
+                        </p173:trackLst>
+                      </p173:tracksInfo>
+                    </p:ext>
+                  </p14:extLst>
+                </p14:media>
               </p:ext>
             </p:extLst>
           </p:nvPr>
@@ -5418,7 +5784,13 @@
       </p:sp>
       <p:sp>
         <p:nvSpPr>
-          <p:cNvPr id="3" name="Tag Why"/>
+          <p:cNvPr id="3" name="Tag Why">
+            <a:extLst>
+              <a:ext uri="{C183D7F6-B498-43B3-948B-1728B52AA6E4}">
+                <adec:decorative xmlns:adec="http://schemas.microsoft.com/office/drawing/2017/decorative" val="1"/>
+              </a:ext>
+            </a:extLst>
+          </p:cNvPr>
           <p:cNvSpPr/>
           <p:nvPr/>
         </p:nvSpPr>
@@ -5481,7 +5853,13 @@
       </p:sp>
       <p:sp>
         <p:nvSpPr>
-          <p:cNvPr id="5" name="Date 1"/>
+          <p:cNvPr id="5" name="Date 1">
+            <a:extLst>
+              <a:ext uri="{C183D7F6-B498-43B3-948B-1728B52AA6E4}">
+                <adec:decorative xmlns:adec="http://schemas.microsoft.com/office/drawing/2017/decorative" val="1"/>
+              </a:ext>
+            </a:extLst>
+          </p:cNvPr>
           <p:cNvSpPr/>
           <p:nvPr/>
         </p:nvSpPr>
@@ -5574,7 +5952,13 @@
       </p:sp>
       <p:sp>
         <p:nvSpPr>
-          <p:cNvPr id="7" name="Date 2"/>
+          <p:cNvPr id="7" name="Date 2">
+            <a:extLst>
+              <a:ext uri="{C183D7F6-B498-43B3-948B-1728B52AA6E4}">
+                <adec:decorative xmlns:adec="http://schemas.microsoft.com/office/drawing/2017/decorative" val="1"/>
+              </a:ext>
+            </a:extLst>
+          </p:cNvPr>
           <p:cNvSpPr/>
           <p:nvPr/>
         </p:nvSpPr>
@@ -5667,7 +6051,13 @@
       </p:sp>
       <p:sp>
         <p:nvSpPr>
-          <p:cNvPr id="9" name="Date 3"/>
+          <p:cNvPr id="9" name="Date 3">
+            <a:extLst>
+              <a:ext uri="{C183D7F6-B498-43B3-948B-1728B52AA6E4}">
+                <adec:decorative xmlns:adec="http://schemas.microsoft.com/office/drawing/2017/decorative" val="1"/>
+              </a:ext>
+            </a:extLst>
+          </p:cNvPr>
           <p:cNvSpPr/>
           <p:nvPr/>
         </p:nvSpPr>
@@ -5760,7 +6150,13 @@
       </p:sp>
       <p:sp>
         <p:nvSpPr>
-          <p:cNvPr id="11" name="Date 4"/>
+          <p:cNvPr id="11" name="Date 4">
+            <a:extLst>
+              <a:ext uri="{C183D7F6-B498-43B3-948B-1728B52AA6E4}">
+                <adec:decorative xmlns:adec="http://schemas.microsoft.com/office/drawing/2017/decorative" val="1"/>
+              </a:ext>
+            </a:extLst>
+          </p:cNvPr>
           <p:cNvSpPr/>
           <p:nvPr/>
         </p:nvSpPr>
@@ -5897,7 +6293,13 @@
       </p:sp>
       <p:sp>
         <p:nvSpPr>
-          <p:cNvPr id="14" name="Lift and shift"/>
+          <p:cNvPr id="14" name="Lift and shift">
+            <a:extLst>
+              <a:ext uri="{C183D7F6-B498-43B3-948B-1728B52AA6E4}">
+                <adec:decorative xmlns:adec="http://schemas.microsoft.com/office/drawing/2017/decorative" val="1"/>
+              </a:ext>
+            </a:extLst>
+          </p:cNvPr>
           <p:cNvSpPr/>
           <p:nvPr/>
         </p:nvSpPr>
@@ -5931,7 +6333,13 @@
       </p:sp>
       <p:sp>
         <p:nvSpPr>
-          <p:cNvPr id="15" name="Icon FaPlugCircleXmark"/>
+          <p:cNvPr id="15" name="Icon FaPlugCircleXmark">
+            <a:extLst>
+              <a:ext uri="{C183D7F6-B498-43B3-948B-1728B52AA6E4}">
+                <adec:decorative xmlns:adec="http://schemas.microsoft.com/office/drawing/2017/decorative" val="1"/>
+              </a:ext>
+            </a:extLst>
+          </p:cNvPr>
           <p:cNvSpPr/>
           <p:nvPr/>
         </p:nvSpPr>
@@ -5956,7 +6364,13 @@
       </p:sp>
       <p:pic>
         <p:nvPicPr>
-          <p:cNvPr id="16" name="Image 0" descr="C:\Users\whale\git\mwb-b02\presentations\_build\icons\FaPlugCircleXmark.png"/>
+          <p:cNvPr id="16" name="Image 0">
+            <a:extLst>
+              <a:ext uri="{C183D7F6-B498-43B3-948B-1728B52AA6E4}">
+                <adec:decorative xmlns:adec="http://schemas.microsoft.com/office/drawing/2017/decorative" val="1"/>
+              </a:ext>
+            </a:extLst>
+          </p:cNvPr>
           <p:cNvPicPr>
             <a:picLocks noChangeAspect="1"/>
           </p:cNvPicPr>
@@ -6105,11 +6519,11 @@
       </p:sp>
       <p:pic>
         <p:nvPicPr>
-          <p:cNvPr id="19" name="Narration">
+          <p:cNvPr id="19" name="Narration" descr="Narration for this slide; captions available">
             <a:hlinkClick r:id="" action="ppaction://media"/>
             <a:extLst>
               <a:ext uri="{FF2B5EF4-FFF2-40B4-BE49-F238E27FC236}">
-                <a16:creationId xmlns:a16="http://schemas.microsoft.com/office/drawing/2014/main" id="{09F8277D-E1F6-B5DD-9B7D-DF66A92F9D8C}"/>
+                <a16:creationId xmlns:a16="http://schemas.microsoft.com/office/drawing/2014/main" id="{8EB0D5E7-C11F-D37C-0A79-4B6EFEB60C01}"/>
               </a:ext>
             </a:extLst>
           </p:cNvPr>
@@ -6120,7 +6534,17 @@
             <a:audioFile r:link="rId2"/>
             <p:extLst>
               <p:ext uri="{DAA4B4D4-6D71-4841-9C94-3DE7FCFB9230}">
-                <p14:media xmlns:p14="http://schemas.microsoft.com/office/powerpoint/2010/main" r:embed="rId1"/>
+                <p14:media xmlns:p14="http://schemas.microsoft.com/office/powerpoint/2010/main" r:embed="rId1">
+                  <p14:extLst>
+                    <p:ext uri="{3AFAAA56-56D3-431D-BCD4-E75A35582382}">
+                      <p173:tracksInfo xmlns:p173="http://schemas.microsoft.com/office/powerpoint/2017/3/main" displayLoc="slide">
+                        <p173:trackLst>
+                          <p173:track id="{D9540E45-3C2F-4819-BDF5-3DBB9865922C}" label="English (captions)" lang="en-US" r:embed="rId7"/>
+                        </p173:trackLst>
+                      </p173:tracksInfo>
+                    </p:ext>
+                  </p14:extLst>
+                </p14:media>
               </p:ext>
             </p:extLst>
           </p:nvPr>
@@ -6287,7 +6711,13 @@
       </p:sp>
       <p:sp>
         <p:nvSpPr>
-          <p:cNvPr id="3" name="Tag What"/>
+          <p:cNvPr id="3" name="Tag What">
+            <a:extLst>
+              <a:ext uri="{C183D7F6-B498-43B3-948B-1728B52AA6E4}">
+                <adec:decorative xmlns:adec="http://schemas.microsoft.com/office/drawing/2017/decorative" val="1"/>
+              </a:ext>
+            </a:extLst>
+          </p:cNvPr>
           <p:cNvSpPr/>
           <p:nvPr/>
         </p:nvSpPr>
@@ -6369,7 +6799,7 @@
         <a:graphic>
           <a:graphicData uri="http://schemas.openxmlformats.org/drawingml/2006/table">
             <a:tbl>
-              <a:tblPr/>
+              <a:tblPr firstRow="1" bandRow="1"/>
               <a:tblGrid>
                 <a:gridCol w="1965960">
                   <a:extLst>
@@ -7865,7 +8295,13 @@
       </p:graphicFrame>
       <p:sp>
         <p:nvSpPr>
-          <p:cNvPr id="6" name="Key idea"/>
+          <p:cNvPr id="6" name="Key idea">
+            <a:extLst>
+              <a:ext uri="{C183D7F6-B498-43B3-948B-1728B52AA6E4}">
+                <adec:decorative xmlns:adec="http://schemas.microsoft.com/office/drawing/2017/decorative" val="1"/>
+              </a:ext>
+            </a:extLst>
+          </p:cNvPr>
           <p:cNvSpPr/>
           <p:nvPr/>
         </p:nvSpPr>
@@ -7899,7 +8335,13 @@
       </p:sp>
       <p:sp>
         <p:nvSpPr>
-          <p:cNvPr id="7" name="Icon FaRightLeft"/>
+          <p:cNvPr id="7" name="Icon FaRightLeft">
+            <a:extLst>
+              <a:ext uri="{C183D7F6-B498-43B3-948B-1728B52AA6E4}">
+                <adec:decorative xmlns:adec="http://schemas.microsoft.com/office/drawing/2017/decorative" val="1"/>
+              </a:ext>
+            </a:extLst>
+          </p:cNvPr>
           <p:cNvSpPr/>
           <p:nvPr/>
         </p:nvSpPr>
@@ -7924,7 +8366,13 @@
       </p:sp>
       <p:pic>
         <p:nvPicPr>
-          <p:cNvPr id="8" name="Image 0" descr="C:\Users\whale\git\mwb-b02\presentations\_build\icons\FaRightLeft.png"/>
+          <p:cNvPr id="8" name="Image 0">
+            <a:extLst>
+              <a:ext uri="{C183D7F6-B498-43B3-948B-1728B52AA6E4}">
+                <adec:decorative xmlns:adec="http://schemas.microsoft.com/office/drawing/2017/decorative" val="1"/>
+              </a:ext>
+            </a:extLst>
+          </p:cNvPr>
           <p:cNvPicPr>
             <a:picLocks noChangeAspect="1"/>
           </p:cNvPicPr>
@@ -8073,11 +8521,11 @@
       </p:sp>
       <p:pic>
         <p:nvPicPr>
-          <p:cNvPr id="11" name="Narration">
+          <p:cNvPr id="11" name="Narration" descr="Narration for this slide; captions available">
             <a:hlinkClick r:id="" action="ppaction://media"/>
             <a:extLst>
               <a:ext uri="{FF2B5EF4-FFF2-40B4-BE49-F238E27FC236}">
-                <a16:creationId xmlns:a16="http://schemas.microsoft.com/office/drawing/2014/main" id="{26B2550F-F566-7EFD-ECE2-0B3817A211A6}"/>
+                <a16:creationId xmlns:a16="http://schemas.microsoft.com/office/drawing/2014/main" id="{90D9D0F9-736B-7A11-C2FC-9F647E227C43}"/>
               </a:ext>
             </a:extLst>
           </p:cNvPr>
@@ -8088,7 +8536,17 @@
             <a:audioFile r:link="rId2"/>
             <p:extLst>
               <p:ext uri="{DAA4B4D4-6D71-4841-9C94-3DE7FCFB9230}">
-                <p14:media xmlns:p14="http://schemas.microsoft.com/office/powerpoint/2010/main" r:embed="rId1"/>
+                <p14:media xmlns:p14="http://schemas.microsoft.com/office/powerpoint/2010/main" r:embed="rId1">
+                  <p14:extLst>
+                    <p:ext uri="{3AFAAA56-56D3-431D-BCD4-E75A35582382}">
+                      <p173:tracksInfo xmlns:p173="http://schemas.microsoft.com/office/powerpoint/2017/3/main" displayLoc="slide">
+                        <p173:trackLst>
+                          <p173:track id="{617ED16A-317A-44E5-A0E0-965ABDFE19F3}" label="English (captions)" lang="en-US" r:embed="rId7"/>
+                        </p173:trackLst>
+                      </p173:tracksInfo>
+                    </p:ext>
+                  </p14:extLst>
+                </p14:media>
               </p:ext>
             </p:extLst>
           </p:nvPr>
@@ -8255,7 +8713,13 @@
       </p:sp>
       <p:sp>
         <p:nvSpPr>
-          <p:cNvPr id="3" name="Tag What"/>
+          <p:cNvPr id="3" name="Tag What">
+            <a:extLst>
+              <a:ext uri="{C183D7F6-B498-43B3-948B-1728B52AA6E4}">
+                <adec:decorative xmlns:adec="http://schemas.microsoft.com/office/drawing/2017/decorative" val="1"/>
+              </a:ext>
+            </a:extLst>
+          </p:cNvPr>
           <p:cNvSpPr/>
           <p:nvPr/>
         </p:nvSpPr>
@@ -8354,7 +8818,13 @@
       </p:sp>
       <p:sp>
         <p:nvSpPr>
-          <p:cNvPr id="6" name="Dep 1"/>
+          <p:cNvPr id="6" name="Dep 1">
+            <a:extLst>
+              <a:ext uri="{C183D7F6-B498-43B3-948B-1728B52AA6E4}">
+                <adec:decorative xmlns:adec="http://schemas.microsoft.com/office/drawing/2017/decorative" val="1"/>
+              </a:ext>
+            </a:extLst>
+          </p:cNvPr>
           <p:cNvSpPr/>
           <p:nvPr/>
         </p:nvSpPr>
@@ -8388,7 +8858,13 @@
       </p:sp>
       <p:sp>
         <p:nvSpPr>
-          <p:cNvPr id="7" name="Icon FaGlobe"/>
+          <p:cNvPr id="7" name="Icon FaGlobe">
+            <a:extLst>
+              <a:ext uri="{C183D7F6-B498-43B3-948B-1728B52AA6E4}">
+                <adec:decorative xmlns:adec="http://schemas.microsoft.com/office/drawing/2017/decorative" val="1"/>
+              </a:ext>
+            </a:extLst>
+          </p:cNvPr>
           <p:cNvSpPr/>
           <p:nvPr/>
         </p:nvSpPr>
@@ -8413,7 +8889,13 @@
       </p:sp>
       <p:pic>
         <p:nvPicPr>
-          <p:cNvPr id="8" name="Image 0" descr="C:\Users\whale\git\mwb-b02\presentations\_build\icons\FaGlobe.png"/>
+          <p:cNvPr id="8" name="Image 0">
+            <a:extLst>
+              <a:ext uri="{C183D7F6-B498-43B3-948B-1728B52AA6E4}">
+                <adec:decorative xmlns:adec="http://schemas.microsoft.com/office/drawing/2017/decorative" val="1"/>
+              </a:ext>
+            </a:extLst>
+          </p:cNvPr>
           <p:cNvPicPr>
             <a:picLocks noChangeAspect="1"/>
           </p:cNvPicPr>
@@ -8487,7 +8969,13 @@
       </p:sp>
       <p:sp>
         <p:nvSpPr>
-          <p:cNvPr id="10" name="Dep 2"/>
+          <p:cNvPr id="10" name="Dep 2">
+            <a:extLst>
+              <a:ext uri="{C183D7F6-B498-43B3-948B-1728B52AA6E4}">
+                <adec:decorative xmlns:adec="http://schemas.microsoft.com/office/drawing/2017/decorative" val="1"/>
+              </a:ext>
+            </a:extLst>
+          </p:cNvPr>
           <p:cNvSpPr/>
           <p:nvPr/>
         </p:nvSpPr>
@@ -8521,7 +9009,13 @@
       </p:sp>
       <p:sp>
         <p:nvSpPr>
-          <p:cNvPr id="11" name="Icon FaKey"/>
+          <p:cNvPr id="11" name="Icon FaKey">
+            <a:extLst>
+              <a:ext uri="{C183D7F6-B498-43B3-948B-1728B52AA6E4}">
+                <adec:decorative xmlns:adec="http://schemas.microsoft.com/office/drawing/2017/decorative" val="1"/>
+              </a:ext>
+            </a:extLst>
+          </p:cNvPr>
           <p:cNvSpPr/>
           <p:nvPr/>
         </p:nvSpPr>
@@ -8546,7 +9040,13 @@
       </p:sp>
       <p:pic>
         <p:nvPicPr>
-          <p:cNvPr id="12" name="Image 1" descr="C:\Users\whale\git\mwb-b02\presentations\_build\icons\FaKey.png"/>
+          <p:cNvPr id="12" name="Image 1">
+            <a:extLst>
+              <a:ext uri="{C183D7F6-B498-43B3-948B-1728B52AA6E4}">
+                <adec:decorative xmlns:adec="http://schemas.microsoft.com/office/drawing/2017/decorative" val="1"/>
+              </a:ext>
+            </a:extLst>
+          </p:cNvPr>
           <p:cNvPicPr>
             <a:picLocks noChangeAspect="1"/>
           </p:cNvPicPr>
@@ -8620,7 +9120,13 @@
       </p:sp>
       <p:sp>
         <p:nvSpPr>
-          <p:cNvPr id="14" name="Dep 3"/>
+          <p:cNvPr id="14" name="Dep 3">
+            <a:extLst>
+              <a:ext uri="{C183D7F6-B498-43B3-948B-1728B52AA6E4}">
+                <adec:decorative xmlns:adec="http://schemas.microsoft.com/office/drawing/2017/decorative" val="1"/>
+              </a:ext>
+            </a:extLst>
+          </p:cNvPr>
           <p:cNvSpPr/>
           <p:nvPr/>
         </p:nvSpPr>
@@ -8654,7 +9160,13 @@
       </p:sp>
       <p:sp>
         <p:nvSpPr>
-          <p:cNvPr id="15" name="Icon FaRoute"/>
+          <p:cNvPr id="15" name="Icon FaRoute">
+            <a:extLst>
+              <a:ext uri="{C183D7F6-B498-43B3-948B-1728B52AA6E4}">
+                <adec:decorative xmlns:adec="http://schemas.microsoft.com/office/drawing/2017/decorative" val="1"/>
+              </a:ext>
+            </a:extLst>
+          </p:cNvPr>
           <p:cNvSpPr/>
           <p:nvPr/>
         </p:nvSpPr>
@@ -8679,7 +9191,13 @@
       </p:sp>
       <p:pic>
         <p:nvPicPr>
-          <p:cNvPr id="16" name="Image 2" descr="C:\Users\whale\git\mwb-b02\presentations\_build\icons\FaRoute.png"/>
+          <p:cNvPr id="16" name="Image 2">
+            <a:extLst>
+              <a:ext uri="{C183D7F6-B498-43B3-948B-1728B52AA6E4}">
+                <adec:decorative xmlns:adec="http://schemas.microsoft.com/office/drawing/2017/decorative" val="1"/>
+              </a:ext>
+            </a:extLst>
+          </p:cNvPr>
           <p:cNvPicPr>
             <a:picLocks noChangeAspect="1"/>
           </p:cNvPicPr>
@@ -8753,7 +9271,13 @@
       </p:sp>
       <p:sp>
         <p:nvSpPr>
-          <p:cNvPr id="18" name="Dep 4"/>
+          <p:cNvPr id="18" name="Dep 4">
+            <a:extLst>
+              <a:ext uri="{C183D7F6-B498-43B3-948B-1728B52AA6E4}">
+                <adec:decorative xmlns:adec="http://schemas.microsoft.com/office/drawing/2017/decorative" val="1"/>
+              </a:ext>
+            </a:extLst>
+          </p:cNvPr>
           <p:cNvSpPr/>
           <p:nvPr/>
         </p:nvSpPr>
@@ -8787,7 +9311,13 @@
       </p:sp>
       <p:sp>
         <p:nvSpPr>
-          <p:cNvPr id="19" name="Icon FaPlugCircleXmark"/>
+          <p:cNvPr id="19" name="Icon FaPlugCircleXmark">
+            <a:extLst>
+              <a:ext uri="{C183D7F6-B498-43B3-948B-1728B52AA6E4}">
+                <adec:decorative xmlns:adec="http://schemas.microsoft.com/office/drawing/2017/decorative" val="1"/>
+              </a:ext>
+            </a:extLst>
+          </p:cNvPr>
           <p:cNvSpPr/>
           <p:nvPr/>
         </p:nvSpPr>
@@ -8812,7 +9342,13 @@
       </p:sp>
       <p:pic>
         <p:nvPicPr>
-          <p:cNvPr id="20" name="Image 3" descr="C:\Users\whale\git\mwb-b02\presentations\_build\icons\FaPlugCircleXmark.png"/>
+          <p:cNvPr id="20" name="Image 3">
+            <a:extLst>
+              <a:ext uri="{C183D7F6-B498-43B3-948B-1728B52AA6E4}">
+                <adec:decorative xmlns:adec="http://schemas.microsoft.com/office/drawing/2017/decorative" val="1"/>
+              </a:ext>
+            </a:extLst>
+          </p:cNvPr>
           <p:cNvPicPr>
             <a:picLocks noChangeAspect="1"/>
           </p:cNvPicPr>
@@ -8886,7 +9422,13 @@
       </p:sp>
       <p:sp>
         <p:nvSpPr>
-          <p:cNvPr id="22" name="Dep 5"/>
+          <p:cNvPr id="22" name="Dep 5">
+            <a:extLst>
+              <a:ext uri="{C183D7F6-B498-43B3-948B-1728B52AA6E4}">
+                <adec:decorative xmlns:adec="http://schemas.microsoft.com/office/drawing/2017/decorative" val="1"/>
+              </a:ext>
+            </a:extLst>
+          </p:cNvPr>
           <p:cNvSpPr/>
           <p:nvPr/>
         </p:nvSpPr>
@@ -8920,7 +9462,13 @@
       </p:sp>
       <p:sp>
         <p:nvSpPr>
-          <p:cNvPr id="23" name="Icon FaArrowsRotate"/>
+          <p:cNvPr id="23" name="Icon FaArrowsRotate">
+            <a:extLst>
+              <a:ext uri="{C183D7F6-B498-43B3-948B-1728B52AA6E4}">
+                <adec:decorative xmlns:adec="http://schemas.microsoft.com/office/drawing/2017/decorative" val="1"/>
+              </a:ext>
+            </a:extLst>
+          </p:cNvPr>
           <p:cNvSpPr/>
           <p:nvPr/>
         </p:nvSpPr>
@@ -8945,7 +9493,13 @@
       </p:sp>
       <p:pic>
         <p:nvPicPr>
-          <p:cNvPr id="24" name="Image 4" descr="C:\Users\whale\git\mwb-b02\presentations\_build\icons\FaArrowsRotate.png"/>
+          <p:cNvPr id="24" name="Image 4">
+            <a:extLst>
+              <a:ext uri="{C183D7F6-B498-43B3-948B-1728B52AA6E4}">
+                <adec:decorative xmlns:adec="http://schemas.microsoft.com/office/drawing/2017/decorative" val="1"/>
+              </a:ext>
+            </a:extLst>
+          </p:cNvPr>
           <p:cNvPicPr>
             <a:picLocks noChangeAspect="1"/>
           </p:cNvPicPr>
@@ -9019,7 +9573,13 @@
       </p:sp>
       <p:sp>
         <p:nvSpPr>
-          <p:cNvPr id="26" name="Dep 6"/>
+          <p:cNvPr id="26" name="Dep 6">
+            <a:extLst>
+              <a:ext uri="{C183D7F6-B498-43B3-948B-1728B52AA6E4}">
+                <adec:decorative xmlns:adec="http://schemas.microsoft.com/office/drawing/2017/decorative" val="1"/>
+              </a:ext>
+            </a:extLst>
+          </p:cNvPr>
           <p:cNvSpPr/>
           <p:nvPr/>
         </p:nvSpPr>
@@ -9053,7 +9613,13 @@
       </p:sp>
       <p:sp>
         <p:nvSpPr>
-          <p:cNvPr id="27" name="Icon FaLaptop"/>
+          <p:cNvPr id="27" name="Icon FaLaptop">
+            <a:extLst>
+              <a:ext uri="{C183D7F6-B498-43B3-948B-1728B52AA6E4}">
+                <adec:decorative xmlns:adec="http://schemas.microsoft.com/office/drawing/2017/decorative" val="1"/>
+              </a:ext>
+            </a:extLst>
+          </p:cNvPr>
           <p:cNvSpPr/>
           <p:nvPr/>
         </p:nvSpPr>
@@ -9078,7 +9644,13 @@
       </p:sp>
       <p:pic>
         <p:nvPicPr>
-          <p:cNvPr id="28" name="Image 5" descr="C:\Users\whale\git\mwb-b02\presentations\_build\icons\FaLaptop.png"/>
+          <p:cNvPr id="28" name="Image 5">
+            <a:extLst>
+              <a:ext uri="{C183D7F6-B498-43B3-948B-1728B52AA6E4}">
+                <adec:decorative xmlns:adec="http://schemas.microsoft.com/office/drawing/2017/decorative" val="1"/>
+              </a:ext>
+            </a:extLst>
+          </p:cNvPr>
           <p:cNvPicPr>
             <a:picLocks noChangeAspect="1"/>
           </p:cNvPicPr>
@@ -9152,7 +9724,13 @@
       </p:sp>
       <p:sp>
         <p:nvSpPr>
-          <p:cNvPr id="30" name="Dep 7"/>
+          <p:cNvPr id="30" name="Dep 7">
+            <a:extLst>
+              <a:ext uri="{C183D7F6-B498-43B3-948B-1728B52AA6E4}">
+                <adec:decorative xmlns:adec="http://schemas.microsoft.com/office/drawing/2017/decorative" val="1"/>
+              </a:ext>
+            </a:extLst>
+          </p:cNvPr>
           <p:cNvSpPr/>
           <p:nvPr/>
         </p:nvSpPr>
@@ -9186,7 +9764,13 @@
       </p:sp>
       <p:sp>
         <p:nvSpPr>
-          <p:cNvPr id="31" name="Icon FaUserClock"/>
+          <p:cNvPr id="31" name="Icon FaUserClock">
+            <a:extLst>
+              <a:ext uri="{C183D7F6-B498-43B3-948B-1728B52AA6E4}">
+                <adec:decorative xmlns:adec="http://schemas.microsoft.com/office/drawing/2017/decorative" val="1"/>
+              </a:ext>
+            </a:extLst>
+          </p:cNvPr>
           <p:cNvSpPr/>
           <p:nvPr/>
         </p:nvSpPr>
@@ -9211,7 +9795,13 @@
       </p:sp>
       <p:pic>
         <p:nvPicPr>
-          <p:cNvPr id="32" name="Image 6" descr="C:\Users\whale\git\mwb-b02\presentations\_build\icons\FaUserClock.png"/>
+          <p:cNvPr id="32" name="Image 6">
+            <a:extLst>
+              <a:ext uri="{C183D7F6-B498-43B3-948B-1728B52AA6E4}">
+                <adec:decorative xmlns:adec="http://schemas.microsoft.com/office/drawing/2017/decorative" val="1"/>
+              </a:ext>
+            </a:extLst>
+          </p:cNvPr>
           <p:cNvPicPr>
             <a:picLocks noChangeAspect="1"/>
           </p:cNvPicPr>
@@ -9285,7 +9875,13 @@
       </p:sp>
       <p:sp>
         <p:nvSpPr>
-          <p:cNvPr id="34" name="Dep 8"/>
+          <p:cNvPr id="34" name="Dep 8">
+            <a:extLst>
+              <a:ext uri="{C183D7F6-B498-43B3-948B-1728B52AA6E4}">
+                <adec:decorative xmlns:adec="http://schemas.microsoft.com/office/drawing/2017/decorative" val="1"/>
+              </a:ext>
+            </a:extLst>
+          </p:cNvPr>
           <p:cNvSpPr/>
           <p:nvPr/>
         </p:nvSpPr>
@@ -9319,7 +9915,13 @@
       </p:sp>
       <p:sp>
         <p:nvSpPr>
-          <p:cNvPr id="35" name="Icon FaDatabase"/>
+          <p:cNvPr id="35" name="Icon FaDatabase">
+            <a:extLst>
+              <a:ext uri="{C183D7F6-B498-43B3-948B-1728B52AA6E4}">
+                <adec:decorative xmlns:adec="http://schemas.microsoft.com/office/drawing/2017/decorative" val="1"/>
+              </a:ext>
+            </a:extLst>
+          </p:cNvPr>
           <p:cNvSpPr/>
           <p:nvPr/>
         </p:nvSpPr>
@@ -9344,7 +9946,13 @@
       </p:sp>
       <p:pic>
         <p:nvPicPr>
-          <p:cNvPr id="36" name="Image 7" descr="C:\Users\whale\git\mwb-b02\presentations\_build\icons\FaDatabase.png"/>
+          <p:cNvPr id="36" name="Image 7">
+            <a:extLst>
+              <a:ext uri="{C183D7F6-B498-43B3-948B-1728B52AA6E4}">
+                <adec:decorative xmlns:adec="http://schemas.microsoft.com/office/drawing/2017/decorative" val="1"/>
+              </a:ext>
+            </a:extLst>
+          </p:cNvPr>
           <p:cNvPicPr>
             <a:picLocks noChangeAspect="1"/>
           </p:cNvPicPr>
@@ -9418,7 +10026,13 @@
       </p:sp>
       <p:sp>
         <p:nvSpPr>
-          <p:cNvPr id="38" name="Adapters"/>
+          <p:cNvPr id="38" name="Adapters">
+            <a:extLst>
+              <a:ext uri="{C183D7F6-B498-43B3-948B-1728B52AA6E4}">
+                <adec:decorative xmlns:adec="http://schemas.microsoft.com/office/drawing/2017/decorative" val="1"/>
+              </a:ext>
+            </a:extLst>
+          </p:cNvPr>
           <p:cNvSpPr/>
           <p:nvPr/>
         </p:nvSpPr>
@@ -9452,7 +10066,13 @@
       </p:sp>
       <p:sp>
         <p:nvSpPr>
-          <p:cNvPr id="39" name="Icon FaCubes"/>
+          <p:cNvPr id="39" name="Icon FaCubes">
+            <a:extLst>
+              <a:ext uri="{C183D7F6-B498-43B3-948B-1728B52AA6E4}">
+                <adec:decorative xmlns:adec="http://schemas.microsoft.com/office/drawing/2017/decorative" val="1"/>
+              </a:ext>
+            </a:extLst>
+          </p:cNvPr>
           <p:cNvSpPr/>
           <p:nvPr/>
         </p:nvSpPr>
@@ -9477,7 +10097,13 @@
       </p:sp>
       <p:pic>
         <p:nvPicPr>
-          <p:cNvPr id="40" name="Image 8" descr="C:\Users\whale\git\mwb-b02\presentations\_build\icons\FaCubes.png"/>
+          <p:cNvPr id="40" name="Image 8">
+            <a:extLst>
+              <a:ext uri="{C183D7F6-B498-43B3-948B-1728B52AA6E4}">
+                <adec:decorative xmlns:adec="http://schemas.microsoft.com/office/drawing/2017/decorative" val="1"/>
+              </a:ext>
+            </a:extLst>
+          </p:cNvPr>
           <p:cNvPicPr>
             <a:picLocks noChangeAspect="1"/>
           </p:cNvPicPr>
@@ -9626,11 +10252,11 @@
       </p:sp>
       <p:pic>
         <p:nvPicPr>
-          <p:cNvPr id="44" name="Narration">
+          <p:cNvPr id="44" name="Narration" descr="Narration for this slide; captions available">
             <a:hlinkClick r:id="" action="ppaction://media"/>
             <a:extLst>
               <a:ext uri="{FF2B5EF4-FFF2-40B4-BE49-F238E27FC236}">
-                <a16:creationId xmlns:a16="http://schemas.microsoft.com/office/drawing/2014/main" id="{972C06EF-0978-BE4A-99F4-702AB56C4367}"/>
+                <a16:creationId xmlns:a16="http://schemas.microsoft.com/office/drawing/2014/main" id="{D3501289-B1E1-9854-C8ED-A126A95F8389}"/>
               </a:ext>
             </a:extLst>
           </p:cNvPr>
@@ -9641,7 +10267,17 @@
             <a:audioFile r:link="rId2"/>
             <p:extLst>
               <p:ext uri="{DAA4B4D4-6D71-4841-9C94-3DE7FCFB9230}">
-                <p14:media xmlns:p14="http://schemas.microsoft.com/office/powerpoint/2010/main" r:embed="rId1"/>
+                <p14:media xmlns:p14="http://schemas.microsoft.com/office/powerpoint/2010/main" r:embed="rId1">
+                  <p14:extLst>
+                    <p:ext uri="{3AFAAA56-56D3-431D-BCD4-E75A35582382}">
+                      <p173:tracksInfo xmlns:p173="http://schemas.microsoft.com/office/powerpoint/2017/3/main" displayLoc="slide">
+                        <p173:trackLst>
+                          <p173:track id="{F126053E-8589-421D-AB5F-8F5FED7889FF}" label="English (captions)" lang="en-US" r:embed="rId15"/>
+                        </p173:trackLst>
+                      </p173:tracksInfo>
+                    </p:ext>
+                  </p14:extLst>
+                </p14:media>
               </p:ext>
             </p:extLst>
           </p:nvPr>
@@ -9808,7 +10444,13 @@
       </p:sp>
       <p:sp>
         <p:nvSpPr>
-          <p:cNvPr id="3" name="Tag What"/>
+          <p:cNvPr id="3" name="Tag What">
+            <a:extLst>
+              <a:ext uri="{C183D7F6-B498-43B3-948B-1728B52AA6E4}">
+                <adec:decorative xmlns:adec="http://schemas.microsoft.com/office/drawing/2017/decorative" val="1"/>
+              </a:ext>
+            </a:extLst>
+          </p:cNvPr>
           <p:cNvSpPr/>
           <p:nvPr/>
         </p:nvSpPr>
@@ -9871,7 +10513,13 @@
       </p:sp>
       <p:sp>
         <p:nvSpPr>
-          <p:cNvPr id="5" name="Tier 0"/>
+          <p:cNvPr id="5" name="Tier 0">
+            <a:extLst>
+              <a:ext uri="{C183D7F6-B498-43B3-948B-1728B52AA6E4}">
+                <adec:decorative xmlns:adec="http://schemas.microsoft.com/office/drawing/2017/decorative" val="1"/>
+              </a:ext>
+            </a:extLst>
+          </p:cNvPr>
           <p:cNvSpPr/>
           <p:nvPr/>
         </p:nvSpPr>
@@ -9955,7 +10603,13 @@
       </p:sp>
       <p:sp>
         <p:nvSpPr>
-          <p:cNvPr id="7" name="Tier 1"/>
+          <p:cNvPr id="7" name="Tier 1">
+            <a:extLst>
+              <a:ext uri="{C183D7F6-B498-43B3-948B-1728B52AA6E4}">
+                <adec:decorative xmlns:adec="http://schemas.microsoft.com/office/drawing/2017/decorative" val="1"/>
+              </a:ext>
+            </a:extLst>
+          </p:cNvPr>
           <p:cNvSpPr/>
           <p:nvPr/>
         </p:nvSpPr>
@@ -10039,7 +10693,13 @@
       </p:sp>
       <p:sp>
         <p:nvSpPr>
-          <p:cNvPr id="9" name="Tier 2"/>
+          <p:cNvPr id="9" name="Tier 2">
+            <a:extLst>
+              <a:ext uri="{C183D7F6-B498-43B3-948B-1728B52AA6E4}">
+                <adec:decorative xmlns:adec="http://schemas.microsoft.com/office/drawing/2017/decorative" val="1"/>
+              </a:ext>
+            </a:extLst>
+          </p:cNvPr>
           <p:cNvSpPr/>
           <p:nvPr/>
         </p:nvSpPr>
@@ -10123,7 +10783,13 @@
       </p:sp>
       <p:sp>
         <p:nvSpPr>
-          <p:cNvPr id="11" name="Facts box"/>
+          <p:cNvPr id="11" name="Facts box">
+            <a:extLst>
+              <a:ext uri="{C183D7F6-B498-43B3-948B-1728B52AA6E4}">
+                <adec:decorative xmlns:adec="http://schemas.microsoft.com/office/drawing/2017/decorative" val="1"/>
+              </a:ext>
+            </a:extLst>
+          </p:cNvPr>
           <p:cNvSpPr/>
           <p:nvPr/>
         </p:nvSpPr>
@@ -10287,7 +10953,13 @@
       </p:sp>
       <p:sp>
         <p:nvSpPr>
-          <p:cNvPr id="14" name="Decision"/>
+          <p:cNvPr id="14" name="Decision">
+            <a:extLst>
+              <a:ext uri="{C183D7F6-B498-43B3-948B-1728B52AA6E4}">
+                <adec:decorative xmlns:adec="http://schemas.microsoft.com/office/drawing/2017/decorative" val="1"/>
+              </a:ext>
+            </a:extLst>
+          </p:cNvPr>
           <p:cNvSpPr/>
           <p:nvPr/>
         </p:nvSpPr>
@@ -10321,7 +10993,13 @@
       </p:sp>
       <p:sp>
         <p:nvSpPr>
-          <p:cNvPr id="15" name="Icon FaScaleBalanced"/>
+          <p:cNvPr id="15" name="Icon FaScaleBalanced">
+            <a:extLst>
+              <a:ext uri="{C183D7F6-B498-43B3-948B-1728B52AA6E4}">
+                <adec:decorative xmlns:adec="http://schemas.microsoft.com/office/drawing/2017/decorative" val="1"/>
+              </a:ext>
+            </a:extLst>
+          </p:cNvPr>
           <p:cNvSpPr/>
           <p:nvPr/>
         </p:nvSpPr>
@@ -10346,7 +11024,13 @@
       </p:sp>
       <p:pic>
         <p:nvPicPr>
-          <p:cNvPr id="16" name="Image 0" descr="C:\Users\whale\git\mwb-b02\presentations\_build\icons\FaScaleBalanced.png"/>
+          <p:cNvPr id="16" name="Image 0">
+            <a:extLst>
+              <a:ext uri="{C183D7F6-B498-43B3-948B-1728B52AA6E4}">
+                <adec:decorative xmlns:adec="http://schemas.microsoft.com/office/drawing/2017/decorative" val="1"/>
+              </a:ext>
+            </a:extLst>
+          </p:cNvPr>
           <p:cNvPicPr>
             <a:picLocks noChangeAspect="1"/>
           </p:cNvPicPr>
@@ -10495,11 +11179,11 @@
       </p:sp>
       <p:pic>
         <p:nvPicPr>
-          <p:cNvPr id="19" name="Narration">
+          <p:cNvPr id="19" name="Narration" descr="Narration for this slide; captions available">
             <a:hlinkClick r:id="" action="ppaction://media"/>
             <a:extLst>
               <a:ext uri="{FF2B5EF4-FFF2-40B4-BE49-F238E27FC236}">
-                <a16:creationId xmlns:a16="http://schemas.microsoft.com/office/drawing/2014/main" id="{5EDC55F9-D3E4-4C9A-FA31-C326A8E519FE}"/>
+                <a16:creationId xmlns:a16="http://schemas.microsoft.com/office/drawing/2014/main" id="{32C21EAE-4444-01E9-9C22-AD2893B43925}"/>
               </a:ext>
             </a:extLst>
           </p:cNvPr>
@@ -10510,7 +11194,17 @@
             <a:audioFile r:link="rId2"/>
             <p:extLst>
               <p:ext uri="{DAA4B4D4-6D71-4841-9C94-3DE7FCFB9230}">
-                <p14:media xmlns:p14="http://schemas.microsoft.com/office/powerpoint/2010/main" r:embed="rId1"/>
+                <p14:media xmlns:p14="http://schemas.microsoft.com/office/powerpoint/2010/main" r:embed="rId1">
+                  <p14:extLst>
+                    <p:ext uri="{3AFAAA56-56D3-431D-BCD4-E75A35582382}">
+                      <p173:tracksInfo xmlns:p173="http://schemas.microsoft.com/office/powerpoint/2017/3/main" displayLoc="slide">
+                        <p173:trackLst>
+                          <p173:track id="{8D185861-2E71-420B-89E1-3C68A34F46CF}" label="English (captions)" lang="en-US" r:embed="rId7"/>
+                        </p173:trackLst>
+                      </p173:tracksInfo>
+                    </p:ext>
+                  </p14:extLst>
+                </p14:media>
               </p:ext>
             </p:extLst>
           </p:nvPr>
@@ -10677,7 +11371,13 @@
       </p:sp>
       <p:sp>
         <p:nvSpPr>
-          <p:cNvPr id="3" name="Tag What"/>
+          <p:cNvPr id="3" name="Tag What">
+            <a:extLst>
+              <a:ext uri="{C183D7F6-B498-43B3-948B-1728B52AA6E4}">
+                <adec:decorative xmlns:adec="http://schemas.microsoft.com/office/drawing/2017/decorative" val="1"/>
+              </a:ext>
+            </a:extLst>
+          </p:cNvPr>
           <p:cNvSpPr/>
           <p:nvPr/>
         </p:nvSpPr>
@@ -10759,7 +11459,7 @@
         <a:graphic>
           <a:graphicData uri="http://schemas.openxmlformats.org/drawingml/2006/table">
             <a:tbl>
-              <a:tblPr/>
+              <a:tblPr firstRow="1" bandRow="1"/>
               <a:tblGrid>
                 <a:gridCol w="777240">
                   <a:extLst>
@@ -11844,7 +12544,13 @@
       </p:graphicFrame>
       <p:sp>
         <p:nvSpPr>
-          <p:cNvPr id="6" name="Off box"/>
+          <p:cNvPr id="6" name="Off box">
+            <a:extLst>
+              <a:ext uri="{C183D7F6-B498-43B3-948B-1728B52AA6E4}">
+                <adec:decorative xmlns:adec="http://schemas.microsoft.com/office/drawing/2017/decorative" val="1"/>
+              </a:ext>
+            </a:extLst>
+          </p:cNvPr>
           <p:cNvSpPr/>
           <p:nvPr/>
         </p:nvSpPr>
@@ -11878,7 +12584,13 @@
       </p:sp>
       <p:sp>
         <p:nvSpPr>
-          <p:cNvPr id="7" name="Icon FaLock"/>
+          <p:cNvPr id="7" name="Icon FaLock">
+            <a:extLst>
+              <a:ext uri="{C183D7F6-B498-43B3-948B-1728B52AA6E4}">
+                <adec:decorative xmlns:adec="http://schemas.microsoft.com/office/drawing/2017/decorative" val="1"/>
+              </a:ext>
+            </a:extLst>
+          </p:cNvPr>
           <p:cNvSpPr/>
           <p:nvPr/>
         </p:nvSpPr>
@@ -11903,7 +12615,13 @@
       </p:sp>
       <p:pic>
         <p:nvPicPr>
-          <p:cNvPr id="5" name="Image 0" descr="C:\Users\whale\git\mwb-b02\presentations\_build\icons\FaLock.png"/>
+          <p:cNvPr id="5" name="Image 0">
+            <a:extLst>
+              <a:ext uri="{C183D7F6-B498-43B3-948B-1728B52AA6E4}">
+                <adec:decorative xmlns:adec="http://schemas.microsoft.com/office/drawing/2017/decorative" val="1"/>
+              </a:ext>
+            </a:extLst>
+          </p:cNvPr>
           <p:cNvPicPr>
             <a:picLocks noChangeAspect="1"/>
           </p:cNvPicPr>
@@ -12056,7 +12774,13 @@
       </p:sp>
       <p:sp>
         <p:nvSpPr>
-          <p:cNvPr id="11" name="PHS"/>
+          <p:cNvPr id="11" name="PHS">
+            <a:extLst>
+              <a:ext uri="{C183D7F6-B498-43B3-948B-1728B52AA6E4}">
+                <adec:decorative xmlns:adec="http://schemas.microsoft.com/office/drawing/2017/decorative" val="1"/>
+              </a:ext>
+            </a:extLst>
+          </p:cNvPr>
           <p:cNvSpPr/>
           <p:nvPr/>
         </p:nvSpPr>
@@ -12090,7 +12814,13 @@
       </p:sp>
       <p:sp>
         <p:nvSpPr>
-          <p:cNvPr id="12" name="Icon FaKey"/>
+          <p:cNvPr id="12" name="Icon FaKey">
+            <a:extLst>
+              <a:ext uri="{C183D7F6-B498-43B3-948B-1728B52AA6E4}">
+                <adec:decorative xmlns:adec="http://schemas.microsoft.com/office/drawing/2017/decorative" val="1"/>
+              </a:ext>
+            </a:extLst>
+          </p:cNvPr>
           <p:cNvSpPr/>
           <p:nvPr/>
         </p:nvSpPr>
@@ -12115,7 +12845,13 @@
       </p:sp>
       <p:pic>
         <p:nvPicPr>
-          <p:cNvPr id="13" name="Image 1" descr="C:\Users\whale\git\mwb-b02\presentations\_build\icons\FaKey.png"/>
+          <p:cNvPr id="13" name="Image 1">
+            <a:extLst>
+              <a:ext uri="{C183D7F6-B498-43B3-948B-1728B52AA6E4}">
+                <adec:decorative xmlns:adec="http://schemas.microsoft.com/office/drawing/2017/decorative" val="1"/>
+              </a:ext>
+            </a:extLst>
+          </p:cNvPr>
           <p:cNvPicPr>
             <a:picLocks noChangeAspect="1"/>
           </p:cNvPicPr>
@@ -12264,11 +13000,11 @@
       </p:sp>
       <p:pic>
         <p:nvPicPr>
-          <p:cNvPr id="16" name="Narration">
+          <p:cNvPr id="16" name="Narration" descr="Narration for this slide; captions available">
             <a:hlinkClick r:id="" action="ppaction://media"/>
             <a:extLst>
               <a:ext uri="{FF2B5EF4-FFF2-40B4-BE49-F238E27FC236}">
-                <a16:creationId xmlns:a16="http://schemas.microsoft.com/office/drawing/2014/main" id="{257676EE-2662-5019-9027-8B2F90E43572}"/>
+                <a16:creationId xmlns:a16="http://schemas.microsoft.com/office/drawing/2014/main" id="{ACA03C29-5256-42CF-F075-17548B931568}"/>
               </a:ext>
             </a:extLst>
           </p:cNvPr>
@@ -12279,7 +13015,17 @@
             <a:audioFile r:link="rId2"/>
             <p:extLst>
               <p:ext uri="{DAA4B4D4-6D71-4841-9C94-3DE7FCFB9230}">
-                <p14:media xmlns:p14="http://schemas.microsoft.com/office/powerpoint/2010/main" r:embed="rId1"/>
+                <p14:media xmlns:p14="http://schemas.microsoft.com/office/powerpoint/2010/main" r:embed="rId1">
+                  <p14:extLst>
+                    <p:ext uri="{3AFAAA56-56D3-431D-BCD4-E75A35582382}">
+                      <p173:tracksInfo xmlns:p173="http://schemas.microsoft.com/office/powerpoint/2017/3/main" displayLoc="slide">
+                        <p173:trackLst>
+                          <p173:track id="{8C3CB176-C6C7-4D7B-90C3-0DC93E86446F}" label="English (captions)" lang="en-US" r:embed="rId8"/>
+                        </p173:trackLst>
+                      </p173:tracksInfo>
+                    </p:ext>
+                  </p14:extLst>
+                </p14:media>
               </p:ext>
             </p:extLst>
           </p:nvPr>
@@ -12446,7 +13192,13 @@
       </p:sp>
       <p:sp>
         <p:nvSpPr>
-          <p:cNvPr id="3" name="Tag Who"/>
+          <p:cNvPr id="3" name="Tag Who">
+            <a:extLst>
+              <a:ext uri="{C183D7F6-B498-43B3-948B-1728B52AA6E4}">
+                <adec:decorative xmlns:adec="http://schemas.microsoft.com/office/drawing/2017/decorative" val="1"/>
+              </a:ext>
+            </a:extLst>
+          </p:cNvPr>
           <p:cNvSpPr/>
           <p:nvPr/>
         </p:nvSpPr>
@@ -12509,7 +13261,13 @@
       </p:sp>
       <p:sp>
         <p:nvSpPr>
-          <p:cNvPr id="5" name="Who col 1"/>
+          <p:cNvPr id="5" name="Who col 1">
+            <a:extLst>
+              <a:ext uri="{C183D7F6-B498-43B3-948B-1728B52AA6E4}">
+                <adec:decorative xmlns:adec="http://schemas.microsoft.com/office/drawing/2017/decorative" val="1"/>
+              </a:ext>
+            </a:extLst>
+          </p:cNvPr>
           <p:cNvSpPr/>
           <p:nvPr/>
         </p:nvSpPr>
@@ -12543,7 +13301,13 @@
       </p:sp>
       <p:sp>
         <p:nvSpPr>
-          <p:cNvPr id="6" name="Icon FaBuildingColumns"/>
+          <p:cNvPr id="6" name="Icon FaBuildingColumns">
+            <a:extLst>
+              <a:ext uri="{C183D7F6-B498-43B3-948B-1728B52AA6E4}">
+                <adec:decorative xmlns:adec="http://schemas.microsoft.com/office/drawing/2017/decorative" val="1"/>
+              </a:ext>
+            </a:extLst>
+          </p:cNvPr>
           <p:cNvSpPr/>
           <p:nvPr/>
         </p:nvSpPr>
@@ -12568,7 +13332,13 @@
       </p:sp>
       <p:pic>
         <p:nvPicPr>
-          <p:cNvPr id="7" name="Image 0" descr="C:\Users\whale\git\mwb-b02\presentations\_build\icons\FaBuildingColumns.png"/>
+          <p:cNvPr id="7" name="Image 0">
+            <a:extLst>
+              <a:ext uri="{C183D7F6-B498-43B3-948B-1728B52AA6E4}">
+                <adec:decorative xmlns:adec="http://schemas.microsoft.com/office/drawing/2017/decorative" val="1"/>
+              </a:ext>
+            </a:extLst>
+          </p:cNvPr>
           <p:cNvPicPr>
             <a:picLocks noChangeAspect="1"/>
           </p:cNvPicPr>
@@ -12755,7 +13525,13 @@
       </p:sp>
       <p:sp>
         <p:nvSpPr>
-          <p:cNvPr id="10" name="Who col 2"/>
+          <p:cNvPr id="10" name="Who col 2">
+            <a:extLst>
+              <a:ext uri="{C183D7F6-B498-43B3-948B-1728B52AA6E4}">
+                <adec:decorative xmlns:adec="http://schemas.microsoft.com/office/drawing/2017/decorative" val="1"/>
+              </a:ext>
+            </a:extLst>
+          </p:cNvPr>
           <p:cNvSpPr/>
           <p:nvPr/>
         </p:nvSpPr>
@@ -12789,7 +13565,13 @@
       </p:sp>
       <p:sp>
         <p:nvSpPr>
-          <p:cNvPr id="11" name="Icon FaUsersGear"/>
+          <p:cNvPr id="11" name="Icon FaUsersGear">
+            <a:extLst>
+              <a:ext uri="{C183D7F6-B498-43B3-948B-1728B52AA6E4}">
+                <adec:decorative xmlns:adec="http://schemas.microsoft.com/office/drawing/2017/decorative" val="1"/>
+              </a:ext>
+            </a:extLst>
+          </p:cNvPr>
           <p:cNvSpPr/>
           <p:nvPr/>
         </p:nvSpPr>
@@ -12814,7 +13596,13 @@
       </p:sp>
       <p:pic>
         <p:nvPicPr>
-          <p:cNvPr id="12" name="Image 1" descr="C:\Users\whale\git\mwb-b02\presentations\_build\icons\FaUsersGear.png"/>
+          <p:cNvPr id="12" name="Image 1">
+            <a:extLst>
+              <a:ext uri="{C183D7F6-B498-43B3-948B-1728B52AA6E4}">
+                <adec:decorative xmlns:adec="http://schemas.microsoft.com/office/drawing/2017/decorative" val="1"/>
+              </a:ext>
+            </a:extLst>
+          </p:cNvPr>
           <p:cNvPicPr>
             <a:picLocks noChangeAspect="1"/>
           </p:cNvPicPr>
@@ -13001,7 +13789,13 @@
       </p:sp>
       <p:sp>
         <p:nvSpPr>
-          <p:cNvPr id="15" name="Who col 3"/>
+          <p:cNvPr id="15" name="Who col 3">
+            <a:extLst>
+              <a:ext uri="{C183D7F6-B498-43B3-948B-1728B52AA6E4}">
+                <adec:decorative xmlns:adec="http://schemas.microsoft.com/office/drawing/2017/decorative" val="1"/>
+              </a:ext>
+            </a:extLst>
+          </p:cNvPr>
           <p:cNvSpPr/>
           <p:nvPr/>
         </p:nvSpPr>
@@ -13035,7 +13829,13 @@
       </p:sp>
       <p:sp>
         <p:nvSpPr>
-          <p:cNvPr id="16" name="Icon FaPeopleArrows"/>
+          <p:cNvPr id="16" name="Icon FaPeopleArrows">
+            <a:extLst>
+              <a:ext uri="{C183D7F6-B498-43B3-948B-1728B52AA6E4}">
+                <adec:decorative xmlns:adec="http://schemas.microsoft.com/office/drawing/2017/decorative" val="1"/>
+              </a:ext>
+            </a:extLst>
+          </p:cNvPr>
           <p:cNvSpPr/>
           <p:nvPr/>
         </p:nvSpPr>
@@ -13060,7 +13860,13 @@
       </p:sp>
       <p:pic>
         <p:nvPicPr>
-          <p:cNvPr id="17" name="Image 2" descr="C:\Users\whale\git\mwb-b02\presentations\_build\icons\FaPeopleArrows.png"/>
+          <p:cNvPr id="17" name="Image 2">
+            <a:extLst>
+              <a:ext uri="{C183D7F6-B498-43B3-948B-1728B52AA6E4}">
+                <adec:decorative xmlns:adec="http://schemas.microsoft.com/office/drawing/2017/decorative" val="1"/>
+              </a:ext>
+            </a:extLst>
+          </p:cNvPr>
           <p:cNvPicPr>
             <a:picLocks noChangeAspect="1"/>
           </p:cNvPicPr>
@@ -13247,7 +14053,13 @@
       </p:sp>
       <p:sp>
         <p:nvSpPr>
-          <p:cNvPr id="20" name="Gap owner"/>
+          <p:cNvPr id="20" name="Gap owner">
+            <a:extLst>
+              <a:ext uri="{C183D7F6-B498-43B3-948B-1728B52AA6E4}">
+                <adec:decorative xmlns:adec="http://schemas.microsoft.com/office/drawing/2017/decorative" val="1"/>
+              </a:ext>
+            </a:extLst>
+          </p:cNvPr>
           <p:cNvSpPr/>
           <p:nvPr/>
         </p:nvSpPr>
@@ -13281,7 +14093,13 @@
       </p:sp>
       <p:sp>
         <p:nvSpPr>
-          <p:cNvPr id="21" name="Icon FaSitemap"/>
+          <p:cNvPr id="21" name="Icon FaSitemap">
+            <a:extLst>
+              <a:ext uri="{C183D7F6-B498-43B3-948B-1728B52AA6E4}">
+                <adec:decorative xmlns:adec="http://schemas.microsoft.com/office/drawing/2017/decorative" val="1"/>
+              </a:ext>
+            </a:extLst>
+          </p:cNvPr>
           <p:cNvSpPr/>
           <p:nvPr/>
         </p:nvSpPr>
@@ -13306,7 +14124,13 @@
       </p:sp>
       <p:pic>
         <p:nvPicPr>
-          <p:cNvPr id="22" name="Image 3" descr="C:\Users\whale\git\mwb-b02\presentations\_build\icons\FaSitemap.png"/>
+          <p:cNvPr id="22" name="Image 3">
+            <a:extLst>
+              <a:ext uri="{C183D7F6-B498-43B3-948B-1728B52AA6E4}">
+                <adec:decorative xmlns:adec="http://schemas.microsoft.com/office/drawing/2017/decorative" val="1"/>
+              </a:ext>
+            </a:extLst>
+          </p:cNvPr>
           <p:cNvPicPr>
             <a:picLocks noChangeAspect="1"/>
           </p:cNvPicPr>
@@ -13455,11 +14279,11 @@
       </p:sp>
       <p:pic>
         <p:nvPicPr>
-          <p:cNvPr id="26" name="Narration">
+          <p:cNvPr id="26" name="Narration" descr="Narration for this slide; captions available">
             <a:hlinkClick r:id="" action="ppaction://media"/>
             <a:extLst>
               <a:ext uri="{FF2B5EF4-FFF2-40B4-BE49-F238E27FC236}">
-                <a16:creationId xmlns:a16="http://schemas.microsoft.com/office/drawing/2014/main" id="{03C474EB-AC5E-1A49-F20A-770B60589484}"/>
+                <a16:creationId xmlns:a16="http://schemas.microsoft.com/office/drawing/2014/main" id="{98007187-1A89-AB31-E47C-B5FE8C335071}"/>
               </a:ext>
             </a:extLst>
           </p:cNvPr>
@@ -13470,7 +14294,17 @@
             <a:audioFile r:link="rId2"/>
             <p:extLst>
               <p:ext uri="{DAA4B4D4-6D71-4841-9C94-3DE7FCFB9230}">
-                <p14:media xmlns:p14="http://schemas.microsoft.com/office/powerpoint/2010/main" r:embed="rId1"/>
+                <p14:media xmlns:p14="http://schemas.microsoft.com/office/powerpoint/2010/main" r:embed="rId1">
+                  <p14:extLst>
+                    <p:ext uri="{3AFAAA56-56D3-431D-BCD4-E75A35582382}">
+                      <p173:tracksInfo xmlns:p173="http://schemas.microsoft.com/office/powerpoint/2017/3/main" displayLoc="slide">
+                        <p173:trackLst>
+                          <p173:track id="{44F6D59F-8FFE-4454-8B71-F957A869D891}" label="English (captions)" lang="en-US" r:embed="rId10"/>
+                        </p173:trackLst>
+                      </p173:tracksInfo>
+                    </p:ext>
+                  </p14:extLst>
+                </p14:media>
               </p:ext>
             </p:extLst>
           </p:nvPr>
@@ -13637,7 +14471,13 @@
       </p:sp>
       <p:sp>
         <p:nvSpPr>
-          <p:cNvPr id="3" name="Tag How"/>
+          <p:cNvPr id="3" name="Tag How">
+            <a:extLst>
+              <a:ext uri="{C183D7F6-B498-43B3-948B-1728B52AA6E4}">
+                <adec:decorative xmlns:adec="http://schemas.microsoft.com/office/drawing/2017/decorative" val="1"/>
+              </a:ext>
+            </a:extLst>
+          </p:cNvPr>
           <p:cNvSpPr/>
           <p:nvPr/>
         </p:nvSpPr>
@@ -13700,7 +14540,13 @@
       </p:sp>
       <p:sp>
         <p:nvSpPr>
-          <p:cNvPr id="5" name="Step 1"/>
+          <p:cNvPr id="5" name="Step 1">
+            <a:extLst>
+              <a:ext uri="{C183D7F6-B498-43B3-948B-1728B52AA6E4}">
+                <adec:decorative xmlns:adec="http://schemas.microsoft.com/office/drawing/2017/decorative" val="1"/>
+              </a:ext>
+            </a:extLst>
+          </p:cNvPr>
           <p:cNvSpPr/>
           <p:nvPr/>
         </p:nvSpPr>
@@ -13849,7 +14695,13 @@
       </p:sp>
       <p:sp>
         <p:nvSpPr>
-          <p:cNvPr id="8" name="Step 2"/>
+          <p:cNvPr id="8" name="Step 2">
+            <a:extLst>
+              <a:ext uri="{C183D7F6-B498-43B3-948B-1728B52AA6E4}">
+                <adec:decorative xmlns:adec="http://schemas.microsoft.com/office/drawing/2017/decorative" val="1"/>
+              </a:ext>
+            </a:extLst>
+          </p:cNvPr>
           <p:cNvSpPr/>
           <p:nvPr/>
         </p:nvSpPr>
@@ -13998,7 +14850,13 @@
       </p:sp>
       <p:sp>
         <p:nvSpPr>
-          <p:cNvPr id="11" name="Step 3"/>
+          <p:cNvPr id="11" name="Step 3">
+            <a:extLst>
+              <a:ext uri="{C183D7F6-B498-43B3-948B-1728B52AA6E4}">
+                <adec:decorative xmlns:adec="http://schemas.microsoft.com/office/drawing/2017/decorative" val="1"/>
+              </a:ext>
+            </a:extLst>
+          </p:cNvPr>
           <p:cNvSpPr/>
           <p:nvPr/>
         </p:nvSpPr>
@@ -14147,7 +15005,13 @@
       </p:sp>
       <p:sp>
         <p:nvSpPr>
-          <p:cNvPr id="14" name="Step 4"/>
+          <p:cNvPr id="14" name="Step 4">
+            <a:extLst>
+              <a:ext uri="{C183D7F6-B498-43B3-948B-1728B52AA6E4}">
+                <adec:decorative xmlns:adec="http://schemas.microsoft.com/office/drawing/2017/decorative" val="1"/>
+              </a:ext>
+            </a:extLst>
+          </p:cNvPr>
           <p:cNvSpPr/>
           <p:nvPr/>
         </p:nvSpPr>
@@ -14296,7 +15160,13 @@
       </p:sp>
       <p:sp>
         <p:nvSpPr>
-          <p:cNvPr id="17" name="Step 5"/>
+          <p:cNvPr id="17" name="Step 5">
+            <a:extLst>
+              <a:ext uri="{C183D7F6-B498-43B3-948B-1728B52AA6E4}">
+                <adec:decorative xmlns:adec="http://schemas.microsoft.com/office/drawing/2017/decorative" val="1"/>
+              </a:ext>
+            </a:extLst>
+          </p:cNvPr>
           <p:cNvSpPr/>
           <p:nvPr/>
         </p:nvSpPr>
@@ -14445,7 +15315,13 @@
       </p:sp>
       <p:sp>
         <p:nvSpPr>
-          <p:cNvPr id="20" name="Rules"/>
+          <p:cNvPr id="20" name="Rules">
+            <a:extLst>
+              <a:ext uri="{C183D7F6-B498-43B3-948B-1728B52AA6E4}">
+                <adec:decorative xmlns:adec="http://schemas.microsoft.com/office/drawing/2017/decorative" val="1"/>
+              </a:ext>
+            </a:extLst>
+          </p:cNvPr>
           <p:cNvSpPr/>
           <p:nvPr/>
         </p:nvSpPr>
@@ -14479,7 +15355,13 @@
       </p:sp>
       <p:sp>
         <p:nvSpPr>
-          <p:cNvPr id="21" name="Icon FaClipboardCheck"/>
+          <p:cNvPr id="21" name="Icon FaClipboardCheck">
+            <a:extLst>
+              <a:ext uri="{C183D7F6-B498-43B3-948B-1728B52AA6E4}">
+                <adec:decorative xmlns:adec="http://schemas.microsoft.com/office/drawing/2017/decorative" val="1"/>
+              </a:ext>
+            </a:extLst>
+          </p:cNvPr>
           <p:cNvSpPr/>
           <p:nvPr/>
         </p:nvSpPr>
@@ -14504,7 +15386,13 @@
       </p:sp>
       <p:pic>
         <p:nvPicPr>
-          <p:cNvPr id="22" name="Image 0" descr="C:\Users\whale\git\mwb-b02\presentations\_build\icons\FaClipboardCheck.png"/>
+          <p:cNvPr id="22" name="Image 0">
+            <a:extLst>
+              <a:ext uri="{C183D7F6-B498-43B3-948B-1728B52AA6E4}">
+                <adec:decorative xmlns:adec="http://schemas.microsoft.com/office/drawing/2017/decorative" val="1"/>
+              </a:ext>
+            </a:extLst>
+          </p:cNvPr>
           <p:cNvPicPr>
             <a:picLocks noChangeAspect="1"/>
           </p:cNvPicPr>
@@ -14653,11 +15541,11 @@
       </p:sp>
       <p:pic>
         <p:nvPicPr>
-          <p:cNvPr id="26" name="Narration">
+          <p:cNvPr id="26" name="Narration" descr="Narration for this slide; captions available">
             <a:hlinkClick r:id="" action="ppaction://media"/>
             <a:extLst>
               <a:ext uri="{FF2B5EF4-FFF2-40B4-BE49-F238E27FC236}">
-                <a16:creationId xmlns:a16="http://schemas.microsoft.com/office/drawing/2014/main" id="{FC004E95-8AEB-2877-6492-4BC15F2B8D4E}"/>
+                <a16:creationId xmlns:a16="http://schemas.microsoft.com/office/drawing/2014/main" id="{3C85BB17-D0B7-1719-B6DA-93325895A849}"/>
               </a:ext>
             </a:extLst>
           </p:cNvPr>
@@ -14668,7 +15556,17 @@
             <a:audioFile r:link="rId2"/>
             <p:extLst>
               <p:ext uri="{DAA4B4D4-6D71-4841-9C94-3DE7FCFB9230}">
-                <p14:media xmlns:p14="http://schemas.microsoft.com/office/powerpoint/2010/main" r:embed="rId1"/>
+                <p14:media xmlns:p14="http://schemas.microsoft.com/office/powerpoint/2010/main" r:embed="rId1">
+                  <p14:extLst>
+                    <p:ext uri="{3AFAAA56-56D3-431D-BCD4-E75A35582382}">
+                      <p173:tracksInfo xmlns:p173="http://schemas.microsoft.com/office/powerpoint/2017/3/main" displayLoc="slide">
+                        <p173:trackLst>
+                          <p173:track id="{CD570FF2-7ED6-4A7A-BCE0-A7473B1CA62C}" label="English (captions)" lang="en-US" r:embed="rId7"/>
+                        </p173:trackLst>
+                      </p173:tracksInfo>
+                    </p:ext>
+                  </p14:extLst>
+                </p14:media>
               </p:ext>
             </p:extLst>
           </p:nvPr>
@@ -14774,9 +15672,9 @@
 </file>
 
 <file path=ppt/theme/theme1.xml><?xml version="1.0" encoding="utf-8"?>
-<a:theme xmlns:a="http://schemas.openxmlformats.org/drawingml/2006/main" name="Modernization Workbook">
+<a:theme xmlns:a="http://schemas.openxmlformats.org/drawingml/2006/main" name="Federal Modernization Workbook">
   <a:themeElements>
-    <a:clrScheme name="Modernization Workbook">
+    <a:clrScheme name="Federal Modernization Workbook">
       <a:dk1>
         <a:srgbClr val="1F2A44"/>
       </a:dk1>
@@ -14814,7 +15712,7 @@
         <a:srgbClr val="334155"/>
       </a:folHlink>
     </a:clrScheme>
-    <a:fontScheme name="Modernization Workbook">
+    <a:fontScheme name="Federal Modernization Workbook">
       <a:majorFont>
         <a:latin typeface="Cambria"/>
         <a:ea typeface=""/>

--- a/presentations/b02-identity/B02_Identity_Narrated.pptx
+++ b/presentations/b02-identity/B02_Identity_Narrated.pptx
@@ -181,7 +181,7 @@
     </p:spTree>
     <p:extLst>
       <p:ext uri="{BB962C8B-B14F-4D97-AF65-F5344CB8AC3E}">
-        <p14:creationId xmlns:p14="http://schemas.microsoft.com/office/powerpoint/2010/main" val="215066518"/>
+        <p14:creationId xmlns:p14="http://schemas.microsoft.com/office/powerpoint/2010/main" val="3532569626"/>
       </p:ext>
     </p:extLst>
   </p:cSld>
@@ -2252,7 +2252,7 @@
             <a:hlinkClick r:id="" action="ppaction://media"/>
             <a:extLst>
               <a:ext uri="{FF2B5EF4-FFF2-40B4-BE49-F238E27FC236}">
-                <a16:creationId xmlns:a16="http://schemas.microsoft.com/office/drawing/2014/main" id="{7FE0509C-4C33-1C82-E704-D45EC6E383A0}"/>
+                <a16:creationId xmlns:a16="http://schemas.microsoft.com/office/drawing/2014/main" id="{512277A2-1776-6CE6-6C6C-D43F055E9BCD}"/>
               </a:ext>
             </a:extLst>
           </p:cNvPr>
@@ -2268,7 +2268,7 @@
                     <p:ext uri="{3AFAAA56-56D3-431D-BCD4-E75A35582382}">
                       <p173:tracksInfo xmlns:p173="http://schemas.microsoft.com/office/powerpoint/2017/3/main" displayLoc="slide">
                         <p173:trackLst>
-                          <p173:track id="{13E783A0-EAAA-44E9-A20A-5274C36BF11B}" label="English (captions)" lang="en-US" r:embed="rId6"/>
+                          <p173:track id="{7C554A51-EC82-4580-8AEB-2FE54658FB22}" label="English (captions)" lang="en-US" r:embed="rId6"/>
                         </p173:trackLst>
                       </p173:tracksInfo>
                     </p:ext>
@@ -3407,7 +3407,7 @@
             <a:hlinkClick r:id="" action="ppaction://media"/>
             <a:extLst>
               <a:ext uri="{FF2B5EF4-FFF2-40B4-BE49-F238E27FC236}">
-                <a16:creationId xmlns:a16="http://schemas.microsoft.com/office/drawing/2014/main" id="{D17F26EF-8B81-B4D2-2717-822839907F5F}"/>
+                <a16:creationId xmlns:a16="http://schemas.microsoft.com/office/drawing/2014/main" id="{C49BC6EB-D0F3-BD3F-AF2C-C3D575C3B94D}"/>
               </a:ext>
             </a:extLst>
           </p:cNvPr>
@@ -3423,7 +3423,7 @@
                     <p:ext uri="{3AFAAA56-56D3-431D-BCD4-E75A35582382}">
                       <p173:tracksInfo xmlns:p173="http://schemas.microsoft.com/office/powerpoint/2017/3/main" displayLoc="slide">
                         <p173:trackLst>
-                          <p173:track id="{3041292E-F641-4230-A558-62968ADA2093}" label="English (captions)" lang="en-US" r:embed="rId8"/>
+                          <p173:track id="{A829B705-F325-4F1D-9C38-8F27C88C7C41}" label="English (captions)" lang="en-US" r:embed="rId8"/>
                         </p173:trackLst>
                       </p173:tracksInfo>
                     </p:ext>
@@ -4474,7 +4474,7 @@
             <a:hlinkClick r:id="" action="ppaction://media"/>
             <a:extLst>
               <a:ext uri="{FF2B5EF4-FFF2-40B4-BE49-F238E27FC236}">
-                <a16:creationId xmlns:a16="http://schemas.microsoft.com/office/drawing/2014/main" id="{5D0C1AEA-1085-5020-75A1-BBF2D497C3F6}"/>
+                <a16:creationId xmlns:a16="http://schemas.microsoft.com/office/drawing/2014/main" id="{337BBF99-4D17-546B-7FED-5E8D1AA6158E}"/>
               </a:ext>
             </a:extLst>
           </p:cNvPr>
@@ -4490,7 +4490,7 @@
                     <p:ext uri="{3AFAAA56-56D3-431D-BCD4-E75A35582382}">
                       <p173:tracksInfo xmlns:p173="http://schemas.microsoft.com/office/powerpoint/2017/3/main" displayLoc="slide">
                         <p173:trackLst>
-                          <p173:track id="{5737E283-3AB7-47C4-B7EA-CD72186C2FA0}" label="English (captions)" lang="en-US" r:embed="rId11"/>
+                          <p173:track id="{8F393958-E6BA-4ADD-84E1-1B41BBE84499}" label="English (captions)" lang="en-US" r:embed="rId11"/>
                         </p173:trackLst>
                       </p173:tracksInfo>
                     </p:ext>
@@ -5596,7 +5596,7 @@
             <a:hlinkClick r:id="" action="ppaction://media"/>
             <a:extLst>
               <a:ext uri="{FF2B5EF4-FFF2-40B4-BE49-F238E27FC236}">
-                <a16:creationId xmlns:a16="http://schemas.microsoft.com/office/drawing/2014/main" id="{89A82CC7-7D64-0ACB-E99A-259EFC665200}"/>
+                <a16:creationId xmlns:a16="http://schemas.microsoft.com/office/drawing/2014/main" id="{739251BC-0A4D-2F2E-F5ED-B8FCA99250C9}"/>
               </a:ext>
             </a:extLst>
           </p:cNvPr>
@@ -5612,7 +5612,7 @@
                     <p:ext uri="{3AFAAA56-56D3-431D-BCD4-E75A35582382}">
                       <p173:tracksInfo xmlns:p173="http://schemas.microsoft.com/office/powerpoint/2017/3/main" displayLoc="slide">
                         <p173:trackLst>
-                          <p173:track id="{A7F21003-1F1B-4BEA-86EB-1C25FD729A2D}" label="English (captions)" lang="en-US" r:embed="rId11"/>
+                          <p173:track id="{22242249-CD5D-4FF5-9ABA-366945E32937}" label="English (captions)" lang="en-US" r:embed="rId11"/>
                         </p173:trackLst>
                       </p173:tracksInfo>
                     </p:ext>
@@ -6523,7 +6523,7 @@
             <a:hlinkClick r:id="" action="ppaction://media"/>
             <a:extLst>
               <a:ext uri="{FF2B5EF4-FFF2-40B4-BE49-F238E27FC236}">
-                <a16:creationId xmlns:a16="http://schemas.microsoft.com/office/drawing/2014/main" id="{8EB0D5E7-C11F-D37C-0A79-4B6EFEB60C01}"/>
+                <a16:creationId xmlns:a16="http://schemas.microsoft.com/office/drawing/2014/main" id="{91A0E98E-46DB-7E49-FA2D-98B95BCFD6CC}"/>
               </a:ext>
             </a:extLst>
           </p:cNvPr>
@@ -6539,7 +6539,7 @@
                     <p:ext uri="{3AFAAA56-56D3-431D-BCD4-E75A35582382}">
                       <p173:tracksInfo xmlns:p173="http://schemas.microsoft.com/office/powerpoint/2017/3/main" displayLoc="slide">
                         <p173:trackLst>
-                          <p173:track id="{D9540E45-3C2F-4819-BDF5-3DBB9865922C}" label="English (captions)" lang="en-US" r:embed="rId7"/>
+                          <p173:track id="{5D6A8062-8857-4D4A-AFEB-A89F6256A5FE}" label="English (captions)" lang="en-US" r:embed="rId7"/>
                         </p173:trackLst>
                       </p173:tracksInfo>
                     </p:ext>
@@ -6572,10 +6572,10 @@
   </p:clrMapOvr>
   <mc:AlternateContent xmlns:mc="http://schemas.openxmlformats.org/markup-compatibility/2006">
     <mc:Choice xmlns:p14="http://schemas.microsoft.com/office/powerpoint/2010/main" Requires="p14">
-      <p:transition spd="slow" p14:dur="2000" advTm="85190"/>
+      <p:transition spd="slow" p14:dur="2000" advTm="87300"/>
     </mc:Choice>
     <mc:Fallback>
-      <p:transition spd="slow" advTm="85190"/>
+      <p:transition spd="slow" advTm="87300"/>
     </mc:Fallback>
   </mc:AlternateContent>
   <p:timing>
@@ -6609,7 +6609,7 @@
                                   <p:childTnLst>
                                     <p:cmd type="call" cmd="playFrom(0.0)">
                                       <p:cBhvr>
-                                        <p:cTn id="6" dur="84192" fill="hold"/>
+                                        <p:cTn id="6" dur="86304" fill="hold"/>
                                         <p:tgtEl>
                                           <p:spTgt spid="19"/>
                                         </p:tgtEl>
@@ -8525,7 +8525,7 @@
             <a:hlinkClick r:id="" action="ppaction://media"/>
             <a:extLst>
               <a:ext uri="{FF2B5EF4-FFF2-40B4-BE49-F238E27FC236}">
-                <a16:creationId xmlns:a16="http://schemas.microsoft.com/office/drawing/2014/main" id="{90D9D0F9-736B-7A11-C2FC-9F647E227C43}"/>
+                <a16:creationId xmlns:a16="http://schemas.microsoft.com/office/drawing/2014/main" id="{0CE9D706-B5AD-C53F-CDC4-F631A4DED4DD}"/>
               </a:ext>
             </a:extLst>
           </p:cNvPr>
@@ -8541,7 +8541,7 @@
                     <p:ext uri="{3AFAAA56-56D3-431D-BCD4-E75A35582382}">
                       <p173:tracksInfo xmlns:p173="http://schemas.microsoft.com/office/powerpoint/2017/3/main" displayLoc="slide">
                         <p173:trackLst>
-                          <p173:track id="{617ED16A-317A-44E5-A0E0-965ABDFE19F3}" label="English (captions)" lang="en-US" r:embed="rId7"/>
+                          <p173:track id="{9B27B583-7157-4537-8288-2E8D0FF061DD}" label="English (captions)" lang="en-US" r:embed="rId7"/>
                         </p173:trackLst>
                       </p173:tracksInfo>
                     </p:ext>
@@ -8574,10 +8574,10 @@
   </p:clrMapOvr>
   <mc:AlternateContent xmlns:mc="http://schemas.openxmlformats.org/markup-compatibility/2006">
     <mc:Choice xmlns:p14="http://schemas.microsoft.com/office/powerpoint/2010/main" Requires="p14">
-      <p:transition spd="slow" p14:dur="2000" advTm="71370"/>
+      <p:transition spd="slow" p14:dur="2000" advTm="71680"/>
     </mc:Choice>
     <mc:Fallback>
-      <p:transition spd="slow" advTm="71370"/>
+      <p:transition spd="slow" advTm="71680"/>
     </mc:Fallback>
   </mc:AlternateContent>
   <p:timing>
@@ -8611,7 +8611,7 @@
                                   <p:childTnLst>
                                     <p:cmd type="call" cmd="playFrom(0.0)">
                                       <p:cBhvr>
-                                        <p:cTn id="6" dur="70368" fill="hold"/>
+                                        <p:cTn id="6" dur="70680" fill="hold"/>
                                         <p:tgtEl>
                                           <p:spTgt spid="11"/>
                                         </p:tgtEl>
@@ -10256,7 +10256,7 @@
             <a:hlinkClick r:id="" action="ppaction://media"/>
             <a:extLst>
               <a:ext uri="{FF2B5EF4-FFF2-40B4-BE49-F238E27FC236}">
-                <a16:creationId xmlns:a16="http://schemas.microsoft.com/office/drawing/2014/main" id="{D3501289-B1E1-9854-C8ED-A126A95F8389}"/>
+                <a16:creationId xmlns:a16="http://schemas.microsoft.com/office/drawing/2014/main" id="{50F809E1-6CEF-3A4B-DAA2-B10BC7CFF5EB}"/>
               </a:ext>
             </a:extLst>
           </p:cNvPr>
@@ -10272,7 +10272,7 @@
                     <p:ext uri="{3AFAAA56-56D3-431D-BCD4-E75A35582382}">
                       <p173:tracksInfo xmlns:p173="http://schemas.microsoft.com/office/powerpoint/2017/3/main" displayLoc="slide">
                         <p173:trackLst>
-                          <p173:track id="{F126053E-8589-421D-AB5F-8F5FED7889FF}" label="English (captions)" lang="en-US" r:embed="rId15"/>
+                          <p173:track id="{31F55509-7D3D-4CF3-B757-9460CC638B82}" label="English (captions)" lang="en-US" r:embed="rId15"/>
                         </p173:trackLst>
                       </p173:tracksInfo>
                     </p:ext>
@@ -11183,7 +11183,7 @@
             <a:hlinkClick r:id="" action="ppaction://media"/>
             <a:extLst>
               <a:ext uri="{FF2B5EF4-FFF2-40B4-BE49-F238E27FC236}">
-                <a16:creationId xmlns:a16="http://schemas.microsoft.com/office/drawing/2014/main" id="{32C21EAE-4444-01E9-9C22-AD2893B43925}"/>
+                <a16:creationId xmlns:a16="http://schemas.microsoft.com/office/drawing/2014/main" id="{38FF682A-92E8-B976-591A-BBB459A970A2}"/>
               </a:ext>
             </a:extLst>
           </p:cNvPr>
@@ -11199,7 +11199,7 @@
                     <p:ext uri="{3AFAAA56-56D3-431D-BCD4-E75A35582382}">
                       <p173:tracksInfo xmlns:p173="http://schemas.microsoft.com/office/powerpoint/2017/3/main" displayLoc="slide">
                         <p173:trackLst>
-                          <p173:track id="{8D185861-2E71-420B-89E1-3C68A34F46CF}" label="English (captions)" lang="en-US" r:embed="rId7"/>
+                          <p173:track id="{8A4A9113-EEB4-41CE-BD9A-0F6E912AE578}" label="English (captions)" lang="en-US" r:embed="rId7"/>
                         </p173:trackLst>
                       </p173:tracksInfo>
                     </p:ext>
@@ -11232,10 +11232,10 @@
   </p:clrMapOvr>
   <mc:AlternateContent xmlns:mc="http://schemas.openxmlformats.org/markup-compatibility/2006">
     <mc:Choice xmlns:p14="http://schemas.microsoft.com/office/powerpoint/2010/main" Requires="p14">
-      <p:transition spd="slow" p14:dur="2000" advTm="73000"/>
+      <p:transition spd="slow" p14:dur="2000" advTm="73240"/>
     </mc:Choice>
     <mc:Fallback>
-      <p:transition spd="slow" advTm="73000"/>
+      <p:transition spd="slow" advTm="73240"/>
     </mc:Fallback>
   </mc:AlternateContent>
   <p:timing>
@@ -11269,7 +11269,7 @@
                                   <p:childTnLst>
                                     <p:cmd type="call" cmd="playFrom(0.0)">
                                       <p:cBhvr>
-                                        <p:cTn id="6" dur="72000" fill="hold"/>
+                                        <p:cTn id="6" dur="72240" fill="hold"/>
                                         <p:tgtEl>
                                           <p:spTgt spid="19"/>
                                         </p:tgtEl>
@@ -13004,7 +13004,7 @@
             <a:hlinkClick r:id="" action="ppaction://media"/>
             <a:extLst>
               <a:ext uri="{FF2B5EF4-FFF2-40B4-BE49-F238E27FC236}">
-                <a16:creationId xmlns:a16="http://schemas.microsoft.com/office/drawing/2014/main" id="{ACA03C29-5256-42CF-F075-17548B931568}"/>
+                <a16:creationId xmlns:a16="http://schemas.microsoft.com/office/drawing/2014/main" id="{29FF26AD-8CC5-0E5D-BBFF-5C282158E8B4}"/>
               </a:ext>
             </a:extLst>
           </p:cNvPr>
@@ -13020,7 +13020,7 @@
                     <p:ext uri="{3AFAAA56-56D3-431D-BCD4-E75A35582382}">
                       <p173:tracksInfo xmlns:p173="http://schemas.microsoft.com/office/powerpoint/2017/3/main" displayLoc="slide">
                         <p173:trackLst>
-                          <p173:track id="{8C3CB176-C6C7-4D7B-90C3-0DC93E86446F}" label="English (captions)" lang="en-US" r:embed="rId8"/>
+                          <p173:track id="{055DA427-9C31-4391-8001-4D18BCAC5B09}" label="English (captions)" lang="en-US" r:embed="rId8"/>
                         </p173:trackLst>
                       </p173:tracksInfo>
                     </p:ext>
@@ -14283,7 +14283,7 @@
             <a:hlinkClick r:id="" action="ppaction://media"/>
             <a:extLst>
               <a:ext uri="{FF2B5EF4-FFF2-40B4-BE49-F238E27FC236}">
-                <a16:creationId xmlns:a16="http://schemas.microsoft.com/office/drawing/2014/main" id="{98007187-1A89-AB31-E47C-B5FE8C335071}"/>
+                <a16:creationId xmlns:a16="http://schemas.microsoft.com/office/drawing/2014/main" id="{04FCB6E7-BAD7-207E-8FBF-4796A869FA07}"/>
               </a:ext>
             </a:extLst>
           </p:cNvPr>
@@ -14299,7 +14299,7 @@
                     <p:ext uri="{3AFAAA56-56D3-431D-BCD4-E75A35582382}">
                       <p173:tracksInfo xmlns:p173="http://schemas.microsoft.com/office/powerpoint/2017/3/main" displayLoc="slide">
                         <p173:trackLst>
-                          <p173:track id="{44F6D59F-8FFE-4454-8B71-F957A869D891}" label="English (captions)" lang="en-US" r:embed="rId10"/>
+                          <p173:track id="{7BABEC79-ED8D-4268-BCD9-2A59854DBAF9}" label="English (captions)" lang="en-US" r:embed="rId10"/>
                         </p173:trackLst>
                       </p173:tracksInfo>
                     </p:ext>
@@ -15545,7 +15545,7 @@
             <a:hlinkClick r:id="" action="ppaction://media"/>
             <a:extLst>
               <a:ext uri="{FF2B5EF4-FFF2-40B4-BE49-F238E27FC236}">
-                <a16:creationId xmlns:a16="http://schemas.microsoft.com/office/drawing/2014/main" id="{3C85BB17-D0B7-1719-B6DA-93325895A849}"/>
+                <a16:creationId xmlns:a16="http://schemas.microsoft.com/office/drawing/2014/main" id="{23AEBE2C-856B-4CC1-A46D-1385DBD5B1AE}"/>
               </a:ext>
             </a:extLst>
           </p:cNvPr>
@@ -15561,7 +15561,7 @@
                     <p:ext uri="{3AFAAA56-56D3-431D-BCD4-E75A35582382}">
                       <p173:tracksInfo xmlns:p173="http://schemas.microsoft.com/office/powerpoint/2017/3/main" displayLoc="slide">
                         <p173:trackLst>
-                          <p173:track id="{CD570FF2-7ED6-4A7A-BCE0-A7473B1CA62C}" label="English (captions)" lang="en-US" r:embed="rId7"/>
+                          <p173:track id="{66D1DE67-23B8-4C3A-B795-9AADCA47262F}" label="English (captions)" lang="en-US" r:embed="rId7"/>
                         </p173:trackLst>
                       </p173:tracksInfo>
                     </p:ext>

--- a/presentations/b02-identity/B02_Identity_Narrated.pptx
+++ b/presentations/b02-identity/B02_Identity_Narrated.pptx
@@ -181,7 +181,7 @@
     </p:spTree>
     <p:extLst>
       <p:ext uri="{BB962C8B-B14F-4D97-AF65-F5344CB8AC3E}">
-        <p14:creationId xmlns:p14="http://schemas.microsoft.com/office/powerpoint/2010/main" val="3532569626"/>
+        <p14:creationId xmlns:p14="http://schemas.microsoft.com/office/powerpoint/2010/main" val="1065748622"/>
       </p:ext>
     </p:extLst>
   </p:cSld>
@@ -2252,7 +2252,7 @@
             <a:hlinkClick r:id="" action="ppaction://media"/>
             <a:extLst>
               <a:ext uri="{FF2B5EF4-FFF2-40B4-BE49-F238E27FC236}">
-                <a16:creationId xmlns:a16="http://schemas.microsoft.com/office/drawing/2014/main" id="{512277A2-1776-6CE6-6C6C-D43F055E9BCD}"/>
+                <a16:creationId xmlns:a16="http://schemas.microsoft.com/office/drawing/2014/main" id="{E10A3DA8-4BAB-1229-BE57-19FF6483D6FC}"/>
               </a:ext>
             </a:extLst>
           </p:cNvPr>
@@ -2268,7 +2268,7 @@
                     <p:ext uri="{3AFAAA56-56D3-431D-BCD4-E75A35582382}">
                       <p173:tracksInfo xmlns:p173="http://schemas.microsoft.com/office/powerpoint/2017/3/main" displayLoc="slide">
                         <p173:trackLst>
-                          <p173:track id="{7C554A51-EC82-4580-8AEB-2FE54658FB22}" label="English (captions)" lang="en-US" r:embed="rId6"/>
+                          <p173:track id="{071EDBD8-2327-4440-AA3A-98630AB31B04}" label="English (captions)" lang="en-US" r:embed="rId6"/>
                         </p173:trackLst>
                       </p173:tracksInfo>
                     </p:ext>
@@ -3407,7 +3407,7 @@
             <a:hlinkClick r:id="" action="ppaction://media"/>
             <a:extLst>
               <a:ext uri="{FF2B5EF4-FFF2-40B4-BE49-F238E27FC236}">
-                <a16:creationId xmlns:a16="http://schemas.microsoft.com/office/drawing/2014/main" id="{C49BC6EB-D0F3-BD3F-AF2C-C3D575C3B94D}"/>
+                <a16:creationId xmlns:a16="http://schemas.microsoft.com/office/drawing/2014/main" id="{D5C0BF3D-6DAE-F003-7814-3EF54D774293}"/>
               </a:ext>
             </a:extLst>
           </p:cNvPr>
@@ -3423,7 +3423,7 @@
                     <p:ext uri="{3AFAAA56-56D3-431D-BCD4-E75A35582382}">
                       <p173:tracksInfo xmlns:p173="http://schemas.microsoft.com/office/powerpoint/2017/3/main" displayLoc="slide">
                         <p173:trackLst>
-                          <p173:track id="{A829B705-F325-4F1D-9C38-8F27C88C7C41}" label="English (captions)" lang="en-US" r:embed="rId8"/>
+                          <p173:track id="{B40A97EB-A6F7-463D-9A81-F96DBDAAB19C}" label="English (captions)" lang="en-US" r:embed="rId8"/>
                         </p173:trackLst>
                       </p173:tracksInfo>
                     </p:ext>
@@ -4474,7 +4474,7 @@
             <a:hlinkClick r:id="" action="ppaction://media"/>
             <a:extLst>
               <a:ext uri="{FF2B5EF4-FFF2-40B4-BE49-F238E27FC236}">
-                <a16:creationId xmlns:a16="http://schemas.microsoft.com/office/drawing/2014/main" id="{337BBF99-4D17-546B-7FED-5E8D1AA6158E}"/>
+                <a16:creationId xmlns:a16="http://schemas.microsoft.com/office/drawing/2014/main" id="{2D53CA0C-FBC1-39B1-E8E9-E3F12117FA56}"/>
               </a:ext>
             </a:extLst>
           </p:cNvPr>
@@ -4490,7 +4490,7 @@
                     <p:ext uri="{3AFAAA56-56D3-431D-BCD4-E75A35582382}">
                       <p173:tracksInfo xmlns:p173="http://schemas.microsoft.com/office/powerpoint/2017/3/main" displayLoc="slide">
                         <p173:trackLst>
-                          <p173:track id="{8F393958-E6BA-4ADD-84E1-1B41BBE84499}" label="English (captions)" lang="en-US" r:embed="rId11"/>
+                          <p173:track id="{17A47A3F-175E-49E6-A857-F7E3046E37E0}" label="English (captions)" lang="en-US" r:embed="rId11"/>
                         </p173:trackLst>
                       </p173:tracksInfo>
                     </p:ext>
@@ -4523,10 +4523,10 @@
   </p:clrMapOvr>
   <mc:AlternateContent xmlns:mc="http://schemas.openxmlformats.org/markup-compatibility/2006">
     <mc:Choice xmlns:p14="http://schemas.microsoft.com/office/powerpoint/2010/main" Requires="p14">
-      <p:transition spd="slow" p14:dur="2000" advTm="64380"/>
+      <p:transition spd="slow" p14:dur="2000" advTm="66210"/>
     </mc:Choice>
     <mc:Fallback>
-      <p:transition spd="slow" advTm="64380"/>
+      <p:transition spd="slow" advTm="66210"/>
     </mc:Fallback>
   </mc:AlternateContent>
   <p:timing>
@@ -4560,7 +4560,7 @@
                                   <p:childTnLst>
                                     <p:cmd type="call" cmd="playFrom(0.0)">
                                       <p:cBhvr>
-                                        <p:cTn id="6" dur="63384" fill="hold"/>
+                                        <p:cTn id="6" dur="65208" fill="hold"/>
                                         <p:tgtEl>
                                           <p:spTgt spid="26"/>
                                         </p:tgtEl>
@@ -5596,7 +5596,7 @@
             <a:hlinkClick r:id="" action="ppaction://media"/>
             <a:extLst>
               <a:ext uri="{FF2B5EF4-FFF2-40B4-BE49-F238E27FC236}">
-                <a16:creationId xmlns:a16="http://schemas.microsoft.com/office/drawing/2014/main" id="{739251BC-0A4D-2F2E-F5ED-B8FCA99250C9}"/>
+                <a16:creationId xmlns:a16="http://schemas.microsoft.com/office/drawing/2014/main" id="{8416428B-C8B8-35DB-C222-A5B18B589516}"/>
               </a:ext>
             </a:extLst>
           </p:cNvPr>
@@ -5612,7 +5612,7 @@
                     <p:ext uri="{3AFAAA56-56D3-431D-BCD4-E75A35582382}">
                       <p173:tracksInfo xmlns:p173="http://schemas.microsoft.com/office/powerpoint/2017/3/main" displayLoc="slide">
                         <p173:trackLst>
-                          <p173:track id="{22242249-CD5D-4FF5-9ABA-366945E32937}" label="English (captions)" lang="en-US" r:embed="rId11"/>
+                          <p173:track id="{6EF174A7-C960-481F-A1CE-48ECD2A0AEB4}" label="English (captions)" lang="en-US" r:embed="rId11"/>
                         </p173:trackLst>
                       </p173:tracksInfo>
                     </p:ext>
@@ -6523,7 +6523,7 @@
             <a:hlinkClick r:id="" action="ppaction://media"/>
             <a:extLst>
               <a:ext uri="{FF2B5EF4-FFF2-40B4-BE49-F238E27FC236}">
-                <a16:creationId xmlns:a16="http://schemas.microsoft.com/office/drawing/2014/main" id="{91A0E98E-46DB-7E49-FA2D-98B95BCFD6CC}"/>
+                <a16:creationId xmlns:a16="http://schemas.microsoft.com/office/drawing/2014/main" id="{EC4DD994-DAFD-A75B-DA06-A0351E4AE139}"/>
               </a:ext>
             </a:extLst>
           </p:cNvPr>
@@ -6539,7 +6539,7 @@
                     <p:ext uri="{3AFAAA56-56D3-431D-BCD4-E75A35582382}">
                       <p173:tracksInfo xmlns:p173="http://schemas.microsoft.com/office/powerpoint/2017/3/main" displayLoc="slide">
                         <p173:trackLst>
-                          <p173:track id="{5D6A8062-8857-4D4A-AFEB-A89F6256A5FE}" label="English (captions)" lang="en-US" r:embed="rId7"/>
+                          <p173:track id="{636BABED-2712-4DCD-AE45-5B3718D4958E}" label="English (captions)" lang="en-US" r:embed="rId7"/>
                         </p173:trackLst>
                       </p173:tracksInfo>
                     </p:ext>
@@ -8525,7 +8525,7 @@
             <a:hlinkClick r:id="" action="ppaction://media"/>
             <a:extLst>
               <a:ext uri="{FF2B5EF4-FFF2-40B4-BE49-F238E27FC236}">
-                <a16:creationId xmlns:a16="http://schemas.microsoft.com/office/drawing/2014/main" id="{0CE9D706-B5AD-C53F-CDC4-F631A4DED4DD}"/>
+                <a16:creationId xmlns:a16="http://schemas.microsoft.com/office/drawing/2014/main" id="{01387AB7-4141-AE8E-6C98-9119D9BF5775}"/>
               </a:ext>
             </a:extLst>
           </p:cNvPr>
@@ -8541,7 +8541,7 @@
                     <p:ext uri="{3AFAAA56-56D3-431D-BCD4-E75A35582382}">
                       <p173:tracksInfo xmlns:p173="http://schemas.microsoft.com/office/powerpoint/2017/3/main" displayLoc="slide">
                         <p173:trackLst>
-                          <p173:track id="{9B27B583-7157-4537-8288-2E8D0FF061DD}" label="English (captions)" lang="en-US" r:embed="rId7"/>
+                          <p173:track id="{4FA43800-AE4D-4898-8E94-8FD0B6E02581}" label="English (captions)" lang="en-US" r:embed="rId7"/>
                         </p173:trackLst>
                       </p173:tracksInfo>
                     </p:ext>
@@ -10256,7 +10256,7 @@
             <a:hlinkClick r:id="" action="ppaction://media"/>
             <a:extLst>
               <a:ext uri="{FF2B5EF4-FFF2-40B4-BE49-F238E27FC236}">
-                <a16:creationId xmlns:a16="http://schemas.microsoft.com/office/drawing/2014/main" id="{50F809E1-6CEF-3A4B-DAA2-B10BC7CFF5EB}"/>
+                <a16:creationId xmlns:a16="http://schemas.microsoft.com/office/drawing/2014/main" id="{EDFA886C-4CEF-EB9D-CC79-3F653B11C198}"/>
               </a:ext>
             </a:extLst>
           </p:cNvPr>
@@ -10272,7 +10272,7 @@
                     <p:ext uri="{3AFAAA56-56D3-431D-BCD4-E75A35582382}">
                       <p173:tracksInfo xmlns:p173="http://schemas.microsoft.com/office/powerpoint/2017/3/main" displayLoc="slide">
                         <p173:trackLst>
-                          <p173:track id="{31F55509-7D3D-4CF3-B757-9460CC638B82}" label="English (captions)" lang="en-US" r:embed="rId15"/>
+                          <p173:track id="{477BF850-9114-450F-BA0F-1DBE561C8D2B}" label="English (captions)" lang="en-US" r:embed="rId15"/>
                         </p173:trackLst>
                       </p173:tracksInfo>
                     </p:ext>
@@ -11183,7 +11183,7 @@
             <a:hlinkClick r:id="" action="ppaction://media"/>
             <a:extLst>
               <a:ext uri="{FF2B5EF4-FFF2-40B4-BE49-F238E27FC236}">
-                <a16:creationId xmlns:a16="http://schemas.microsoft.com/office/drawing/2014/main" id="{38FF682A-92E8-B976-591A-BBB459A970A2}"/>
+                <a16:creationId xmlns:a16="http://schemas.microsoft.com/office/drawing/2014/main" id="{7574F8DC-65C4-8713-3A5B-4EA38BE5957F}"/>
               </a:ext>
             </a:extLst>
           </p:cNvPr>
@@ -11199,7 +11199,7 @@
                     <p:ext uri="{3AFAAA56-56D3-431D-BCD4-E75A35582382}">
                       <p173:tracksInfo xmlns:p173="http://schemas.microsoft.com/office/powerpoint/2017/3/main" displayLoc="slide">
                         <p173:trackLst>
-                          <p173:track id="{8A4A9113-EEB4-41CE-BD9A-0F6E912AE578}" label="English (captions)" lang="en-US" r:embed="rId7"/>
+                          <p173:track id="{B857DA69-2881-4B11-96B6-4F6D818F5FC7}" label="English (captions)" lang="en-US" r:embed="rId7"/>
                         </p173:trackLst>
                       </p173:tracksInfo>
                     </p:ext>
@@ -13004,7 +13004,7 @@
             <a:hlinkClick r:id="" action="ppaction://media"/>
             <a:extLst>
               <a:ext uri="{FF2B5EF4-FFF2-40B4-BE49-F238E27FC236}">
-                <a16:creationId xmlns:a16="http://schemas.microsoft.com/office/drawing/2014/main" id="{29FF26AD-8CC5-0E5D-BBFF-5C282158E8B4}"/>
+                <a16:creationId xmlns:a16="http://schemas.microsoft.com/office/drawing/2014/main" id="{C21D75C5-1097-B0AB-871C-BF67A1056536}"/>
               </a:ext>
             </a:extLst>
           </p:cNvPr>
@@ -13020,7 +13020,7 @@
                     <p:ext uri="{3AFAAA56-56D3-431D-BCD4-E75A35582382}">
                       <p173:tracksInfo xmlns:p173="http://schemas.microsoft.com/office/powerpoint/2017/3/main" displayLoc="slide">
                         <p173:trackLst>
-                          <p173:track id="{055DA427-9C31-4391-8001-4D18BCAC5B09}" label="English (captions)" lang="en-US" r:embed="rId8"/>
+                          <p173:track id="{4FF4047C-41BE-40F9-8C1B-F69BB2F0540E}" label="English (captions)" lang="en-US" r:embed="rId8"/>
                         </p173:trackLst>
                       </p173:tracksInfo>
                     </p:ext>
@@ -14283,7 +14283,7 @@
             <a:hlinkClick r:id="" action="ppaction://media"/>
             <a:extLst>
               <a:ext uri="{FF2B5EF4-FFF2-40B4-BE49-F238E27FC236}">
-                <a16:creationId xmlns:a16="http://schemas.microsoft.com/office/drawing/2014/main" id="{04FCB6E7-BAD7-207E-8FBF-4796A869FA07}"/>
+                <a16:creationId xmlns:a16="http://schemas.microsoft.com/office/drawing/2014/main" id="{F356A936-BAEE-807C-AD60-C30E0618DEE2}"/>
               </a:ext>
             </a:extLst>
           </p:cNvPr>
@@ -14299,7 +14299,7 @@
                     <p:ext uri="{3AFAAA56-56D3-431D-BCD4-E75A35582382}">
                       <p173:tracksInfo xmlns:p173="http://schemas.microsoft.com/office/powerpoint/2017/3/main" displayLoc="slide">
                         <p173:trackLst>
-                          <p173:track id="{7BABEC79-ED8D-4268-BCD9-2A59854DBAF9}" label="English (captions)" lang="en-US" r:embed="rId10"/>
+                          <p173:track id="{BB58C456-90E7-4019-932A-4A652325960B}" label="English (captions)" lang="en-US" r:embed="rId10"/>
                         </p173:trackLst>
                       </p173:tracksInfo>
                     </p:ext>
@@ -15545,7 +15545,7 @@
             <a:hlinkClick r:id="" action="ppaction://media"/>
             <a:extLst>
               <a:ext uri="{FF2B5EF4-FFF2-40B4-BE49-F238E27FC236}">
-                <a16:creationId xmlns:a16="http://schemas.microsoft.com/office/drawing/2014/main" id="{23AEBE2C-856B-4CC1-A46D-1385DBD5B1AE}"/>
+                <a16:creationId xmlns:a16="http://schemas.microsoft.com/office/drawing/2014/main" id="{D5B15840-29F6-AB29-AA91-11376D6F3DDF}"/>
               </a:ext>
             </a:extLst>
           </p:cNvPr>
@@ -15561,7 +15561,7 @@
                     <p:ext uri="{3AFAAA56-56D3-431D-BCD4-E75A35582382}">
                       <p173:tracksInfo xmlns:p173="http://schemas.microsoft.com/office/powerpoint/2017/3/main" displayLoc="slide">
                         <p173:trackLst>
-                          <p173:track id="{66D1DE67-23B8-4C3A-B795-9AADCA47262F}" label="English (captions)" lang="en-US" r:embed="rId7"/>
+                          <p173:track id="{85479FBA-7693-4A5F-BC06-4F97083406D3}" label="English (captions)" lang="en-US" r:embed="rId7"/>
                         </p173:trackLst>
                       </p173:tracksInfo>
                     </p:ext>

--- a/presentations/b02-identity/B02_Identity_Narrated.pptx
+++ b/presentations/b02-identity/B02_Identity_Narrated.pptx
@@ -181,7 +181,7 @@
     </p:spTree>
     <p:extLst>
       <p:ext uri="{BB962C8B-B14F-4D97-AF65-F5344CB8AC3E}">
-        <p14:creationId xmlns:p14="http://schemas.microsoft.com/office/powerpoint/2010/main" val="1065748622"/>
+        <p14:creationId xmlns:p14="http://schemas.microsoft.com/office/powerpoint/2010/main" val="2756329138"/>
       </p:ext>
     </p:extLst>
   </p:cSld>
@@ -2252,7 +2252,7 @@
             <a:hlinkClick r:id="" action="ppaction://media"/>
             <a:extLst>
               <a:ext uri="{FF2B5EF4-FFF2-40B4-BE49-F238E27FC236}">
-                <a16:creationId xmlns:a16="http://schemas.microsoft.com/office/drawing/2014/main" id="{E10A3DA8-4BAB-1229-BE57-19FF6483D6FC}"/>
+                <a16:creationId xmlns:a16="http://schemas.microsoft.com/office/drawing/2014/main" id="{922381C0-BCC2-06D5-B28D-49FB0F472AE5}"/>
               </a:ext>
             </a:extLst>
           </p:cNvPr>
@@ -2268,7 +2268,7 @@
                     <p:ext uri="{3AFAAA56-56D3-431D-BCD4-E75A35582382}">
                       <p173:tracksInfo xmlns:p173="http://schemas.microsoft.com/office/powerpoint/2017/3/main" displayLoc="slide">
                         <p173:trackLst>
-                          <p173:track id="{071EDBD8-2327-4440-AA3A-98630AB31B04}" label="English (captions)" lang="en-US" r:embed="rId6"/>
+                          <p173:track id="{C7956B57-5DA5-4BE7-8BEA-4F403C292121}" label="English (captions)" lang="en-US" r:embed="rId6"/>
                         </p173:trackLst>
                       </p173:tracksInfo>
                     </p:ext>
@@ -2301,10 +2301,10 @@
   </p:clrMapOvr>
   <mc:AlternateContent xmlns:mc="http://schemas.openxmlformats.org/markup-compatibility/2006">
     <mc:Choice xmlns:p14="http://schemas.microsoft.com/office/powerpoint/2010/main" Requires="p14">
-      <p:transition spd="slow" p14:dur="2000" advTm="31020"/>
+      <p:transition spd="slow" p14:dur="2000" advTm="39660"/>
     </mc:Choice>
     <mc:Fallback>
-      <p:transition spd="slow" advTm="31020"/>
+      <p:transition spd="slow" advTm="39660"/>
     </mc:Fallback>
   </mc:AlternateContent>
   <p:timing>
@@ -2338,7 +2338,7 @@
                                   <p:childTnLst>
                                     <p:cmd type="call" cmd="playFrom(0.0)">
                                       <p:cBhvr>
-                                        <p:cTn id="6" dur="30024" fill="hold"/>
+                                        <p:cTn id="6" dur="35664" fill="hold"/>
                                         <p:tgtEl>
                                           <p:spTgt spid="8"/>
                                         </p:tgtEl>
@@ -3407,7 +3407,7 @@
             <a:hlinkClick r:id="" action="ppaction://media"/>
             <a:extLst>
               <a:ext uri="{FF2B5EF4-FFF2-40B4-BE49-F238E27FC236}">
-                <a16:creationId xmlns:a16="http://schemas.microsoft.com/office/drawing/2014/main" id="{D5C0BF3D-6DAE-F003-7814-3EF54D774293}"/>
+                <a16:creationId xmlns:a16="http://schemas.microsoft.com/office/drawing/2014/main" id="{44A36555-209A-4D79-3568-E01A43E04DA5}"/>
               </a:ext>
             </a:extLst>
           </p:cNvPr>
@@ -3423,7 +3423,7 @@
                     <p:ext uri="{3AFAAA56-56D3-431D-BCD4-E75A35582382}">
                       <p173:tracksInfo xmlns:p173="http://schemas.microsoft.com/office/powerpoint/2017/3/main" displayLoc="slide">
                         <p173:trackLst>
-                          <p173:track id="{B40A97EB-A6F7-463D-9A81-F96DBDAAB19C}" label="English (captions)" lang="en-US" r:embed="rId8"/>
+                          <p173:track id="{4DF5FE6E-D251-4184-AC50-9AA770B62053}" label="English (captions)" lang="en-US" r:embed="rId8"/>
                         </p173:trackLst>
                       </p173:tracksInfo>
                     </p:ext>
@@ -3456,10 +3456,10 @@
   </p:clrMapOvr>
   <mc:AlternateContent xmlns:mc="http://schemas.openxmlformats.org/markup-compatibility/2006">
     <mc:Choice xmlns:p14="http://schemas.microsoft.com/office/powerpoint/2010/main" Requires="p14">
-      <p:transition spd="slow" p14:dur="2000" advTm="82620"/>
+      <p:transition spd="slow" p14:dur="2000" advTm="55340"/>
     </mc:Choice>
     <mc:Fallback>
-      <p:transition spd="slow" advTm="82620"/>
+      <p:transition spd="slow" advTm="55340"/>
     </mc:Fallback>
   </mc:AlternateContent>
   <p:timing>
@@ -3493,7 +3493,7 @@
                                   <p:childTnLst>
                                     <p:cmd type="call" cmd="playFrom(0.0)">
                                       <p:cBhvr>
-                                        <p:cTn id="6" dur="81624" fill="hold"/>
+                                        <p:cTn id="6" dur="51336" fill="hold"/>
                                         <p:tgtEl>
                                           <p:spTgt spid="26"/>
                                         </p:tgtEl>
@@ -4474,7 +4474,7 @@
             <a:hlinkClick r:id="" action="ppaction://media"/>
             <a:extLst>
               <a:ext uri="{FF2B5EF4-FFF2-40B4-BE49-F238E27FC236}">
-                <a16:creationId xmlns:a16="http://schemas.microsoft.com/office/drawing/2014/main" id="{2D53CA0C-FBC1-39B1-E8E9-E3F12117FA56}"/>
+                <a16:creationId xmlns:a16="http://schemas.microsoft.com/office/drawing/2014/main" id="{04402C1A-F1BF-9DCD-A7B2-0B09B15DBD75}"/>
               </a:ext>
             </a:extLst>
           </p:cNvPr>
@@ -4490,7 +4490,7 @@
                     <p:ext uri="{3AFAAA56-56D3-431D-BCD4-E75A35582382}">
                       <p173:tracksInfo xmlns:p173="http://schemas.microsoft.com/office/powerpoint/2017/3/main" displayLoc="slide">
                         <p173:trackLst>
-                          <p173:track id="{17A47A3F-175E-49E6-A857-F7E3046E37E0}" label="English (captions)" lang="en-US" r:embed="rId11"/>
+                          <p173:track id="{3FC5A588-F67E-4519-A1A2-F414275DCD78}" label="English (captions)" lang="en-US" r:embed="rId11"/>
                         </p173:trackLst>
                       </p173:tracksInfo>
                     </p:ext>
@@ -4523,10 +4523,10 @@
   </p:clrMapOvr>
   <mc:AlternateContent xmlns:mc="http://schemas.openxmlformats.org/markup-compatibility/2006">
     <mc:Choice xmlns:p14="http://schemas.microsoft.com/office/powerpoint/2010/main" Requires="p14">
-      <p:transition spd="slow" p14:dur="2000" advTm="66210"/>
+      <p:transition spd="slow" p14:dur="2000" advTm="58430"/>
     </mc:Choice>
     <mc:Fallback>
-      <p:transition spd="slow" advTm="66210"/>
+      <p:transition spd="slow" advTm="58430"/>
     </mc:Fallback>
   </mc:AlternateContent>
   <p:timing>
@@ -4560,7 +4560,7 @@
                                   <p:childTnLst>
                                     <p:cmd type="call" cmd="playFrom(0.0)">
                                       <p:cBhvr>
-                                        <p:cTn id="6" dur="65208" fill="hold"/>
+                                        <p:cTn id="6" dur="54432" fill="hold"/>
                                         <p:tgtEl>
                                           <p:spTgt spid="26"/>
                                         </p:tgtEl>
@@ -5596,7 +5596,7 @@
             <a:hlinkClick r:id="" action="ppaction://media"/>
             <a:extLst>
               <a:ext uri="{FF2B5EF4-FFF2-40B4-BE49-F238E27FC236}">
-                <a16:creationId xmlns:a16="http://schemas.microsoft.com/office/drawing/2014/main" id="{8416428B-C8B8-35DB-C222-A5B18B589516}"/>
+                <a16:creationId xmlns:a16="http://schemas.microsoft.com/office/drawing/2014/main" id="{ED99CADA-8305-C459-D4E5-C18ECFAC79FB}"/>
               </a:ext>
             </a:extLst>
           </p:cNvPr>
@@ -5612,7 +5612,7 @@
                     <p:ext uri="{3AFAAA56-56D3-431D-BCD4-E75A35582382}">
                       <p173:tracksInfo xmlns:p173="http://schemas.microsoft.com/office/powerpoint/2017/3/main" displayLoc="slide">
                         <p173:trackLst>
-                          <p173:track id="{6EF174A7-C960-481F-A1CE-48ECD2A0AEB4}" label="English (captions)" lang="en-US" r:embed="rId11"/>
+                          <p173:track id="{BAD7B0A2-D966-4FF4-BD03-CF2C73A7313B}" label="English (captions)" lang="en-US" r:embed="rId11"/>
                         </p173:trackLst>
                       </p173:tracksInfo>
                     </p:ext>
@@ -5645,10 +5645,10 @@
   </p:clrMapOvr>
   <mc:AlternateContent xmlns:mc="http://schemas.openxmlformats.org/markup-compatibility/2006">
     <mc:Choice xmlns:p14="http://schemas.microsoft.com/office/powerpoint/2010/main" Requires="p14">
-      <p:transition spd="slow" p14:dur="2000" advTm="65320"/>
+      <p:transition spd="slow" p14:dur="2000" advTm="58340"/>
     </mc:Choice>
     <mc:Fallback>
-      <p:transition spd="slow" advTm="65320"/>
+      <p:transition spd="slow" advTm="58340"/>
     </mc:Fallback>
   </mc:AlternateContent>
   <p:timing>
@@ -5682,7 +5682,7 @@
                                   <p:childTnLst>
                                     <p:cmd type="call" cmd="playFrom(0.0)">
                                       <p:cBhvr>
-                                        <p:cTn id="6" dur="64320" fill="hold"/>
+                                        <p:cTn id="6" dur="54336" fill="hold"/>
                                         <p:tgtEl>
                                           <p:spTgt spid="27"/>
                                         </p:tgtEl>
@@ -6523,7 +6523,7 @@
             <a:hlinkClick r:id="" action="ppaction://media"/>
             <a:extLst>
               <a:ext uri="{FF2B5EF4-FFF2-40B4-BE49-F238E27FC236}">
-                <a16:creationId xmlns:a16="http://schemas.microsoft.com/office/drawing/2014/main" id="{EC4DD994-DAFD-A75B-DA06-A0351E4AE139}"/>
+                <a16:creationId xmlns:a16="http://schemas.microsoft.com/office/drawing/2014/main" id="{C45D06C1-FB83-816A-4BB4-2BCFE28B1BF6}"/>
               </a:ext>
             </a:extLst>
           </p:cNvPr>
@@ -6539,7 +6539,7 @@
                     <p:ext uri="{3AFAAA56-56D3-431D-BCD4-E75A35582382}">
                       <p173:tracksInfo xmlns:p173="http://schemas.microsoft.com/office/powerpoint/2017/3/main" displayLoc="slide">
                         <p173:trackLst>
-                          <p173:track id="{636BABED-2712-4DCD-AE45-5B3718D4958E}" label="English (captions)" lang="en-US" r:embed="rId7"/>
+                          <p173:track id="{4330072B-8D7F-43EE-AF6A-9FF251BD3354}" label="English (captions)" lang="en-US" r:embed="rId7"/>
                         </p173:trackLst>
                       </p173:tracksInfo>
                     </p:ext>
@@ -6572,10 +6572,10 @@
   </p:clrMapOvr>
   <mc:AlternateContent xmlns:mc="http://schemas.openxmlformats.org/markup-compatibility/2006">
     <mc:Choice xmlns:p14="http://schemas.microsoft.com/office/powerpoint/2010/main" Requires="p14">
-      <p:transition spd="slow" p14:dur="2000" advTm="87300"/>
+      <p:transition spd="slow" p14:dur="2000" advTm="67650"/>
     </mc:Choice>
     <mc:Fallback>
-      <p:transition spd="slow" advTm="87300"/>
+      <p:transition spd="slow" advTm="67650"/>
     </mc:Fallback>
   </mc:AlternateContent>
   <p:timing>
@@ -6609,7 +6609,7 @@
                                   <p:childTnLst>
                                     <p:cmd type="call" cmd="playFrom(0.0)">
                                       <p:cBhvr>
-                                        <p:cTn id="6" dur="86304" fill="hold"/>
+                                        <p:cTn id="6" dur="63648" fill="hold"/>
                                         <p:tgtEl>
                                           <p:spTgt spid="19"/>
                                         </p:tgtEl>
@@ -8525,7 +8525,7 @@
             <a:hlinkClick r:id="" action="ppaction://media"/>
             <a:extLst>
               <a:ext uri="{FF2B5EF4-FFF2-40B4-BE49-F238E27FC236}">
-                <a16:creationId xmlns:a16="http://schemas.microsoft.com/office/drawing/2014/main" id="{01387AB7-4141-AE8E-6C98-9119D9BF5775}"/>
+                <a16:creationId xmlns:a16="http://schemas.microsoft.com/office/drawing/2014/main" id="{E049CD48-4DBE-75A6-7D56-118063ACFB6E}"/>
               </a:ext>
             </a:extLst>
           </p:cNvPr>
@@ -8541,7 +8541,7 @@
                     <p:ext uri="{3AFAAA56-56D3-431D-BCD4-E75A35582382}">
                       <p173:tracksInfo xmlns:p173="http://schemas.microsoft.com/office/powerpoint/2017/3/main" displayLoc="slide">
                         <p173:trackLst>
-                          <p173:track id="{4FA43800-AE4D-4898-8E94-8FD0B6E02581}" label="English (captions)" lang="en-US" r:embed="rId7"/>
+                          <p173:track id="{C37475AE-6F50-4714-9313-906605AD850C}" label="English (captions)" lang="en-US" r:embed="rId7"/>
                         </p173:trackLst>
                       </p173:tracksInfo>
                     </p:ext>
@@ -8574,10 +8574,10 @@
   </p:clrMapOvr>
   <mc:AlternateContent xmlns:mc="http://schemas.openxmlformats.org/markup-compatibility/2006">
     <mc:Choice xmlns:p14="http://schemas.microsoft.com/office/powerpoint/2010/main" Requires="p14">
-      <p:transition spd="slow" p14:dur="2000" advTm="71680"/>
+      <p:transition spd="slow" p14:dur="2000" advTm="60040"/>
     </mc:Choice>
     <mc:Fallback>
-      <p:transition spd="slow" advTm="71680"/>
+      <p:transition spd="slow" advTm="60040"/>
     </mc:Fallback>
   </mc:AlternateContent>
   <p:timing>
@@ -8611,7 +8611,7 @@
                                   <p:childTnLst>
                                     <p:cmd type="call" cmd="playFrom(0.0)">
                                       <p:cBhvr>
-                                        <p:cTn id="6" dur="70680" fill="hold"/>
+                                        <p:cTn id="6" dur="56040" fill="hold"/>
                                         <p:tgtEl>
                                           <p:spTgt spid="11"/>
                                         </p:tgtEl>
@@ -10256,7 +10256,7 @@
             <a:hlinkClick r:id="" action="ppaction://media"/>
             <a:extLst>
               <a:ext uri="{FF2B5EF4-FFF2-40B4-BE49-F238E27FC236}">
-                <a16:creationId xmlns:a16="http://schemas.microsoft.com/office/drawing/2014/main" id="{EDFA886C-4CEF-EB9D-CC79-3F653B11C198}"/>
+                <a16:creationId xmlns:a16="http://schemas.microsoft.com/office/drawing/2014/main" id="{93A188C7-1100-B709-827B-96ADA2DF7073}"/>
               </a:ext>
             </a:extLst>
           </p:cNvPr>
@@ -10272,7 +10272,7 @@
                     <p:ext uri="{3AFAAA56-56D3-431D-BCD4-E75A35582382}">
                       <p173:tracksInfo xmlns:p173="http://schemas.microsoft.com/office/powerpoint/2017/3/main" displayLoc="slide">
                         <p173:trackLst>
-                          <p173:track id="{477BF850-9114-450F-BA0F-1DBE561C8D2B}" label="English (captions)" lang="en-US" r:embed="rId15"/>
+                          <p173:track id="{286F4057-10DF-46BD-8892-54C3DCE11477}" label="English (captions)" lang="en-US" r:embed="rId15"/>
                         </p173:trackLst>
                       </p173:tracksInfo>
                     </p:ext>
@@ -10305,10 +10305,10 @@
   </p:clrMapOvr>
   <mc:AlternateContent xmlns:mc="http://schemas.openxmlformats.org/markup-compatibility/2006">
     <mc:Choice xmlns:p14="http://schemas.microsoft.com/office/powerpoint/2010/main" Requires="p14">
-      <p:transition spd="slow" p14:dur="2000" advTm="67100"/>
+      <p:transition spd="slow" p14:dur="2000" advTm="56440"/>
     </mc:Choice>
     <mc:Fallback>
-      <p:transition spd="slow" advTm="67100"/>
+      <p:transition spd="slow" advTm="56440"/>
     </mc:Fallback>
   </mc:AlternateContent>
   <p:timing>
@@ -10342,7 +10342,7 @@
                                   <p:childTnLst>
                                     <p:cmd type="call" cmd="playFrom(0.0)">
                                       <p:cBhvr>
-                                        <p:cTn id="6" dur="66096" fill="hold"/>
+                                        <p:cTn id="6" dur="52440" fill="hold"/>
                                         <p:tgtEl>
                                           <p:spTgt spid="44"/>
                                         </p:tgtEl>
@@ -11183,7 +11183,7 @@
             <a:hlinkClick r:id="" action="ppaction://media"/>
             <a:extLst>
               <a:ext uri="{FF2B5EF4-FFF2-40B4-BE49-F238E27FC236}">
-                <a16:creationId xmlns:a16="http://schemas.microsoft.com/office/drawing/2014/main" id="{7574F8DC-65C4-8713-3A5B-4EA38BE5957F}"/>
+                <a16:creationId xmlns:a16="http://schemas.microsoft.com/office/drawing/2014/main" id="{D87C1D3E-27AC-D5D9-9AF8-9A7CA08FB0C2}"/>
               </a:ext>
             </a:extLst>
           </p:cNvPr>
@@ -11199,7 +11199,7 @@
                     <p:ext uri="{3AFAAA56-56D3-431D-BCD4-E75A35582382}">
                       <p173:tracksInfo xmlns:p173="http://schemas.microsoft.com/office/powerpoint/2017/3/main" displayLoc="slide">
                         <p173:trackLst>
-                          <p173:track id="{B857DA69-2881-4B11-96B6-4F6D818F5FC7}" label="English (captions)" lang="en-US" r:embed="rId7"/>
+                          <p173:track id="{EA116692-9061-4428-8C18-34F71A6EAB4A}" label="English (captions)" lang="en-US" r:embed="rId7"/>
                         </p173:trackLst>
                       </p173:tracksInfo>
                     </p:ext>
@@ -11232,10 +11232,10 @@
   </p:clrMapOvr>
   <mc:AlternateContent xmlns:mc="http://schemas.openxmlformats.org/markup-compatibility/2006">
     <mc:Choice xmlns:p14="http://schemas.microsoft.com/office/powerpoint/2010/main" Requires="p14">
-      <p:transition spd="slow" p14:dur="2000" advTm="73240"/>
+      <p:transition spd="slow" p14:dur="2000" advTm="57740"/>
     </mc:Choice>
     <mc:Fallback>
-      <p:transition spd="slow" advTm="73240"/>
+      <p:transition spd="slow" advTm="57740"/>
     </mc:Fallback>
   </mc:AlternateContent>
   <p:timing>
@@ -11269,7 +11269,7 @@
                                   <p:childTnLst>
                                     <p:cmd type="call" cmd="playFrom(0.0)">
                                       <p:cBhvr>
-                                        <p:cTn id="6" dur="72240" fill="hold"/>
+                                        <p:cTn id="6" dur="53736" fill="hold"/>
                                         <p:tgtEl>
                                           <p:spTgt spid="19"/>
                                         </p:tgtEl>
@@ -13004,7 +13004,7 @@
             <a:hlinkClick r:id="" action="ppaction://media"/>
             <a:extLst>
               <a:ext uri="{FF2B5EF4-FFF2-40B4-BE49-F238E27FC236}">
-                <a16:creationId xmlns:a16="http://schemas.microsoft.com/office/drawing/2014/main" id="{C21D75C5-1097-B0AB-871C-BF67A1056536}"/>
+                <a16:creationId xmlns:a16="http://schemas.microsoft.com/office/drawing/2014/main" id="{B162AA53-323B-2E80-0465-EF37DFEF2964}"/>
               </a:ext>
             </a:extLst>
           </p:cNvPr>
@@ -13020,7 +13020,7 @@
                     <p:ext uri="{3AFAAA56-56D3-431D-BCD4-E75A35582382}">
                       <p173:tracksInfo xmlns:p173="http://schemas.microsoft.com/office/powerpoint/2017/3/main" displayLoc="slide">
                         <p173:trackLst>
-                          <p173:track id="{4FF4047C-41BE-40F9-8C1B-F69BB2F0540E}" label="English (captions)" lang="en-US" r:embed="rId8"/>
+                          <p173:track id="{A3657677-F906-4DCB-A5B0-C0335DA06403}" label="English (captions)" lang="en-US" r:embed="rId8"/>
                         </p173:trackLst>
                       </p173:tracksInfo>
                     </p:ext>
@@ -13053,10 +13053,10 @@
   </p:clrMapOvr>
   <mc:AlternateContent xmlns:mc="http://schemas.openxmlformats.org/markup-compatibility/2006">
     <mc:Choice xmlns:p14="http://schemas.microsoft.com/office/powerpoint/2010/main" Requires="p14">
-      <p:transition spd="slow" p14:dur="2000" advTm="90830"/>
+      <p:transition spd="slow" p14:dur="2000" advTm="61530"/>
     </mc:Choice>
     <mc:Fallback>
-      <p:transition spd="slow" advTm="90830"/>
+      <p:transition spd="slow" advTm="61530"/>
     </mc:Fallback>
   </mc:AlternateContent>
   <p:timing>
@@ -13090,7 +13090,7 @@
                                   <p:childTnLst>
                                     <p:cmd type="call" cmd="playFrom(0.0)">
                                       <p:cBhvr>
-                                        <p:cTn id="6" dur="89832" fill="hold"/>
+                                        <p:cTn id="6" dur="57528" fill="hold"/>
                                         <p:tgtEl>
                                           <p:spTgt spid="16"/>
                                         </p:tgtEl>
@@ -14283,7 +14283,7 @@
             <a:hlinkClick r:id="" action="ppaction://media"/>
             <a:extLst>
               <a:ext uri="{FF2B5EF4-FFF2-40B4-BE49-F238E27FC236}">
-                <a16:creationId xmlns:a16="http://schemas.microsoft.com/office/drawing/2014/main" id="{F356A936-BAEE-807C-AD60-C30E0618DEE2}"/>
+                <a16:creationId xmlns:a16="http://schemas.microsoft.com/office/drawing/2014/main" id="{E18A00F5-17AE-951A-8E69-3261B1C2EA36}"/>
               </a:ext>
             </a:extLst>
           </p:cNvPr>
@@ -14299,7 +14299,7 @@
                     <p:ext uri="{3AFAAA56-56D3-431D-BCD4-E75A35582382}">
                       <p173:tracksInfo xmlns:p173="http://schemas.microsoft.com/office/powerpoint/2017/3/main" displayLoc="slide">
                         <p173:trackLst>
-                          <p173:track id="{BB58C456-90E7-4019-932A-4A652325960B}" label="English (captions)" lang="en-US" r:embed="rId10"/>
+                          <p173:track id="{B89E4740-8E1C-4605-A6DA-D3CACFC2905F}" label="English (captions)" lang="en-US" r:embed="rId10"/>
                         </p173:trackLst>
                       </p173:tracksInfo>
                     </p:ext>
@@ -14332,10 +14332,10 @@
   </p:clrMapOvr>
   <mc:AlternateContent xmlns:mc="http://schemas.openxmlformats.org/markup-compatibility/2006">
     <mc:Choice xmlns:p14="http://schemas.microsoft.com/office/powerpoint/2010/main" Requires="p14">
-      <p:transition spd="slow" p14:dur="2000" advTm="75400"/>
+      <p:transition spd="slow" p14:dur="2000" advTm="60710"/>
     </mc:Choice>
     <mc:Fallback>
-      <p:transition spd="slow" advTm="75400"/>
+      <p:transition spd="slow" advTm="60710"/>
     </mc:Fallback>
   </mc:AlternateContent>
   <p:timing>
@@ -14369,7 +14369,7 @@
                                   <p:childTnLst>
                                     <p:cmd type="call" cmd="playFrom(0.0)">
                                       <p:cBhvr>
-                                        <p:cTn id="6" dur="74400" fill="hold"/>
+                                        <p:cTn id="6" dur="56712" fill="hold"/>
                                         <p:tgtEl>
                                           <p:spTgt spid="26"/>
                                         </p:tgtEl>
@@ -15545,7 +15545,7 @@
             <a:hlinkClick r:id="" action="ppaction://media"/>
             <a:extLst>
               <a:ext uri="{FF2B5EF4-FFF2-40B4-BE49-F238E27FC236}">
-                <a16:creationId xmlns:a16="http://schemas.microsoft.com/office/drawing/2014/main" id="{D5B15840-29F6-AB29-AA91-11376D6F3DDF}"/>
+                <a16:creationId xmlns:a16="http://schemas.microsoft.com/office/drawing/2014/main" id="{74370BF2-7285-7FF2-8A49-82D03EE2BD84}"/>
               </a:ext>
             </a:extLst>
           </p:cNvPr>
@@ -15561,7 +15561,7 @@
                     <p:ext uri="{3AFAAA56-56D3-431D-BCD4-E75A35582382}">
                       <p173:tracksInfo xmlns:p173="http://schemas.microsoft.com/office/powerpoint/2017/3/main" displayLoc="slide">
                         <p173:trackLst>
-                          <p173:track id="{85479FBA-7693-4A5F-BC06-4F97083406D3}" label="English (captions)" lang="en-US" r:embed="rId7"/>
+                          <p173:track id="{DF4B0695-B0AB-406B-8D28-3256E33261ED}" label="English (captions)" lang="en-US" r:embed="rId7"/>
                         </p173:trackLst>
                       </p173:tracksInfo>
                     </p:ext>
@@ -15594,10 +15594,10 @@
   </p:clrMapOvr>
   <mc:AlternateContent xmlns:mc="http://schemas.openxmlformats.org/markup-compatibility/2006">
     <mc:Choice xmlns:p14="http://schemas.microsoft.com/office/powerpoint/2010/main" Requires="p14">
-      <p:transition spd="slow" p14:dur="2000" advTm="78140"/>
+      <p:transition spd="slow" p14:dur="2000" advTm="60230"/>
     </mc:Choice>
     <mc:Fallback>
-      <p:transition spd="slow" advTm="78140"/>
+      <p:transition spd="slow" advTm="60230"/>
     </mc:Fallback>
   </mc:AlternateContent>
   <p:timing>
@@ -15631,7 +15631,7 @@
                                   <p:childTnLst>
                                     <p:cmd type="call" cmd="playFrom(0.0)">
                                       <p:cBhvr>
-                                        <p:cTn id="6" dur="77136" fill="hold"/>
+                                        <p:cTn id="6" dur="56232" fill="hold"/>
                                         <p:tgtEl>
                                           <p:spTgt spid="26"/>
                                         </p:tgtEl>

--- a/presentations/b02-identity/B02_Identity_Narrated.pptx
+++ b/presentations/b02-identity/B02_Identity_Narrated.pptx
@@ -181,7 +181,7 @@
     </p:spTree>
     <p:extLst>
       <p:ext uri="{BB962C8B-B14F-4D97-AF65-F5344CB8AC3E}">
-        <p14:creationId xmlns:p14="http://schemas.microsoft.com/office/powerpoint/2010/main" val="2756329138"/>
+        <p14:creationId xmlns:p14="http://schemas.microsoft.com/office/powerpoint/2010/main" val="10350527"/>
       </p:ext>
     </p:extLst>
   </p:cSld>
@@ -2252,7 +2252,7 @@
             <a:hlinkClick r:id="" action="ppaction://media"/>
             <a:extLst>
               <a:ext uri="{FF2B5EF4-FFF2-40B4-BE49-F238E27FC236}">
-                <a16:creationId xmlns:a16="http://schemas.microsoft.com/office/drawing/2014/main" id="{922381C0-BCC2-06D5-B28D-49FB0F472AE5}"/>
+                <a16:creationId xmlns:a16="http://schemas.microsoft.com/office/drawing/2014/main" id="{53F8AC62-9779-34DB-1C61-9EED28F23799}"/>
               </a:ext>
             </a:extLst>
           </p:cNvPr>
@@ -2268,7 +2268,7 @@
                     <p:ext uri="{3AFAAA56-56D3-431D-BCD4-E75A35582382}">
                       <p173:tracksInfo xmlns:p173="http://schemas.microsoft.com/office/powerpoint/2017/3/main" displayLoc="slide">
                         <p173:trackLst>
-                          <p173:track id="{C7956B57-5DA5-4BE7-8BEA-4F403C292121}" label="English (captions)" lang="en-US" r:embed="rId6"/>
+                          <p173:track id="{FF24F6FE-A282-41B4-9869-C2D18DC1D5E1}" label="English (captions)" lang="en-US" r:embed="rId6"/>
                         </p173:trackLst>
                       </p173:tracksInfo>
                     </p:ext>
@@ -2286,7 +2286,7 @@
         </p:blipFill>
         <p:spPr>
           <a:xfrm>
-            <a:off x="127000" y="6350000"/>
+            <a:off x="12446000" y="127000"/>
             <a:ext cx="304800" cy="304800"/>
           </a:xfrm>
           <a:prstGeom prst="rect">
@@ -3407,7 +3407,7 @@
             <a:hlinkClick r:id="" action="ppaction://media"/>
             <a:extLst>
               <a:ext uri="{FF2B5EF4-FFF2-40B4-BE49-F238E27FC236}">
-                <a16:creationId xmlns:a16="http://schemas.microsoft.com/office/drawing/2014/main" id="{44A36555-209A-4D79-3568-E01A43E04DA5}"/>
+                <a16:creationId xmlns:a16="http://schemas.microsoft.com/office/drawing/2014/main" id="{A56A0FFF-23E3-B896-3F6E-A47465218882}"/>
               </a:ext>
             </a:extLst>
           </p:cNvPr>
@@ -3423,7 +3423,7 @@
                     <p:ext uri="{3AFAAA56-56D3-431D-BCD4-E75A35582382}">
                       <p173:tracksInfo xmlns:p173="http://schemas.microsoft.com/office/powerpoint/2017/3/main" displayLoc="slide">
                         <p173:trackLst>
-                          <p173:track id="{4DF5FE6E-D251-4184-AC50-9AA770B62053}" label="English (captions)" lang="en-US" r:embed="rId8"/>
+                          <p173:track id="{F284E2B0-4511-4622-89ED-7CAAF0A77EFE}" label="English (captions)" lang="en-US" r:embed="rId8"/>
                         </p173:trackLst>
                       </p173:tracksInfo>
                     </p:ext>
@@ -3441,7 +3441,7 @@
         </p:blipFill>
         <p:spPr>
           <a:xfrm>
-            <a:off x="127000" y="6350000"/>
+            <a:off x="12446000" y="127000"/>
             <a:ext cx="304800" cy="304800"/>
           </a:xfrm>
           <a:prstGeom prst="rect">
@@ -4474,7 +4474,7 @@
             <a:hlinkClick r:id="" action="ppaction://media"/>
             <a:extLst>
               <a:ext uri="{FF2B5EF4-FFF2-40B4-BE49-F238E27FC236}">
-                <a16:creationId xmlns:a16="http://schemas.microsoft.com/office/drawing/2014/main" id="{04402C1A-F1BF-9DCD-A7B2-0B09B15DBD75}"/>
+                <a16:creationId xmlns:a16="http://schemas.microsoft.com/office/drawing/2014/main" id="{9EE29B46-0266-573D-CD11-397815173ADF}"/>
               </a:ext>
             </a:extLst>
           </p:cNvPr>
@@ -4490,7 +4490,7 @@
                     <p:ext uri="{3AFAAA56-56D3-431D-BCD4-E75A35582382}">
                       <p173:tracksInfo xmlns:p173="http://schemas.microsoft.com/office/powerpoint/2017/3/main" displayLoc="slide">
                         <p173:trackLst>
-                          <p173:track id="{3FC5A588-F67E-4519-A1A2-F414275DCD78}" label="English (captions)" lang="en-US" r:embed="rId11"/>
+                          <p173:track id="{79C82CE7-9D8E-484A-9B14-1A86FD27DD19}" label="English (captions)" lang="en-US" r:embed="rId11"/>
                         </p173:trackLst>
                       </p173:tracksInfo>
                     </p:ext>
@@ -4508,7 +4508,7 @@
         </p:blipFill>
         <p:spPr>
           <a:xfrm>
-            <a:off x="127000" y="6350000"/>
+            <a:off x="12446000" y="127000"/>
             <a:ext cx="304800" cy="304800"/>
           </a:xfrm>
           <a:prstGeom prst="rect">
@@ -5596,7 +5596,7 @@
             <a:hlinkClick r:id="" action="ppaction://media"/>
             <a:extLst>
               <a:ext uri="{FF2B5EF4-FFF2-40B4-BE49-F238E27FC236}">
-                <a16:creationId xmlns:a16="http://schemas.microsoft.com/office/drawing/2014/main" id="{ED99CADA-8305-C459-D4E5-C18ECFAC79FB}"/>
+                <a16:creationId xmlns:a16="http://schemas.microsoft.com/office/drawing/2014/main" id="{6CCAE99B-525B-B4DE-46D2-F1C596D4A1F2}"/>
               </a:ext>
             </a:extLst>
           </p:cNvPr>
@@ -5612,7 +5612,7 @@
                     <p:ext uri="{3AFAAA56-56D3-431D-BCD4-E75A35582382}">
                       <p173:tracksInfo xmlns:p173="http://schemas.microsoft.com/office/powerpoint/2017/3/main" displayLoc="slide">
                         <p173:trackLst>
-                          <p173:track id="{BAD7B0A2-D966-4FF4-BD03-CF2C73A7313B}" label="English (captions)" lang="en-US" r:embed="rId11"/>
+                          <p173:track id="{A7F45FDA-88E5-4F9B-9F41-76B07954D3CF}" label="English (captions)" lang="en-US" r:embed="rId11"/>
                         </p173:trackLst>
                       </p173:tracksInfo>
                     </p:ext>
@@ -5630,7 +5630,7 @@
         </p:blipFill>
         <p:spPr>
           <a:xfrm>
-            <a:off x="127000" y="6350000"/>
+            <a:off x="12446000" y="127000"/>
             <a:ext cx="304800" cy="304800"/>
           </a:xfrm>
           <a:prstGeom prst="rect">
@@ -6523,7 +6523,7 @@
             <a:hlinkClick r:id="" action="ppaction://media"/>
             <a:extLst>
               <a:ext uri="{FF2B5EF4-FFF2-40B4-BE49-F238E27FC236}">
-                <a16:creationId xmlns:a16="http://schemas.microsoft.com/office/drawing/2014/main" id="{C45D06C1-FB83-816A-4BB4-2BCFE28B1BF6}"/>
+                <a16:creationId xmlns:a16="http://schemas.microsoft.com/office/drawing/2014/main" id="{4471D08D-C4BD-5903-6FA2-4A6DFCF06696}"/>
               </a:ext>
             </a:extLst>
           </p:cNvPr>
@@ -6539,7 +6539,7 @@
                     <p:ext uri="{3AFAAA56-56D3-431D-BCD4-E75A35582382}">
                       <p173:tracksInfo xmlns:p173="http://schemas.microsoft.com/office/powerpoint/2017/3/main" displayLoc="slide">
                         <p173:trackLst>
-                          <p173:track id="{4330072B-8D7F-43EE-AF6A-9FF251BD3354}" label="English (captions)" lang="en-US" r:embed="rId7"/>
+                          <p173:track id="{332512D1-A37E-4EC0-B5D7-8EEFB3E5CD31}" label="English (captions)" lang="en-US" r:embed="rId7"/>
                         </p173:trackLst>
                       </p173:tracksInfo>
                     </p:ext>
@@ -6557,7 +6557,7 @@
         </p:blipFill>
         <p:spPr>
           <a:xfrm>
-            <a:off x="127000" y="6350000"/>
+            <a:off x="12446000" y="127000"/>
             <a:ext cx="304800" cy="304800"/>
           </a:xfrm>
           <a:prstGeom prst="rect">
@@ -8525,7 +8525,7 @@
             <a:hlinkClick r:id="" action="ppaction://media"/>
             <a:extLst>
               <a:ext uri="{FF2B5EF4-FFF2-40B4-BE49-F238E27FC236}">
-                <a16:creationId xmlns:a16="http://schemas.microsoft.com/office/drawing/2014/main" id="{E049CD48-4DBE-75A6-7D56-118063ACFB6E}"/>
+                <a16:creationId xmlns:a16="http://schemas.microsoft.com/office/drawing/2014/main" id="{2557D807-4209-F79B-C386-2D8C8A9ABD91}"/>
               </a:ext>
             </a:extLst>
           </p:cNvPr>
@@ -8541,7 +8541,7 @@
                     <p:ext uri="{3AFAAA56-56D3-431D-BCD4-E75A35582382}">
                       <p173:tracksInfo xmlns:p173="http://schemas.microsoft.com/office/powerpoint/2017/3/main" displayLoc="slide">
                         <p173:trackLst>
-                          <p173:track id="{C37475AE-6F50-4714-9313-906605AD850C}" label="English (captions)" lang="en-US" r:embed="rId7"/>
+                          <p173:track id="{188AAB03-45C8-4383-810A-0CB426D4B1E6}" label="English (captions)" lang="en-US" r:embed="rId7"/>
                         </p173:trackLst>
                       </p173:tracksInfo>
                     </p:ext>
@@ -8559,7 +8559,7 @@
         </p:blipFill>
         <p:spPr>
           <a:xfrm>
-            <a:off x="127000" y="6350000"/>
+            <a:off x="12446000" y="127000"/>
             <a:ext cx="304800" cy="304800"/>
           </a:xfrm>
           <a:prstGeom prst="rect">
@@ -10256,7 +10256,7 @@
             <a:hlinkClick r:id="" action="ppaction://media"/>
             <a:extLst>
               <a:ext uri="{FF2B5EF4-FFF2-40B4-BE49-F238E27FC236}">
-                <a16:creationId xmlns:a16="http://schemas.microsoft.com/office/drawing/2014/main" id="{93A188C7-1100-B709-827B-96ADA2DF7073}"/>
+                <a16:creationId xmlns:a16="http://schemas.microsoft.com/office/drawing/2014/main" id="{29AB8184-44D7-E266-EEDF-F2681B22AD0E}"/>
               </a:ext>
             </a:extLst>
           </p:cNvPr>
@@ -10272,7 +10272,7 @@
                     <p:ext uri="{3AFAAA56-56D3-431D-BCD4-E75A35582382}">
                       <p173:tracksInfo xmlns:p173="http://schemas.microsoft.com/office/powerpoint/2017/3/main" displayLoc="slide">
                         <p173:trackLst>
-                          <p173:track id="{286F4057-10DF-46BD-8892-54C3DCE11477}" label="English (captions)" lang="en-US" r:embed="rId15"/>
+                          <p173:track id="{EDE78168-E339-434F-86F5-09C279BC69CC}" label="English (captions)" lang="en-US" r:embed="rId15"/>
                         </p173:trackLst>
                       </p173:tracksInfo>
                     </p:ext>
@@ -10290,7 +10290,7 @@
         </p:blipFill>
         <p:spPr>
           <a:xfrm>
-            <a:off x="127000" y="6350000"/>
+            <a:off x="12446000" y="127000"/>
             <a:ext cx="304800" cy="304800"/>
           </a:xfrm>
           <a:prstGeom prst="rect">
@@ -11183,7 +11183,7 @@
             <a:hlinkClick r:id="" action="ppaction://media"/>
             <a:extLst>
               <a:ext uri="{FF2B5EF4-FFF2-40B4-BE49-F238E27FC236}">
-                <a16:creationId xmlns:a16="http://schemas.microsoft.com/office/drawing/2014/main" id="{D87C1D3E-27AC-D5D9-9AF8-9A7CA08FB0C2}"/>
+                <a16:creationId xmlns:a16="http://schemas.microsoft.com/office/drawing/2014/main" id="{1191CC5F-2727-1EA9-342D-FB031EF9FB73}"/>
               </a:ext>
             </a:extLst>
           </p:cNvPr>
@@ -11199,7 +11199,7 @@
                     <p:ext uri="{3AFAAA56-56D3-431D-BCD4-E75A35582382}">
                       <p173:tracksInfo xmlns:p173="http://schemas.microsoft.com/office/powerpoint/2017/3/main" displayLoc="slide">
                         <p173:trackLst>
-                          <p173:track id="{EA116692-9061-4428-8C18-34F71A6EAB4A}" label="English (captions)" lang="en-US" r:embed="rId7"/>
+                          <p173:track id="{767E107C-50AA-4B7B-A48D-B61228DD43AE}" label="English (captions)" lang="en-US" r:embed="rId7"/>
                         </p173:trackLst>
                       </p173:tracksInfo>
                     </p:ext>
@@ -11217,7 +11217,7 @@
         </p:blipFill>
         <p:spPr>
           <a:xfrm>
-            <a:off x="127000" y="6350000"/>
+            <a:off x="12446000" y="127000"/>
             <a:ext cx="304800" cy="304800"/>
           </a:xfrm>
           <a:prstGeom prst="rect">
@@ -13004,7 +13004,7 @@
             <a:hlinkClick r:id="" action="ppaction://media"/>
             <a:extLst>
               <a:ext uri="{FF2B5EF4-FFF2-40B4-BE49-F238E27FC236}">
-                <a16:creationId xmlns:a16="http://schemas.microsoft.com/office/drawing/2014/main" id="{B162AA53-323B-2E80-0465-EF37DFEF2964}"/>
+                <a16:creationId xmlns:a16="http://schemas.microsoft.com/office/drawing/2014/main" id="{98D0E5B1-F08B-9064-05B6-D259E401BACA}"/>
               </a:ext>
             </a:extLst>
           </p:cNvPr>
@@ -13020,7 +13020,7 @@
                     <p:ext uri="{3AFAAA56-56D3-431D-BCD4-E75A35582382}">
                       <p173:tracksInfo xmlns:p173="http://schemas.microsoft.com/office/powerpoint/2017/3/main" displayLoc="slide">
                         <p173:trackLst>
-                          <p173:track id="{A3657677-F906-4DCB-A5B0-C0335DA06403}" label="English (captions)" lang="en-US" r:embed="rId8"/>
+                          <p173:track id="{38A396E4-3F2F-4585-8BB4-8A99D8EA37F8}" label="English (captions)" lang="en-US" r:embed="rId8"/>
                         </p173:trackLst>
                       </p173:tracksInfo>
                     </p:ext>
@@ -13038,7 +13038,7 @@
         </p:blipFill>
         <p:spPr>
           <a:xfrm>
-            <a:off x="127000" y="6350000"/>
+            <a:off x="12446000" y="127000"/>
             <a:ext cx="304800" cy="304800"/>
           </a:xfrm>
           <a:prstGeom prst="rect">
@@ -14283,7 +14283,7 @@
             <a:hlinkClick r:id="" action="ppaction://media"/>
             <a:extLst>
               <a:ext uri="{FF2B5EF4-FFF2-40B4-BE49-F238E27FC236}">
-                <a16:creationId xmlns:a16="http://schemas.microsoft.com/office/drawing/2014/main" id="{E18A00F5-17AE-951A-8E69-3261B1C2EA36}"/>
+                <a16:creationId xmlns:a16="http://schemas.microsoft.com/office/drawing/2014/main" id="{D4DB3DC9-B7ED-8E08-6985-AF9A4386369A}"/>
               </a:ext>
             </a:extLst>
           </p:cNvPr>
@@ -14299,7 +14299,7 @@
                     <p:ext uri="{3AFAAA56-56D3-431D-BCD4-E75A35582382}">
                       <p173:tracksInfo xmlns:p173="http://schemas.microsoft.com/office/powerpoint/2017/3/main" displayLoc="slide">
                         <p173:trackLst>
-                          <p173:track id="{B89E4740-8E1C-4605-A6DA-D3CACFC2905F}" label="English (captions)" lang="en-US" r:embed="rId10"/>
+                          <p173:track id="{6B39DD64-A2D8-42FB-9B47-215DE62411D6}" label="English (captions)" lang="en-US" r:embed="rId10"/>
                         </p173:trackLst>
                       </p173:tracksInfo>
                     </p:ext>
@@ -14317,7 +14317,7 @@
         </p:blipFill>
         <p:spPr>
           <a:xfrm>
-            <a:off x="127000" y="6350000"/>
+            <a:off x="12446000" y="127000"/>
             <a:ext cx="304800" cy="304800"/>
           </a:xfrm>
           <a:prstGeom prst="rect">
@@ -15545,7 +15545,7 @@
             <a:hlinkClick r:id="" action="ppaction://media"/>
             <a:extLst>
               <a:ext uri="{FF2B5EF4-FFF2-40B4-BE49-F238E27FC236}">
-                <a16:creationId xmlns:a16="http://schemas.microsoft.com/office/drawing/2014/main" id="{74370BF2-7285-7FF2-8A49-82D03EE2BD84}"/>
+                <a16:creationId xmlns:a16="http://schemas.microsoft.com/office/drawing/2014/main" id="{8307B499-8D47-69D4-23B5-D9748AEE33A5}"/>
               </a:ext>
             </a:extLst>
           </p:cNvPr>
@@ -15561,7 +15561,7 @@
                     <p:ext uri="{3AFAAA56-56D3-431D-BCD4-E75A35582382}">
                       <p173:tracksInfo xmlns:p173="http://schemas.microsoft.com/office/powerpoint/2017/3/main" displayLoc="slide">
                         <p173:trackLst>
-                          <p173:track id="{DF4B0695-B0AB-406B-8D28-3256E33261ED}" label="English (captions)" lang="en-US" r:embed="rId7"/>
+                          <p173:track id="{3B47940D-0898-417F-9F90-DED94D03D569}" label="English (captions)" lang="en-US" r:embed="rId7"/>
                         </p173:trackLst>
                       </p173:tracksInfo>
                     </p:ext>
@@ -15579,7 +15579,7 @@
         </p:blipFill>
         <p:spPr>
           <a:xfrm>
-            <a:off x="127000" y="6350000"/>
+            <a:off x="12446000" y="127000"/>
             <a:ext cx="304800" cy="304800"/>
           </a:xfrm>
           <a:prstGeom prst="rect">

--- a/presentations/b02-identity/B02_Identity_Narrated.pptx
+++ b/presentations/b02-identity/B02_Identity_Narrated.pptx
@@ -5,7 +5,7 @@
     <p:sldMasterId id="2147483648" r:id="rId1"/>
   </p:sldMasterIdLst>
   <p:notesMasterIdLst>
-    <p:notesMasterId r:id="rId13"/>
+    <p:notesMasterId r:id="rId14"/>
   </p:notesMasterIdLst>
   <p:sldIdLst>
     <p:sldId id="256" r:id="rId2"/>
@@ -19,6 +19,7 @@
     <p:sldId id="264" r:id="rId10"/>
     <p:sldId id="265" r:id="rId11"/>
     <p:sldId id="266" r:id="rId12"/>
+    <p:sldId id="267" r:id="rId13"/>
   </p:sldIdLst>
   <p:sldSz cx="12192000" cy="6858000"/>
   <p:notesSz cx="6858000" cy="12192000"/>
@@ -117,34 +118,35 @@
   <p:extLst>
     <p:ext uri="{521415D9-36F7-43E2-AB2F-B90AF26B5E84}">
       <p14:sectionLst xmlns:p14="http://schemas.microsoft.com/office/powerpoint/2010/main">
-        <p14:section name="Why identity matters" id="{252D397D-F72B-6D7A-7C8D-65F278D89D7E}">
+        <p14:section name="Why identity matters" id="{59A9F7BF-A23F-DDDF-5A9D-2A6C8D6B7C44}">
           <p14:sldIdLst>
             <p14:sldId id="256"/>
             <p14:sldId id="257"/>
             <p14:sldId id="258"/>
           </p14:sldIdLst>
         </p14:section>
-        <p14:section name="What changes" id="{55052109-6183-7980-B9CE-AA6E0993BC8C}">
+        <p14:section name="What changes" id="{9A65225E-C214-D20B-0172-CAE52F936E15}">
           <p14:sldIdLst>
             <p14:sldId id="259"/>
             <p14:sldId id="260"/>
             <p14:sldId id="261"/>
             <p14:sldId id="262"/>
-          </p14:sldIdLst>
-        </p14:section>
-        <p14:section name="Who owns it" id="{F2A4C398-C262-7B73-F8D9-8BA02308393D}">
-          <p14:sldIdLst>
             <p14:sldId id="263"/>
           </p14:sldIdLst>
         </p14:section>
-        <p14:section name="How to do it" id="{FB486A26-0329-F58A-BA66-8CBA11CFD0E4}">
+        <p14:section name="Who owns it" id="{343723E1-B0ED-C481-0093-E89757F646EF}">
           <p14:sldIdLst>
             <p14:sldId id="264"/>
+          </p14:sldIdLst>
+        </p14:section>
+        <p14:section name="How to do it" id="{D2199643-FD5A-017A-8F23-EE8D69DCBA40}">
+          <p14:sldIdLst>
             <p14:sldId id="265"/>
             <p14:sldId id="266"/>
+            <p14:sldId id="267"/>
           </p14:sldIdLst>
         </p14:section>
-        <p14:section name="Backup" id="{47BD790A-5004-4587-2BC3-D31C63DFD5AA}">
+        <p14:section name="Backup" id="{6F685E4F-E564-81E9-3C46-5E5A9D7DA620}">
           <p14:sldIdLst/>
         </p14:section>
       </p14:sectionLst>
@@ -181,7 +183,7 @@
     </p:spTree>
     <p:extLst>
       <p:ext uri="{BB962C8B-B14F-4D97-AF65-F5344CB8AC3E}">
-        <p14:creationId xmlns:p14="http://schemas.microsoft.com/office/powerpoint/2010/main" val="10350527"/>
+        <p14:creationId xmlns:p14="http://schemas.microsoft.com/office/powerpoint/2010/main" val="2138687767"/>
       </p:ext>
     </p:extLst>
   </p:cSld>
@@ -330,7 +332,8 @@
               <a:t>[0:00–0:29]  This briefing comes from Book 02 of the Federal Modernization Workbook, Identity and Directory: the move from Active Directory to Entra ID.
 I'll take it through four questions. Why identity matters now. What actually changes when a directory moves to the cloud. Who has to own which decisions. And how to do it without losing the governance that twenty-five years of Active Directory quietly carried.
 The short version: this is not a directory upgrade. It decides whether every security control after it works.
-Workbook: Book 02, index.</a:t>
+What Book 02 accomplishes: a directory in which OU placement has become attributes and rules, delegation has moved to administrative units, and every service account has an owner and a target. Of the workbook's four tracks it carries the directory side of the HR track and the service accounts on the non-person track. Where people's attributes come from is Book 03; end-user devices and servers, the Intune and Arc tracks, are Book 05; AI agents are Book 17.
+Workbook: Book 02, index; Appendix A.</a:t>
             </a:r>
           </a:p>
         </p:txBody>
@@ -417,10 +420,11 @@
           <a:p>
             <a:r>
               <a:rPr lang="en-US" dirty="0"/>
-              <a:t>[10:27–11:49]  Chapter 11 puts the steps together in a reference deployment. It's a framing pattern, not a real engagement: a civilian agency with two forests, a trust between them, and a fleet of SQL Server instances. The figures are illustrative; the mechanics are real.
-It runs in five phases. Discover: a read-only survey of both forests, including the service accounts and every service principal name the SQL Server work will depend on. Normalize: an organizational registry built from that survey and checked against the agency's own chart, with a finding raised for every account the registry can't attribute to a real owner. Map: one adapter per surface, and four carry most of the risk here: synchronization, certificates, RADIUS and SQL Server. Migrate: every change recorded with who asked for it, on what authority, and a hash of the resulting state. And Validate: the before and after inventories compared, and every drift finding closed with evidence.
-What comes out is an evidence bundle. It goes to the authorizing official and the security control assessor, who authorize the agency's own system under the Risk Management Framework. And it belongs to the agency. When the integrator leaves, the registry, the schemas, the findings and the evidence stay behind for the next authorization cycle.
-Workbook: Book 02, Chapter 11 — Reference Deployment.</a:t>
+              <a:t>[9:10–10:27]  How. The book's How chapters follow five steps.
+One, discover. Start with read-only access, which every employee already has, and learn the topology, OU tree, groups and Group Policy links. Then ask for narrow, time-bound access for only what you couldn't see. Two, assess: the full forest inventory, including certificate templates, trusts and delegation, without ever requesting the rights that expose secrets.
+Three, build the target. The book recommends Cloud Sync unless a Connect-only requirement applies, password hash sync everywhere, Privileged Identity Management for every admin role, and a tested Conditional Access baseline. Four, migrate in waves: phishing-resistant authentication, including PIV and CAC through certificate-based authentication, and legacy authentication turned off. Five, prove it: drift checks against the baseline and an evidence bundle the authorizing official can rely on.
+A few rules hold for every wave. Never enforce an untested policy on all users. Keep two cloud-only break-glass accounts on phishing-resistant credentials. Convert service accounts to managed or workload identities. And treat every closure as unproven until it carries its evidence.
+Workbook: Book 02, Chapters 07 through 11.</a:t>
             </a:r>
           </a:p>
         </p:txBody>
@@ -507,6 +511,96 @@
           <a:p>
             <a:r>
               <a:rPr lang="en-US" dirty="0"/>
+              <a:t>[10:27–11:49]  Chapter 11 puts the steps together in a reference deployment. It's a framing pattern, not a real engagement: a civilian agency with two forests, a trust between them, and a fleet of SQL Server instances. The figures are illustrative; the mechanics are real.
+It runs in five phases. Discover: a read-only survey of both forests, including the service accounts and every service principal name the SQL Server work will depend on. Normalize: an organizational registry built from that survey and checked against the agency's own chart, with a finding raised for every account the registry can't attribute to a real owner. Map: one adapter per surface, and four carry most of the risk here: synchronization, certificates, RADIUS and SQL Server. Migrate: every change recorded with who asked for it, on what authority, and a hash of the resulting state. And Validate: the before and after inventories compared, and every drift finding closed with evidence.
+What comes out is an evidence bundle. It goes to the authorizing official and the security control assessor, who authorize the agency's own system under the Risk Management Framework. And it belongs to the agency. When the integrator leaves, the registry, the schemas, the findings and the evidence stay behind for the next authorization cycle.
+Workbook: Book 02, Chapter 11 — Reference Deployment.</a:t>
+            </a:r>
+          </a:p>
+        </p:txBody>
+      </p:sp>
+      <p:sp>
+        <p:nvSpPr>
+          <p:cNvPr id="4" name="Slide Number Placeholder 3"/>
+          <p:cNvSpPr>
+            <a:spLocks noGrp="1"/>
+          </p:cNvSpPr>
+          <p:nvPr>
+            <p:ph type="sldNum" sz="quarter" idx="10"/>
+          </p:nvPr>
+        </p:nvSpPr>
+        <p:spPr/>
+        <p:txBody>
+          <a:bodyPr/>
+          <a:lstStyle/>
+          <a:p>
+            <a:fld id="{F7021451-1387-4CA6-816F-3879F97B5CBC}" type="slidenum">
+              <a:rPr lang="en-US"/>
+              <a:t>11</a:t>
+            </a:fld>
+            <a:endParaRPr lang="en-US"/>
+          </a:p>
+        </p:txBody>
+      </p:sp>
+    </p:spTree>
+    <p:extLst>
+      <p:ext uri="{BB962C8B-B14F-4D97-AF65-F5344CB8AC3E}">
+        <p14:creationId xmlns:p14="http://schemas.microsoft.com/office/powerpoint/2010/main" val="1024086991"/>
+      </p:ext>
+    </p:extLst>
+  </p:cSld>
+  <p:clrMapOvr>
+    <a:masterClrMapping/>
+  </p:clrMapOvr>
+</p:notes>
+</file>
+
+<file path=ppt/notesSlides/notesSlide12.xml><?xml version="1.0" encoding="utf-8"?>
+<p:notes xmlns:a="http://schemas.openxmlformats.org/drawingml/2006/main" xmlns:r="http://schemas.openxmlformats.org/officeDocument/2006/relationships" xmlns:p="http://schemas.openxmlformats.org/presentationml/2006/main">
+  <p:cSld>
+    <p:spTree>
+      <p:nvGrpSpPr>
+        <p:cNvPr id="1" name=""/>
+        <p:cNvGrpSpPr/>
+        <p:nvPr/>
+      </p:nvGrpSpPr>
+      <p:grpSpPr>
+        <a:xfrm>
+          <a:off x="0" y="0"/>
+          <a:ext cx="0" cy="0"/>
+          <a:chOff x="0" y="0"/>
+          <a:chExt cx="0" cy="0"/>
+        </a:xfrm>
+      </p:grpSpPr>
+      <p:sp>
+        <p:nvSpPr>
+          <p:cNvPr id="2" name="Slide Image Placeholder 1"/>
+          <p:cNvSpPr>
+            <a:spLocks noGrp="1" noRot="1" noChangeAspect="1"/>
+          </p:cNvSpPr>
+          <p:nvPr>
+            <p:ph type="sldImg"/>
+          </p:nvPr>
+        </p:nvSpPr>
+        <p:spPr/>
+      </p:sp>
+      <p:sp>
+        <p:nvSpPr>
+          <p:cNvPr id="3" name="Notes Placeholder 2"/>
+          <p:cNvSpPr>
+            <a:spLocks noGrp="1"/>
+          </p:cNvSpPr>
+          <p:nvPr>
+            <p:ph type="body" idx="1"/>
+          </p:nvPr>
+        </p:nvSpPr>
+        <p:spPr/>
+        <p:txBody>
+          <a:bodyPr/>
+          <a:lstStyle/>
+          <a:p>
+            <a:r>
+              <a:rPr lang="en-US" dirty="0"/>
               <a:t>[11:49–12:52]  So, four asks.
 Name the owners: the sponsor, the CISO, the authorizing official, the identity engineering lead, and someone who owns the gaps between the tools.
 Start read-only discovery now. It needs no elevated access to begin, and the request for more access then follows the evidence rather than preceding it.
@@ -536,7 +630,7 @@
           <a:p>
             <a:fld id="{F7021451-1387-4CA6-816F-3879F97B5CBC}" type="slidenum">
               <a:rPr lang="en-US"/>
-              <a:t>11</a:t>
+              <a:t>12</a:t>
             </a:fld>
             <a:endParaRPr lang="en-US"/>
           </a:p>
@@ -874,11 +968,12 @@
           <a:p>
             <a:r>
               <a:rPr lang="en-US" dirty="0"/>
-              <a:t>[4:08–5:14]  The second thing that changes is the size of the job. Most migration plans count users and groups. But Active Directory has also been holding the estate together.
-DNS, DHCP and IP address management, with the zones applications depend on. Certificate Services, behind smart cards, Wi-Fi, VPN and servers. RADIUS through the Network Policy Server for Wi-Fi and VPN sign-in. Applications that bind to the directory over LDAP. The sync engine itself, which is a tier zero asset. Devices that are domain-joined and governed by Group Policy. Time, because Kerberos depends on synchronized clocks. And file services, whose permissions are bound to AD groups.
-None of those move just because users sync to the cloud. Some, like the NPS extension for Entra multifactor authentication, are useful interim steps that still depend on AD.
-The program's answer is an adapter for each dependency: an owner, a target, a cutover test and a validation check, retired in priority order rather than all at once.
-Workbook: Book 02, Chapter 04 — The Hidden Migration Surface.</a:t>
+              <a:t>An Active Directory forest holds four populations of identity, and they move by different paths, so the workbook treats them as four tracks, each with its own source of truth. The track model is the program's framing, design guidance.
+The HR track is people, employees and contractors. Book 02 builds the directory side: sync, the Entra target, and the groups and administrative units that read the attributes. Where those attributes come from, HR and the contractor source, is Book 03.
+The Intune track is end-user devices and the Azure Arc track is member servers. Book 02's GPO analysis finds the computer-configuration settings; Book 05 moves them, Chapters 03, 04 and 08 for devices and Chapter 09 for servers.
+The non-person track is the service accounts, MSAs and gMSAs, service principals and AI agents. Book 02, Chapter 09 inventories every service account, gives it an owner and a target, and moves it; AI agents are Book 17.
+What Book 02 accomplishes: a directory where placement has become attributes and rules, and every service account has an owner and a target. Appendix A maps that work to NIST SP 800-53 Rev. 5: account management, AC-2, attribute-based access control, AC-3(13), and least privilege, AC-6; and to OMB M-22-09's enterprise-managed identities with phishing-resistant MFA.
+Workbook: Book 02, Chapters 02, 08 and 09; Appendix A — "NIST SP 800-53 Rev. 5 control mapping," "OMB M-22-09"; Books 03, 05 and 17.</a:t>
             </a:r>
           </a:p>
         </p:txBody>
@@ -965,11 +1060,11 @@
           <a:p>
             <a:r>
               <a:rPr lang="en-US" dirty="0"/>
-              <a:t>[5:14–6:26]  The third change is delegation. In Active Directory, who can manage what was largely expressed by OUs. Entra ID has no OUs, so delegation has to be rebuilt on purpose.
-The program uses three tiers. Tier zero is tenant-wide control: Global Administrator and similar roles, plus break-glass accounts, all activated just in time. Tier one is service administration, such as Exchange, Intune and security. Tier two is departmental administration, like the help desk, scoped to administrative units.
-The platform sets real limits, and the old design documents got several wrong. Administrative units can't be nested. Groups that hold roles can't have dynamic membership. Reader roles like Global Reader apply to the whole tenant. And restricted management is chosen when a unit is created; it can't be added later. It also takes those users and groups out of Entra ID Governance: no access reviews or lifecycle workflows for them.
-So the program's decision is that administrative units are unrestricted by default. Restricted management is a per-unit choice for sensitive accounts, recorded in the registry before the unit exists.
-Workbook: Book 02, Chapter 05 — Delegation Without OUs.</a:t>
+              <a:t>[4:08–5:14]  The second thing that changes is the size of the job. Most migration plans count users and groups. But Active Directory has also been holding the estate together.
+DNS, DHCP and IP address management, with the zones applications depend on. Certificate Services, behind smart cards, Wi-Fi, VPN and servers. RADIUS through the Network Policy Server for Wi-Fi and VPN sign-in. Applications that bind to the directory over LDAP. The sync engine itself, which is a tier zero asset. Devices that are domain-joined and governed by Group Policy. Time, because Kerberos depends on synchronized clocks. And file services, whose permissions are bound to AD groups.
+None of those move just because users sync to the cloud. Some, like the NPS extension for Entra multifactor authentication, are useful interim steps that still depend on AD.
+The program's answer is an adapter for each dependency: an owner, a target, a cutover test and a validation check, retired in priority order rather than all at once.
+Workbook: Book 02, Chapter 04 — The Hidden Migration Surface.</a:t>
             </a:r>
           </a:p>
         </p:txBody>
@@ -1056,12 +1151,11 @@
           <a:p>
             <a:r>
               <a:rPr lang="en-US" dirty="0"/>
-              <a:t>[6:26–7:56]  One more thing changes, and users will feel it: how they sign in.
-OMB M-22-09 requires phishing-resistant multifactor authentication for agency staff, and it names PIV as the simplest route. That reorders the usual roadmap. Earlier plans treated smart-card sign-in as the last phase, for high-security users only. But a federal workforce already carries PIV or CAC cards, so Entra certificate-based authentication is the fastest path: the credential is already issued, and it works directly against Entra ID without a federation server.
-The book runs four waves. Privileged accounts first, on FIDO2 security keys, or their PIV card. Then everyone who holds a PIV or CAC card, through certificate-based authentication. Then managed Windows devices, with Windows Hello for Business. And finally everyone else, including mobile users, with passkeys in Microsoft Authenticator. All four meet Entra's built-in phishing-resistant authentication strength.
-Some things go away: SMS and voice codes for staff, which the memo requires agencies to stop using for routine access, and legacy protocols that send a password with every request. Those are found in the sign-in logs, fixed, then blocked, and watched for thirty days.
-One thing stays on: password hash sync. It enables leaked-credential detection, and it's the manual fallback if pass-through agents or AD FS fail.
-Workbook: Book 02, Chapter 10 — Migrating and Governing.</a:t>
+              <a:t>[5:14–6:26]  The third change is delegation. In Active Directory, who can manage what was largely expressed by OUs. Entra ID has no OUs, so delegation has to be rebuilt on purpose.
+The program uses three tiers. Tier zero is tenant-wide control: Global Administrator and similar roles, plus break-glass accounts, all activated just in time. Tier one is service administration, such as Exchange, Intune and security. Tier two is departmental administration, like the help desk, scoped to administrative units.
+The platform sets real limits, and the old design documents got several wrong. Administrative units can't be nested. Groups that hold roles can't have dynamic membership. Reader roles like Global Reader apply to the whole tenant. And restricted management is chosen when a unit is created; it can't be added later. It also takes those users and groups out of Entra ID Governance: no access reviews or lifecycle workflows for them.
+So the program's decision is that administrative units are unrestricted by default. Restricted management is a per-unit choice for sensitive accounts, recorded in the registry before the unit exists.
+Workbook: Book 02, Chapter 05 — Delegation Without OUs.</a:t>
             </a:r>
           </a:p>
         </p:txBody>
@@ -1148,12 +1242,12 @@
           <a:p>
             <a:r>
               <a:rPr lang="en-US" dirty="0"/>
-              <a:t>[7:56–9:10]  Who. A directory migration fails more often on ownership than on technology, so the book separates who decides from who does the work.
-Deciding: the CIO and executive sponsor set scope, funding and sequence. The CISO sets the control requirements the target has to meet. And the authorizing official accepts any risk the program proposes to carry instead of remove, such as a service account that can't be converted yet.
-Building and running: identity engineering designs and builds the target: sync, authentication, Conditional Access, PIM and administrative units. AD administrators clean the source and, at the end, retire it. The ISSO assembles the evidence and tracks findings to closure.
-Supplying and accepting: HR supplies the facts the directory can't verify on its own, which is the subject of the HR-driven identity book. Application owners accept test results and cutover windows. And the help desk and users carry recovery, registration and wave readiness.
-One owner is usually missing. Microsoft's native tools each own a slice of the picture. Nobody owns the gaps between them unless the program names someone.
-Workbook: Book 02, Chapter 06 — Who Owns the Migration.</a:t>
+              <a:t>[6:26–7:56]  One more thing changes, and users will feel it: how they sign in.
+OMB M-22-09 requires phishing-resistant multifactor authentication for agency staff, and it names PIV as the simplest route. That reorders the usual roadmap. Earlier plans treated smart-card sign-in as the last phase, for high-security users only. But a federal workforce already carries PIV or CAC cards, so Entra certificate-based authentication is the fastest path: the credential is already issued, and it works directly against Entra ID without a federation server.
+The book runs four waves. Privileged accounts first, on FIDO2 security keys, or their PIV card. Then everyone who holds a PIV or CAC card, through certificate-based authentication. Then managed Windows devices, with Windows Hello for Business. And finally everyone else, including mobile users, with passkeys in Microsoft Authenticator. All four meet Entra's built-in phishing-resistant authentication strength.
+Some things go away: SMS and voice codes for staff, which the memo requires agencies to stop using for routine access, and legacy protocols that send a password with every request. Those are found in the sign-in logs, fixed, then blocked, and watched for thirty days.
+One thing stays on: password hash sync. It enables leaked-credential detection, and it's the manual fallback if pass-through agents or AD FS fail.
+Workbook: Book 02, Chapter 10 — Migrating and Governing.</a:t>
             </a:r>
           </a:p>
         </p:txBody>
@@ -1240,11 +1334,12 @@
           <a:p>
             <a:r>
               <a:rPr lang="en-US" dirty="0"/>
-              <a:t>[9:10–10:27]  How. The book's How chapters follow five steps.
-One, discover. Start with read-only access, which every employee already has, and learn the topology, OU tree, groups and Group Policy links. Then ask for narrow, time-bound access for only what you couldn't see. Two, assess: the full forest inventory, including certificate templates, trusts and delegation, without ever requesting the rights that expose secrets.
-Three, build the target. The book recommends Cloud Sync unless a Connect-only requirement applies, password hash sync everywhere, Privileged Identity Management for every admin role, and a tested Conditional Access baseline. Four, migrate in waves: phishing-resistant authentication, including PIV and CAC through certificate-based authentication, and legacy authentication turned off. Five, prove it: drift checks against the baseline and an evidence bundle the authorizing official can rely on.
-A few rules hold for every wave. Never enforce an untested policy on all users. Keep two cloud-only break-glass accounts on phishing-resistant credentials. Convert service accounts to managed or workload identities. And treat every closure as unproven until it carries its evidence.
-Workbook: Book 02, Chapters 07 through 11.</a:t>
+              <a:t>[7:56–9:10]  Who. A directory migration fails more often on ownership than on technology, so the book separates who decides from who does the work.
+Deciding: the CIO and executive sponsor set scope, funding and sequence. The CISO sets the control requirements the target has to meet. And the authorizing official accepts any risk the program proposes to carry instead of remove, such as a service account that can't be converted yet.
+Building and running: identity engineering designs and builds the target: sync, authentication, Conditional Access, PIM and administrative units. AD administrators clean the source and, at the end, retire it. The ISSO assembles the evidence and tracks findings to closure.
+Supplying and accepting: HR supplies the facts the directory can't verify on its own, which is the subject of the HR-driven identity book. Application owners accept test results and cutover windows. And the help desk and users carry recovery, registration and wave readiness.
+One owner is usually missing. Microsoft's native tools each own a slice of the picture. Nobody owns the gaps between them unless the program names someone.
+Workbook: Book 02, Chapter 06 — Who Owns the Migration.</a:t>
             </a:r>
           </a:p>
         </p:txBody>
@@ -2252,7 +2347,7 @@
             <a:hlinkClick r:id="" action="ppaction://media"/>
             <a:extLst>
               <a:ext uri="{FF2B5EF4-FFF2-40B4-BE49-F238E27FC236}">
-                <a16:creationId xmlns:a16="http://schemas.microsoft.com/office/drawing/2014/main" id="{53F8AC62-9779-34DB-1C61-9EED28F23799}"/>
+                <a16:creationId xmlns:a16="http://schemas.microsoft.com/office/drawing/2014/main" id="{33E0566C-8AD3-97AE-7702-14D04A0A53A7}"/>
               </a:ext>
             </a:extLst>
           </p:cNvPr>
@@ -2268,7 +2363,7 @@
                     <p:ext uri="{3AFAAA56-56D3-431D-BCD4-E75A35582382}">
                       <p173:tracksInfo xmlns:p173="http://schemas.microsoft.com/office/powerpoint/2017/3/main" displayLoc="slide">
                         <p173:trackLst>
-                          <p173:track id="{FF24F6FE-A282-41B4-9869-C2D18DC1D5E1}" label="English (captions)" lang="en-US" r:embed="rId6"/>
+                          <p173:track id="{0312F526-6FC2-4B06-903F-897BE9DF2124}" label="English (captions)" lang="en-US" r:embed="rId6"/>
                         </p173:trackLst>
                       </p173:tracksInfo>
                     </p:ext>
@@ -2301,10 +2396,10 @@
   </p:clrMapOvr>
   <mc:AlternateContent xmlns:mc="http://schemas.openxmlformats.org/markup-compatibility/2006">
     <mc:Choice xmlns:p14="http://schemas.microsoft.com/office/powerpoint/2010/main" Requires="p14">
-      <p:transition spd="slow" p14:dur="2000" advTm="39660"/>
+      <p:transition spd="slow" p14:dur="2000" advTm="52380"/>
     </mc:Choice>
     <mc:Fallback>
-      <p:transition spd="slow" advTm="39660"/>
+      <p:transition spd="slow" advTm="52380"/>
     </mc:Fallback>
   </mc:AlternateContent>
   <p:timing>
@@ -2338,7 +2433,7 @@
                                   <p:childTnLst>
                                     <p:cmd type="call" cmd="playFrom(0.0)">
                                       <p:cBhvr>
-                                        <p:cTn id="6" dur="35664" fill="hold"/>
+                                        <p:cTn id="6" dur="48384" fill="hold"/>
                                         <p:tgtEl>
                                           <p:spTgt spid="8"/>
                                         </p:tgtEl>
@@ -2432,7 +2527,7 @@
                 <a:ea typeface="Cambria" pitchFamily="34" charset="-122"/>
                 <a:cs typeface="Cambria" pitchFamily="34" charset="-120"/>
               </a:rPr>
-              <a:t>What a reference deployment produces</a:t>
+              <a:t>How: discover, assess, build, migrate, prove</a:t>
             </a:r>
             <a:endParaRPr lang="en-US" sz="3000" dirty="0"/>
           </a:p>
@@ -2509,7 +2604,7 @@
       </p:sp>
       <p:sp>
         <p:nvSpPr>
-          <p:cNvPr id="5" name="Phase 1">
+          <p:cNvPr id="5" name="Step 1">
             <a:extLst>
               <a:ext uri="{C183D7F6-B498-43B3-948B-1728B52AA6E4}">
                 <adec:decorative xmlns:adec="http://schemas.microsoft.com/office/drawing/2017/decorative" val="1"/>
@@ -2521,12 +2616,12 @@
         </p:nvSpPr>
         <p:spPr>
           <a:xfrm>
-            <a:off x="548640" y="1417320"/>
-            <a:ext cx="6675120" cy="548640"/>
+            <a:off x="548640" y="1463040"/>
+            <a:ext cx="2103120" cy="2606040"/>
           </a:xfrm>
           <a:prstGeom prst="roundRect">
             <a:avLst>
-              <a:gd name="adj" fmla="val 13333"/>
+              <a:gd name="adj" fmla="val 3478"/>
             </a:avLst>
           </a:prstGeom>
           <a:solidFill>
@@ -2549,14 +2644,14 @@
       </p:sp>
       <p:sp>
         <p:nvSpPr>
-          <p:cNvPr id="6" name="Phase 1 text"/>
+          <p:cNvPr id="6" name="Step 1 num"/>
           <p:cNvSpPr txBox="1"/>
           <p:nvPr/>
         </p:nvSpPr>
         <p:spPr>
           <a:xfrm>
-            <a:off x="731520" y="1417320"/>
-            <a:ext cx="6400800" cy="548640"/>
+            <a:off x="731520" y="1572768"/>
+            <a:ext cx="548640" cy="548640"/>
           </a:xfrm>
           <a:prstGeom prst="rect">
             <a:avLst/>
@@ -2565,35 +2660,106 @@
           <a:ln/>
         </p:spPr>
         <p:txBody>
-          <a:bodyPr wrap="square" lIns="0" tIns="0" rIns="0" bIns="0" rtlCol="0" anchor="ctr"/>
+          <a:bodyPr wrap="square" lIns="0" tIns="0" rIns="0" bIns="0" rtlCol="0" anchor="t"/>
           <a:lstStyle/>
           <a:p>
             <a:pPr marL="0" indent="0">
               <a:buNone/>
             </a:pPr>
             <a:r>
-              <a:rPr lang="en-US" sz="1550" b="1" dirty="0">
+              <a:rPr lang="en-US" sz="3000" b="1" dirty="0">
                 <a:solidFill>
                   <a:srgbClr val="1F2A44"/>
                 </a:solidFill>
-              </a:rPr>
-              <a:t>1  Discover   </a:t>
-            </a:r>
+                <a:latin typeface="Cambria" pitchFamily="34" charset="0"/>
+                <a:ea typeface="Cambria" pitchFamily="34" charset="-122"/>
+                <a:cs typeface="Cambria" pitchFamily="34" charset="-120"/>
+              </a:rPr>
+              <a:t>1</a:t>
+            </a:r>
+            <a:endParaRPr lang="en-US" sz="3000" dirty="0"/>
+          </a:p>
+        </p:txBody>
+      </p:sp>
+      <p:sp>
+        <p:nvSpPr>
+          <p:cNvPr id="7" name="Step 1 text"/>
+          <p:cNvSpPr txBox="1"/>
+          <p:nvPr/>
+        </p:nvSpPr>
+        <p:spPr>
+          <a:xfrm>
+            <a:off x="731520" y="2148840"/>
+            <a:ext cx="1783080" cy="1828800"/>
+          </a:xfrm>
+          <a:prstGeom prst="rect">
+            <a:avLst/>
+          </a:prstGeom>
+          <a:noFill/>
+          <a:ln/>
+        </p:spPr>
+        <p:txBody>
+          <a:bodyPr wrap="square" lIns="0" tIns="0" rIns="0" bIns="0" rtlCol="0" anchor="t"/>
+          <a:lstStyle/>
+          <a:p>
+            <a:pPr marL="0" indent="0">
+              <a:spcAft>
+                <a:spcPts val="400"/>
+              </a:spcAft>
+              <a:buNone/>
+            </a:pPr>
+            <a:r>
+              <a:rPr lang="en-US" sz="1800" b="1" dirty="0">
+                <a:solidFill>
+                  <a:srgbClr val="1F2A44"/>
+                </a:solidFill>
+                <a:latin typeface="Cambria" pitchFamily="34" charset="0"/>
+                <a:ea typeface="Cambria" pitchFamily="34" charset="-122"/>
+                <a:cs typeface="Cambria" pitchFamily="34" charset="-120"/>
+              </a:rPr>
+              <a:t>Discover</a:t>
+            </a:r>
+            <a:endParaRPr lang="en-US" sz="1400" dirty="0"/>
+          </a:p>
+          <a:p>
+            <a:pPr marL="0" indent="0">
+              <a:spcAft>
+                <a:spcPts val="400"/>
+              </a:spcAft>
+              <a:buNone/>
+            </a:pPr>
             <a:r>
               <a:rPr lang="en-US" sz="1350" dirty="0">
                 <a:solidFill>
                   <a:schemeClr val="tx2"/>
                 </a:solidFill>
               </a:rPr>
-              <a:t>Read-only survey of both forests; service-account and SPN inventory</a:t>
+              <a:t>Read-only first; ask for narrow, time-bound access</a:t>
             </a:r>
             <a:endParaRPr lang="en-US" sz="1400" dirty="0"/>
           </a:p>
+          <a:p>
+            <a:pPr marL="0" indent="0">
+              <a:spcAft>
+                <a:spcPts val="400"/>
+              </a:spcAft>
+              <a:buNone/>
+            </a:pPr>
+            <a:r>
+              <a:rPr lang="en-US" sz="1200" i="1" dirty="0">
+                <a:solidFill>
+                  <a:srgbClr val="64748B"/>
+                </a:solidFill>
+              </a:rPr>
+              <a:t>Ch 07</a:t>
+            </a:r>
+            <a:endParaRPr lang="en-US" sz="1400" dirty="0"/>
+          </a:p>
         </p:txBody>
       </p:sp>
       <p:sp>
         <p:nvSpPr>
-          <p:cNvPr id="7" name="Phase 2">
+          <p:cNvPr id="8" name="Step 2">
             <a:extLst>
               <a:ext uri="{C183D7F6-B498-43B3-948B-1728B52AA6E4}">
                 <adec:decorative xmlns:adec="http://schemas.microsoft.com/office/drawing/2017/decorative" val="1"/>
@@ -2605,12 +2771,12 @@
         </p:nvSpPr>
         <p:spPr>
           <a:xfrm>
-            <a:off x="548640" y="2057400"/>
-            <a:ext cx="6675120" cy="548640"/>
+            <a:off x="2798064" y="1463040"/>
+            <a:ext cx="2103120" cy="2606040"/>
           </a:xfrm>
           <a:prstGeom prst="roundRect">
             <a:avLst>
-              <a:gd name="adj" fmla="val 13333"/>
+              <a:gd name="adj" fmla="val 3478"/>
             </a:avLst>
           </a:prstGeom>
           <a:solidFill>
@@ -2633,14 +2799,14 @@
       </p:sp>
       <p:sp>
         <p:nvSpPr>
-          <p:cNvPr id="8" name="Phase 2 text"/>
+          <p:cNvPr id="9" name="Step 2 num"/>
           <p:cNvSpPr txBox="1"/>
           <p:nvPr/>
         </p:nvSpPr>
         <p:spPr>
           <a:xfrm>
-            <a:off x="731520" y="2057400"/>
-            <a:ext cx="6400800" cy="548640"/>
+            <a:off x="2980944" y="1572768"/>
+            <a:ext cx="548640" cy="548640"/>
           </a:xfrm>
           <a:prstGeom prst="rect">
             <a:avLst/>
@@ -2649,35 +2815,106 @@
           <a:ln/>
         </p:spPr>
         <p:txBody>
-          <a:bodyPr wrap="square" lIns="0" tIns="0" rIns="0" bIns="0" rtlCol="0" anchor="ctr"/>
+          <a:bodyPr wrap="square" lIns="0" tIns="0" rIns="0" bIns="0" rtlCol="0" anchor="t"/>
           <a:lstStyle/>
           <a:p>
             <a:pPr marL="0" indent="0">
               <a:buNone/>
             </a:pPr>
             <a:r>
-              <a:rPr lang="en-US" sz="1550" b="1" dirty="0">
+              <a:rPr lang="en-US" sz="3000" b="1" dirty="0">
                 <a:solidFill>
                   <a:srgbClr val="0F766E"/>
                 </a:solidFill>
-              </a:rPr>
-              <a:t>2  Normalize   </a:t>
-            </a:r>
+                <a:latin typeface="Cambria" pitchFamily="34" charset="0"/>
+                <a:ea typeface="Cambria" pitchFamily="34" charset="-122"/>
+                <a:cs typeface="Cambria" pitchFamily="34" charset="-120"/>
+              </a:rPr>
+              <a:t>2</a:t>
+            </a:r>
+            <a:endParaRPr lang="en-US" sz="3000" dirty="0"/>
+          </a:p>
+        </p:txBody>
+      </p:sp>
+      <p:sp>
+        <p:nvSpPr>
+          <p:cNvPr id="10" name="Step 2 text"/>
+          <p:cNvSpPr txBox="1"/>
+          <p:nvPr/>
+        </p:nvSpPr>
+        <p:spPr>
+          <a:xfrm>
+            <a:off x="2980944" y="2148840"/>
+            <a:ext cx="1783080" cy="1828800"/>
+          </a:xfrm>
+          <a:prstGeom prst="rect">
+            <a:avLst/>
+          </a:prstGeom>
+          <a:noFill/>
+          <a:ln/>
+        </p:spPr>
+        <p:txBody>
+          <a:bodyPr wrap="square" lIns="0" tIns="0" rIns="0" bIns="0" rtlCol="0" anchor="t"/>
+          <a:lstStyle/>
+          <a:p>
+            <a:pPr marL="0" indent="0">
+              <a:spcAft>
+                <a:spcPts val="400"/>
+              </a:spcAft>
+              <a:buNone/>
+            </a:pPr>
+            <a:r>
+              <a:rPr lang="en-US" sz="1800" b="1" dirty="0">
+                <a:solidFill>
+                  <a:srgbClr val="0F766E"/>
+                </a:solidFill>
+                <a:latin typeface="Cambria" pitchFamily="34" charset="0"/>
+                <a:ea typeface="Cambria" pitchFamily="34" charset="-122"/>
+                <a:cs typeface="Cambria" pitchFamily="34" charset="-120"/>
+              </a:rPr>
+              <a:t>Assess</a:t>
+            </a:r>
+            <a:endParaRPr lang="en-US" sz="1400" dirty="0"/>
+          </a:p>
+          <a:p>
+            <a:pPr marL="0" indent="0">
+              <a:spcAft>
+                <a:spcPts val="400"/>
+              </a:spcAft>
+              <a:buNone/>
+            </a:pPr>
             <a:r>
               <a:rPr lang="en-US" sz="1350" dirty="0">
                 <a:solidFill>
                   <a:schemeClr val="tx2"/>
                 </a:solidFill>
               </a:rPr>
-              <a:t>An organizational registry; a finding for every unattributed principal</a:t>
+              <a:t>Full forest inventory, with secrets never requested</a:t>
             </a:r>
             <a:endParaRPr lang="en-US" sz="1400" dirty="0"/>
           </a:p>
+          <a:p>
+            <a:pPr marL="0" indent="0">
+              <a:spcAft>
+                <a:spcPts val="400"/>
+              </a:spcAft>
+              <a:buNone/>
+            </a:pPr>
+            <a:r>
+              <a:rPr lang="en-US" sz="1200" i="1" dirty="0">
+                <a:solidFill>
+                  <a:srgbClr val="64748B"/>
+                </a:solidFill>
+              </a:rPr>
+              <a:t>Ch 08</a:t>
+            </a:r>
+            <a:endParaRPr lang="en-US" sz="1400" dirty="0"/>
+          </a:p>
         </p:txBody>
       </p:sp>
       <p:sp>
         <p:nvSpPr>
-          <p:cNvPr id="9" name="Phase 3">
+          <p:cNvPr id="11" name="Step 3">
             <a:extLst>
               <a:ext uri="{C183D7F6-B498-43B3-948B-1728B52AA6E4}">
                 <adec:decorative xmlns:adec="http://schemas.microsoft.com/office/drawing/2017/decorative" val="1"/>
@@ -2689,12 +2926,12 @@
         </p:nvSpPr>
         <p:spPr>
           <a:xfrm>
-            <a:off x="548640" y="2697480"/>
-            <a:ext cx="6675120" cy="548640"/>
+            <a:off x="5047488" y="1463040"/>
+            <a:ext cx="2103120" cy="2606040"/>
           </a:xfrm>
           <a:prstGeom prst="roundRect">
             <a:avLst>
-              <a:gd name="adj" fmla="val 13333"/>
+              <a:gd name="adj" fmla="val 3478"/>
             </a:avLst>
           </a:prstGeom>
           <a:solidFill>
@@ -2717,14 +2954,14 @@
       </p:sp>
       <p:sp>
         <p:nvSpPr>
-          <p:cNvPr id="10" name="Phase 3 text"/>
+          <p:cNvPr id="12" name="Step 3 num"/>
           <p:cNvSpPr txBox="1"/>
           <p:nvPr/>
         </p:nvSpPr>
         <p:spPr>
           <a:xfrm>
-            <a:off x="731520" y="2697480"/>
-            <a:ext cx="6400800" cy="548640"/>
+            <a:off x="5230368" y="1572768"/>
+            <a:ext cx="548640" cy="548640"/>
           </a:xfrm>
           <a:prstGeom prst="rect">
             <a:avLst/>
@@ -2733,35 +2970,106 @@
           <a:ln/>
         </p:spPr>
         <p:txBody>
-          <a:bodyPr wrap="square" lIns="0" tIns="0" rIns="0" bIns="0" rtlCol="0" anchor="ctr"/>
+          <a:bodyPr wrap="square" lIns="0" tIns="0" rIns="0" bIns="0" rtlCol="0" anchor="t"/>
           <a:lstStyle/>
           <a:p>
             <a:pPr marL="0" indent="0">
               <a:buNone/>
             </a:pPr>
             <a:r>
-              <a:rPr lang="en-US" sz="1550" b="1" dirty="0">
+              <a:rPr lang="en-US" sz="3000" b="1" dirty="0">
                 <a:solidFill>
                   <a:srgbClr val="1F2A44"/>
                 </a:solidFill>
-              </a:rPr>
-              <a:t>3  Map   </a:t>
-            </a:r>
+                <a:latin typeface="Cambria" pitchFamily="34" charset="0"/>
+                <a:ea typeface="Cambria" pitchFamily="34" charset="-122"/>
+                <a:cs typeface="Cambria" pitchFamily="34" charset="-120"/>
+              </a:rPr>
+              <a:t>3</a:t>
+            </a:r>
+            <a:endParaRPr lang="en-US" sz="3000" dirty="0"/>
+          </a:p>
+        </p:txBody>
+      </p:sp>
+      <p:sp>
+        <p:nvSpPr>
+          <p:cNvPr id="13" name="Step 3 text"/>
+          <p:cNvSpPr txBox="1"/>
+          <p:nvPr/>
+        </p:nvSpPr>
+        <p:spPr>
+          <a:xfrm>
+            <a:off x="5230368" y="2148840"/>
+            <a:ext cx="1783080" cy="1828800"/>
+          </a:xfrm>
+          <a:prstGeom prst="rect">
+            <a:avLst/>
+          </a:prstGeom>
+          <a:noFill/>
+          <a:ln/>
+        </p:spPr>
+        <p:txBody>
+          <a:bodyPr wrap="square" lIns="0" tIns="0" rIns="0" bIns="0" rtlCol="0" anchor="t"/>
+          <a:lstStyle/>
+          <a:p>
+            <a:pPr marL="0" indent="0">
+              <a:spcAft>
+                <a:spcPts val="400"/>
+              </a:spcAft>
+              <a:buNone/>
+            </a:pPr>
+            <a:r>
+              <a:rPr lang="en-US" sz="1800" b="1" dirty="0">
+                <a:solidFill>
+                  <a:srgbClr val="1F2A44"/>
+                </a:solidFill>
+                <a:latin typeface="Cambria" pitchFamily="34" charset="0"/>
+                <a:ea typeface="Cambria" pitchFamily="34" charset="-122"/>
+                <a:cs typeface="Cambria" pitchFamily="34" charset="-120"/>
+              </a:rPr>
+              <a:t>Build</a:t>
+            </a:r>
+            <a:endParaRPr lang="en-US" sz="1400" dirty="0"/>
+          </a:p>
+          <a:p>
+            <a:pPr marL="0" indent="0">
+              <a:spcAft>
+                <a:spcPts val="400"/>
+              </a:spcAft>
+              <a:buNone/>
+            </a:pPr>
             <a:r>
               <a:rPr lang="en-US" sz="1350" dirty="0">
                 <a:solidFill>
                   <a:schemeClr val="tx2"/>
                 </a:solidFill>
               </a:rPr>
-              <a:t>One adapter per surface: sync, PKI, RADIUS, SQL Server</a:t>
+              <a:t>Cloud Sync, password hash sync, PIM, Conditional Access</a:t>
             </a:r>
             <a:endParaRPr lang="en-US" sz="1400" dirty="0"/>
           </a:p>
+          <a:p>
+            <a:pPr marL="0" indent="0">
+              <a:spcAft>
+                <a:spcPts val="400"/>
+              </a:spcAft>
+              <a:buNone/>
+            </a:pPr>
+            <a:r>
+              <a:rPr lang="en-US" sz="1200" i="1" dirty="0">
+                <a:solidFill>
+                  <a:srgbClr val="64748B"/>
+                </a:solidFill>
+              </a:rPr>
+              <a:t>Ch 09</a:t>
+            </a:r>
+            <a:endParaRPr lang="en-US" sz="1400" dirty="0"/>
+          </a:p>
         </p:txBody>
       </p:sp>
       <p:sp>
         <p:nvSpPr>
-          <p:cNvPr id="11" name="Phase 4">
+          <p:cNvPr id="14" name="Step 4">
             <a:extLst>
               <a:ext uri="{C183D7F6-B498-43B3-948B-1728B52AA6E4}">
                 <adec:decorative xmlns:adec="http://schemas.microsoft.com/office/drawing/2017/decorative" val="1"/>
@@ -2773,12 +3081,12 @@
         </p:nvSpPr>
         <p:spPr>
           <a:xfrm>
-            <a:off x="548640" y="3337560"/>
-            <a:ext cx="6675120" cy="548640"/>
+            <a:off x="7296912" y="1463040"/>
+            <a:ext cx="2103120" cy="2606040"/>
           </a:xfrm>
           <a:prstGeom prst="roundRect">
             <a:avLst>
-              <a:gd name="adj" fmla="val 13333"/>
+              <a:gd name="adj" fmla="val 3478"/>
             </a:avLst>
           </a:prstGeom>
           <a:solidFill>
@@ -2801,14 +3109,14 @@
       </p:sp>
       <p:sp>
         <p:nvSpPr>
-          <p:cNvPr id="12" name="Phase 4 text"/>
+          <p:cNvPr id="15" name="Step 4 num"/>
           <p:cNvSpPr txBox="1"/>
           <p:nvPr/>
         </p:nvSpPr>
         <p:spPr>
           <a:xfrm>
-            <a:off x="731520" y="3337560"/>
-            <a:ext cx="6400800" cy="548640"/>
+            <a:off x="7479792" y="1572768"/>
+            <a:ext cx="548640" cy="548640"/>
           </a:xfrm>
           <a:prstGeom prst="rect">
             <a:avLst/>
@@ -2817,35 +3125,106 @@
           <a:ln/>
         </p:spPr>
         <p:txBody>
-          <a:bodyPr wrap="square" lIns="0" tIns="0" rIns="0" bIns="0" rtlCol="0" anchor="ctr"/>
+          <a:bodyPr wrap="square" lIns="0" tIns="0" rIns="0" bIns="0" rtlCol="0" anchor="t"/>
           <a:lstStyle/>
           <a:p>
             <a:pPr marL="0" indent="0">
               <a:buNone/>
             </a:pPr>
             <a:r>
-              <a:rPr lang="en-US" sz="1550" b="1" dirty="0">
+              <a:rPr lang="en-US" sz="3000" b="1" dirty="0">
                 <a:solidFill>
                   <a:srgbClr val="0F766E"/>
                 </a:solidFill>
-              </a:rPr>
-              <a:t>4  Migrate   </a:t>
-            </a:r>
+                <a:latin typeface="Cambria" pitchFamily="34" charset="0"/>
+                <a:ea typeface="Cambria" pitchFamily="34" charset="-122"/>
+                <a:cs typeface="Cambria" pitchFamily="34" charset="-120"/>
+              </a:rPr>
+              <a:t>4</a:t>
+            </a:r>
+            <a:endParaRPr lang="en-US" sz="3000" dirty="0"/>
+          </a:p>
+        </p:txBody>
+      </p:sp>
+      <p:sp>
+        <p:nvSpPr>
+          <p:cNvPr id="16" name="Step 4 text"/>
+          <p:cNvSpPr txBox="1"/>
+          <p:nvPr/>
+        </p:nvSpPr>
+        <p:spPr>
+          <a:xfrm>
+            <a:off x="7479792" y="2148840"/>
+            <a:ext cx="1783080" cy="1828800"/>
+          </a:xfrm>
+          <a:prstGeom prst="rect">
+            <a:avLst/>
+          </a:prstGeom>
+          <a:noFill/>
+          <a:ln/>
+        </p:spPr>
+        <p:txBody>
+          <a:bodyPr wrap="square" lIns="0" tIns="0" rIns="0" bIns="0" rtlCol="0" anchor="t"/>
+          <a:lstStyle/>
+          <a:p>
+            <a:pPr marL="0" indent="0">
+              <a:spcAft>
+                <a:spcPts val="400"/>
+              </a:spcAft>
+              <a:buNone/>
+            </a:pPr>
+            <a:r>
+              <a:rPr lang="en-US" sz="1800" b="1" dirty="0">
+                <a:solidFill>
+                  <a:srgbClr val="0F766E"/>
+                </a:solidFill>
+                <a:latin typeface="Cambria" pitchFamily="34" charset="0"/>
+                <a:ea typeface="Cambria" pitchFamily="34" charset="-122"/>
+                <a:cs typeface="Cambria" pitchFamily="34" charset="-120"/>
+              </a:rPr>
+              <a:t>Migrate</a:t>
+            </a:r>
+            <a:endParaRPr lang="en-US" sz="1400" dirty="0"/>
+          </a:p>
+          <a:p>
+            <a:pPr marL="0" indent="0">
+              <a:spcAft>
+                <a:spcPts val="400"/>
+              </a:spcAft>
+              <a:buNone/>
+            </a:pPr>
             <a:r>
               <a:rPr lang="en-US" sz="1350" dirty="0">
                 <a:solidFill>
                   <a:schemeClr val="tx2"/>
                 </a:solidFill>
               </a:rPr>
-              <a:t>Every change recorded with who asked, on what authority, and a state hash</a:t>
+              <a:t>Waves; phishing-resistant MFA; legacy auth off</a:t>
             </a:r>
             <a:endParaRPr lang="en-US" sz="1400" dirty="0"/>
           </a:p>
+          <a:p>
+            <a:pPr marL="0" indent="0">
+              <a:spcAft>
+                <a:spcPts val="400"/>
+              </a:spcAft>
+              <a:buNone/>
+            </a:pPr>
+            <a:r>
+              <a:rPr lang="en-US" sz="1200" i="1" dirty="0">
+                <a:solidFill>
+                  <a:srgbClr val="64748B"/>
+                </a:solidFill>
+              </a:rPr>
+              <a:t>Ch 10</a:t>
+            </a:r>
+            <a:endParaRPr lang="en-US" sz="1400" dirty="0"/>
+          </a:p>
         </p:txBody>
       </p:sp>
       <p:sp>
         <p:nvSpPr>
-          <p:cNvPr id="13" name="Phase 5">
+          <p:cNvPr id="17" name="Step 5">
             <a:extLst>
               <a:ext uri="{C183D7F6-B498-43B3-948B-1728B52AA6E4}">
                 <adec:decorative xmlns:adec="http://schemas.microsoft.com/office/drawing/2017/decorative" val="1"/>
@@ -2857,12 +3236,12 @@
         </p:nvSpPr>
         <p:spPr>
           <a:xfrm>
-            <a:off x="548640" y="3977640"/>
-            <a:ext cx="6675120" cy="548640"/>
+            <a:off x="9546336" y="1463040"/>
+            <a:ext cx="2103120" cy="2606040"/>
           </a:xfrm>
           <a:prstGeom prst="roundRect">
             <a:avLst>
-              <a:gd name="adj" fmla="val 13333"/>
+              <a:gd name="adj" fmla="val 3478"/>
             </a:avLst>
           </a:prstGeom>
           <a:solidFill>
@@ -2885,14 +3264,14 @@
       </p:sp>
       <p:sp>
         <p:nvSpPr>
-          <p:cNvPr id="14" name="Phase 5 text"/>
+          <p:cNvPr id="18" name="Step 5 num"/>
           <p:cNvSpPr txBox="1"/>
           <p:nvPr/>
         </p:nvSpPr>
         <p:spPr>
           <a:xfrm>
-            <a:off x="731520" y="3977640"/>
-            <a:ext cx="6400800" cy="548640"/>
+            <a:off x="9729216" y="1572768"/>
+            <a:ext cx="548640" cy="548640"/>
           </a:xfrm>
           <a:prstGeom prst="rect">
             <a:avLst/>
@@ -2901,35 +3280,106 @@
           <a:ln/>
         </p:spPr>
         <p:txBody>
-          <a:bodyPr wrap="square" lIns="0" tIns="0" rIns="0" bIns="0" rtlCol="0" anchor="ctr"/>
+          <a:bodyPr wrap="square" lIns="0" tIns="0" rIns="0" bIns="0" rtlCol="0" anchor="t"/>
           <a:lstStyle/>
           <a:p>
             <a:pPr marL="0" indent="0">
               <a:buNone/>
             </a:pPr>
             <a:r>
-              <a:rPr lang="en-US" sz="1550" b="1" dirty="0">
+              <a:rPr lang="en-US" sz="3000" b="1" dirty="0">
                 <a:solidFill>
                   <a:srgbClr val="1F2A44"/>
                 </a:solidFill>
-              </a:rPr>
-              <a:t>5  Validate   </a:t>
-            </a:r>
+                <a:latin typeface="Cambria" pitchFamily="34" charset="0"/>
+                <a:ea typeface="Cambria" pitchFamily="34" charset="-122"/>
+                <a:cs typeface="Cambria" pitchFamily="34" charset="-120"/>
+              </a:rPr>
+              <a:t>5</a:t>
+            </a:r>
+            <a:endParaRPr lang="en-US" sz="3000" dirty="0"/>
+          </a:p>
+        </p:txBody>
+      </p:sp>
+      <p:sp>
+        <p:nvSpPr>
+          <p:cNvPr id="19" name="Step 5 text"/>
+          <p:cNvSpPr txBox="1"/>
+          <p:nvPr/>
+        </p:nvSpPr>
+        <p:spPr>
+          <a:xfrm>
+            <a:off x="9729216" y="2148840"/>
+            <a:ext cx="1783080" cy="1828800"/>
+          </a:xfrm>
+          <a:prstGeom prst="rect">
+            <a:avLst/>
+          </a:prstGeom>
+          <a:noFill/>
+          <a:ln/>
+        </p:spPr>
+        <p:txBody>
+          <a:bodyPr wrap="square" lIns="0" tIns="0" rIns="0" bIns="0" rtlCol="0" anchor="t"/>
+          <a:lstStyle/>
+          <a:p>
+            <a:pPr marL="0" indent="0">
+              <a:spcAft>
+                <a:spcPts val="400"/>
+              </a:spcAft>
+              <a:buNone/>
+            </a:pPr>
+            <a:r>
+              <a:rPr lang="en-US" sz="1800" b="1" dirty="0">
+                <a:solidFill>
+                  <a:srgbClr val="1F2A44"/>
+                </a:solidFill>
+                <a:latin typeface="Cambria" pitchFamily="34" charset="0"/>
+                <a:ea typeface="Cambria" pitchFamily="34" charset="-122"/>
+                <a:cs typeface="Cambria" pitchFamily="34" charset="-120"/>
+              </a:rPr>
+              <a:t>Prove</a:t>
+            </a:r>
+            <a:endParaRPr lang="en-US" sz="1400" dirty="0"/>
+          </a:p>
+          <a:p>
+            <a:pPr marL="0" indent="0">
+              <a:spcAft>
+                <a:spcPts val="400"/>
+              </a:spcAft>
+              <a:buNone/>
+            </a:pPr>
             <a:r>
               <a:rPr lang="en-US" sz="1350" dirty="0">
                 <a:solidFill>
                   <a:schemeClr val="tx2"/>
                 </a:solidFill>
               </a:rPr>
-              <a:t>Before-and-after inventories compared; drift closed with evidence</a:t>
+              <a:t>Drift checks and an evidence bundle for the AO</a:t>
             </a:r>
             <a:endParaRPr lang="en-US" sz="1400" dirty="0"/>
           </a:p>
+          <a:p>
+            <a:pPr marL="0" indent="0">
+              <a:spcAft>
+                <a:spcPts val="400"/>
+              </a:spcAft>
+              <a:buNone/>
+            </a:pPr>
+            <a:r>
+              <a:rPr lang="en-US" sz="1200" i="1" dirty="0">
+                <a:solidFill>
+                  <a:srgbClr val="64748B"/>
+                </a:solidFill>
+              </a:rPr>
+              <a:t>Ch 10–11</a:t>
+            </a:r>
+            <a:endParaRPr lang="en-US" sz="1400" dirty="0"/>
+          </a:p>
         </p:txBody>
       </p:sp>
       <p:sp>
         <p:nvSpPr>
-          <p:cNvPr id="15" name="Bundle box">
+          <p:cNvPr id="20" name="Rules">
             <a:extLst>
               <a:ext uri="{C183D7F6-B498-43B3-948B-1728B52AA6E4}">
                 <adec:decorative xmlns:adec="http://schemas.microsoft.com/office/drawing/2017/decorative" val="1"/>
@@ -2941,12 +3391,12 @@
         </p:nvSpPr>
         <p:spPr>
           <a:xfrm>
-            <a:off x="7452360" y="1417320"/>
-            <a:ext cx="4206240" cy="3108960"/>
+            <a:off x="548640" y="4343400"/>
+            <a:ext cx="11109960" cy="1600200"/>
           </a:xfrm>
           <a:prstGeom prst="roundRect">
             <a:avLst>
-              <a:gd name="adj" fmla="val 2353"/>
+              <a:gd name="adj" fmla="val 4571"/>
             </a:avLst>
           </a:prstGeom>
           <a:solidFill>
@@ -2969,6 +3419,913 @@
       </p:sp>
       <p:sp>
         <p:nvSpPr>
+          <p:cNvPr id="21" name="Icon FaClipboardCheck">
+            <a:extLst>
+              <a:ext uri="{C183D7F6-B498-43B3-948B-1728B52AA6E4}">
+                <adec:decorative xmlns:adec="http://schemas.microsoft.com/office/drawing/2017/decorative" val="1"/>
+              </a:ext>
+            </a:extLst>
+          </p:cNvPr>
+          <p:cNvSpPr/>
+          <p:nvPr/>
+        </p:nvSpPr>
+        <p:spPr>
+          <a:xfrm>
+            <a:off x="777240" y="4777740"/>
+            <a:ext cx="731520" cy="731520"/>
+          </a:xfrm>
+          <a:prstGeom prst="ellipse">
+            <a:avLst/>
+          </a:prstGeom>
+          <a:solidFill>
+            <a:srgbClr val="B45309"/>
+          </a:solidFill>
+          <a:ln w="12700">
+            <a:solidFill>
+              <a:srgbClr val="B45309"/>
+            </a:solidFill>
+            <a:prstDash val="solid"/>
+          </a:ln>
+        </p:spPr>
+      </p:sp>
+      <p:pic>
+        <p:nvPicPr>
+          <p:cNvPr id="22" name="Image 0">
+            <a:extLst>
+              <a:ext uri="{C183D7F6-B498-43B3-948B-1728B52AA6E4}">
+                <adec:decorative xmlns:adec="http://schemas.microsoft.com/office/drawing/2017/decorative" val="1"/>
+              </a:ext>
+            </a:extLst>
+          </p:cNvPr>
+          <p:cNvPicPr>
+            <a:picLocks noChangeAspect="1"/>
+          </p:cNvPicPr>
+          <p:nvPr/>
+        </p:nvPicPr>
+        <p:blipFill>
+          <a:blip r:embed="rId5"/>
+          <a:stretch>
+            <a:fillRect/>
+          </a:stretch>
+        </p:blipFill>
+        <p:spPr>
+          <a:xfrm>
+            <a:off x="952805" y="4953305"/>
+            <a:ext cx="380390" cy="380390"/>
+          </a:xfrm>
+          <a:prstGeom prst="rect">
+            <a:avLst/>
+          </a:prstGeom>
+        </p:spPr>
+      </p:pic>
+      <p:sp>
+        <p:nvSpPr>
+          <p:cNvPr id="23" name="Rules text"/>
+          <p:cNvSpPr txBox="1"/>
+          <p:nvPr/>
+        </p:nvSpPr>
+        <p:spPr>
+          <a:xfrm>
+            <a:off x="1737360" y="4389120"/>
+            <a:ext cx="9738360" cy="1508760"/>
+          </a:xfrm>
+          <a:prstGeom prst="rect">
+            <a:avLst/>
+          </a:prstGeom>
+          <a:noFill/>
+          <a:ln/>
+        </p:spPr>
+        <p:txBody>
+          <a:bodyPr wrap="square" lIns="0" tIns="0" rIns="0" bIns="0" rtlCol="0" anchor="ctr"/>
+          <a:lstStyle/>
+          <a:p>
+            <a:pPr marL="0" indent="0">
+              <a:buNone/>
+            </a:pPr>
+            <a:r>
+              <a:rPr lang="en-US" sz="1650" b="1" dirty="0">
+                <a:solidFill>
+                  <a:srgbClr val="B45309"/>
+                </a:solidFill>
+              </a:rPr>
+              <a:t>Rules that hold every wave: </a:t>
+            </a:r>
+            <a:r>
+              <a:rPr lang="en-US" sz="1650" dirty="0">
+                <a:solidFill>
+                  <a:schemeClr val="tx2"/>
+                </a:solidFill>
+              </a:rPr>
+              <a:t>never enforce an untested policy on all users; keep two cloud-only break-glass accounts on phishing-resistant credentials; convert service accounts to managed or workload identities; and treat every closure as unproven until it carries its evidence.</a:t>
+            </a:r>
+            <a:endParaRPr lang="en-US" sz="1650" dirty="0"/>
+          </a:p>
+        </p:txBody>
+      </p:sp>
+      <p:sp>
+        <p:nvSpPr>
+          <p:cNvPr id="24" name="Sources"/>
+          <p:cNvSpPr txBox="1"/>
+          <p:nvPr/>
+        </p:nvSpPr>
+        <p:spPr>
+          <a:xfrm>
+            <a:off x="548640" y="6053328"/>
+            <a:ext cx="10424160" cy="292608"/>
+          </a:xfrm>
+          <a:prstGeom prst="rect">
+            <a:avLst/>
+          </a:prstGeom>
+          <a:noFill/>
+          <a:ln/>
+        </p:spPr>
+        <p:txBody>
+          <a:bodyPr wrap="square" lIns="0" tIns="0" rIns="0" bIns="0" rtlCol="0" anchor="t"/>
+          <a:lstStyle/>
+          <a:p>
+            <a:pPr marL="0" indent="0">
+              <a:buNone/>
+            </a:pPr>
+            <a:r>
+              <a:rPr lang="en-US" sz="1000" i="1" dirty="0">
+                <a:solidFill>
+                  <a:srgbClr val="64748B"/>
+                </a:solidFill>
+              </a:rPr>
+              <a:t>Sources: Microsoft Learn — Cloud Sync, PHS, PIM, emergency access accounts, CBA, workload identity federation. Book 02, Chapters 07–11.</a:t>
+            </a:r>
+            <a:endParaRPr lang="en-US" sz="1000" dirty="0"/>
+          </a:p>
+        </p:txBody>
+      </p:sp>
+      <p:sp>
+        <p:nvSpPr>
+          <p:cNvPr id="25" name="Slide Number Placeholder 0"/>
+          <p:cNvSpPr>
+            <a:spLocks noGrp="1"/>
+          </p:cNvSpPr>
+          <p:nvPr>
+            <p:ph type="sldNum" sz="quarter" idx="4294967295"/>
+          </p:nvPr>
+        </p:nvSpPr>
+        <p:spPr>
+          <a:xfrm>
+            <a:off x="11155680" y="6400800"/>
+            <a:ext cx="457200" cy="274320"/>
+          </a:xfrm>
+          <a:prstGeom prst="rect">
+            <a:avLst/>
+          </a:prstGeom>
+          <a:extLst>
+            <a:ext uri="{C572A759-6A51-4108-AA02-DFA0A04FC94B}">
+              <ma14:wrappingTextBoxFlag xmlns:ma14="http://schemas.microsoft.com/office/mac/drawingml/2011/main" xmlns="" val="0"/>
+            </a:ext>
+          </a:extLst>
+        </p:spPr>
+        <p:txBody>
+          <a:bodyPr/>
+          <a:lstStyle>
+            <a:lvl1pPr>
+              <a:defRPr sz="1000">
+                <a:solidFill>
+                  <a:schemeClr val="accent5"/>
+                </a:solidFill>
+              </a:defRPr>
+            </a:lvl1pPr>
+          </a:lstStyle>
+          <a:p>
+            <a:pPr algn="r"/>
+            <a:fld id="{F7021451-1387-4CA6-816F-3879F97B5CBC}" type="slidenum">
+              <a:rPr lang="en-US" b="0"/>
+              <a:t>10</a:t>
+            </a:fld>
+            <a:endParaRPr lang="en-US"/>
+          </a:p>
+        </p:txBody>
+      </p:sp>
+      <p:pic>
+        <p:nvPicPr>
+          <p:cNvPr id="26" name="Narration" descr="Narration for this slide; captions available">
+            <a:hlinkClick r:id="" action="ppaction://media"/>
+            <a:extLst>
+              <a:ext uri="{FF2B5EF4-FFF2-40B4-BE49-F238E27FC236}">
+                <a16:creationId xmlns:a16="http://schemas.microsoft.com/office/drawing/2014/main" id="{D8E5D89E-4B4A-5370-157C-BC0432718217}"/>
+              </a:ext>
+            </a:extLst>
+          </p:cNvPr>
+          <p:cNvPicPr>
+            <a:picLocks noChangeAspect="1"/>
+          </p:cNvPicPr>
+          <p:nvPr>
+            <a:audioFile r:link="rId2"/>
+            <p:extLst>
+              <p:ext uri="{DAA4B4D4-6D71-4841-9C94-3DE7FCFB9230}">
+                <p14:media xmlns:p14="http://schemas.microsoft.com/office/powerpoint/2010/main" r:embed="rId1">
+                  <p14:extLst>
+                    <p:ext uri="{3AFAAA56-56D3-431D-BCD4-E75A35582382}">
+                      <p173:tracksInfo xmlns:p173="http://schemas.microsoft.com/office/powerpoint/2017/3/main" displayLoc="slide">
+                        <p173:trackLst>
+                          <p173:track id="{7879F476-6B4A-454C-9A76-FFB64283C72E}" label="English (captions)" lang="en-US" r:embed="rId7"/>
+                        </p173:trackLst>
+                      </p173:tracksInfo>
+                    </p:ext>
+                  </p14:extLst>
+                </p14:media>
+              </p:ext>
+            </p:extLst>
+          </p:nvPr>
+        </p:nvPicPr>
+        <p:blipFill>
+          <a:blip r:embed="rId6"/>
+          <a:stretch>
+            <a:fillRect/>
+          </a:stretch>
+        </p:blipFill>
+        <p:spPr>
+          <a:xfrm>
+            <a:off x="12446000" y="127000"/>
+            <a:ext cx="304800" cy="304800"/>
+          </a:xfrm>
+          <a:prstGeom prst="rect">
+            <a:avLst/>
+          </a:prstGeom>
+        </p:spPr>
+      </p:pic>
+    </p:spTree>
+  </p:cSld>
+  <p:clrMapOvr>
+    <a:masterClrMapping/>
+  </p:clrMapOvr>
+  <mc:AlternateContent xmlns:mc="http://schemas.openxmlformats.org/markup-compatibility/2006">
+    <mc:Choice xmlns:p14="http://schemas.microsoft.com/office/powerpoint/2010/main" Requires="p14">
+      <p:transition spd="slow" p14:dur="2000" advTm="60230"/>
+    </mc:Choice>
+    <mc:Fallback>
+      <p:transition spd="slow" advTm="60230"/>
+    </mc:Fallback>
+  </mc:AlternateContent>
+  <p:timing>
+    <p:tnLst>
+      <p:par>
+        <p:cTn id="1" dur="indefinite" restart="never" nodeType="tmRoot">
+          <p:childTnLst>
+            <p:seq concurrent="1" nextAc="seek">
+              <p:cTn id="2" dur="indefinite" nodeType="mainSeq">
+                <p:childTnLst>
+                  <p:par>
+                    <p:cTn id="3" fill="hold">
+                      <p:stCondLst>
+                        <p:cond delay="indefinite"/>
+                        <p:cond evt="onBegin" delay="0">
+                          <p:tn val="2"/>
+                        </p:cond>
+                      </p:stCondLst>
+                      <p:childTnLst>
+                        <p:par>
+                          <p:cTn id="4" fill="hold">
+                            <p:stCondLst>
+                              <p:cond delay="0"/>
+                            </p:stCondLst>
+                            <p:childTnLst>
+                              <p:par>
+                                <p:cTn id="5" presetID="1" presetClass="mediacall" presetSubtype="0" fill="hold" nodeType="withEffect">
+                                  <p:stCondLst>
+                                    <p:cond delay="0"/>
+                                  </p:stCondLst>
+                                  <p:childTnLst>
+                                    <p:cmd type="call" cmd="playFrom(0.0)">
+                                      <p:cBhvr>
+                                        <p:cTn id="6" dur="56232" fill="hold"/>
+                                        <p:tgtEl>
+                                          <p:spTgt spid="26"/>
+                                        </p:tgtEl>
+                                      </p:cBhvr>
+                                    </p:cmd>
+                                  </p:childTnLst>
+                                </p:cTn>
+                              </p:par>
+                            </p:childTnLst>
+                          </p:cTn>
+                        </p:par>
+                      </p:childTnLst>
+                    </p:cTn>
+                  </p:par>
+                </p:childTnLst>
+              </p:cTn>
+              <p:prevCondLst>
+                <p:cond evt="onPrev" delay="0">
+                  <p:tgtEl>
+                    <p:sldTgt/>
+                  </p:tgtEl>
+                </p:cond>
+              </p:prevCondLst>
+              <p:nextCondLst>
+                <p:cond evt="onNext" delay="0">
+                  <p:tgtEl>
+                    <p:sldTgt/>
+                  </p:tgtEl>
+                </p:cond>
+              </p:nextCondLst>
+            </p:seq>
+          </p:childTnLst>
+        </p:cTn>
+      </p:par>
+    </p:tnLst>
+  </p:timing>
+</p:sld>
+</file>
+
+<file path=ppt/slides/slide11.xml><?xml version="1.0" encoding="utf-8"?>
+<p:sld xmlns:a="http://schemas.openxmlformats.org/drawingml/2006/main" xmlns:r="http://schemas.openxmlformats.org/officeDocument/2006/relationships" xmlns:p="http://schemas.openxmlformats.org/presentationml/2006/main">
+  <p:cSld name="Slide 11">
+    <p:spTree>
+      <p:nvGrpSpPr>
+        <p:cNvPr id="1" name=""/>
+        <p:cNvGrpSpPr/>
+        <p:nvPr/>
+      </p:nvGrpSpPr>
+      <p:grpSpPr>
+        <a:xfrm>
+          <a:off x="0" y="0"/>
+          <a:ext cx="0" cy="0"/>
+          <a:chOff x="0" y="0"/>
+          <a:chExt cx="0" cy="0"/>
+        </a:xfrm>
+      </p:grpSpPr>
+      <p:sp>
+        <p:nvSpPr>
+          <p:cNvPr id="2" name="Text 0"/>
+          <p:cNvSpPr>
+            <a:spLocks noGrp="1"/>
+          </p:cNvSpPr>
+          <p:nvPr>
+            <p:ph type="title" idx="100" hasCustomPrompt="1"/>
+          </p:nvPr>
+        </p:nvSpPr>
+        <p:spPr>
+          <a:xfrm>
+            <a:off x="548640" y="457200"/>
+            <a:ext cx="11064240" cy="777240"/>
+          </a:xfrm>
+          <a:prstGeom prst="rect">
+            <a:avLst/>
+          </a:prstGeom>
+          <a:noFill/>
+          <a:ln/>
+        </p:spPr>
+        <p:txBody>
+          <a:bodyPr wrap="square" lIns="0" tIns="0" rIns="0" bIns="0" rtlCol="0" anchor="ctr"/>
+          <a:lstStyle/>
+          <a:p>
+            <a:pPr marL="0" indent="0" algn="ctr">
+              <a:buNone/>
+            </a:pPr>
+            <a:r>
+              <a:rPr lang="en-US" sz="3000" b="1" dirty="0">
+                <a:solidFill>
+                  <a:schemeClr val="tx1"/>
+                </a:solidFill>
+                <a:latin typeface="Cambria" pitchFamily="34" charset="0"/>
+                <a:ea typeface="Cambria" pitchFamily="34" charset="-122"/>
+                <a:cs typeface="Cambria" pitchFamily="34" charset="-120"/>
+              </a:rPr>
+              <a:t>What a reference deployment produces</a:t>
+            </a:r>
+            <a:endParaRPr lang="en-US" sz="3000" dirty="0"/>
+          </a:p>
+        </p:txBody>
+      </p:sp>
+      <p:sp>
+        <p:nvSpPr>
+          <p:cNvPr id="3" name="Tag How">
+            <a:extLst>
+              <a:ext uri="{C183D7F6-B498-43B3-948B-1728B52AA6E4}">
+                <adec:decorative xmlns:adec="http://schemas.microsoft.com/office/drawing/2017/decorative" val="1"/>
+              </a:ext>
+            </a:extLst>
+          </p:cNvPr>
+          <p:cNvSpPr/>
+          <p:nvPr/>
+        </p:nvSpPr>
+        <p:spPr>
+          <a:xfrm>
+            <a:off x="548640" y="109728"/>
+            <a:ext cx="868680" cy="292608"/>
+          </a:xfrm>
+          <a:prstGeom prst="roundRect">
+            <a:avLst>
+              <a:gd name="adj" fmla="val 18750"/>
+            </a:avLst>
+          </a:prstGeom>
+          <a:solidFill>
+            <a:srgbClr val="B45309"/>
+          </a:solidFill>
+          <a:ln w="12700">
+            <a:solidFill>
+              <a:srgbClr val="B45309"/>
+            </a:solidFill>
+            <a:prstDash val="solid"/>
+          </a:ln>
+        </p:spPr>
+      </p:sp>
+      <p:sp>
+        <p:nvSpPr>
+          <p:cNvPr id="4" name="Tag How text"/>
+          <p:cNvSpPr txBox="1"/>
+          <p:nvPr/>
+        </p:nvSpPr>
+        <p:spPr>
+          <a:xfrm>
+            <a:off x="548640" y="109728"/>
+            <a:ext cx="868680" cy="292608"/>
+          </a:xfrm>
+          <a:prstGeom prst="rect">
+            <a:avLst/>
+          </a:prstGeom>
+          <a:noFill/>
+          <a:ln/>
+        </p:spPr>
+        <p:txBody>
+          <a:bodyPr wrap="square" lIns="0" tIns="0" rIns="0" bIns="0" rtlCol="0" anchor="ctr"/>
+          <a:lstStyle/>
+          <a:p>
+            <a:pPr marL="0" indent="0" algn="ctr">
+              <a:buNone/>
+            </a:pPr>
+            <a:r>
+              <a:rPr lang="en-US" sz="1100" b="1" kern="0" spc="100" dirty="0">
+                <a:solidFill>
+                  <a:srgbClr val="FFFFFF"/>
+                </a:solidFill>
+              </a:rPr>
+              <a:t>HOW</a:t>
+            </a:r>
+            <a:endParaRPr lang="en-US" sz="1100" dirty="0"/>
+          </a:p>
+        </p:txBody>
+      </p:sp>
+      <p:sp>
+        <p:nvSpPr>
+          <p:cNvPr id="5" name="Phase 1">
+            <a:extLst>
+              <a:ext uri="{C183D7F6-B498-43B3-948B-1728B52AA6E4}">
+                <adec:decorative xmlns:adec="http://schemas.microsoft.com/office/drawing/2017/decorative" val="1"/>
+              </a:ext>
+            </a:extLst>
+          </p:cNvPr>
+          <p:cNvSpPr/>
+          <p:nvPr/>
+        </p:nvSpPr>
+        <p:spPr>
+          <a:xfrm>
+            <a:off x="548640" y="1417320"/>
+            <a:ext cx="6675120" cy="548640"/>
+          </a:xfrm>
+          <a:prstGeom prst="roundRect">
+            <a:avLst>
+              <a:gd name="adj" fmla="val 13333"/>
+            </a:avLst>
+          </a:prstGeom>
+          <a:solidFill>
+            <a:srgbClr val="E4EAF4"/>
+          </a:solidFill>
+          <a:ln w="12700">
+            <a:solidFill>
+              <a:srgbClr val="E4EAF4"/>
+            </a:solidFill>
+            <a:prstDash val="solid"/>
+          </a:ln>
+          <a:effectLst>
+            <a:outerShdw blurRad="76200" dist="25400" dir="5400000" algn="bl" rotWithShape="0">
+              <a:srgbClr val="64748B">
+                <a:alpha val="22000"/>
+              </a:srgbClr>
+            </a:outerShdw>
+          </a:effectLst>
+        </p:spPr>
+      </p:sp>
+      <p:sp>
+        <p:nvSpPr>
+          <p:cNvPr id="6" name="Phase 1 text"/>
+          <p:cNvSpPr txBox="1"/>
+          <p:nvPr/>
+        </p:nvSpPr>
+        <p:spPr>
+          <a:xfrm>
+            <a:off x="731520" y="1417320"/>
+            <a:ext cx="6400800" cy="548640"/>
+          </a:xfrm>
+          <a:prstGeom prst="rect">
+            <a:avLst/>
+          </a:prstGeom>
+          <a:noFill/>
+          <a:ln/>
+        </p:spPr>
+        <p:txBody>
+          <a:bodyPr wrap="square" lIns="0" tIns="0" rIns="0" bIns="0" rtlCol="0" anchor="ctr"/>
+          <a:lstStyle/>
+          <a:p>
+            <a:pPr marL="0" indent="0">
+              <a:buNone/>
+            </a:pPr>
+            <a:r>
+              <a:rPr lang="en-US" sz="1550" b="1" dirty="0">
+                <a:solidFill>
+                  <a:srgbClr val="1F2A44"/>
+                </a:solidFill>
+              </a:rPr>
+              <a:t>1  Discover   </a:t>
+            </a:r>
+            <a:r>
+              <a:rPr lang="en-US" sz="1350" dirty="0">
+                <a:solidFill>
+                  <a:schemeClr val="tx2"/>
+                </a:solidFill>
+              </a:rPr>
+              <a:t>Read-only survey of both forests; service-account and SPN inventory</a:t>
+            </a:r>
+            <a:endParaRPr lang="en-US" sz="1400" dirty="0"/>
+          </a:p>
+        </p:txBody>
+      </p:sp>
+      <p:sp>
+        <p:nvSpPr>
+          <p:cNvPr id="7" name="Phase 2">
+            <a:extLst>
+              <a:ext uri="{C183D7F6-B498-43B3-948B-1728B52AA6E4}">
+                <adec:decorative xmlns:adec="http://schemas.microsoft.com/office/drawing/2017/decorative" val="1"/>
+              </a:ext>
+            </a:extLst>
+          </p:cNvPr>
+          <p:cNvSpPr/>
+          <p:nvPr/>
+        </p:nvSpPr>
+        <p:spPr>
+          <a:xfrm>
+            <a:off x="548640" y="2057400"/>
+            <a:ext cx="6675120" cy="548640"/>
+          </a:xfrm>
+          <a:prstGeom prst="roundRect">
+            <a:avLst>
+              <a:gd name="adj" fmla="val 13333"/>
+            </a:avLst>
+          </a:prstGeom>
+          <a:solidFill>
+            <a:srgbClr val="DCEFEC"/>
+          </a:solidFill>
+          <a:ln w="12700">
+            <a:solidFill>
+              <a:srgbClr val="DCEFEC"/>
+            </a:solidFill>
+            <a:prstDash val="solid"/>
+          </a:ln>
+          <a:effectLst>
+            <a:outerShdw blurRad="76200" dist="25400" dir="5400000" algn="bl" rotWithShape="0">
+              <a:srgbClr val="64748B">
+                <a:alpha val="22000"/>
+              </a:srgbClr>
+            </a:outerShdw>
+          </a:effectLst>
+        </p:spPr>
+      </p:sp>
+      <p:sp>
+        <p:nvSpPr>
+          <p:cNvPr id="8" name="Phase 2 text"/>
+          <p:cNvSpPr txBox="1"/>
+          <p:nvPr/>
+        </p:nvSpPr>
+        <p:spPr>
+          <a:xfrm>
+            <a:off x="731520" y="2057400"/>
+            <a:ext cx="6400800" cy="548640"/>
+          </a:xfrm>
+          <a:prstGeom prst="rect">
+            <a:avLst/>
+          </a:prstGeom>
+          <a:noFill/>
+          <a:ln/>
+        </p:spPr>
+        <p:txBody>
+          <a:bodyPr wrap="square" lIns="0" tIns="0" rIns="0" bIns="0" rtlCol="0" anchor="ctr"/>
+          <a:lstStyle/>
+          <a:p>
+            <a:pPr marL="0" indent="0">
+              <a:buNone/>
+            </a:pPr>
+            <a:r>
+              <a:rPr lang="en-US" sz="1550" b="1" dirty="0">
+                <a:solidFill>
+                  <a:srgbClr val="0F766E"/>
+                </a:solidFill>
+              </a:rPr>
+              <a:t>2  Normalize   </a:t>
+            </a:r>
+            <a:r>
+              <a:rPr lang="en-US" sz="1350" dirty="0">
+                <a:solidFill>
+                  <a:schemeClr val="tx2"/>
+                </a:solidFill>
+              </a:rPr>
+              <a:t>An organizational registry; a finding for every unattributed principal</a:t>
+            </a:r>
+            <a:endParaRPr lang="en-US" sz="1400" dirty="0"/>
+          </a:p>
+        </p:txBody>
+      </p:sp>
+      <p:sp>
+        <p:nvSpPr>
+          <p:cNvPr id="9" name="Phase 3">
+            <a:extLst>
+              <a:ext uri="{C183D7F6-B498-43B3-948B-1728B52AA6E4}">
+                <adec:decorative xmlns:adec="http://schemas.microsoft.com/office/drawing/2017/decorative" val="1"/>
+              </a:ext>
+            </a:extLst>
+          </p:cNvPr>
+          <p:cNvSpPr/>
+          <p:nvPr/>
+        </p:nvSpPr>
+        <p:spPr>
+          <a:xfrm>
+            <a:off x="548640" y="2697480"/>
+            <a:ext cx="6675120" cy="548640"/>
+          </a:xfrm>
+          <a:prstGeom prst="roundRect">
+            <a:avLst>
+              <a:gd name="adj" fmla="val 13333"/>
+            </a:avLst>
+          </a:prstGeom>
+          <a:solidFill>
+            <a:srgbClr val="E4EAF4"/>
+          </a:solidFill>
+          <a:ln w="12700">
+            <a:solidFill>
+              <a:srgbClr val="E4EAF4"/>
+            </a:solidFill>
+            <a:prstDash val="solid"/>
+          </a:ln>
+          <a:effectLst>
+            <a:outerShdw blurRad="76200" dist="25400" dir="5400000" algn="bl" rotWithShape="0">
+              <a:srgbClr val="64748B">
+                <a:alpha val="22000"/>
+              </a:srgbClr>
+            </a:outerShdw>
+          </a:effectLst>
+        </p:spPr>
+      </p:sp>
+      <p:sp>
+        <p:nvSpPr>
+          <p:cNvPr id="10" name="Phase 3 text"/>
+          <p:cNvSpPr txBox="1"/>
+          <p:nvPr/>
+        </p:nvSpPr>
+        <p:spPr>
+          <a:xfrm>
+            <a:off x="731520" y="2697480"/>
+            <a:ext cx="6400800" cy="548640"/>
+          </a:xfrm>
+          <a:prstGeom prst="rect">
+            <a:avLst/>
+          </a:prstGeom>
+          <a:noFill/>
+          <a:ln/>
+        </p:spPr>
+        <p:txBody>
+          <a:bodyPr wrap="square" lIns="0" tIns="0" rIns="0" bIns="0" rtlCol="0" anchor="ctr"/>
+          <a:lstStyle/>
+          <a:p>
+            <a:pPr marL="0" indent="0">
+              <a:buNone/>
+            </a:pPr>
+            <a:r>
+              <a:rPr lang="en-US" sz="1550" b="1" dirty="0">
+                <a:solidFill>
+                  <a:srgbClr val="1F2A44"/>
+                </a:solidFill>
+              </a:rPr>
+              <a:t>3  Map   </a:t>
+            </a:r>
+            <a:r>
+              <a:rPr lang="en-US" sz="1350" dirty="0">
+                <a:solidFill>
+                  <a:schemeClr val="tx2"/>
+                </a:solidFill>
+              </a:rPr>
+              <a:t>One adapter per surface: sync, PKI, RADIUS, SQL Server</a:t>
+            </a:r>
+            <a:endParaRPr lang="en-US" sz="1400" dirty="0"/>
+          </a:p>
+        </p:txBody>
+      </p:sp>
+      <p:sp>
+        <p:nvSpPr>
+          <p:cNvPr id="11" name="Phase 4">
+            <a:extLst>
+              <a:ext uri="{C183D7F6-B498-43B3-948B-1728B52AA6E4}">
+                <adec:decorative xmlns:adec="http://schemas.microsoft.com/office/drawing/2017/decorative" val="1"/>
+              </a:ext>
+            </a:extLst>
+          </p:cNvPr>
+          <p:cNvSpPr/>
+          <p:nvPr/>
+        </p:nvSpPr>
+        <p:spPr>
+          <a:xfrm>
+            <a:off x="548640" y="3337560"/>
+            <a:ext cx="6675120" cy="548640"/>
+          </a:xfrm>
+          <a:prstGeom prst="roundRect">
+            <a:avLst>
+              <a:gd name="adj" fmla="val 13333"/>
+            </a:avLst>
+          </a:prstGeom>
+          <a:solidFill>
+            <a:srgbClr val="DCEFEC"/>
+          </a:solidFill>
+          <a:ln w="12700">
+            <a:solidFill>
+              <a:srgbClr val="DCEFEC"/>
+            </a:solidFill>
+            <a:prstDash val="solid"/>
+          </a:ln>
+          <a:effectLst>
+            <a:outerShdw blurRad="76200" dist="25400" dir="5400000" algn="bl" rotWithShape="0">
+              <a:srgbClr val="64748B">
+                <a:alpha val="22000"/>
+              </a:srgbClr>
+            </a:outerShdw>
+          </a:effectLst>
+        </p:spPr>
+      </p:sp>
+      <p:sp>
+        <p:nvSpPr>
+          <p:cNvPr id="12" name="Phase 4 text"/>
+          <p:cNvSpPr txBox="1"/>
+          <p:nvPr/>
+        </p:nvSpPr>
+        <p:spPr>
+          <a:xfrm>
+            <a:off x="731520" y="3337560"/>
+            <a:ext cx="6400800" cy="548640"/>
+          </a:xfrm>
+          <a:prstGeom prst="rect">
+            <a:avLst/>
+          </a:prstGeom>
+          <a:noFill/>
+          <a:ln/>
+        </p:spPr>
+        <p:txBody>
+          <a:bodyPr wrap="square" lIns="0" tIns="0" rIns="0" bIns="0" rtlCol="0" anchor="ctr"/>
+          <a:lstStyle/>
+          <a:p>
+            <a:pPr marL="0" indent="0">
+              <a:buNone/>
+            </a:pPr>
+            <a:r>
+              <a:rPr lang="en-US" sz="1550" b="1" dirty="0">
+                <a:solidFill>
+                  <a:srgbClr val="0F766E"/>
+                </a:solidFill>
+              </a:rPr>
+              <a:t>4  Migrate   </a:t>
+            </a:r>
+            <a:r>
+              <a:rPr lang="en-US" sz="1350" dirty="0">
+                <a:solidFill>
+                  <a:schemeClr val="tx2"/>
+                </a:solidFill>
+              </a:rPr>
+              <a:t>Every change recorded with who asked, on what authority, and a state hash</a:t>
+            </a:r>
+            <a:endParaRPr lang="en-US" sz="1400" dirty="0"/>
+          </a:p>
+        </p:txBody>
+      </p:sp>
+      <p:sp>
+        <p:nvSpPr>
+          <p:cNvPr id="13" name="Phase 5">
+            <a:extLst>
+              <a:ext uri="{C183D7F6-B498-43B3-948B-1728B52AA6E4}">
+                <adec:decorative xmlns:adec="http://schemas.microsoft.com/office/drawing/2017/decorative" val="1"/>
+              </a:ext>
+            </a:extLst>
+          </p:cNvPr>
+          <p:cNvSpPr/>
+          <p:nvPr/>
+        </p:nvSpPr>
+        <p:spPr>
+          <a:xfrm>
+            <a:off x="548640" y="3977640"/>
+            <a:ext cx="6675120" cy="548640"/>
+          </a:xfrm>
+          <a:prstGeom prst="roundRect">
+            <a:avLst>
+              <a:gd name="adj" fmla="val 13333"/>
+            </a:avLst>
+          </a:prstGeom>
+          <a:solidFill>
+            <a:srgbClr val="E4EAF4"/>
+          </a:solidFill>
+          <a:ln w="12700">
+            <a:solidFill>
+              <a:srgbClr val="E4EAF4"/>
+            </a:solidFill>
+            <a:prstDash val="solid"/>
+          </a:ln>
+          <a:effectLst>
+            <a:outerShdw blurRad="76200" dist="25400" dir="5400000" algn="bl" rotWithShape="0">
+              <a:srgbClr val="64748B">
+                <a:alpha val="22000"/>
+              </a:srgbClr>
+            </a:outerShdw>
+          </a:effectLst>
+        </p:spPr>
+      </p:sp>
+      <p:sp>
+        <p:nvSpPr>
+          <p:cNvPr id="14" name="Phase 5 text"/>
+          <p:cNvSpPr txBox="1"/>
+          <p:nvPr/>
+        </p:nvSpPr>
+        <p:spPr>
+          <a:xfrm>
+            <a:off x="731520" y="3977640"/>
+            <a:ext cx="6400800" cy="548640"/>
+          </a:xfrm>
+          <a:prstGeom prst="rect">
+            <a:avLst/>
+          </a:prstGeom>
+          <a:noFill/>
+          <a:ln/>
+        </p:spPr>
+        <p:txBody>
+          <a:bodyPr wrap="square" lIns="0" tIns="0" rIns="0" bIns="0" rtlCol="0" anchor="ctr"/>
+          <a:lstStyle/>
+          <a:p>
+            <a:pPr marL="0" indent="0">
+              <a:buNone/>
+            </a:pPr>
+            <a:r>
+              <a:rPr lang="en-US" sz="1550" b="1" dirty="0">
+                <a:solidFill>
+                  <a:srgbClr val="1F2A44"/>
+                </a:solidFill>
+              </a:rPr>
+              <a:t>5  Validate   </a:t>
+            </a:r>
+            <a:r>
+              <a:rPr lang="en-US" sz="1350" dirty="0">
+                <a:solidFill>
+                  <a:schemeClr val="tx2"/>
+                </a:solidFill>
+              </a:rPr>
+              <a:t>Before-and-after inventories compared; drift closed with evidence</a:t>
+            </a:r>
+            <a:endParaRPr lang="en-US" sz="1400" dirty="0"/>
+          </a:p>
+        </p:txBody>
+      </p:sp>
+      <p:sp>
+        <p:nvSpPr>
+          <p:cNvPr id="15" name="Bundle box">
+            <a:extLst>
+              <a:ext uri="{C183D7F6-B498-43B3-948B-1728B52AA6E4}">
+                <adec:decorative xmlns:adec="http://schemas.microsoft.com/office/drawing/2017/decorative" val="1"/>
+              </a:ext>
+            </a:extLst>
+          </p:cNvPr>
+          <p:cNvSpPr/>
+          <p:nvPr/>
+        </p:nvSpPr>
+        <p:spPr>
+          <a:xfrm>
+            <a:off x="7452360" y="1417320"/>
+            <a:ext cx="4206240" cy="3108960"/>
+          </a:xfrm>
+          <a:prstGeom prst="roundRect">
+            <a:avLst>
+              <a:gd name="adj" fmla="val 2353"/>
+            </a:avLst>
+          </a:prstGeom>
+          <a:solidFill>
+            <a:srgbClr val="FFFFFF"/>
+          </a:solidFill>
+          <a:ln w="12700">
+            <a:solidFill>
+              <a:srgbClr val="B45309"/>
+            </a:solidFill>
+            <a:prstDash val="solid"/>
+          </a:ln>
+          <a:effectLst>
+            <a:outerShdw blurRad="76200" dist="25400" dir="5400000" algn="bl" rotWithShape="0">
+              <a:srgbClr val="64748B">
+                <a:alpha val="22000"/>
+              </a:srgbClr>
+            </a:outerShdw>
+          </a:effectLst>
+        </p:spPr>
+      </p:sp>
+      <p:sp>
+        <p:nvSpPr>
           <p:cNvPr id="16" name="Icon FaFileShield">
             <a:extLst>
               <a:ext uri="{C183D7F6-B498-43B3-948B-1728B52AA6E4}">
@@ -3395,7 +4752,7 @@
             <a:pPr algn="r"/>
             <a:fld id="{F7021451-1387-4CA6-816F-3879F97B5CBC}" type="slidenum">
               <a:rPr lang="en-US" b="0"/>
-              <a:t>10</a:t>
+              <a:t>11</a:t>
             </a:fld>
             <a:endParaRPr lang="en-US"/>
           </a:p>
@@ -3407,7 +4764,7 @@
             <a:hlinkClick r:id="" action="ppaction://media"/>
             <a:extLst>
               <a:ext uri="{FF2B5EF4-FFF2-40B4-BE49-F238E27FC236}">
-                <a16:creationId xmlns:a16="http://schemas.microsoft.com/office/drawing/2014/main" id="{A56A0FFF-23E3-B896-3F6E-A47465218882}"/>
+                <a16:creationId xmlns:a16="http://schemas.microsoft.com/office/drawing/2014/main" id="{A6AA3E3F-6A34-826B-5281-92E51A4F7F8B}"/>
               </a:ext>
             </a:extLst>
           </p:cNvPr>
@@ -3423,7 +4780,7 @@
                     <p:ext uri="{3AFAAA56-56D3-431D-BCD4-E75A35582382}">
                       <p173:tracksInfo xmlns:p173="http://schemas.microsoft.com/office/powerpoint/2017/3/main" displayLoc="slide">
                         <p173:trackLst>
-                          <p173:track id="{F284E2B0-4511-4622-89ED-7CAAF0A77EFE}" label="English (captions)" lang="en-US" r:embed="rId8"/>
+                          <p173:track id="{44249F39-FC2C-4E8F-8F63-0DAC0684E9CD}" label="English (captions)" lang="en-US" r:embed="rId8"/>
                         </p173:trackLst>
                       </p173:tracksInfo>
                     </p:ext>
@@ -3533,9 +4890,9 @@
 </p:sld>
 </file>
 
-<file path=ppt/slides/slide11.xml><?xml version="1.0" encoding="utf-8"?>
+<file path=ppt/slides/slide12.xml><?xml version="1.0" encoding="utf-8"?>
 <p:sld xmlns:a="http://schemas.openxmlformats.org/drawingml/2006/main" xmlns:r="http://schemas.openxmlformats.org/officeDocument/2006/relationships" xmlns:p="http://schemas.openxmlformats.org/presentationml/2006/main">
-  <p:cSld name="Slide 11">
+  <p:cSld name="Slide 12">
     <p:spTree>
       <p:nvGrpSpPr>
         <p:cNvPr id="1" name=""/>
@@ -4462,7 +5819,7 @@
             <a:pPr algn="r"/>
             <a:fld id="{F7021451-1387-4CA6-816F-3879F97B5CBC}" type="slidenum">
               <a:rPr lang="en-US" b="0"/>
-              <a:t>11</a:t>
+              <a:t>12</a:t>
             </a:fld>
             <a:endParaRPr lang="en-US"/>
           </a:p>
@@ -4474,7 +5831,7 @@
             <a:hlinkClick r:id="" action="ppaction://media"/>
             <a:extLst>
               <a:ext uri="{FF2B5EF4-FFF2-40B4-BE49-F238E27FC236}">
-                <a16:creationId xmlns:a16="http://schemas.microsoft.com/office/drawing/2014/main" id="{9EE29B46-0266-573D-CD11-397815173ADF}"/>
+                <a16:creationId xmlns:a16="http://schemas.microsoft.com/office/drawing/2014/main" id="{1AA97E8C-414A-23B6-7364-99E646DFD54A}"/>
               </a:ext>
             </a:extLst>
           </p:cNvPr>
@@ -4490,7 +5847,7 @@
                     <p:ext uri="{3AFAAA56-56D3-431D-BCD4-E75A35582382}">
                       <p173:tracksInfo xmlns:p173="http://schemas.microsoft.com/office/powerpoint/2017/3/main" displayLoc="slide">
                         <p173:trackLst>
-                          <p173:track id="{79C82CE7-9D8E-484A-9B14-1A86FD27DD19}" label="English (captions)" lang="en-US" r:embed="rId11"/>
+                          <p173:track id="{7E4C0912-B287-4CAC-8847-96DD7D9FD50E}" label="English (captions)" lang="en-US" r:embed="rId11"/>
                         </p173:trackLst>
                       </p173:tracksInfo>
                     </p:ext>
@@ -5596,7 +6953,7 @@
             <a:hlinkClick r:id="" action="ppaction://media"/>
             <a:extLst>
               <a:ext uri="{FF2B5EF4-FFF2-40B4-BE49-F238E27FC236}">
-                <a16:creationId xmlns:a16="http://schemas.microsoft.com/office/drawing/2014/main" id="{6CCAE99B-525B-B4DE-46D2-F1C596D4A1F2}"/>
+                <a16:creationId xmlns:a16="http://schemas.microsoft.com/office/drawing/2014/main" id="{A9A11B23-D3BF-4442-91D4-3D174E88C78F}"/>
               </a:ext>
             </a:extLst>
           </p:cNvPr>
@@ -5612,7 +6969,7 @@
                     <p:ext uri="{3AFAAA56-56D3-431D-BCD4-E75A35582382}">
                       <p173:tracksInfo xmlns:p173="http://schemas.microsoft.com/office/powerpoint/2017/3/main" displayLoc="slide">
                         <p173:trackLst>
-                          <p173:track id="{A7F45FDA-88E5-4F9B-9F41-76B07954D3CF}" label="English (captions)" lang="en-US" r:embed="rId11"/>
+                          <p173:track id="{9AEC604F-705B-413C-9A99-B902D213F169}" label="English (captions)" lang="en-US" r:embed="rId11"/>
                         </p173:trackLst>
                       </p173:tracksInfo>
                     </p:ext>
@@ -6523,7 +7880,7 @@
             <a:hlinkClick r:id="" action="ppaction://media"/>
             <a:extLst>
               <a:ext uri="{FF2B5EF4-FFF2-40B4-BE49-F238E27FC236}">
-                <a16:creationId xmlns:a16="http://schemas.microsoft.com/office/drawing/2014/main" id="{4471D08D-C4BD-5903-6FA2-4A6DFCF06696}"/>
+                <a16:creationId xmlns:a16="http://schemas.microsoft.com/office/drawing/2014/main" id="{F8E32E8B-20E1-DE99-8857-2F8BE8075696}"/>
               </a:ext>
             </a:extLst>
           </p:cNvPr>
@@ -6539,7 +7896,7 @@
                     <p:ext uri="{3AFAAA56-56D3-431D-BCD4-E75A35582382}">
                       <p173:tracksInfo xmlns:p173="http://schemas.microsoft.com/office/powerpoint/2017/3/main" displayLoc="slide">
                         <p173:trackLst>
-                          <p173:track id="{332512D1-A37E-4EC0-B5D7-8EEFB3E5CD31}" label="English (captions)" lang="en-US" r:embed="rId7"/>
+                          <p173:track id="{59FD7B70-896C-44C7-B468-32CC7433A39F}" label="English (captions)" lang="en-US" r:embed="rId7"/>
                         </p173:trackLst>
                       </p173:tracksInfo>
                     </p:ext>
@@ -8525,7 +9882,7 @@
             <a:hlinkClick r:id="" action="ppaction://media"/>
             <a:extLst>
               <a:ext uri="{FF2B5EF4-FFF2-40B4-BE49-F238E27FC236}">
-                <a16:creationId xmlns:a16="http://schemas.microsoft.com/office/drawing/2014/main" id="{2557D807-4209-F79B-C386-2D8C8A9ABD91}"/>
+                <a16:creationId xmlns:a16="http://schemas.microsoft.com/office/drawing/2014/main" id="{88479D99-7E62-B2D2-8085-2D78D351479A}"/>
               </a:ext>
             </a:extLst>
           </p:cNvPr>
@@ -8541,7 +9898,7 @@
                     <p:ext uri="{3AFAAA56-56D3-431D-BCD4-E75A35582382}">
                       <p173:tracksInfo xmlns:p173="http://schemas.microsoft.com/office/powerpoint/2017/3/main" displayLoc="slide">
                         <p173:trackLst>
-                          <p173:track id="{188AAB03-45C8-4383-810A-0CB426D4B1E6}" label="English (captions)" lang="en-US" r:embed="rId7"/>
+                          <p173:track id="{132013DE-51D7-4BD6-8FF8-3D5DBDD925E7}" label="English (captions)" lang="en-US" r:embed="rId7"/>
                         </p173:trackLst>
                       </p173:tracksInfo>
                     </p:ext>
@@ -8705,6 +10062,1944 @@
                 <a:ea typeface="Cambria" pitchFamily="34" charset="-122"/>
                 <a:cs typeface="Cambria" pitchFamily="34" charset="-120"/>
               </a:rPr>
+              <a:t>Four tracks: what Book 02 moves, and where the rest goes</a:t>
+            </a:r>
+            <a:endParaRPr lang="en-US" sz="3000" dirty="0"/>
+          </a:p>
+        </p:txBody>
+      </p:sp>
+      <p:sp>
+        <p:nvSpPr>
+          <p:cNvPr id="3" name="Tag What">
+            <a:extLst>
+              <a:ext uri="{C183D7F6-B498-43B3-948B-1728B52AA6E4}">
+                <adec:decorative xmlns:adec="http://schemas.microsoft.com/office/drawing/2017/decorative" val="1"/>
+              </a:ext>
+            </a:extLst>
+          </p:cNvPr>
+          <p:cNvSpPr/>
+          <p:nvPr/>
+        </p:nvSpPr>
+        <p:spPr>
+          <a:xfrm>
+            <a:off x="548640" y="109728"/>
+            <a:ext cx="868680" cy="292608"/>
+          </a:xfrm>
+          <a:prstGeom prst="roundRect">
+            <a:avLst>
+              <a:gd name="adj" fmla="val 18750"/>
+            </a:avLst>
+          </a:prstGeom>
+          <a:solidFill>
+            <a:srgbClr val="1F2A44"/>
+          </a:solidFill>
+          <a:ln w="12700">
+            <a:solidFill>
+              <a:srgbClr val="1F2A44"/>
+            </a:solidFill>
+            <a:prstDash val="solid"/>
+          </a:ln>
+        </p:spPr>
+      </p:sp>
+      <p:sp>
+        <p:nvSpPr>
+          <p:cNvPr id="4" name="Tag What text"/>
+          <p:cNvSpPr txBox="1"/>
+          <p:nvPr/>
+        </p:nvSpPr>
+        <p:spPr>
+          <a:xfrm>
+            <a:off x="548640" y="109728"/>
+            <a:ext cx="868680" cy="292608"/>
+          </a:xfrm>
+          <a:prstGeom prst="rect">
+            <a:avLst/>
+          </a:prstGeom>
+          <a:noFill/>
+          <a:ln/>
+        </p:spPr>
+        <p:txBody>
+          <a:bodyPr wrap="square" lIns="0" tIns="0" rIns="0" bIns="0" rtlCol="0" anchor="ctr"/>
+          <a:lstStyle/>
+          <a:p>
+            <a:pPr marL="0" indent="0" algn="ctr">
+              <a:buNone/>
+            </a:pPr>
+            <a:r>
+              <a:rPr lang="en-US" sz="1100" b="1" kern="0" spc="100" dirty="0">
+                <a:solidFill>
+                  <a:srgbClr val="FFFFFF"/>
+                </a:solidFill>
+              </a:rPr>
+              <a:t>WHAT</a:t>
+            </a:r>
+            <a:endParaRPr lang="en-US" sz="1100" dirty="0"/>
+          </a:p>
+        </p:txBody>
+      </p:sp>
+      <p:graphicFrame>
+        <p:nvGraphicFramePr>
+          <p:cNvPr id="6" name="Table 0"/>
+          <p:cNvGraphicFramePr>
+            <a:graphicFrameLocks noGrp="1"/>
+          </p:cNvGraphicFramePr>
+          <p:nvPr>
+            <p:extLst>
+              <p:ext uri="{D42A27DB-BD31-4B8C-83A1-F6EECF244321}">
+                <p14:modId xmlns:p14="http://schemas.microsoft.com/office/powerpoint/2010/main" val="1579011935"/>
+              </p:ext>
+            </p:extLst>
+          </p:nvPr>
+        </p:nvGraphicFramePr>
+        <p:xfrm>
+          <a:off x="548640" y="1417320"/>
+          <a:ext cx="9144000" cy="914400"/>
+        </p:xfrm>
+        <a:graphic>
+          <a:graphicData uri="http://schemas.openxmlformats.org/drawingml/2006/table">
+            <a:tbl>
+              <a:tblPr firstRow="1" bandRow="1"/>
+              <a:tblGrid>
+                <a:gridCol w="2514600">
+                  <a:extLst>
+                    <a:ext uri="{9D8B030D-6E8A-4147-A177-3AD203B41FA5}">
+                      <a16:colId xmlns:a16="http://schemas.microsoft.com/office/drawing/2014/main" val="20000"/>
+                    </a:ext>
+                  </a:extLst>
+                </a:gridCol>
+                <a:gridCol w="2651760">
+                  <a:extLst>
+                    <a:ext uri="{9D8B030D-6E8A-4147-A177-3AD203B41FA5}">
+                      <a16:colId xmlns:a16="http://schemas.microsoft.com/office/drawing/2014/main" val="20001"/>
+                    </a:ext>
+                  </a:extLst>
+                </a:gridCol>
+                <a:gridCol w="3520440">
+                  <a:extLst>
+                    <a:ext uri="{9D8B030D-6E8A-4147-A177-3AD203B41FA5}">
+                      <a16:colId xmlns:a16="http://schemas.microsoft.com/office/drawing/2014/main" val="20002"/>
+                    </a:ext>
+                  </a:extLst>
+                </a:gridCol>
+                <a:gridCol w="2423160">
+                  <a:extLst>
+                    <a:ext uri="{9D8B030D-6E8A-4147-A177-3AD203B41FA5}">
+                      <a16:colId xmlns:a16="http://schemas.microsoft.com/office/drawing/2014/main" val="20003"/>
+                    </a:ext>
+                  </a:extLst>
+                </a:gridCol>
+              </a:tblGrid>
+              <a:tr h="411480">
+                <a:tc>
+                  <a:txBody>
+                    <a:bodyPr/>
+                    <a:lstStyle/>
+                    <a:p>
+                      <a:pPr marL="0" indent="0">
+                        <a:buNone/>
+                      </a:pPr>
+                      <a:r>
+                        <a:rPr lang="en-US" sz="1350" b="1" dirty="0">
+                          <a:solidFill>
+                            <a:srgbClr val="FFFFFF"/>
+                          </a:solidFill>
+                          <a:latin typeface="Calibri" pitchFamily="34" charset="0"/>
+                          <a:ea typeface="Calibri" pitchFamily="34" charset="-122"/>
+                          <a:cs typeface="Calibri" pitchFamily="34" charset="-120"/>
+                        </a:rPr>
+                        <a:t>Track</a:t>
+                      </a:r>
+                      <a:endParaRPr lang="en-US" sz="1350" dirty="0">
+                        <a:latin typeface="Calibri" charset="0"/>
+                        <a:ea typeface="Calibri" charset="0"/>
+                        <a:cs typeface="Calibri" charset="0"/>
+                      </a:endParaRPr>
+                    </a:p>
+                  </a:txBody>
+                  <a:tcPr anchor="ctr">
+                    <a:lnL w="9525" cap="flat" cmpd="sng" algn="ctr">
+                      <a:solidFill>
+                        <a:srgbClr val="CBD5E1"/>
+                      </a:solidFill>
+                      <a:prstDash val="solid"/>
+                      <a:round/>
+                      <a:headEnd type="none" w="med" len="med"/>
+                      <a:tailEnd type="none" w="med" len="med"/>
+                    </a:lnL>
+                    <a:lnR w="9525" cap="flat" cmpd="sng" algn="ctr">
+                      <a:solidFill>
+                        <a:srgbClr val="CBD5E1"/>
+                      </a:solidFill>
+                      <a:prstDash val="solid"/>
+                      <a:round/>
+                      <a:headEnd type="none" w="med" len="med"/>
+                      <a:tailEnd type="none" w="med" len="med"/>
+                    </a:lnR>
+                    <a:lnT w="9525" cap="flat" cmpd="sng" algn="ctr">
+                      <a:solidFill>
+                        <a:srgbClr val="CBD5E1"/>
+                      </a:solidFill>
+                      <a:prstDash val="solid"/>
+                      <a:round/>
+                      <a:headEnd type="none" w="med" len="med"/>
+                      <a:tailEnd type="none" w="med" len="med"/>
+                    </a:lnT>
+                    <a:lnB w="9525" cap="flat" cmpd="sng" algn="ctr">
+                      <a:solidFill>
+                        <a:srgbClr val="CBD5E1"/>
+                      </a:solidFill>
+                      <a:prstDash val="solid"/>
+                      <a:round/>
+                      <a:headEnd type="none" w="med" len="med"/>
+                      <a:tailEnd type="none" w="med" len="med"/>
+                    </a:lnB>
+                    <a:solidFill>
+                      <a:srgbClr val="1F2A44"/>
+                    </a:solidFill>
+                  </a:tcPr>
+                </a:tc>
+                <a:tc>
+                  <a:txBody>
+                    <a:bodyPr/>
+                    <a:lstStyle/>
+                    <a:p>
+                      <a:pPr marL="0" indent="0">
+                        <a:buNone/>
+                      </a:pPr>
+                      <a:r>
+                        <a:rPr lang="en-US" sz="1350" b="1" dirty="0">
+                          <a:solidFill>
+                            <a:srgbClr val="FFFFFF"/>
+                          </a:solidFill>
+                          <a:latin typeface="Calibri" pitchFamily="34" charset="0"/>
+                          <a:ea typeface="Calibri" pitchFamily="34" charset="-122"/>
+                          <a:cs typeface="Calibri" pitchFamily="34" charset="-120"/>
+                        </a:rPr>
+                        <a:t>What it covers</a:t>
+                      </a:r>
+                      <a:endParaRPr lang="en-US" sz="1350" dirty="0">
+                        <a:latin typeface="Calibri" charset="0"/>
+                        <a:ea typeface="Calibri" charset="0"/>
+                        <a:cs typeface="Calibri" charset="0"/>
+                      </a:endParaRPr>
+                    </a:p>
+                  </a:txBody>
+                  <a:tcPr anchor="ctr">
+                    <a:lnL w="9525" cap="flat" cmpd="sng" algn="ctr">
+                      <a:solidFill>
+                        <a:srgbClr val="CBD5E1"/>
+                      </a:solidFill>
+                      <a:prstDash val="solid"/>
+                      <a:round/>
+                      <a:headEnd type="none" w="med" len="med"/>
+                      <a:tailEnd type="none" w="med" len="med"/>
+                    </a:lnL>
+                    <a:lnR w="9525" cap="flat" cmpd="sng" algn="ctr">
+                      <a:solidFill>
+                        <a:srgbClr val="CBD5E1"/>
+                      </a:solidFill>
+                      <a:prstDash val="solid"/>
+                      <a:round/>
+                      <a:headEnd type="none" w="med" len="med"/>
+                      <a:tailEnd type="none" w="med" len="med"/>
+                    </a:lnR>
+                    <a:lnT w="9525" cap="flat" cmpd="sng" algn="ctr">
+                      <a:solidFill>
+                        <a:srgbClr val="CBD5E1"/>
+                      </a:solidFill>
+                      <a:prstDash val="solid"/>
+                      <a:round/>
+                      <a:headEnd type="none" w="med" len="med"/>
+                      <a:tailEnd type="none" w="med" len="med"/>
+                    </a:lnT>
+                    <a:lnB w="9525" cap="flat" cmpd="sng" algn="ctr">
+                      <a:solidFill>
+                        <a:srgbClr val="CBD5E1"/>
+                      </a:solidFill>
+                      <a:prstDash val="solid"/>
+                      <a:round/>
+                      <a:headEnd type="none" w="med" len="med"/>
+                      <a:tailEnd type="none" w="med" len="med"/>
+                    </a:lnB>
+                    <a:solidFill>
+                      <a:srgbClr val="1F2A44"/>
+                    </a:solidFill>
+                  </a:tcPr>
+                </a:tc>
+                <a:tc>
+                  <a:txBody>
+                    <a:bodyPr/>
+                    <a:lstStyle/>
+                    <a:p>
+                      <a:pPr marL="0" indent="0">
+                        <a:buNone/>
+                      </a:pPr>
+                      <a:r>
+                        <a:rPr lang="en-US" sz="1350" b="1" dirty="0">
+                          <a:solidFill>
+                            <a:srgbClr val="FFFFFF"/>
+                          </a:solidFill>
+                          <a:latin typeface="Calibri" pitchFamily="34" charset="0"/>
+                          <a:ea typeface="Calibri" pitchFamily="34" charset="-122"/>
+                          <a:cs typeface="Calibri" pitchFamily="34" charset="-120"/>
+                        </a:rPr>
+                        <a:t>Book 02's part</a:t>
+                      </a:r>
+                      <a:endParaRPr lang="en-US" sz="1350" dirty="0">
+                        <a:latin typeface="Calibri" charset="0"/>
+                        <a:ea typeface="Calibri" charset="0"/>
+                        <a:cs typeface="Calibri" charset="0"/>
+                      </a:endParaRPr>
+                    </a:p>
+                  </a:txBody>
+                  <a:tcPr anchor="ctr">
+                    <a:lnL w="9525" cap="flat" cmpd="sng" algn="ctr">
+                      <a:solidFill>
+                        <a:srgbClr val="CBD5E1"/>
+                      </a:solidFill>
+                      <a:prstDash val="solid"/>
+                      <a:round/>
+                      <a:headEnd type="none" w="med" len="med"/>
+                      <a:tailEnd type="none" w="med" len="med"/>
+                    </a:lnL>
+                    <a:lnR w="9525" cap="flat" cmpd="sng" algn="ctr">
+                      <a:solidFill>
+                        <a:srgbClr val="CBD5E1"/>
+                      </a:solidFill>
+                      <a:prstDash val="solid"/>
+                      <a:round/>
+                      <a:headEnd type="none" w="med" len="med"/>
+                      <a:tailEnd type="none" w="med" len="med"/>
+                    </a:lnR>
+                    <a:lnT w="9525" cap="flat" cmpd="sng" algn="ctr">
+                      <a:solidFill>
+                        <a:srgbClr val="CBD5E1"/>
+                      </a:solidFill>
+                      <a:prstDash val="solid"/>
+                      <a:round/>
+                      <a:headEnd type="none" w="med" len="med"/>
+                      <a:tailEnd type="none" w="med" len="med"/>
+                    </a:lnT>
+                    <a:lnB w="9525" cap="flat" cmpd="sng" algn="ctr">
+                      <a:solidFill>
+                        <a:srgbClr val="CBD5E1"/>
+                      </a:solidFill>
+                      <a:prstDash val="solid"/>
+                      <a:round/>
+                      <a:headEnd type="none" w="med" len="med"/>
+                      <a:tailEnd type="none" w="med" len="med"/>
+                    </a:lnB>
+                    <a:solidFill>
+                      <a:srgbClr val="1F2A44"/>
+                    </a:solidFill>
+                  </a:tcPr>
+                </a:tc>
+                <a:tc>
+                  <a:txBody>
+                    <a:bodyPr/>
+                    <a:lstStyle/>
+                    <a:p>
+                      <a:pPr marL="0" indent="0">
+                        <a:buNone/>
+                      </a:pPr>
+                      <a:r>
+                        <a:rPr lang="en-US" sz="1350" b="1" dirty="0">
+                          <a:solidFill>
+                            <a:srgbClr val="FFFFFF"/>
+                          </a:solidFill>
+                          <a:latin typeface="Calibri" pitchFamily="34" charset="0"/>
+                          <a:ea typeface="Calibri" pitchFamily="34" charset="-122"/>
+                          <a:cs typeface="Calibri" pitchFamily="34" charset="-120"/>
+                        </a:rPr>
+                        <a:t>Carried in</a:t>
+                      </a:r>
+                      <a:endParaRPr lang="en-US" sz="1350" dirty="0">
+                        <a:latin typeface="Calibri" charset="0"/>
+                        <a:ea typeface="Calibri" charset="0"/>
+                        <a:cs typeface="Calibri" charset="0"/>
+                      </a:endParaRPr>
+                    </a:p>
+                  </a:txBody>
+                  <a:tcPr anchor="ctr">
+                    <a:lnL w="9525" cap="flat" cmpd="sng" algn="ctr">
+                      <a:solidFill>
+                        <a:srgbClr val="CBD5E1"/>
+                      </a:solidFill>
+                      <a:prstDash val="solid"/>
+                      <a:round/>
+                      <a:headEnd type="none" w="med" len="med"/>
+                      <a:tailEnd type="none" w="med" len="med"/>
+                    </a:lnL>
+                    <a:lnR w="9525" cap="flat" cmpd="sng" algn="ctr">
+                      <a:solidFill>
+                        <a:srgbClr val="CBD5E1"/>
+                      </a:solidFill>
+                      <a:prstDash val="solid"/>
+                      <a:round/>
+                      <a:headEnd type="none" w="med" len="med"/>
+                      <a:tailEnd type="none" w="med" len="med"/>
+                    </a:lnR>
+                    <a:lnT w="9525" cap="flat" cmpd="sng" algn="ctr">
+                      <a:solidFill>
+                        <a:srgbClr val="CBD5E1"/>
+                      </a:solidFill>
+                      <a:prstDash val="solid"/>
+                      <a:round/>
+                      <a:headEnd type="none" w="med" len="med"/>
+                      <a:tailEnd type="none" w="med" len="med"/>
+                    </a:lnT>
+                    <a:lnB w="9525" cap="flat" cmpd="sng" algn="ctr">
+                      <a:solidFill>
+                        <a:srgbClr val="CBD5E1"/>
+                      </a:solidFill>
+                      <a:prstDash val="solid"/>
+                      <a:round/>
+                      <a:headEnd type="none" w="med" len="med"/>
+                      <a:tailEnd type="none" w="med" len="med"/>
+                    </a:lnB>
+                    <a:solidFill>
+                      <a:srgbClr val="1F2A44"/>
+                    </a:solidFill>
+                  </a:tcPr>
+                </a:tc>
+                <a:extLst>
+                  <a:ext uri="{0D108BD9-81ED-4DB2-BD59-A6C34878D82A}">
+                    <a16:rowId xmlns:a16="http://schemas.microsoft.com/office/drawing/2014/main" val="10000"/>
+                  </a:ext>
+                </a:extLst>
+              </a:tr>
+              <a:tr h="685800">
+                <a:tc>
+                  <a:txBody>
+                    <a:bodyPr/>
+                    <a:lstStyle/>
+                    <a:p>
+                      <a:pPr marL="0" indent="0">
+                        <a:buNone/>
+                      </a:pPr>
+                      <a:r>
+                        <a:rPr lang="en-US" sz="1350" b="1" dirty="0">
+                          <a:solidFill>
+                            <a:srgbClr val="1F2A44"/>
+                          </a:solidFill>
+                          <a:latin typeface="Calibri" pitchFamily="34" charset="0"/>
+                          <a:ea typeface="Calibri" pitchFamily="34" charset="-122"/>
+                          <a:cs typeface="Calibri" pitchFamily="34" charset="-120"/>
+                        </a:rPr>
+                        <a:t>HR track: people</a:t>
+                      </a:r>
+                      <a:endParaRPr lang="en-US" sz="1350" dirty="0">
+                        <a:latin typeface="Calibri" charset="0"/>
+                        <a:ea typeface="Calibri" charset="0"/>
+                        <a:cs typeface="Calibri" charset="0"/>
+                      </a:endParaRPr>
+                    </a:p>
+                  </a:txBody>
+                  <a:tcPr anchor="ctr">
+                    <a:lnL w="9525" cap="flat" cmpd="sng" algn="ctr">
+                      <a:solidFill>
+                        <a:srgbClr val="CBD5E1"/>
+                      </a:solidFill>
+                      <a:prstDash val="solid"/>
+                      <a:round/>
+                      <a:headEnd type="none" w="med" len="med"/>
+                      <a:tailEnd type="none" w="med" len="med"/>
+                    </a:lnL>
+                    <a:lnR w="9525" cap="flat" cmpd="sng" algn="ctr">
+                      <a:solidFill>
+                        <a:srgbClr val="CBD5E1"/>
+                      </a:solidFill>
+                      <a:prstDash val="solid"/>
+                      <a:round/>
+                      <a:headEnd type="none" w="med" len="med"/>
+                      <a:tailEnd type="none" w="med" len="med"/>
+                    </a:lnR>
+                    <a:lnT w="9525" cap="flat" cmpd="sng" algn="ctr">
+                      <a:solidFill>
+                        <a:srgbClr val="CBD5E1"/>
+                      </a:solidFill>
+                      <a:prstDash val="solid"/>
+                      <a:round/>
+                      <a:headEnd type="none" w="med" len="med"/>
+                      <a:tailEnd type="none" w="med" len="med"/>
+                    </a:lnT>
+                    <a:lnB w="9525" cap="flat" cmpd="sng" algn="ctr">
+                      <a:solidFill>
+                        <a:srgbClr val="CBD5E1"/>
+                      </a:solidFill>
+                      <a:prstDash val="solid"/>
+                      <a:round/>
+                      <a:headEnd type="none" w="med" len="med"/>
+                      <a:tailEnd type="none" w="med" len="med"/>
+                    </a:lnB>
+                    <a:solidFill>
+                      <a:srgbClr val="FFFFFF"/>
+                    </a:solidFill>
+                  </a:tcPr>
+                </a:tc>
+                <a:tc>
+                  <a:txBody>
+                    <a:bodyPr/>
+                    <a:lstStyle/>
+                    <a:p>
+                      <a:pPr marL="0" indent="0">
+                        <a:buNone/>
+                      </a:pPr>
+                      <a:r>
+                        <a:rPr lang="en-US" sz="1350" dirty="0">
+                          <a:solidFill>
+                            <a:srgbClr val="334155"/>
+                          </a:solidFill>
+                          <a:latin typeface="Calibri" pitchFamily="34" charset="0"/>
+                          <a:ea typeface="Calibri" pitchFamily="34" charset="-122"/>
+                          <a:cs typeface="Calibri" pitchFamily="34" charset="-120"/>
+                        </a:rPr>
+                        <a:t>Employee and contractor accounts</a:t>
+                      </a:r>
+                      <a:endParaRPr lang="en-US" sz="1350" dirty="0">
+                        <a:latin typeface="Calibri" charset="0"/>
+                        <a:ea typeface="Calibri" charset="0"/>
+                        <a:cs typeface="Calibri" charset="0"/>
+                      </a:endParaRPr>
+                    </a:p>
+                  </a:txBody>
+                  <a:tcPr anchor="ctr">
+                    <a:lnL w="9525" cap="flat" cmpd="sng" algn="ctr">
+                      <a:solidFill>
+                        <a:srgbClr val="CBD5E1"/>
+                      </a:solidFill>
+                      <a:prstDash val="solid"/>
+                      <a:round/>
+                      <a:headEnd type="none" w="med" len="med"/>
+                      <a:tailEnd type="none" w="med" len="med"/>
+                    </a:lnL>
+                    <a:lnR w="9525" cap="flat" cmpd="sng" algn="ctr">
+                      <a:solidFill>
+                        <a:srgbClr val="CBD5E1"/>
+                      </a:solidFill>
+                      <a:prstDash val="solid"/>
+                      <a:round/>
+                      <a:headEnd type="none" w="med" len="med"/>
+                      <a:tailEnd type="none" w="med" len="med"/>
+                    </a:lnR>
+                    <a:lnT w="9525" cap="flat" cmpd="sng" algn="ctr">
+                      <a:solidFill>
+                        <a:srgbClr val="CBD5E1"/>
+                      </a:solidFill>
+                      <a:prstDash val="solid"/>
+                      <a:round/>
+                      <a:headEnd type="none" w="med" len="med"/>
+                      <a:tailEnd type="none" w="med" len="med"/>
+                    </a:lnT>
+                    <a:lnB w="9525" cap="flat" cmpd="sng" algn="ctr">
+                      <a:solidFill>
+                        <a:srgbClr val="CBD5E1"/>
+                      </a:solidFill>
+                      <a:prstDash val="solid"/>
+                      <a:round/>
+                      <a:headEnd type="none" w="med" len="med"/>
+                      <a:tailEnd type="none" w="med" len="med"/>
+                    </a:lnB>
+                    <a:solidFill>
+                      <a:srgbClr val="FFFFFF"/>
+                    </a:solidFill>
+                  </a:tcPr>
+                </a:tc>
+                <a:tc>
+                  <a:txBody>
+                    <a:bodyPr/>
+                    <a:lstStyle/>
+                    <a:p>
+                      <a:pPr marL="0" indent="0">
+                        <a:buNone/>
+                      </a:pPr>
+                      <a:r>
+                        <a:rPr lang="en-US" sz="1350" dirty="0">
+                          <a:solidFill>
+                            <a:srgbClr val="334155"/>
+                          </a:solidFill>
+                          <a:latin typeface="Calibri" pitchFamily="34" charset="0"/>
+                          <a:ea typeface="Calibri" pitchFamily="34" charset="-122"/>
+                          <a:cs typeface="Calibri" pitchFamily="34" charset="-120"/>
+                        </a:rPr>
+                        <a:t>Sync, the Entra target, and the groups and units that read the attributes</a:t>
+                      </a:r>
+                      <a:endParaRPr lang="en-US" sz="1350" dirty="0">
+                        <a:latin typeface="Calibri" charset="0"/>
+                        <a:ea typeface="Calibri" charset="0"/>
+                        <a:cs typeface="Calibri" charset="0"/>
+                      </a:endParaRPr>
+                    </a:p>
+                  </a:txBody>
+                  <a:tcPr anchor="ctr">
+                    <a:lnL w="9525" cap="flat" cmpd="sng" algn="ctr">
+                      <a:solidFill>
+                        <a:srgbClr val="CBD5E1"/>
+                      </a:solidFill>
+                      <a:prstDash val="solid"/>
+                      <a:round/>
+                      <a:headEnd type="none" w="med" len="med"/>
+                      <a:tailEnd type="none" w="med" len="med"/>
+                    </a:lnL>
+                    <a:lnR w="9525" cap="flat" cmpd="sng" algn="ctr">
+                      <a:solidFill>
+                        <a:srgbClr val="CBD5E1"/>
+                      </a:solidFill>
+                      <a:prstDash val="solid"/>
+                      <a:round/>
+                      <a:headEnd type="none" w="med" len="med"/>
+                      <a:tailEnd type="none" w="med" len="med"/>
+                    </a:lnR>
+                    <a:lnT w="9525" cap="flat" cmpd="sng" algn="ctr">
+                      <a:solidFill>
+                        <a:srgbClr val="CBD5E1"/>
+                      </a:solidFill>
+                      <a:prstDash val="solid"/>
+                      <a:round/>
+                      <a:headEnd type="none" w="med" len="med"/>
+                      <a:tailEnd type="none" w="med" len="med"/>
+                    </a:lnT>
+                    <a:lnB w="9525" cap="flat" cmpd="sng" algn="ctr">
+                      <a:solidFill>
+                        <a:srgbClr val="CBD5E1"/>
+                      </a:solidFill>
+                      <a:prstDash val="solid"/>
+                      <a:round/>
+                      <a:headEnd type="none" w="med" len="med"/>
+                      <a:tailEnd type="none" w="med" len="med"/>
+                    </a:lnB>
+                    <a:solidFill>
+                      <a:srgbClr val="FFFFFF"/>
+                    </a:solidFill>
+                  </a:tcPr>
+                </a:tc>
+                <a:tc>
+                  <a:txBody>
+                    <a:bodyPr/>
+                    <a:lstStyle/>
+                    <a:p>
+                      <a:pPr marL="0" indent="0">
+                        <a:buNone/>
+                      </a:pPr>
+                      <a:r>
+                        <a:rPr lang="en-US" sz="1350" b="1" dirty="0">
+                          <a:solidFill>
+                            <a:srgbClr val="0F766E"/>
+                          </a:solidFill>
+                          <a:latin typeface="Calibri" pitchFamily="34" charset="0"/>
+                          <a:ea typeface="Calibri" pitchFamily="34" charset="-122"/>
+                          <a:cs typeface="Calibri" pitchFamily="34" charset="-120"/>
+                        </a:rPr>
+                        <a:t>Book 03: where the attributes come from</a:t>
+                      </a:r>
+                      <a:endParaRPr lang="en-US" sz="1350" dirty="0">
+                        <a:latin typeface="Calibri" charset="0"/>
+                        <a:ea typeface="Calibri" charset="0"/>
+                        <a:cs typeface="Calibri" charset="0"/>
+                      </a:endParaRPr>
+                    </a:p>
+                  </a:txBody>
+                  <a:tcPr anchor="ctr">
+                    <a:lnL w="9525" cap="flat" cmpd="sng" algn="ctr">
+                      <a:solidFill>
+                        <a:srgbClr val="CBD5E1"/>
+                      </a:solidFill>
+                      <a:prstDash val="solid"/>
+                      <a:round/>
+                      <a:headEnd type="none" w="med" len="med"/>
+                      <a:tailEnd type="none" w="med" len="med"/>
+                    </a:lnL>
+                    <a:lnR w="9525" cap="flat" cmpd="sng" algn="ctr">
+                      <a:solidFill>
+                        <a:srgbClr val="CBD5E1"/>
+                      </a:solidFill>
+                      <a:prstDash val="solid"/>
+                      <a:round/>
+                      <a:headEnd type="none" w="med" len="med"/>
+                      <a:tailEnd type="none" w="med" len="med"/>
+                    </a:lnR>
+                    <a:lnT w="9525" cap="flat" cmpd="sng" algn="ctr">
+                      <a:solidFill>
+                        <a:srgbClr val="CBD5E1"/>
+                      </a:solidFill>
+                      <a:prstDash val="solid"/>
+                      <a:round/>
+                      <a:headEnd type="none" w="med" len="med"/>
+                      <a:tailEnd type="none" w="med" len="med"/>
+                    </a:lnT>
+                    <a:lnB w="9525" cap="flat" cmpd="sng" algn="ctr">
+                      <a:solidFill>
+                        <a:srgbClr val="CBD5E1"/>
+                      </a:solidFill>
+                      <a:prstDash val="solid"/>
+                      <a:round/>
+                      <a:headEnd type="none" w="med" len="med"/>
+                      <a:tailEnd type="none" w="med" len="med"/>
+                    </a:lnB>
+                    <a:solidFill>
+                      <a:srgbClr val="FFFFFF"/>
+                    </a:solidFill>
+                  </a:tcPr>
+                </a:tc>
+                <a:extLst>
+                  <a:ext uri="{0D108BD9-81ED-4DB2-BD59-A6C34878D82A}">
+                    <a16:rowId xmlns:a16="http://schemas.microsoft.com/office/drawing/2014/main" val="10001"/>
+                  </a:ext>
+                </a:extLst>
+              </a:tr>
+              <a:tr h="685800">
+                <a:tc>
+                  <a:txBody>
+                    <a:bodyPr/>
+                    <a:lstStyle/>
+                    <a:p>
+                      <a:pPr marL="0" indent="0">
+                        <a:buNone/>
+                      </a:pPr>
+                      <a:r>
+                        <a:rPr lang="en-US" sz="1350" b="1" dirty="0">
+                          <a:solidFill>
+                            <a:srgbClr val="1F2A44"/>
+                          </a:solidFill>
+                          <a:latin typeface="Calibri" pitchFamily="34" charset="0"/>
+                          <a:ea typeface="Calibri" pitchFamily="34" charset="-122"/>
+                          <a:cs typeface="Calibri" pitchFamily="34" charset="-120"/>
+                        </a:rPr>
+                        <a:t>Intune track: devices</a:t>
+                      </a:r>
+                      <a:endParaRPr lang="en-US" sz="1350" dirty="0">
+                        <a:latin typeface="Calibri" charset="0"/>
+                        <a:ea typeface="Calibri" charset="0"/>
+                        <a:cs typeface="Calibri" charset="0"/>
+                      </a:endParaRPr>
+                    </a:p>
+                  </a:txBody>
+                  <a:tcPr anchor="ctr">
+                    <a:lnL w="9525" cap="flat" cmpd="sng" algn="ctr">
+                      <a:solidFill>
+                        <a:srgbClr val="CBD5E1"/>
+                      </a:solidFill>
+                      <a:prstDash val="solid"/>
+                      <a:round/>
+                      <a:headEnd type="none" w="med" len="med"/>
+                      <a:tailEnd type="none" w="med" len="med"/>
+                    </a:lnL>
+                    <a:lnR w="9525" cap="flat" cmpd="sng" algn="ctr">
+                      <a:solidFill>
+                        <a:srgbClr val="CBD5E1"/>
+                      </a:solidFill>
+                      <a:prstDash val="solid"/>
+                      <a:round/>
+                      <a:headEnd type="none" w="med" len="med"/>
+                      <a:tailEnd type="none" w="med" len="med"/>
+                    </a:lnR>
+                    <a:lnT w="9525" cap="flat" cmpd="sng" algn="ctr">
+                      <a:solidFill>
+                        <a:srgbClr val="CBD5E1"/>
+                      </a:solidFill>
+                      <a:prstDash val="solid"/>
+                      <a:round/>
+                      <a:headEnd type="none" w="med" len="med"/>
+                      <a:tailEnd type="none" w="med" len="med"/>
+                    </a:lnT>
+                    <a:lnB w="9525" cap="flat" cmpd="sng" algn="ctr">
+                      <a:solidFill>
+                        <a:srgbClr val="CBD5E1"/>
+                      </a:solidFill>
+                      <a:prstDash val="solid"/>
+                      <a:round/>
+                      <a:headEnd type="none" w="med" len="med"/>
+                      <a:tailEnd type="none" w="med" len="med"/>
+                    </a:lnB>
+                    <a:solidFill>
+                      <a:srgbClr val="FFFFFF"/>
+                    </a:solidFill>
+                  </a:tcPr>
+                </a:tc>
+                <a:tc>
+                  <a:txBody>
+                    <a:bodyPr/>
+                    <a:lstStyle/>
+                    <a:p>
+                      <a:pPr marL="0" indent="0">
+                        <a:buNone/>
+                      </a:pPr>
+                      <a:r>
+                        <a:rPr lang="en-US" sz="1350" dirty="0">
+                          <a:solidFill>
+                            <a:srgbClr val="334155"/>
+                          </a:solidFill>
+                          <a:latin typeface="Calibri" pitchFamily="34" charset="0"/>
+                          <a:ea typeface="Calibri" pitchFamily="34" charset="-122"/>
+                          <a:cs typeface="Calibri" pitchFamily="34" charset="-120"/>
+                        </a:rPr>
+                        <a:t>Workstations, laptops, mobile</a:t>
+                      </a:r>
+                      <a:endParaRPr lang="en-US" sz="1350" dirty="0">
+                        <a:latin typeface="Calibri" charset="0"/>
+                        <a:ea typeface="Calibri" charset="0"/>
+                        <a:cs typeface="Calibri" charset="0"/>
+                      </a:endParaRPr>
+                    </a:p>
+                  </a:txBody>
+                  <a:tcPr anchor="ctr">
+                    <a:lnL w="9525" cap="flat" cmpd="sng" algn="ctr">
+                      <a:solidFill>
+                        <a:srgbClr val="CBD5E1"/>
+                      </a:solidFill>
+                      <a:prstDash val="solid"/>
+                      <a:round/>
+                      <a:headEnd type="none" w="med" len="med"/>
+                      <a:tailEnd type="none" w="med" len="med"/>
+                    </a:lnL>
+                    <a:lnR w="9525" cap="flat" cmpd="sng" algn="ctr">
+                      <a:solidFill>
+                        <a:srgbClr val="CBD5E1"/>
+                      </a:solidFill>
+                      <a:prstDash val="solid"/>
+                      <a:round/>
+                      <a:headEnd type="none" w="med" len="med"/>
+                      <a:tailEnd type="none" w="med" len="med"/>
+                    </a:lnR>
+                    <a:lnT w="9525" cap="flat" cmpd="sng" algn="ctr">
+                      <a:solidFill>
+                        <a:srgbClr val="CBD5E1"/>
+                      </a:solidFill>
+                      <a:prstDash val="solid"/>
+                      <a:round/>
+                      <a:headEnd type="none" w="med" len="med"/>
+                      <a:tailEnd type="none" w="med" len="med"/>
+                    </a:lnT>
+                    <a:lnB w="9525" cap="flat" cmpd="sng" algn="ctr">
+                      <a:solidFill>
+                        <a:srgbClr val="CBD5E1"/>
+                      </a:solidFill>
+                      <a:prstDash val="solid"/>
+                      <a:round/>
+                      <a:headEnd type="none" w="med" len="med"/>
+                      <a:tailEnd type="none" w="med" len="med"/>
+                    </a:lnB>
+                    <a:solidFill>
+                      <a:srgbClr val="FFFFFF"/>
+                    </a:solidFill>
+                  </a:tcPr>
+                </a:tc>
+                <a:tc>
+                  <a:txBody>
+                    <a:bodyPr/>
+                    <a:lstStyle/>
+                    <a:p>
+                      <a:pPr marL="0" indent="0">
+                        <a:buNone/>
+                      </a:pPr>
+                      <a:r>
+                        <a:rPr lang="en-US" sz="1350" dirty="0">
+                          <a:solidFill>
+                            <a:srgbClr val="334155"/>
+                          </a:solidFill>
+                          <a:latin typeface="Calibri" pitchFamily="34" charset="0"/>
+                          <a:ea typeface="Calibri" pitchFamily="34" charset="-122"/>
+                          <a:cs typeface="Calibri" pitchFamily="34" charset="-120"/>
+                        </a:rPr>
+                        <a:t>The device objects; the computer side of the GPO analysis</a:t>
+                      </a:r>
+                      <a:endParaRPr lang="en-US" sz="1350" dirty="0">
+                        <a:latin typeface="Calibri" charset="0"/>
+                        <a:ea typeface="Calibri" charset="0"/>
+                        <a:cs typeface="Calibri" charset="0"/>
+                      </a:endParaRPr>
+                    </a:p>
+                  </a:txBody>
+                  <a:tcPr anchor="ctr">
+                    <a:lnL w="9525" cap="flat" cmpd="sng" algn="ctr">
+                      <a:solidFill>
+                        <a:srgbClr val="CBD5E1"/>
+                      </a:solidFill>
+                      <a:prstDash val="solid"/>
+                      <a:round/>
+                      <a:headEnd type="none" w="med" len="med"/>
+                      <a:tailEnd type="none" w="med" len="med"/>
+                    </a:lnL>
+                    <a:lnR w="9525" cap="flat" cmpd="sng" algn="ctr">
+                      <a:solidFill>
+                        <a:srgbClr val="CBD5E1"/>
+                      </a:solidFill>
+                      <a:prstDash val="solid"/>
+                      <a:round/>
+                      <a:headEnd type="none" w="med" len="med"/>
+                      <a:tailEnd type="none" w="med" len="med"/>
+                    </a:lnR>
+                    <a:lnT w="9525" cap="flat" cmpd="sng" algn="ctr">
+                      <a:solidFill>
+                        <a:srgbClr val="CBD5E1"/>
+                      </a:solidFill>
+                      <a:prstDash val="solid"/>
+                      <a:round/>
+                      <a:headEnd type="none" w="med" len="med"/>
+                      <a:tailEnd type="none" w="med" len="med"/>
+                    </a:lnT>
+                    <a:lnB w="9525" cap="flat" cmpd="sng" algn="ctr">
+                      <a:solidFill>
+                        <a:srgbClr val="CBD5E1"/>
+                      </a:solidFill>
+                      <a:prstDash val="solid"/>
+                      <a:round/>
+                      <a:headEnd type="none" w="med" len="med"/>
+                      <a:tailEnd type="none" w="med" len="med"/>
+                    </a:lnB>
+                    <a:solidFill>
+                      <a:srgbClr val="FFFFFF"/>
+                    </a:solidFill>
+                  </a:tcPr>
+                </a:tc>
+                <a:tc>
+                  <a:txBody>
+                    <a:bodyPr/>
+                    <a:lstStyle/>
+                    <a:p>
+                      <a:pPr marL="0" indent="0">
+                        <a:buNone/>
+                      </a:pPr>
+                      <a:r>
+                        <a:rPr lang="en-US" sz="1350" b="1" dirty="0">
+                          <a:solidFill>
+                            <a:srgbClr val="0F766E"/>
+                          </a:solidFill>
+                          <a:latin typeface="Calibri" pitchFamily="34" charset="0"/>
+                          <a:ea typeface="Calibri" pitchFamily="34" charset="-122"/>
+                          <a:cs typeface="Calibri" pitchFamily="34" charset="-120"/>
+                        </a:rPr>
+                        <a:t>Book 05, Chapters 03, 04, 08</a:t>
+                      </a:r>
+                      <a:endParaRPr lang="en-US" sz="1350" dirty="0">
+                        <a:latin typeface="Calibri" charset="0"/>
+                        <a:ea typeface="Calibri" charset="0"/>
+                        <a:cs typeface="Calibri" charset="0"/>
+                      </a:endParaRPr>
+                    </a:p>
+                  </a:txBody>
+                  <a:tcPr anchor="ctr">
+                    <a:lnL w="9525" cap="flat" cmpd="sng" algn="ctr">
+                      <a:solidFill>
+                        <a:srgbClr val="CBD5E1"/>
+                      </a:solidFill>
+                      <a:prstDash val="solid"/>
+                      <a:round/>
+                      <a:headEnd type="none" w="med" len="med"/>
+                      <a:tailEnd type="none" w="med" len="med"/>
+                    </a:lnL>
+                    <a:lnR w="9525" cap="flat" cmpd="sng" algn="ctr">
+                      <a:solidFill>
+                        <a:srgbClr val="CBD5E1"/>
+                      </a:solidFill>
+                      <a:prstDash val="solid"/>
+                      <a:round/>
+                      <a:headEnd type="none" w="med" len="med"/>
+                      <a:tailEnd type="none" w="med" len="med"/>
+                    </a:lnR>
+                    <a:lnT w="9525" cap="flat" cmpd="sng" algn="ctr">
+                      <a:solidFill>
+                        <a:srgbClr val="CBD5E1"/>
+                      </a:solidFill>
+                      <a:prstDash val="solid"/>
+                      <a:round/>
+                      <a:headEnd type="none" w="med" len="med"/>
+                      <a:tailEnd type="none" w="med" len="med"/>
+                    </a:lnT>
+                    <a:lnB w="9525" cap="flat" cmpd="sng" algn="ctr">
+                      <a:solidFill>
+                        <a:srgbClr val="CBD5E1"/>
+                      </a:solidFill>
+                      <a:prstDash val="solid"/>
+                      <a:round/>
+                      <a:headEnd type="none" w="med" len="med"/>
+                      <a:tailEnd type="none" w="med" len="med"/>
+                    </a:lnB>
+                    <a:solidFill>
+                      <a:srgbClr val="FFFFFF"/>
+                    </a:solidFill>
+                  </a:tcPr>
+                </a:tc>
+                <a:extLst>
+                  <a:ext uri="{0D108BD9-81ED-4DB2-BD59-A6C34878D82A}">
+                    <a16:rowId xmlns:a16="http://schemas.microsoft.com/office/drawing/2014/main" val="10002"/>
+                  </a:ext>
+                </a:extLst>
+              </a:tr>
+              <a:tr h="685800">
+                <a:tc>
+                  <a:txBody>
+                    <a:bodyPr/>
+                    <a:lstStyle/>
+                    <a:p>
+                      <a:pPr marL="0" indent="0">
+                        <a:buNone/>
+                      </a:pPr>
+                      <a:r>
+                        <a:rPr lang="en-US" sz="1350" b="1" dirty="0">
+                          <a:solidFill>
+                            <a:srgbClr val="1F2A44"/>
+                          </a:solidFill>
+                          <a:latin typeface="Calibri" pitchFamily="34" charset="0"/>
+                          <a:ea typeface="Calibri" pitchFamily="34" charset="-122"/>
+                          <a:cs typeface="Calibri" pitchFamily="34" charset="-120"/>
+                        </a:rPr>
+                        <a:t>Azure Arc track: servers</a:t>
+                      </a:r>
+                      <a:endParaRPr lang="en-US" sz="1350" dirty="0">
+                        <a:latin typeface="Calibri" charset="0"/>
+                        <a:ea typeface="Calibri" charset="0"/>
+                        <a:cs typeface="Calibri" charset="0"/>
+                      </a:endParaRPr>
+                    </a:p>
+                  </a:txBody>
+                  <a:tcPr anchor="ctr">
+                    <a:lnL w="9525" cap="flat" cmpd="sng" algn="ctr">
+                      <a:solidFill>
+                        <a:srgbClr val="CBD5E1"/>
+                      </a:solidFill>
+                      <a:prstDash val="solid"/>
+                      <a:round/>
+                      <a:headEnd type="none" w="med" len="med"/>
+                      <a:tailEnd type="none" w="med" len="med"/>
+                    </a:lnL>
+                    <a:lnR w="9525" cap="flat" cmpd="sng" algn="ctr">
+                      <a:solidFill>
+                        <a:srgbClr val="CBD5E1"/>
+                      </a:solidFill>
+                      <a:prstDash val="solid"/>
+                      <a:round/>
+                      <a:headEnd type="none" w="med" len="med"/>
+                      <a:tailEnd type="none" w="med" len="med"/>
+                    </a:lnR>
+                    <a:lnT w="9525" cap="flat" cmpd="sng" algn="ctr">
+                      <a:solidFill>
+                        <a:srgbClr val="CBD5E1"/>
+                      </a:solidFill>
+                      <a:prstDash val="solid"/>
+                      <a:round/>
+                      <a:headEnd type="none" w="med" len="med"/>
+                      <a:tailEnd type="none" w="med" len="med"/>
+                    </a:lnT>
+                    <a:lnB w="9525" cap="flat" cmpd="sng" algn="ctr">
+                      <a:solidFill>
+                        <a:srgbClr val="CBD5E1"/>
+                      </a:solidFill>
+                      <a:prstDash val="solid"/>
+                      <a:round/>
+                      <a:headEnd type="none" w="med" len="med"/>
+                      <a:tailEnd type="none" w="med" len="med"/>
+                    </a:lnB>
+                    <a:solidFill>
+                      <a:srgbClr val="FFFFFF"/>
+                    </a:solidFill>
+                  </a:tcPr>
+                </a:tc>
+                <a:tc>
+                  <a:txBody>
+                    <a:bodyPr/>
+                    <a:lstStyle/>
+                    <a:p>
+                      <a:pPr marL="0" indent="0">
+                        <a:buNone/>
+                      </a:pPr>
+                      <a:r>
+                        <a:rPr lang="en-US" sz="1350" dirty="0">
+                          <a:solidFill>
+                            <a:srgbClr val="334155"/>
+                          </a:solidFill>
+                          <a:latin typeface="Calibri" pitchFamily="34" charset="0"/>
+                          <a:ea typeface="Calibri" pitchFamily="34" charset="-122"/>
+                          <a:cs typeface="Calibri" pitchFamily="34" charset="-120"/>
+                        </a:rPr>
+                        <a:t>Member servers</a:t>
+                      </a:r>
+                      <a:endParaRPr lang="en-US" sz="1350" dirty="0">
+                        <a:latin typeface="Calibri" charset="0"/>
+                        <a:ea typeface="Calibri" charset="0"/>
+                        <a:cs typeface="Calibri" charset="0"/>
+                      </a:endParaRPr>
+                    </a:p>
+                  </a:txBody>
+                  <a:tcPr anchor="ctr">
+                    <a:lnL w="9525" cap="flat" cmpd="sng" algn="ctr">
+                      <a:solidFill>
+                        <a:srgbClr val="CBD5E1"/>
+                      </a:solidFill>
+                      <a:prstDash val="solid"/>
+                      <a:round/>
+                      <a:headEnd type="none" w="med" len="med"/>
+                      <a:tailEnd type="none" w="med" len="med"/>
+                    </a:lnL>
+                    <a:lnR w="9525" cap="flat" cmpd="sng" algn="ctr">
+                      <a:solidFill>
+                        <a:srgbClr val="CBD5E1"/>
+                      </a:solidFill>
+                      <a:prstDash val="solid"/>
+                      <a:round/>
+                      <a:headEnd type="none" w="med" len="med"/>
+                      <a:tailEnd type="none" w="med" len="med"/>
+                    </a:lnR>
+                    <a:lnT w="9525" cap="flat" cmpd="sng" algn="ctr">
+                      <a:solidFill>
+                        <a:srgbClr val="CBD5E1"/>
+                      </a:solidFill>
+                      <a:prstDash val="solid"/>
+                      <a:round/>
+                      <a:headEnd type="none" w="med" len="med"/>
+                      <a:tailEnd type="none" w="med" len="med"/>
+                    </a:lnT>
+                    <a:lnB w="9525" cap="flat" cmpd="sng" algn="ctr">
+                      <a:solidFill>
+                        <a:srgbClr val="CBD5E1"/>
+                      </a:solidFill>
+                      <a:prstDash val="solid"/>
+                      <a:round/>
+                      <a:headEnd type="none" w="med" len="med"/>
+                      <a:tailEnd type="none" w="med" len="med"/>
+                    </a:lnB>
+                    <a:solidFill>
+                      <a:srgbClr val="FFFFFF"/>
+                    </a:solidFill>
+                  </a:tcPr>
+                </a:tc>
+                <a:tc>
+                  <a:txBody>
+                    <a:bodyPr/>
+                    <a:lstStyle/>
+                    <a:p>
+                      <a:pPr marL="0" indent="0">
+                        <a:buNone/>
+                      </a:pPr>
+                      <a:r>
+                        <a:rPr lang="en-US" sz="1350" dirty="0">
+                          <a:solidFill>
+                            <a:srgbClr val="334155"/>
+                          </a:solidFill>
+                          <a:latin typeface="Calibri" pitchFamily="34" charset="0"/>
+                          <a:ea typeface="Calibri" pitchFamily="34" charset="-122"/>
+                          <a:cs typeface="Calibri" pitchFamily="34" charset="-120"/>
+                        </a:rPr>
+                        <a:t>The computer side of the GPO analysis</a:t>
+                      </a:r>
+                      <a:endParaRPr lang="en-US" sz="1350" dirty="0">
+                        <a:latin typeface="Calibri" charset="0"/>
+                        <a:ea typeface="Calibri" charset="0"/>
+                        <a:cs typeface="Calibri" charset="0"/>
+                      </a:endParaRPr>
+                    </a:p>
+                  </a:txBody>
+                  <a:tcPr anchor="ctr">
+                    <a:lnL w="9525" cap="flat" cmpd="sng" algn="ctr">
+                      <a:solidFill>
+                        <a:srgbClr val="CBD5E1"/>
+                      </a:solidFill>
+                      <a:prstDash val="solid"/>
+                      <a:round/>
+                      <a:headEnd type="none" w="med" len="med"/>
+                      <a:tailEnd type="none" w="med" len="med"/>
+                    </a:lnL>
+                    <a:lnR w="9525" cap="flat" cmpd="sng" algn="ctr">
+                      <a:solidFill>
+                        <a:srgbClr val="CBD5E1"/>
+                      </a:solidFill>
+                      <a:prstDash val="solid"/>
+                      <a:round/>
+                      <a:headEnd type="none" w="med" len="med"/>
+                      <a:tailEnd type="none" w="med" len="med"/>
+                    </a:lnR>
+                    <a:lnT w="9525" cap="flat" cmpd="sng" algn="ctr">
+                      <a:solidFill>
+                        <a:srgbClr val="CBD5E1"/>
+                      </a:solidFill>
+                      <a:prstDash val="solid"/>
+                      <a:round/>
+                      <a:headEnd type="none" w="med" len="med"/>
+                      <a:tailEnd type="none" w="med" len="med"/>
+                    </a:lnT>
+                    <a:lnB w="9525" cap="flat" cmpd="sng" algn="ctr">
+                      <a:solidFill>
+                        <a:srgbClr val="CBD5E1"/>
+                      </a:solidFill>
+                      <a:prstDash val="solid"/>
+                      <a:round/>
+                      <a:headEnd type="none" w="med" len="med"/>
+                      <a:tailEnd type="none" w="med" len="med"/>
+                    </a:lnB>
+                    <a:solidFill>
+                      <a:srgbClr val="FFFFFF"/>
+                    </a:solidFill>
+                  </a:tcPr>
+                </a:tc>
+                <a:tc>
+                  <a:txBody>
+                    <a:bodyPr/>
+                    <a:lstStyle/>
+                    <a:p>
+                      <a:pPr marL="0" indent="0">
+                        <a:buNone/>
+                      </a:pPr>
+                      <a:r>
+                        <a:rPr lang="en-US" sz="1350" b="1" dirty="0">
+                          <a:solidFill>
+                            <a:srgbClr val="0F766E"/>
+                          </a:solidFill>
+                          <a:latin typeface="Calibri" pitchFamily="34" charset="0"/>
+                          <a:ea typeface="Calibri" pitchFamily="34" charset="-122"/>
+                          <a:cs typeface="Calibri" pitchFamily="34" charset="-120"/>
+                        </a:rPr>
+                        <a:t>Book 05, Chapter 09</a:t>
+                      </a:r>
+                      <a:endParaRPr lang="en-US" sz="1350" dirty="0">
+                        <a:latin typeface="Calibri" charset="0"/>
+                        <a:ea typeface="Calibri" charset="0"/>
+                        <a:cs typeface="Calibri" charset="0"/>
+                      </a:endParaRPr>
+                    </a:p>
+                  </a:txBody>
+                  <a:tcPr anchor="ctr">
+                    <a:lnL w="9525" cap="flat" cmpd="sng" algn="ctr">
+                      <a:solidFill>
+                        <a:srgbClr val="CBD5E1"/>
+                      </a:solidFill>
+                      <a:prstDash val="solid"/>
+                      <a:round/>
+                      <a:headEnd type="none" w="med" len="med"/>
+                      <a:tailEnd type="none" w="med" len="med"/>
+                    </a:lnL>
+                    <a:lnR w="9525" cap="flat" cmpd="sng" algn="ctr">
+                      <a:solidFill>
+                        <a:srgbClr val="CBD5E1"/>
+                      </a:solidFill>
+                      <a:prstDash val="solid"/>
+                      <a:round/>
+                      <a:headEnd type="none" w="med" len="med"/>
+                      <a:tailEnd type="none" w="med" len="med"/>
+                    </a:lnR>
+                    <a:lnT w="9525" cap="flat" cmpd="sng" algn="ctr">
+                      <a:solidFill>
+                        <a:srgbClr val="CBD5E1"/>
+                      </a:solidFill>
+                      <a:prstDash val="solid"/>
+                      <a:round/>
+                      <a:headEnd type="none" w="med" len="med"/>
+                      <a:tailEnd type="none" w="med" len="med"/>
+                    </a:lnT>
+                    <a:lnB w="9525" cap="flat" cmpd="sng" algn="ctr">
+                      <a:solidFill>
+                        <a:srgbClr val="CBD5E1"/>
+                      </a:solidFill>
+                      <a:prstDash val="solid"/>
+                      <a:round/>
+                      <a:headEnd type="none" w="med" len="med"/>
+                      <a:tailEnd type="none" w="med" len="med"/>
+                    </a:lnB>
+                    <a:solidFill>
+                      <a:srgbClr val="FFFFFF"/>
+                    </a:solidFill>
+                  </a:tcPr>
+                </a:tc>
+                <a:extLst>
+                  <a:ext uri="{0D108BD9-81ED-4DB2-BD59-A6C34878D82A}">
+                    <a16:rowId xmlns:a16="http://schemas.microsoft.com/office/drawing/2014/main" val="10003"/>
+                  </a:ext>
+                </a:extLst>
+              </a:tr>
+              <a:tr h="685800">
+                <a:tc>
+                  <a:txBody>
+                    <a:bodyPr/>
+                    <a:lstStyle/>
+                    <a:p>
+                      <a:pPr marL="0" indent="0">
+                        <a:buNone/>
+                      </a:pPr>
+                      <a:r>
+                        <a:rPr lang="en-US" sz="1350" b="1" dirty="0">
+                          <a:solidFill>
+                            <a:srgbClr val="1F2A44"/>
+                          </a:solidFill>
+                          <a:latin typeface="Calibri" pitchFamily="34" charset="0"/>
+                          <a:ea typeface="Calibri" pitchFamily="34" charset="-122"/>
+                          <a:cs typeface="Calibri" pitchFamily="34" charset="-120"/>
+                        </a:rPr>
+                        <a:t>Non-person track</a:t>
+                      </a:r>
+                      <a:endParaRPr lang="en-US" sz="1350" dirty="0">
+                        <a:latin typeface="Calibri" charset="0"/>
+                        <a:ea typeface="Calibri" charset="0"/>
+                        <a:cs typeface="Calibri" charset="0"/>
+                      </a:endParaRPr>
+                    </a:p>
+                  </a:txBody>
+                  <a:tcPr anchor="ctr">
+                    <a:lnL w="9525" cap="flat" cmpd="sng" algn="ctr">
+                      <a:solidFill>
+                        <a:srgbClr val="CBD5E1"/>
+                      </a:solidFill>
+                      <a:prstDash val="solid"/>
+                      <a:round/>
+                      <a:headEnd type="none" w="med" len="med"/>
+                      <a:tailEnd type="none" w="med" len="med"/>
+                    </a:lnL>
+                    <a:lnR w="9525" cap="flat" cmpd="sng" algn="ctr">
+                      <a:solidFill>
+                        <a:srgbClr val="CBD5E1"/>
+                      </a:solidFill>
+                      <a:prstDash val="solid"/>
+                      <a:round/>
+                      <a:headEnd type="none" w="med" len="med"/>
+                      <a:tailEnd type="none" w="med" len="med"/>
+                    </a:lnR>
+                    <a:lnT w="9525" cap="flat" cmpd="sng" algn="ctr">
+                      <a:solidFill>
+                        <a:srgbClr val="CBD5E1"/>
+                      </a:solidFill>
+                      <a:prstDash val="solid"/>
+                      <a:round/>
+                      <a:headEnd type="none" w="med" len="med"/>
+                      <a:tailEnd type="none" w="med" len="med"/>
+                    </a:lnT>
+                    <a:lnB w="9525" cap="flat" cmpd="sng" algn="ctr">
+                      <a:solidFill>
+                        <a:srgbClr val="CBD5E1"/>
+                      </a:solidFill>
+                      <a:prstDash val="solid"/>
+                      <a:round/>
+                      <a:headEnd type="none" w="med" len="med"/>
+                      <a:tailEnd type="none" w="med" len="med"/>
+                    </a:lnB>
+                    <a:solidFill>
+                      <a:srgbClr val="FFFFFF"/>
+                    </a:solidFill>
+                  </a:tcPr>
+                </a:tc>
+                <a:tc>
+                  <a:txBody>
+                    <a:bodyPr/>
+                    <a:lstStyle/>
+                    <a:p>
+                      <a:pPr marL="0" indent="0">
+                        <a:buNone/>
+                      </a:pPr>
+                      <a:r>
+                        <a:rPr lang="en-US" sz="1350" dirty="0">
+                          <a:solidFill>
+                            <a:srgbClr val="334155"/>
+                          </a:solidFill>
+                          <a:latin typeface="Calibri" pitchFamily="34" charset="0"/>
+                          <a:ea typeface="Calibri" pitchFamily="34" charset="-122"/>
+                          <a:cs typeface="Calibri" pitchFamily="34" charset="-120"/>
+                        </a:rPr>
+                        <a:t>Service accounts, MSAs, gMSAs, service principals, AI agents</a:t>
+                      </a:r>
+                      <a:endParaRPr lang="en-US" sz="1350" dirty="0">
+                        <a:latin typeface="Calibri" charset="0"/>
+                        <a:ea typeface="Calibri" charset="0"/>
+                        <a:cs typeface="Calibri" charset="0"/>
+                      </a:endParaRPr>
+                    </a:p>
+                  </a:txBody>
+                  <a:tcPr anchor="ctr">
+                    <a:lnL w="9525" cap="flat" cmpd="sng" algn="ctr">
+                      <a:solidFill>
+                        <a:srgbClr val="CBD5E1"/>
+                      </a:solidFill>
+                      <a:prstDash val="solid"/>
+                      <a:round/>
+                      <a:headEnd type="none" w="med" len="med"/>
+                      <a:tailEnd type="none" w="med" len="med"/>
+                    </a:lnL>
+                    <a:lnR w="9525" cap="flat" cmpd="sng" algn="ctr">
+                      <a:solidFill>
+                        <a:srgbClr val="CBD5E1"/>
+                      </a:solidFill>
+                      <a:prstDash val="solid"/>
+                      <a:round/>
+                      <a:headEnd type="none" w="med" len="med"/>
+                      <a:tailEnd type="none" w="med" len="med"/>
+                    </a:lnR>
+                    <a:lnT w="9525" cap="flat" cmpd="sng" algn="ctr">
+                      <a:solidFill>
+                        <a:srgbClr val="CBD5E1"/>
+                      </a:solidFill>
+                      <a:prstDash val="solid"/>
+                      <a:round/>
+                      <a:headEnd type="none" w="med" len="med"/>
+                      <a:tailEnd type="none" w="med" len="med"/>
+                    </a:lnT>
+                    <a:lnB w="9525" cap="flat" cmpd="sng" algn="ctr">
+                      <a:solidFill>
+                        <a:srgbClr val="CBD5E1"/>
+                      </a:solidFill>
+                      <a:prstDash val="solid"/>
+                      <a:round/>
+                      <a:headEnd type="none" w="med" len="med"/>
+                      <a:tailEnd type="none" w="med" len="med"/>
+                    </a:lnB>
+                    <a:solidFill>
+                      <a:srgbClr val="FFFFFF"/>
+                    </a:solidFill>
+                  </a:tcPr>
+                </a:tc>
+                <a:tc>
+                  <a:txBody>
+                    <a:bodyPr/>
+                    <a:lstStyle/>
+                    <a:p>
+                      <a:pPr marL="0" indent="0">
+                        <a:buNone/>
+                      </a:pPr>
+                      <a:r>
+                        <a:rPr lang="en-US" sz="1350" dirty="0">
+                          <a:solidFill>
+                            <a:srgbClr val="334155"/>
+                          </a:solidFill>
+                          <a:latin typeface="Calibri" pitchFamily="34" charset="0"/>
+                          <a:ea typeface="Calibri" pitchFamily="34" charset="-122"/>
+                          <a:cs typeface="Calibri" pitchFamily="34" charset="-120"/>
+                        </a:rPr>
+                        <a:t>Every service account inventoried, owned, and given a target</a:t>
+                      </a:r>
+                      <a:endParaRPr lang="en-US" sz="1350" dirty="0">
+                        <a:latin typeface="Calibri" charset="0"/>
+                        <a:ea typeface="Calibri" charset="0"/>
+                        <a:cs typeface="Calibri" charset="0"/>
+                      </a:endParaRPr>
+                    </a:p>
+                  </a:txBody>
+                  <a:tcPr anchor="ctr">
+                    <a:lnL w="9525" cap="flat" cmpd="sng" algn="ctr">
+                      <a:solidFill>
+                        <a:srgbClr val="CBD5E1"/>
+                      </a:solidFill>
+                      <a:prstDash val="solid"/>
+                      <a:round/>
+                      <a:headEnd type="none" w="med" len="med"/>
+                      <a:tailEnd type="none" w="med" len="med"/>
+                    </a:lnL>
+                    <a:lnR w="9525" cap="flat" cmpd="sng" algn="ctr">
+                      <a:solidFill>
+                        <a:srgbClr val="CBD5E1"/>
+                      </a:solidFill>
+                      <a:prstDash val="solid"/>
+                      <a:round/>
+                      <a:headEnd type="none" w="med" len="med"/>
+                      <a:tailEnd type="none" w="med" len="med"/>
+                    </a:lnR>
+                    <a:lnT w="9525" cap="flat" cmpd="sng" algn="ctr">
+                      <a:solidFill>
+                        <a:srgbClr val="CBD5E1"/>
+                      </a:solidFill>
+                      <a:prstDash val="solid"/>
+                      <a:round/>
+                      <a:headEnd type="none" w="med" len="med"/>
+                      <a:tailEnd type="none" w="med" len="med"/>
+                    </a:lnT>
+                    <a:lnB w="9525" cap="flat" cmpd="sng" algn="ctr">
+                      <a:solidFill>
+                        <a:srgbClr val="CBD5E1"/>
+                      </a:solidFill>
+                      <a:prstDash val="solid"/>
+                      <a:round/>
+                      <a:headEnd type="none" w="med" len="med"/>
+                      <a:tailEnd type="none" w="med" len="med"/>
+                    </a:lnB>
+                    <a:solidFill>
+                      <a:srgbClr val="FFFFFF"/>
+                    </a:solidFill>
+                  </a:tcPr>
+                </a:tc>
+                <a:tc>
+                  <a:txBody>
+                    <a:bodyPr/>
+                    <a:lstStyle/>
+                    <a:p>
+                      <a:pPr marL="0" indent="0">
+                        <a:buNone/>
+                      </a:pPr>
+                      <a:r>
+                        <a:rPr lang="en-US" sz="1350" b="1" dirty="0">
+                          <a:solidFill>
+                            <a:srgbClr val="0F766E"/>
+                          </a:solidFill>
+                          <a:latin typeface="Calibri" pitchFamily="34" charset="0"/>
+                          <a:ea typeface="Calibri" pitchFamily="34" charset="-122"/>
+                          <a:cs typeface="Calibri" pitchFamily="34" charset="-120"/>
+                        </a:rPr>
+                        <a:t>Book 02, Ch 09; AI agents in Book 17</a:t>
+                      </a:r>
+                      <a:endParaRPr lang="en-US" sz="1350" dirty="0">
+                        <a:latin typeface="Calibri" charset="0"/>
+                        <a:ea typeface="Calibri" charset="0"/>
+                        <a:cs typeface="Calibri" charset="0"/>
+                      </a:endParaRPr>
+                    </a:p>
+                  </a:txBody>
+                  <a:tcPr anchor="ctr">
+                    <a:lnL w="9525" cap="flat" cmpd="sng" algn="ctr">
+                      <a:solidFill>
+                        <a:srgbClr val="CBD5E1"/>
+                      </a:solidFill>
+                      <a:prstDash val="solid"/>
+                      <a:round/>
+                      <a:headEnd type="none" w="med" len="med"/>
+                      <a:tailEnd type="none" w="med" len="med"/>
+                    </a:lnL>
+                    <a:lnR w="9525" cap="flat" cmpd="sng" algn="ctr">
+                      <a:solidFill>
+                        <a:srgbClr val="CBD5E1"/>
+                      </a:solidFill>
+                      <a:prstDash val="solid"/>
+                      <a:round/>
+                      <a:headEnd type="none" w="med" len="med"/>
+                      <a:tailEnd type="none" w="med" len="med"/>
+                    </a:lnR>
+                    <a:lnT w="9525" cap="flat" cmpd="sng" algn="ctr">
+                      <a:solidFill>
+                        <a:srgbClr val="CBD5E1"/>
+                      </a:solidFill>
+                      <a:prstDash val="solid"/>
+                      <a:round/>
+                      <a:headEnd type="none" w="med" len="med"/>
+                      <a:tailEnd type="none" w="med" len="med"/>
+                    </a:lnT>
+                    <a:lnB w="9525" cap="flat" cmpd="sng" algn="ctr">
+                      <a:solidFill>
+                        <a:srgbClr val="CBD5E1"/>
+                      </a:solidFill>
+                      <a:prstDash val="solid"/>
+                      <a:round/>
+                      <a:headEnd type="none" w="med" len="med"/>
+                      <a:tailEnd type="none" w="med" len="med"/>
+                    </a:lnB>
+                    <a:solidFill>
+                      <a:srgbClr val="FFFFFF"/>
+                    </a:solidFill>
+                  </a:tcPr>
+                </a:tc>
+                <a:extLst>
+                  <a:ext uri="{0D108BD9-81ED-4DB2-BD59-A6C34878D82A}">
+                    <a16:rowId xmlns:a16="http://schemas.microsoft.com/office/drawing/2014/main" val="10004"/>
+                  </a:ext>
+                </a:extLst>
+              </a:tr>
+            </a:tbl>
+          </a:graphicData>
+        </a:graphic>
+      </p:graphicFrame>
+      <p:sp>
+        <p:nvSpPr>
+          <p:cNvPr id="5" name="Accomplishes">
+            <a:extLst>
+              <a:ext uri="{C183D7F6-B498-43B3-948B-1728B52AA6E4}">
+                <adec:decorative xmlns:adec="http://schemas.microsoft.com/office/drawing/2017/decorative" val="1"/>
+              </a:ext>
+            </a:extLst>
+          </p:cNvPr>
+          <p:cNvSpPr/>
+          <p:nvPr/>
+        </p:nvSpPr>
+        <p:spPr>
+          <a:xfrm>
+            <a:off x="548640" y="4754880"/>
+            <a:ext cx="11109960" cy="1097280"/>
+          </a:xfrm>
+          <a:prstGeom prst="roundRect">
+            <a:avLst>
+              <a:gd name="adj" fmla="val 6667"/>
+            </a:avLst>
+          </a:prstGeom>
+          <a:solidFill>
+            <a:srgbClr val="FFFFFF"/>
+          </a:solidFill>
+          <a:ln w="12700">
+            <a:solidFill>
+              <a:srgbClr val="1F2A44"/>
+            </a:solidFill>
+            <a:prstDash val="solid"/>
+          </a:ln>
+          <a:effectLst>
+            <a:outerShdw blurRad="76200" dist="25400" dir="5400000" algn="bl" rotWithShape="0">
+              <a:srgbClr val="64748B">
+                <a:alpha val="22000"/>
+              </a:srgbClr>
+            </a:outerShdw>
+          </a:effectLst>
+        </p:spPr>
+      </p:sp>
+      <p:sp>
+        <p:nvSpPr>
+          <p:cNvPr id="7" name="Icon FaClipboardCheck">
+            <a:extLst>
+              <a:ext uri="{C183D7F6-B498-43B3-948B-1728B52AA6E4}">
+                <adec:decorative xmlns:adec="http://schemas.microsoft.com/office/drawing/2017/decorative" val="1"/>
+              </a:ext>
+            </a:extLst>
+          </p:cNvPr>
+          <p:cNvSpPr/>
+          <p:nvPr/>
+        </p:nvSpPr>
+        <p:spPr>
+          <a:xfrm>
+            <a:off x="777240" y="4937760"/>
+            <a:ext cx="731520" cy="731520"/>
+          </a:xfrm>
+          <a:prstGeom prst="ellipse">
+            <a:avLst/>
+          </a:prstGeom>
+          <a:solidFill>
+            <a:srgbClr val="1F2A44"/>
+          </a:solidFill>
+          <a:ln w="12700">
+            <a:solidFill>
+              <a:srgbClr val="1F2A44"/>
+            </a:solidFill>
+            <a:prstDash val="solid"/>
+          </a:ln>
+        </p:spPr>
+      </p:sp>
+      <p:pic>
+        <p:nvPicPr>
+          <p:cNvPr id="8" name="Image 0">
+            <a:extLst>
+              <a:ext uri="{C183D7F6-B498-43B3-948B-1728B52AA6E4}">
+                <adec:decorative xmlns:adec="http://schemas.microsoft.com/office/drawing/2017/decorative" val="1"/>
+              </a:ext>
+            </a:extLst>
+          </p:cNvPr>
+          <p:cNvPicPr>
+            <a:picLocks noChangeAspect="1"/>
+          </p:cNvPicPr>
+          <p:nvPr/>
+        </p:nvPicPr>
+        <p:blipFill>
+          <a:blip r:embed="rId5"/>
+          <a:stretch>
+            <a:fillRect/>
+          </a:stretch>
+        </p:blipFill>
+        <p:spPr>
+          <a:xfrm>
+            <a:off x="952805" y="5113325"/>
+            <a:ext cx="380390" cy="380390"/>
+          </a:xfrm>
+          <a:prstGeom prst="rect">
+            <a:avLst/>
+          </a:prstGeom>
+        </p:spPr>
+      </p:pic>
+      <p:sp>
+        <p:nvSpPr>
+          <p:cNvPr id="9" name="Accomplishes text"/>
+          <p:cNvSpPr txBox="1"/>
+          <p:nvPr/>
+        </p:nvSpPr>
+        <p:spPr>
+          <a:xfrm>
+            <a:off x="1737360" y="4800600"/>
+            <a:ext cx="9738360" cy="1005840"/>
+          </a:xfrm>
+          <a:prstGeom prst="rect">
+            <a:avLst/>
+          </a:prstGeom>
+          <a:noFill/>
+          <a:ln/>
+        </p:spPr>
+        <p:txBody>
+          <a:bodyPr wrap="square" lIns="0" tIns="0" rIns="0" bIns="0" rtlCol="0" anchor="ctr"/>
+          <a:lstStyle/>
+          <a:p>
+            <a:pPr marL="0" indent="0">
+              <a:buNone/>
+            </a:pPr>
+            <a:r>
+              <a:rPr lang="en-US" sz="1650" b="1" dirty="0">
+                <a:solidFill>
+                  <a:srgbClr val="1F2A44"/>
+                </a:solidFill>
+              </a:rPr>
+              <a:t>What Book 02 accomplishes: </a:t>
+            </a:r>
+            <a:r>
+              <a:rPr lang="en-US" sz="1650" dirty="0">
+                <a:solidFill>
+                  <a:schemeClr val="tx2"/>
+                </a:solidFill>
+              </a:rPr>
+              <a:t>a directory where placement has become attributes and rules, and every service account has an owner and a target. Federal requirement: NIST SP 800-53 Rev. 5 AC-2, AC-3(13), AC-6; OMB M-22-09.</a:t>
+            </a:r>
+            <a:endParaRPr lang="en-US" sz="1650" dirty="0"/>
+          </a:p>
+        </p:txBody>
+      </p:sp>
+      <p:sp>
+        <p:nvSpPr>
+          <p:cNvPr id="10" name="Sources"/>
+          <p:cNvSpPr txBox="1"/>
+          <p:nvPr/>
+        </p:nvSpPr>
+        <p:spPr>
+          <a:xfrm>
+            <a:off x="548640" y="6053328"/>
+            <a:ext cx="10424160" cy="292608"/>
+          </a:xfrm>
+          <a:prstGeom prst="rect">
+            <a:avLst/>
+          </a:prstGeom>
+          <a:noFill/>
+          <a:ln/>
+        </p:spPr>
+        <p:txBody>
+          <a:bodyPr wrap="square" lIns="0" tIns="0" rIns="0" bIns="0" rtlCol="0" anchor="t"/>
+          <a:lstStyle/>
+          <a:p>
+            <a:pPr marL="0" indent="0">
+              <a:buNone/>
+            </a:pPr>
+            <a:r>
+              <a:rPr lang="en-US" sz="1000" i="1" dirty="0">
+                <a:solidFill>
+                  <a:srgbClr val="64748B"/>
+                </a:solidFill>
+              </a:rPr>
+              <a:t>Sources: Book 02, Ch 02, 08, 09; Appendix A (NIST SP 800-53 Rev. 5 AC-2, AC-3(13), AC-6; OMB M-22-09). Track model: series framing (design guidance); Books 03, 05, 17.</a:t>
+            </a:r>
+            <a:endParaRPr lang="en-US" sz="1000" dirty="0"/>
+          </a:p>
+        </p:txBody>
+      </p:sp>
+      <p:sp>
+        <p:nvSpPr>
+          <p:cNvPr id="25" name="Slide Number Placeholder 0"/>
+          <p:cNvSpPr>
+            <a:spLocks noGrp="1"/>
+          </p:cNvSpPr>
+          <p:nvPr>
+            <p:ph type="sldNum" sz="quarter" idx="4294967295"/>
+          </p:nvPr>
+        </p:nvSpPr>
+        <p:spPr>
+          <a:xfrm>
+            <a:off x="11155680" y="6400800"/>
+            <a:ext cx="457200" cy="274320"/>
+          </a:xfrm>
+          <a:prstGeom prst="rect">
+            <a:avLst/>
+          </a:prstGeom>
+          <a:extLst>
+            <a:ext uri="{C572A759-6A51-4108-AA02-DFA0A04FC94B}">
+              <ma14:wrappingTextBoxFlag xmlns:ma14="http://schemas.microsoft.com/office/mac/drawingml/2011/main" xmlns="" val="0"/>
+            </a:ext>
+          </a:extLst>
+        </p:spPr>
+        <p:txBody>
+          <a:bodyPr/>
+          <a:lstStyle>
+            <a:lvl1pPr>
+              <a:defRPr sz="1000">
+                <a:solidFill>
+                  <a:schemeClr val="accent5"/>
+                </a:solidFill>
+              </a:defRPr>
+            </a:lvl1pPr>
+          </a:lstStyle>
+          <a:p>
+            <a:pPr algn="r"/>
+            <a:fld id="{F7021451-1387-4CA6-816F-3879F97B5CBC}" type="slidenum">
+              <a:rPr lang="en-US" b="0"/>
+              <a:t>5</a:t>
+            </a:fld>
+            <a:endParaRPr lang="en-US"/>
+          </a:p>
+        </p:txBody>
+      </p:sp>
+      <p:pic>
+        <p:nvPicPr>
+          <p:cNvPr id="11" name="Narration" descr="Narration for this slide; captions available">
+            <a:hlinkClick r:id="" action="ppaction://media"/>
+            <a:extLst>
+              <a:ext uri="{FF2B5EF4-FFF2-40B4-BE49-F238E27FC236}">
+                <a16:creationId xmlns:a16="http://schemas.microsoft.com/office/drawing/2014/main" id="{E03FAA5D-56CF-6ACB-ADAB-A08E00A3954D}"/>
+              </a:ext>
+            </a:extLst>
+          </p:cNvPr>
+          <p:cNvPicPr>
+            <a:picLocks noChangeAspect="1"/>
+          </p:cNvPicPr>
+          <p:nvPr>
+            <a:audioFile r:link="rId2"/>
+            <p:extLst>
+              <p:ext uri="{DAA4B4D4-6D71-4841-9C94-3DE7FCFB9230}">
+                <p14:media xmlns:p14="http://schemas.microsoft.com/office/powerpoint/2010/main" r:embed="rId1">
+                  <p14:extLst>
+                    <p:ext uri="{3AFAAA56-56D3-431D-BCD4-E75A35582382}">
+                      <p173:tracksInfo xmlns:p173="http://schemas.microsoft.com/office/powerpoint/2017/3/main" displayLoc="slide">
+                        <p173:trackLst>
+                          <p173:track id="{92783D64-25C1-476E-9B2F-80D9F3A5DAAA}" label="English (captions)" lang="en-US" r:embed="rId7"/>
+                        </p173:trackLst>
+                      </p173:tracksInfo>
+                    </p:ext>
+                  </p14:extLst>
+                </p14:media>
+              </p:ext>
+            </p:extLst>
+          </p:nvPr>
+        </p:nvPicPr>
+        <p:blipFill>
+          <a:blip r:embed="rId6"/>
+          <a:stretch>
+            <a:fillRect/>
+          </a:stretch>
+        </p:blipFill>
+        <p:spPr>
+          <a:xfrm>
+            <a:off x="12446000" y="127000"/>
+            <a:ext cx="304800" cy="304800"/>
+          </a:xfrm>
+          <a:prstGeom prst="rect">
+            <a:avLst/>
+          </a:prstGeom>
+        </p:spPr>
+      </p:pic>
+    </p:spTree>
+  </p:cSld>
+  <p:clrMapOvr>
+    <a:masterClrMapping/>
+  </p:clrMapOvr>
+  <mc:AlternateContent xmlns:mc="http://schemas.openxmlformats.org/markup-compatibility/2006">
+    <mc:Choice xmlns:p14="http://schemas.microsoft.com/office/powerpoint/2010/main" Requires="p14">
+      <p:transition spd="slow" p14:dur="2000" advTm="52000"/>
+    </mc:Choice>
+    <mc:Fallback>
+      <p:transition spd="slow" advTm="52000"/>
+    </mc:Fallback>
+  </mc:AlternateContent>
+  <p:timing>
+    <p:tnLst>
+      <p:par>
+        <p:cTn id="1" dur="indefinite" restart="never" nodeType="tmRoot">
+          <p:childTnLst>
+            <p:seq concurrent="1" nextAc="seek">
+              <p:cTn id="2" dur="indefinite" nodeType="mainSeq">
+                <p:childTnLst>
+                  <p:par>
+                    <p:cTn id="3" fill="hold">
+                      <p:stCondLst>
+                        <p:cond delay="indefinite"/>
+                        <p:cond evt="onBegin" delay="0">
+                          <p:tn val="2"/>
+                        </p:cond>
+                      </p:stCondLst>
+                      <p:childTnLst>
+                        <p:par>
+                          <p:cTn id="4" fill="hold">
+                            <p:stCondLst>
+                              <p:cond delay="0"/>
+                            </p:stCondLst>
+                            <p:childTnLst>
+                              <p:par>
+                                <p:cTn id="5" presetID="1" presetClass="mediacall" presetSubtype="0" fill="hold" nodeType="withEffect">
+                                  <p:stCondLst>
+                                    <p:cond delay="0"/>
+                                  </p:stCondLst>
+                                  <p:childTnLst>
+                                    <p:cmd type="call" cmd="playFrom(0.0)">
+                                      <p:cBhvr>
+                                        <p:cTn id="6" dur="48000" fill="hold"/>
+                                        <p:tgtEl>
+                                          <p:spTgt spid="11"/>
+                                        </p:tgtEl>
+                                      </p:cBhvr>
+                                    </p:cmd>
+                                  </p:childTnLst>
+                                </p:cTn>
+                              </p:par>
+                            </p:childTnLst>
+                          </p:cTn>
+                        </p:par>
+                      </p:childTnLst>
+                    </p:cTn>
+                  </p:par>
+                </p:childTnLst>
+              </p:cTn>
+              <p:prevCondLst>
+                <p:cond evt="onPrev" delay="0">
+                  <p:tgtEl>
+                    <p:sldTgt/>
+                  </p:tgtEl>
+                </p:cond>
+              </p:prevCondLst>
+              <p:nextCondLst>
+                <p:cond evt="onNext" delay="0">
+                  <p:tgtEl>
+                    <p:sldTgt/>
+                  </p:tgtEl>
+                </p:cond>
+              </p:nextCondLst>
+            </p:seq>
+          </p:childTnLst>
+        </p:cTn>
+      </p:par>
+    </p:tnLst>
+  </p:timing>
+</p:sld>
+</file>
+
+<file path=ppt/slides/slide6.xml><?xml version="1.0" encoding="utf-8"?>
+<p:sld xmlns:a="http://schemas.openxmlformats.org/drawingml/2006/main" xmlns:r="http://schemas.openxmlformats.org/officeDocument/2006/relationships" xmlns:p="http://schemas.openxmlformats.org/presentationml/2006/main">
+  <p:cSld name="Slide 6">
+    <p:spTree>
+      <p:nvGrpSpPr>
+        <p:cNvPr id="1" name=""/>
+        <p:cNvGrpSpPr/>
+        <p:nvPr/>
+      </p:nvGrpSpPr>
+      <p:grpSpPr>
+        <a:xfrm>
+          <a:off x="0" y="0"/>
+          <a:ext cx="0" cy="0"/>
+          <a:chOff x="0" y="0"/>
+          <a:chExt cx="0" cy="0"/>
+        </a:xfrm>
+      </p:grpSpPr>
+      <p:sp>
+        <p:nvSpPr>
+          <p:cNvPr id="2" name="Text 0"/>
+          <p:cNvSpPr>
+            <a:spLocks noGrp="1"/>
+          </p:cNvSpPr>
+          <p:nvPr>
+            <p:ph type="title" idx="100" hasCustomPrompt="1"/>
+          </p:nvPr>
+        </p:nvSpPr>
+        <p:spPr>
+          <a:xfrm>
+            <a:off x="548640" y="457200"/>
+            <a:ext cx="11064240" cy="777240"/>
+          </a:xfrm>
+          <a:prstGeom prst="rect">
+            <a:avLst/>
+          </a:prstGeom>
+          <a:noFill/>
+          <a:ln/>
+        </p:spPr>
+        <p:txBody>
+          <a:bodyPr wrap="square" lIns="0" tIns="0" rIns="0" bIns="0" rtlCol="0" anchor="ctr"/>
+          <a:lstStyle/>
+          <a:p>
+            <a:pPr marL="0" indent="0" algn="ctr">
+              <a:buNone/>
+            </a:pPr>
+            <a:r>
+              <a:rPr lang="en-US" sz="3000" b="1" dirty="0">
+                <a:solidFill>
+                  <a:schemeClr val="tx1"/>
+                </a:solidFill>
+                <a:latin typeface="Cambria" pitchFamily="34" charset="0"/>
+                <a:ea typeface="Cambria" pitchFamily="34" charset="-122"/>
+                <a:cs typeface="Cambria" pitchFamily="34" charset="-120"/>
+              </a:rPr>
               <a:t>The migration surface is much larger than users and groups</a:t>
             </a:r>
             <a:endParaRPr lang="en-US" sz="3000" dirty="0"/>
@@ -10244,7 +13539,7 @@
             <a:pPr algn="r"/>
             <a:fld id="{F7021451-1387-4CA6-816F-3879F97B5CBC}" type="slidenum">
               <a:rPr lang="en-US" b="0"/>
-              <a:t>5</a:t>
+              <a:t>6</a:t>
             </a:fld>
             <a:endParaRPr lang="en-US"/>
           </a:p>
@@ -10256,7 +13551,7 @@
             <a:hlinkClick r:id="" action="ppaction://media"/>
             <a:extLst>
               <a:ext uri="{FF2B5EF4-FFF2-40B4-BE49-F238E27FC236}">
-                <a16:creationId xmlns:a16="http://schemas.microsoft.com/office/drawing/2014/main" id="{29AB8184-44D7-E266-EEDF-F2681B22AD0E}"/>
+                <a16:creationId xmlns:a16="http://schemas.microsoft.com/office/drawing/2014/main" id="{FA18DFA9-6F92-82F5-25B6-336D7294D3BE}"/>
               </a:ext>
             </a:extLst>
           </p:cNvPr>
@@ -10272,7 +13567,7 @@
                     <p:ext uri="{3AFAAA56-56D3-431D-BCD4-E75A35582382}">
                       <p173:tracksInfo xmlns:p173="http://schemas.microsoft.com/office/powerpoint/2017/3/main" displayLoc="slide">
                         <p173:trackLst>
-                          <p173:track id="{EDE78168-E339-434F-86F5-09C279BC69CC}" label="English (captions)" lang="en-US" r:embed="rId15"/>
+                          <p173:track id="{27FBCA7B-BFFC-4415-9519-971EFAA86BA8}" label="English (captions)" lang="en-US" r:embed="rId15"/>
                         </p173:trackLst>
                       </p173:tracksInfo>
                     </p:ext>
@@ -10382,9 +13677,9 @@
 </p:sld>
 </file>
 
-<file path=ppt/slides/slide6.xml><?xml version="1.0" encoding="utf-8"?>
+<file path=ppt/slides/slide7.xml><?xml version="1.0" encoding="utf-8"?>
 <p:sld xmlns:a="http://schemas.openxmlformats.org/drawingml/2006/main" xmlns:r="http://schemas.openxmlformats.org/officeDocument/2006/relationships" xmlns:p="http://schemas.openxmlformats.org/presentationml/2006/main">
-  <p:cSld name="Slide 6">
+  <p:cSld name="Slide 7">
     <p:spTree>
       <p:nvGrpSpPr>
         <p:cNvPr id="1" name=""/>
@@ -11171,7 +14466,7 @@
             <a:pPr algn="r"/>
             <a:fld id="{F7021451-1387-4CA6-816F-3879F97B5CBC}" type="slidenum">
               <a:rPr lang="en-US" b="0"/>
-              <a:t>6</a:t>
+              <a:t>7</a:t>
             </a:fld>
             <a:endParaRPr lang="en-US"/>
           </a:p>
@@ -11183,7 +14478,7 @@
             <a:hlinkClick r:id="" action="ppaction://media"/>
             <a:extLst>
               <a:ext uri="{FF2B5EF4-FFF2-40B4-BE49-F238E27FC236}">
-                <a16:creationId xmlns:a16="http://schemas.microsoft.com/office/drawing/2014/main" id="{1191CC5F-2727-1EA9-342D-FB031EF9FB73}"/>
+                <a16:creationId xmlns:a16="http://schemas.microsoft.com/office/drawing/2014/main" id="{1FBF2554-18F4-6D34-79F8-CF5468A19005}"/>
               </a:ext>
             </a:extLst>
           </p:cNvPr>
@@ -11199,7 +14494,7 @@
                     <p:ext uri="{3AFAAA56-56D3-431D-BCD4-E75A35582382}">
                       <p173:tracksInfo xmlns:p173="http://schemas.microsoft.com/office/powerpoint/2017/3/main" displayLoc="slide">
                         <p173:trackLst>
-                          <p173:track id="{767E107C-50AA-4B7B-A48D-B61228DD43AE}" label="English (captions)" lang="en-US" r:embed="rId7"/>
+                          <p173:track id="{39C52183-5BA6-4F6B-82F9-749E79350E7F}" label="English (captions)" lang="en-US" r:embed="rId7"/>
                         </p173:trackLst>
                       </p173:tracksInfo>
                     </p:ext>
@@ -11309,9 +14604,9 @@
 </p:sld>
 </file>
 
-<file path=ppt/slides/slide7.xml><?xml version="1.0" encoding="utf-8"?>
+<file path=ppt/slides/slide8.xml><?xml version="1.0" encoding="utf-8"?>
 <p:sld xmlns:a="http://schemas.openxmlformats.org/drawingml/2006/main" xmlns:r="http://schemas.openxmlformats.org/officeDocument/2006/relationships" xmlns:p="http://schemas.openxmlformats.org/presentationml/2006/main">
-  <p:cSld name="Slide 7">
+  <p:cSld name="Slide 8">
     <p:spTree>
       <p:nvGrpSpPr>
         <p:cNvPr id="1" name=""/>
@@ -11440,7 +14735,7 @@
       </p:sp>
       <p:graphicFrame>
         <p:nvGraphicFramePr>
-          <p:cNvPr id="8" name="Table 0"/>
+          <p:cNvPr id="9" name="Table 0"/>
           <p:cNvGraphicFramePr>
             <a:graphicFrameLocks noGrp="1"/>
           </p:cNvGraphicFramePr>
@@ -12615,7 +15910,7 @@
       </p:sp>
       <p:pic>
         <p:nvPicPr>
-          <p:cNvPr id="5" name="Image 0">
+          <p:cNvPr id="8" name="Image 0">
             <a:extLst>
               <a:ext uri="{C183D7F6-B498-43B3-948B-1728B52AA6E4}">
                 <adec:decorative xmlns:adec="http://schemas.microsoft.com/office/drawing/2017/decorative" val="1"/>
@@ -12645,7 +15940,7 @@
       </p:pic>
       <p:sp>
         <p:nvSpPr>
-          <p:cNvPr id="9" name="Off head"/>
+          <p:cNvPr id="5" name="Off head"/>
           <p:cNvSpPr txBox="1"/>
           <p:nvPr/>
         </p:nvSpPr>
@@ -12992,7 +16287,7 @@
             <a:pPr algn="r"/>
             <a:fld id="{F7021451-1387-4CA6-816F-3879F97B5CBC}" type="slidenum">
               <a:rPr lang="en-US" b="0"/>
-              <a:t>7</a:t>
+              <a:t>8</a:t>
             </a:fld>
             <a:endParaRPr lang="en-US"/>
           </a:p>
@@ -13004,7 +16299,7 @@
             <a:hlinkClick r:id="" action="ppaction://media"/>
             <a:extLst>
               <a:ext uri="{FF2B5EF4-FFF2-40B4-BE49-F238E27FC236}">
-                <a16:creationId xmlns:a16="http://schemas.microsoft.com/office/drawing/2014/main" id="{98D0E5B1-F08B-9064-05B6-D259E401BACA}"/>
+                <a16:creationId xmlns:a16="http://schemas.microsoft.com/office/drawing/2014/main" id="{341C6919-C052-FF5A-B7B0-3271F17C56E3}"/>
               </a:ext>
             </a:extLst>
           </p:cNvPr>
@@ -13020,7 +16315,7 @@
                     <p:ext uri="{3AFAAA56-56D3-431D-BCD4-E75A35582382}">
                       <p173:tracksInfo xmlns:p173="http://schemas.microsoft.com/office/powerpoint/2017/3/main" displayLoc="slide">
                         <p173:trackLst>
-                          <p173:track id="{38A396E4-3F2F-4585-8BB4-8A99D8EA37F8}" label="English (captions)" lang="en-US" r:embed="rId8"/>
+                          <p173:track id="{235CA650-48BE-476E-9789-80F0E7CC65B6}" label="English (captions)" lang="en-US" r:embed="rId8"/>
                         </p173:trackLst>
                       </p173:tracksInfo>
                     </p:ext>
@@ -13130,9 +16425,9 @@
 </p:sld>
 </file>
 
-<file path=ppt/slides/slide8.xml><?xml version="1.0" encoding="utf-8"?>
+<file path=ppt/slides/slide9.xml><?xml version="1.0" encoding="utf-8"?>
 <p:sld xmlns:a="http://schemas.openxmlformats.org/drawingml/2006/main" xmlns:r="http://schemas.openxmlformats.org/officeDocument/2006/relationships" xmlns:p="http://schemas.openxmlformats.org/presentationml/2006/main">
-  <p:cSld name="Slide 8">
+  <p:cSld name="Slide 9">
     <p:spTree>
       <p:nvGrpSpPr>
         <p:cNvPr id="1" name=""/>
@@ -14271,7 +17566,7 @@
             <a:pPr algn="r"/>
             <a:fld id="{F7021451-1387-4CA6-816F-3879F97B5CBC}" type="slidenum">
               <a:rPr lang="en-US" b="0"/>
-              <a:t>8</a:t>
+              <a:t>9</a:t>
             </a:fld>
             <a:endParaRPr lang="en-US"/>
           </a:p>
@@ -14283,7 +17578,7 @@
             <a:hlinkClick r:id="" action="ppaction://media"/>
             <a:extLst>
               <a:ext uri="{FF2B5EF4-FFF2-40B4-BE49-F238E27FC236}">
-                <a16:creationId xmlns:a16="http://schemas.microsoft.com/office/drawing/2014/main" id="{D4DB3DC9-B7ED-8E08-6985-AF9A4386369A}"/>
+                <a16:creationId xmlns:a16="http://schemas.microsoft.com/office/drawing/2014/main" id="{BE3CAD30-147B-B56C-B9B9-C277CE4892C1}"/>
               </a:ext>
             </a:extLst>
           </p:cNvPr>
@@ -14299,7 +17594,7 @@
                     <p:ext uri="{3AFAAA56-56D3-431D-BCD4-E75A35582382}">
                       <p173:tracksInfo xmlns:p173="http://schemas.microsoft.com/office/powerpoint/2017/3/main" displayLoc="slide">
                         <p173:trackLst>
-                          <p173:track id="{6B39DD64-A2D8-42FB-9B47-215DE62411D6}" label="English (captions)" lang="en-US" r:embed="rId10"/>
+                          <p173:track id="{4D08E8C0-DCEA-4CAC-BBBB-B5DAE6B01351}" label="English (captions)" lang="en-US" r:embed="rId10"/>
                         </p173:trackLst>
                       </p173:tracksInfo>
                     </p:ext>
@@ -14370,1268 +17665,6 @@
                                     <p:cmd type="call" cmd="playFrom(0.0)">
                                       <p:cBhvr>
                                         <p:cTn id="6" dur="56712" fill="hold"/>
-                                        <p:tgtEl>
-                                          <p:spTgt spid="26"/>
-                                        </p:tgtEl>
-                                      </p:cBhvr>
-                                    </p:cmd>
-                                  </p:childTnLst>
-                                </p:cTn>
-                              </p:par>
-                            </p:childTnLst>
-                          </p:cTn>
-                        </p:par>
-                      </p:childTnLst>
-                    </p:cTn>
-                  </p:par>
-                </p:childTnLst>
-              </p:cTn>
-              <p:prevCondLst>
-                <p:cond evt="onPrev" delay="0">
-                  <p:tgtEl>
-                    <p:sldTgt/>
-                  </p:tgtEl>
-                </p:cond>
-              </p:prevCondLst>
-              <p:nextCondLst>
-                <p:cond evt="onNext" delay="0">
-                  <p:tgtEl>
-                    <p:sldTgt/>
-                  </p:tgtEl>
-                </p:cond>
-              </p:nextCondLst>
-            </p:seq>
-          </p:childTnLst>
-        </p:cTn>
-      </p:par>
-    </p:tnLst>
-  </p:timing>
-</p:sld>
-</file>
-
-<file path=ppt/slides/slide9.xml><?xml version="1.0" encoding="utf-8"?>
-<p:sld xmlns:a="http://schemas.openxmlformats.org/drawingml/2006/main" xmlns:r="http://schemas.openxmlformats.org/officeDocument/2006/relationships" xmlns:p="http://schemas.openxmlformats.org/presentationml/2006/main">
-  <p:cSld name="Slide 9">
-    <p:spTree>
-      <p:nvGrpSpPr>
-        <p:cNvPr id="1" name=""/>
-        <p:cNvGrpSpPr/>
-        <p:nvPr/>
-      </p:nvGrpSpPr>
-      <p:grpSpPr>
-        <a:xfrm>
-          <a:off x="0" y="0"/>
-          <a:ext cx="0" cy="0"/>
-          <a:chOff x="0" y="0"/>
-          <a:chExt cx="0" cy="0"/>
-        </a:xfrm>
-      </p:grpSpPr>
-      <p:sp>
-        <p:nvSpPr>
-          <p:cNvPr id="2" name="Text 0"/>
-          <p:cNvSpPr>
-            <a:spLocks noGrp="1"/>
-          </p:cNvSpPr>
-          <p:nvPr>
-            <p:ph type="title" idx="100" hasCustomPrompt="1"/>
-          </p:nvPr>
-        </p:nvSpPr>
-        <p:spPr>
-          <a:xfrm>
-            <a:off x="548640" y="457200"/>
-            <a:ext cx="11064240" cy="777240"/>
-          </a:xfrm>
-          <a:prstGeom prst="rect">
-            <a:avLst/>
-          </a:prstGeom>
-          <a:noFill/>
-          <a:ln/>
-        </p:spPr>
-        <p:txBody>
-          <a:bodyPr wrap="square" lIns="0" tIns="0" rIns="0" bIns="0" rtlCol="0" anchor="ctr"/>
-          <a:lstStyle/>
-          <a:p>
-            <a:pPr marL="0" indent="0" algn="ctr">
-              <a:buNone/>
-            </a:pPr>
-            <a:r>
-              <a:rPr lang="en-US" sz="3000" b="1" dirty="0">
-                <a:solidFill>
-                  <a:schemeClr val="tx1"/>
-                </a:solidFill>
-                <a:latin typeface="Cambria" pitchFamily="34" charset="0"/>
-                <a:ea typeface="Cambria" pitchFamily="34" charset="-122"/>
-                <a:cs typeface="Cambria" pitchFamily="34" charset="-120"/>
-              </a:rPr>
-              <a:t>How: discover, assess, build, migrate, prove</a:t>
-            </a:r>
-            <a:endParaRPr lang="en-US" sz="3000" dirty="0"/>
-          </a:p>
-        </p:txBody>
-      </p:sp>
-      <p:sp>
-        <p:nvSpPr>
-          <p:cNvPr id="3" name="Tag How">
-            <a:extLst>
-              <a:ext uri="{C183D7F6-B498-43B3-948B-1728B52AA6E4}">
-                <adec:decorative xmlns:adec="http://schemas.microsoft.com/office/drawing/2017/decorative" val="1"/>
-              </a:ext>
-            </a:extLst>
-          </p:cNvPr>
-          <p:cNvSpPr/>
-          <p:nvPr/>
-        </p:nvSpPr>
-        <p:spPr>
-          <a:xfrm>
-            <a:off x="548640" y="109728"/>
-            <a:ext cx="868680" cy="292608"/>
-          </a:xfrm>
-          <a:prstGeom prst="roundRect">
-            <a:avLst>
-              <a:gd name="adj" fmla="val 18750"/>
-            </a:avLst>
-          </a:prstGeom>
-          <a:solidFill>
-            <a:srgbClr val="B45309"/>
-          </a:solidFill>
-          <a:ln w="12700">
-            <a:solidFill>
-              <a:srgbClr val="B45309"/>
-            </a:solidFill>
-            <a:prstDash val="solid"/>
-          </a:ln>
-        </p:spPr>
-      </p:sp>
-      <p:sp>
-        <p:nvSpPr>
-          <p:cNvPr id="4" name="Tag How text"/>
-          <p:cNvSpPr txBox="1"/>
-          <p:nvPr/>
-        </p:nvSpPr>
-        <p:spPr>
-          <a:xfrm>
-            <a:off x="548640" y="109728"/>
-            <a:ext cx="868680" cy="292608"/>
-          </a:xfrm>
-          <a:prstGeom prst="rect">
-            <a:avLst/>
-          </a:prstGeom>
-          <a:noFill/>
-          <a:ln/>
-        </p:spPr>
-        <p:txBody>
-          <a:bodyPr wrap="square" lIns="0" tIns="0" rIns="0" bIns="0" rtlCol="0" anchor="ctr"/>
-          <a:lstStyle/>
-          <a:p>
-            <a:pPr marL="0" indent="0" algn="ctr">
-              <a:buNone/>
-            </a:pPr>
-            <a:r>
-              <a:rPr lang="en-US" sz="1100" b="1" kern="0" spc="100" dirty="0">
-                <a:solidFill>
-                  <a:srgbClr val="FFFFFF"/>
-                </a:solidFill>
-              </a:rPr>
-              <a:t>HOW</a:t>
-            </a:r>
-            <a:endParaRPr lang="en-US" sz="1100" dirty="0"/>
-          </a:p>
-        </p:txBody>
-      </p:sp>
-      <p:sp>
-        <p:nvSpPr>
-          <p:cNvPr id="5" name="Step 1">
-            <a:extLst>
-              <a:ext uri="{C183D7F6-B498-43B3-948B-1728B52AA6E4}">
-                <adec:decorative xmlns:adec="http://schemas.microsoft.com/office/drawing/2017/decorative" val="1"/>
-              </a:ext>
-            </a:extLst>
-          </p:cNvPr>
-          <p:cNvSpPr/>
-          <p:nvPr/>
-        </p:nvSpPr>
-        <p:spPr>
-          <a:xfrm>
-            <a:off x="548640" y="1463040"/>
-            <a:ext cx="2103120" cy="2606040"/>
-          </a:xfrm>
-          <a:prstGeom prst="roundRect">
-            <a:avLst>
-              <a:gd name="adj" fmla="val 3478"/>
-            </a:avLst>
-          </a:prstGeom>
-          <a:solidFill>
-            <a:srgbClr val="E4EAF4"/>
-          </a:solidFill>
-          <a:ln w="12700">
-            <a:solidFill>
-              <a:srgbClr val="E4EAF4"/>
-            </a:solidFill>
-            <a:prstDash val="solid"/>
-          </a:ln>
-          <a:effectLst>
-            <a:outerShdw blurRad="76200" dist="25400" dir="5400000" algn="bl" rotWithShape="0">
-              <a:srgbClr val="64748B">
-                <a:alpha val="22000"/>
-              </a:srgbClr>
-            </a:outerShdw>
-          </a:effectLst>
-        </p:spPr>
-      </p:sp>
-      <p:sp>
-        <p:nvSpPr>
-          <p:cNvPr id="6" name="Step 1 num"/>
-          <p:cNvSpPr txBox="1"/>
-          <p:nvPr/>
-        </p:nvSpPr>
-        <p:spPr>
-          <a:xfrm>
-            <a:off x="731520" y="1572768"/>
-            <a:ext cx="548640" cy="548640"/>
-          </a:xfrm>
-          <a:prstGeom prst="rect">
-            <a:avLst/>
-          </a:prstGeom>
-          <a:noFill/>
-          <a:ln/>
-        </p:spPr>
-        <p:txBody>
-          <a:bodyPr wrap="square" lIns="0" tIns="0" rIns="0" bIns="0" rtlCol="0" anchor="t"/>
-          <a:lstStyle/>
-          <a:p>
-            <a:pPr marL="0" indent="0">
-              <a:buNone/>
-            </a:pPr>
-            <a:r>
-              <a:rPr lang="en-US" sz="3000" b="1" dirty="0">
-                <a:solidFill>
-                  <a:srgbClr val="1F2A44"/>
-                </a:solidFill>
-                <a:latin typeface="Cambria" pitchFamily="34" charset="0"/>
-                <a:ea typeface="Cambria" pitchFamily="34" charset="-122"/>
-                <a:cs typeface="Cambria" pitchFamily="34" charset="-120"/>
-              </a:rPr>
-              <a:t>1</a:t>
-            </a:r>
-            <a:endParaRPr lang="en-US" sz="3000" dirty="0"/>
-          </a:p>
-        </p:txBody>
-      </p:sp>
-      <p:sp>
-        <p:nvSpPr>
-          <p:cNvPr id="7" name="Step 1 text"/>
-          <p:cNvSpPr txBox="1"/>
-          <p:nvPr/>
-        </p:nvSpPr>
-        <p:spPr>
-          <a:xfrm>
-            <a:off x="731520" y="2148840"/>
-            <a:ext cx="1783080" cy="1828800"/>
-          </a:xfrm>
-          <a:prstGeom prst="rect">
-            <a:avLst/>
-          </a:prstGeom>
-          <a:noFill/>
-          <a:ln/>
-        </p:spPr>
-        <p:txBody>
-          <a:bodyPr wrap="square" lIns="0" tIns="0" rIns="0" bIns="0" rtlCol="0" anchor="t"/>
-          <a:lstStyle/>
-          <a:p>
-            <a:pPr marL="0" indent="0">
-              <a:spcAft>
-                <a:spcPts val="400"/>
-              </a:spcAft>
-              <a:buNone/>
-            </a:pPr>
-            <a:r>
-              <a:rPr lang="en-US" sz="1800" b="1" dirty="0">
-                <a:solidFill>
-                  <a:srgbClr val="1F2A44"/>
-                </a:solidFill>
-                <a:latin typeface="Cambria" pitchFamily="34" charset="0"/>
-                <a:ea typeface="Cambria" pitchFamily="34" charset="-122"/>
-                <a:cs typeface="Cambria" pitchFamily="34" charset="-120"/>
-              </a:rPr>
-              <a:t>Discover</a:t>
-            </a:r>
-            <a:endParaRPr lang="en-US" sz="1400" dirty="0"/>
-          </a:p>
-          <a:p>
-            <a:pPr marL="0" indent="0">
-              <a:spcAft>
-                <a:spcPts val="400"/>
-              </a:spcAft>
-              <a:buNone/>
-            </a:pPr>
-            <a:r>
-              <a:rPr lang="en-US" sz="1350" dirty="0">
-                <a:solidFill>
-                  <a:schemeClr val="tx2"/>
-                </a:solidFill>
-              </a:rPr>
-              <a:t>Read-only first; ask for narrow, time-bound access</a:t>
-            </a:r>
-            <a:endParaRPr lang="en-US" sz="1400" dirty="0"/>
-          </a:p>
-          <a:p>
-            <a:pPr marL="0" indent="0">
-              <a:spcAft>
-                <a:spcPts val="400"/>
-              </a:spcAft>
-              <a:buNone/>
-            </a:pPr>
-            <a:r>
-              <a:rPr lang="en-US" sz="1200" i="1" dirty="0">
-                <a:solidFill>
-                  <a:srgbClr val="64748B"/>
-                </a:solidFill>
-              </a:rPr>
-              <a:t>Ch 07</a:t>
-            </a:r>
-            <a:endParaRPr lang="en-US" sz="1400" dirty="0"/>
-          </a:p>
-        </p:txBody>
-      </p:sp>
-      <p:sp>
-        <p:nvSpPr>
-          <p:cNvPr id="8" name="Step 2">
-            <a:extLst>
-              <a:ext uri="{C183D7F6-B498-43B3-948B-1728B52AA6E4}">
-                <adec:decorative xmlns:adec="http://schemas.microsoft.com/office/drawing/2017/decorative" val="1"/>
-              </a:ext>
-            </a:extLst>
-          </p:cNvPr>
-          <p:cNvSpPr/>
-          <p:nvPr/>
-        </p:nvSpPr>
-        <p:spPr>
-          <a:xfrm>
-            <a:off x="2798064" y="1463040"/>
-            <a:ext cx="2103120" cy="2606040"/>
-          </a:xfrm>
-          <a:prstGeom prst="roundRect">
-            <a:avLst>
-              <a:gd name="adj" fmla="val 3478"/>
-            </a:avLst>
-          </a:prstGeom>
-          <a:solidFill>
-            <a:srgbClr val="DCEFEC"/>
-          </a:solidFill>
-          <a:ln w="12700">
-            <a:solidFill>
-              <a:srgbClr val="DCEFEC"/>
-            </a:solidFill>
-            <a:prstDash val="solid"/>
-          </a:ln>
-          <a:effectLst>
-            <a:outerShdw blurRad="76200" dist="25400" dir="5400000" algn="bl" rotWithShape="0">
-              <a:srgbClr val="64748B">
-                <a:alpha val="22000"/>
-              </a:srgbClr>
-            </a:outerShdw>
-          </a:effectLst>
-        </p:spPr>
-      </p:sp>
-      <p:sp>
-        <p:nvSpPr>
-          <p:cNvPr id="9" name="Step 2 num"/>
-          <p:cNvSpPr txBox="1"/>
-          <p:nvPr/>
-        </p:nvSpPr>
-        <p:spPr>
-          <a:xfrm>
-            <a:off x="2980944" y="1572768"/>
-            <a:ext cx="548640" cy="548640"/>
-          </a:xfrm>
-          <a:prstGeom prst="rect">
-            <a:avLst/>
-          </a:prstGeom>
-          <a:noFill/>
-          <a:ln/>
-        </p:spPr>
-        <p:txBody>
-          <a:bodyPr wrap="square" lIns="0" tIns="0" rIns="0" bIns="0" rtlCol="0" anchor="t"/>
-          <a:lstStyle/>
-          <a:p>
-            <a:pPr marL="0" indent="0">
-              <a:buNone/>
-            </a:pPr>
-            <a:r>
-              <a:rPr lang="en-US" sz="3000" b="1" dirty="0">
-                <a:solidFill>
-                  <a:srgbClr val="0F766E"/>
-                </a:solidFill>
-                <a:latin typeface="Cambria" pitchFamily="34" charset="0"/>
-                <a:ea typeface="Cambria" pitchFamily="34" charset="-122"/>
-                <a:cs typeface="Cambria" pitchFamily="34" charset="-120"/>
-              </a:rPr>
-              <a:t>2</a:t>
-            </a:r>
-            <a:endParaRPr lang="en-US" sz="3000" dirty="0"/>
-          </a:p>
-        </p:txBody>
-      </p:sp>
-      <p:sp>
-        <p:nvSpPr>
-          <p:cNvPr id="10" name="Step 2 text"/>
-          <p:cNvSpPr txBox="1"/>
-          <p:nvPr/>
-        </p:nvSpPr>
-        <p:spPr>
-          <a:xfrm>
-            <a:off x="2980944" y="2148840"/>
-            <a:ext cx="1783080" cy="1828800"/>
-          </a:xfrm>
-          <a:prstGeom prst="rect">
-            <a:avLst/>
-          </a:prstGeom>
-          <a:noFill/>
-          <a:ln/>
-        </p:spPr>
-        <p:txBody>
-          <a:bodyPr wrap="square" lIns="0" tIns="0" rIns="0" bIns="0" rtlCol="0" anchor="t"/>
-          <a:lstStyle/>
-          <a:p>
-            <a:pPr marL="0" indent="0">
-              <a:spcAft>
-                <a:spcPts val="400"/>
-              </a:spcAft>
-              <a:buNone/>
-            </a:pPr>
-            <a:r>
-              <a:rPr lang="en-US" sz="1800" b="1" dirty="0">
-                <a:solidFill>
-                  <a:srgbClr val="0F766E"/>
-                </a:solidFill>
-                <a:latin typeface="Cambria" pitchFamily="34" charset="0"/>
-                <a:ea typeface="Cambria" pitchFamily="34" charset="-122"/>
-                <a:cs typeface="Cambria" pitchFamily="34" charset="-120"/>
-              </a:rPr>
-              <a:t>Assess</a:t>
-            </a:r>
-            <a:endParaRPr lang="en-US" sz="1400" dirty="0"/>
-          </a:p>
-          <a:p>
-            <a:pPr marL="0" indent="0">
-              <a:spcAft>
-                <a:spcPts val="400"/>
-              </a:spcAft>
-              <a:buNone/>
-            </a:pPr>
-            <a:r>
-              <a:rPr lang="en-US" sz="1350" dirty="0">
-                <a:solidFill>
-                  <a:schemeClr val="tx2"/>
-                </a:solidFill>
-              </a:rPr>
-              <a:t>Full forest inventory, with secrets never requested</a:t>
-            </a:r>
-            <a:endParaRPr lang="en-US" sz="1400" dirty="0"/>
-          </a:p>
-          <a:p>
-            <a:pPr marL="0" indent="0">
-              <a:spcAft>
-                <a:spcPts val="400"/>
-              </a:spcAft>
-              <a:buNone/>
-            </a:pPr>
-            <a:r>
-              <a:rPr lang="en-US" sz="1200" i="1" dirty="0">
-                <a:solidFill>
-                  <a:srgbClr val="64748B"/>
-                </a:solidFill>
-              </a:rPr>
-              <a:t>Ch 08</a:t>
-            </a:r>
-            <a:endParaRPr lang="en-US" sz="1400" dirty="0"/>
-          </a:p>
-        </p:txBody>
-      </p:sp>
-      <p:sp>
-        <p:nvSpPr>
-          <p:cNvPr id="11" name="Step 3">
-            <a:extLst>
-              <a:ext uri="{C183D7F6-B498-43B3-948B-1728B52AA6E4}">
-                <adec:decorative xmlns:adec="http://schemas.microsoft.com/office/drawing/2017/decorative" val="1"/>
-              </a:ext>
-            </a:extLst>
-          </p:cNvPr>
-          <p:cNvSpPr/>
-          <p:nvPr/>
-        </p:nvSpPr>
-        <p:spPr>
-          <a:xfrm>
-            <a:off x="5047488" y="1463040"/>
-            <a:ext cx="2103120" cy="2606040"/>
-          </a:xfrm>
-          <a:prstGeom prst="roundRect">
-            <a:avLst>
-              <a:gd name="adj" fmla="val 3478"/>
-            </a:avLst>
-          </a:prstGeom>
-          <a:solidFill>
-            <a:srgbClr val="E4EAF4"/>
-          </a:solidFill>
-          <a:ln w="12700">
-            <a:solidFill>
-              <a:srgbClr val="E4EAF4"/>
-            </a:solidFill>
-            <a:prstDash val="solid"/>
-          </a:ln>
-          <a:effectLst>
-            <a:outerShdw blurRad="76200" dist="25400" dir="5400000" algn="bl" rotWithShape="0">
-              <a:srgbClr val="64748B">
-                <a:alpha val="22000"/>
-              </a:srgbClr>
-            </a:outerShdw>
-          </a:effectLst>
-        </p:spPr>
-      </p:sp>
-      <p:sp>
-        <p:nvSpPr>
-          <p:cNvPr id="12" name="Step 3 num"/>
-          <p:cNvSpPr txBox="1"/>
-          <p:nvPr/>
-        </p:nvSpPr>
-        <p:spPr>
-          <a:xfrm>
-            <a:off x="5230368" y="1572768"/>
-            <a:ext cx="548640" cy="548640"/>
-          </a:xfrm>
-          <a:prstGeom prst="rect">
-            <a:avLst/>
-          </a:prstGeom>
-          <a:noFill/>
-          <a:ln/>
-        </p:spPr>
-        <p:txBody>
-          <a:bodyPr wrap="square" lIns="0" tIns="0" rIns="0" bIns="0" rtlCol="0" anchor="t"/>
-          <a:lstStyle/>
-          <a:p>
-            <a:pPr marL="0" indent="0">
-              <a:buNone/>
-            </a:pPr>
-            <a:r>
-              <a:rPr lang="en-US" sz="3000" b="1" dirty="0">
-                <a:solidFill>
-                  <a:srgbClr val="1F2A44"/>
-                </a:solidFill>
-                <a:latin typeface="Cambria" pitchFamily="34" charset="0"/>
-                <a:ea typeface="Cambria" pitchFamily="34" charset="-122"/>
-                <a:cs typeface="Cambria" pitchFamily="34" charset="-120"/>
-              </a:rPr>
-              <a:t>3</a:t>
-            </a:r>
-            <a:endParaRPr lang="en-US" sz="3000" dirty="0"/>
-          </a:p>
-        </p:txBody>
-      </p:sp>
-      <p:sp>
-        <p:nvSpPr>
-          <p:cNvPr id="13" name="Step 3 text"/>
-          <p:cNvSpPr txBox="1"/>
-          <p:nvPr/>
-        </p:nvSpPr>
-        <p:spPr>
-          <a:xfrm>
-            <a:off x="5230368" y="2148840"/>
-            <a:ext cx="1783080" cy="1828800"/>
-          </a:xfrm>
-          <a:prstGeom prst="rect">
-            <a:avLst/>
-          </a:prstGeom>
-          <a:noFill/>
-          <a:ln/>
-        </p:spPr>
-        <p:txBody>
-          <a:bodyPr wrap="square" lIns="0" tIns="0" rIns="0" bIns="0" rtlCol="0" anchor="t"/>
-          <a:lstStyle/>
-          <a:p>
-            <a:pPr marL="0" indent="0">
-              <a:spcAft>
-                <a:spcPts val="400"/>
-              </a:spcAft>
-              <a:buNone/>
-            </a:pPr>
-            <a:r>
-              <a:rPr lang="en-US" sz="1800" b="1" dirty="0">
-                <a:solidFill>
-                  <a:srgbClr val="1F2A44"/>
-                </a:solidFill>
-                <a:latin typeface="Cambria" pitchFamily="34" charset="0"/>
-                <a:ea typeface="Cambria" pitchFamily="34" charset="-122"/>
-                <a:cs typeface="Cambria" pitchFamily="34" charset="-120"/>
-              </a:rPr>
-              <a:t>Build</a:t>
-            </a:r>
-            <a:endParaRPr lang="en-US" sz="1400" dirty="0"/>
-          </a:p>
-          <a:p>
-            <a:pPr marL="0" indent="0">
-              <a:spcAft>
-                <a:spcPts val="400"/>
-              </a:spcAft>
-              <a:buNone/>
-            </a:pPr>
-            <a:r>
-              <a:rPr lang="en-US" sz="1350" dirty="0">
-                <a:solidFill>
-                  <a:schemeClr val="tx2"/>
-                </a:solidFill>
-              </a:rPr>
-              <a:t>Cloud Sync, password hash sync, PIM, Conditional Access</a:t>
-            </a:r>
-            <a:endParaRPr lang="en-US" sz="1400" dirty="0"/>
-          </a:p>
-          <a:p>
-            <a:pPr marL="0" indent="0">
-              <a:spcAft>
-                <a:spcPts val="400"/>
-              </a:spcAft>
-              <a:buNone/>
-            </a:pPr>
-            <a:r>
-              <a:rPr lang="en-US" sz="1200" i="1" dirty="0">
-                <a:solidFill>
-                  <a:srgbClr val="64748B"/>
-                </a:solidFill>
-              </a:rPr>
-              <a:t>Ch 09</a:t>
-            </a:r>
-            <a:endParaRPr lang="en-US" sz="1400" dirty="0"/>
-          </a:p>
-        </p:txBody>
-      </p:sp>
-      <p:sp>
-        <p:nvSpPr>
-          <p:cNvPr id="14" name="Step 4">
-            <a:extLst>
-              <a:ext uri="{C183D7F6-B498-43B3-948B-1728B52AA6E4}">
-                <adec:decorative xmlns:adec="http://schemas.microsoft.com/office/drawing/2017/decorative" val="1"/>
-              </a:ext>
-            </a:extLst>
-          </p:cNvPr>
-          <p:cNvSpPr/>
-          <p:nvPr/>
-        </p:nvSpPr>
-        <p:spPr>
-          <a:xfrm>
-            <a:off x="7296912" y="1463040"/>
-            <a:ext cx="2103120" cy="2606040"/>
-          </a:xfrm>
-          <a:prstGeom prst="roundRect">
-            <a:avLst>
-              <a:gd name="adj" fmla="val 3478"/>
-            </a:avLst>
-          </a:prstGeom>
-          <a:solidFill>
-            <a:srgbClr val="DCEFEC"/>
-          </a:solidFill>
-          <a:ln w="12700">
-            <a:solidFill>
-              <a:srgbClr val="DCEFEC"/>
-            </a:solidFill>
-            <a:prstDash val="solid"/>
-          </a:ln>
-          <a:effectLst>
-            <a:outerShdw blurRad="76200" dist="25400" dir="5400000" algn="bl" rotWithShape="0">
-              <a:srgbClr val="64748B">
-                <a:alpha val="22000"/>
-              </a:srgbClr>
-            </a:outerShdw>
-          </a:effectLst>
-        </p:spPr>
-      </p:sp>
-      <p:sp>
-        <p:nvSpPr>
-          <p:cNvPr id="15" name="Step 4 num"/>
-          <p:cNvSpPr txBox="1"/>
-          <p:nvPr/>
-        </p:nvSpPr>
-        <p:spPr>
-          <a:xfrm>
-            <a:off x="7479792" y="1572768"/>
-            <a:ext cx="548640" cy="548640"/>
-          </a:xfrm>
-          <a:prstGeom prst="rect">
-            <a:avLst/>
-          </a:prstGeom>
-          <a:noFill/>
-          <a:ln/>
-        </p:spPr>
-        <p:txBody>
-          <a:bodyPr wrap="square" lIns="0" tIns="0" rIns="0" bIns="0" rtlCol="0" anchor="t"/>
-          <a:lstStyle/>
-          <a:p>
-            <a:pPr marL="0" indent="0">
-              <a:buNone/>
-            </a:pPr>
-            <a:r>
-              <a:rPr lang="en-US" sz="3000" b="1" dirty="0">
-                <a:solidFill>
-                  <a:srgbClr val="0F766E"/>
-                </a:solidFill>
-                <a:latin typeface="Cambria" pitchFamily="34" charset="0"/>
-                <a:ea typeface="Cambria" pitchFamily="34" charset="-122"/>
-                <a:cs typeface="Cambria" pitchFamily="34" charset="-120"/>
-              </a:rPr>
-              <a:t>4</a:t>
-            </a:r>
-            <a:endParaRPr lang="en-US" sz="3000" dirty="0"/>
-          </a:p>
-        </p:txBody>
-      </p:sp>
-      <p:sp>
-        <p:nvSpPr>
-          <p:cNvPr id="16" name="Step 4 text"/>
-          <p:cNvSpPr txBox="1"/>
-          <p:nvPr/>
-        </p:nvSpPr>
-        <p:spPr>
-          <a:xfrm>
-            <a:off x="7479792" y="2148840"/>
-            <a:ext cx="1783080" cy="1828800"/>
-          </a:xfrm>
-          <a:prstGeom prst="rect">
-            <a:avLst/>
-          </a:prstGeom>
-          <a:noFill/>
-          <a:ln/>
-        </p:spPr>
-        <p:txBody>
-          <a:bodyPr wrap="square" lIns="0" tIns="0" rIns="0" bIns="0" rtlCol="0" anchor="t"/>
-          <a:lstStyle/>
-          <a:p>
-            <a:pPr marL="0" indent="0">
-              <a:spcAft>
-                <a:spcPts val="400"/>
-              </a:spcAft>
-              <a:buNone/>
-            </a:pPr>
-            <a:r>
-              <a:rPr lang="en-US" sz="1800" b="1" dirty="0">
-                <a:solidFill>
-                  <a:srgbClr val="0F766E"/>
-                </a:solidFill>
-                <a:latin typeface="Cambria" pitchFamily="34" charset="0"/>
-                <a:ea typeface="Cambria" pitchFamily="34" charset="-122"/>
-                <a:cs typeface="Cambria" pitchFamily="34" charset="-120"/>
-              </a:rPr>
-              <a:t>Migrate</a:t>
-            </a:r>
-            <a:endParaRPr lang="en-US" sz="1400" dirty="0"/>
-          </a:p>
-          <a:p>
-            <a:pPr marL="0" indent="0">
-              <a:spcAft>
-                <a:spcPts val="400"/>
-              </a:spcAft>
-              <a:buNone/>
-            </a:pPr>
-            <a:r>
-              <a:rPr lang="en-US" sz="1350" dirty="0">
-                <a:solidFill>
-                  <a:schemeClr val="tx2"/>
-                </a:solidFill>
-              </a:rPr>
-              <a:t>Waves; phishing-resistant MFA; legacy auth off</a:t>
-            </a:r>
-            <a:endParaRPr lang="en-US" sz="1400" dirty="0"/>
-          </a:p>
-          <a:p>
-            <a:pPr marL="0" indent="0">
-              <a:spcAft>
-                <a:spcPts val="400"/>
-              </a:spcAft>
-              <a:buNone/>
-            </a:pPr>
-            <a:r>
-              <a:rPr lang="en-US" sz="1200" i="1" dirty="0">
-                <a:solidFill>
-                  <a:srgbClr val="64748B"/>
-                </a:solidFill>
-              </a:rPr>
-              <a:t>Ch 10</a:t>
-            </a:r>
-            <a:endParaRPr lang="en-US" sz="1400" dirty="0"/>
-          </a:p>
-        </p:txBody>
-      </p:sp>
-      <p:sp>
-        <p:nvSpPr>
-          <p:cNvPr id="17" name="Step 5">
-            <a:extLst>
-              <a:ext uri="{C183D7F6-B498-43B3-948B-1728B52AA6E4}">
-                <adec:decorative xmlns:adec="http://schemas.microsoft.com/office/drawing/2017/decorative" val="1"/>
-              </a:ext>
-            </a:extLst>
-          </p:cNvPr>
-          <p:cNvSpPr/>
-          <p:nvPr/>
-        </p:nvSpPr>
-        <p:spPr>
-          <a:xfrm>
-            <a:off x="9546336" y="1463040"/>
-            <a:ext cx="2103120" cy="2606040"/>
-          </a:xfrm>
-          <a:prstGeom prst="roundRect">
-            <a:avLst>
-              <a:gd name="adj" fmla="val 3478"/>
-            </a:avLst>
-          </a:prstGeom>
-          <a:solidFill>
-            <a:srgbClr val="E4EAF4"/>
-          </a:solidFill>
-          <a:ln w="12700">
-            <a:solidFill>
-              <a:srgbClr val="E4EAF4"/>
-            </a:solidFill>
-            <a:prstDash val="solid"/>
-          </a:ln>
-          <a:effectLst>
-            <a:outerShdw blurRad="76200" dist="25400" dir="5400000" algn="bl" rotWithShape="0">
-              <a:srgbClr val="64748B">
-                <a:alpha val="22000"/>
-              </a:srgbClr>
-            </a:outerShdw>
-          </a:effectLst>
-        </p:spPr>
-      </p:sp>
-      <p:sp>
-        <p:nvSpPr>
-          <p:cNvPr id="18" name="Step 5 num"/>
-          <p:cNvSpPr txBox="1"/>
-          <p:nvPr/>
-        </p:nvSpPr>
-        <p:spPr>
-          <a:xfrm>
-            <a:off x="9729216" y="1572768"/>
-            <a:ext cx="548640" cy="548640"/>
-          </a:xfrm>
-          <a:prstGeom prst="rect">
-            <a:avLst/>
-          </a:prstGeom>
-          <a:noFill/>
-          <a:ln/>
-        </p:spPr>
-        <p:txBody>
-          <a:bodyPr wrap="square" lIns="0" tIns="0" rIns="0" bIns="0" rtlCol="0" anchor="t"/>
-          <a:lstStyle/>
-          <a:p>
-            <a:pPr marL="0" indent="0">
-              <a:buNone/>
-            </a:pPr>
-            <a:r>
-              <a:rPr lang="en-US" sz="3000" b="1" dirty="0">
-                <a:solidFill>
-                  <a:srgbClr val="1F2A44"/>
-                </a:solidFill>
-                <a:latin typeface="Cambria" pitchFamily="34" charset="0"/>
-                <a:ea typeface="Cambria" pitchFamily="34" charset="-122"/>
-                <a:cs typeface="Cambria" pitchFamily="34" charset="-120"/>
-              </a:rPr>
-              <a:t>5</a:t>
-            </a:r>
-            <a:endParaRPr lang="en-US" sz="3000" dirty="0"/>
-          </a:p>
-        </p:txBody>
-      </p:sp>
-      <p:sp>
-        <p:nvSpPr>
-          <p:cNvPr id="19" name="Step 5 text"/>
-          <p:cNvSpPr txBox="1"/>
-          <p:nvPr/>
-        </p:nvSpPr>
-        <p:spPr>
-          <a:xfrm>
-            <a:off x="9729216" y="2148840"/>
-            <a:ext cx="1783080" cy="1828800"/>
-          </a:xfrm>
-          <a:prstGeom prst="rect">
-            <a:avLst/>
-          </a:prstGeom>
-          <a:noFill/>
-          <a:ln/>
-        </p:spPr>
-        <p:txBody>
-          <a:bodyPr wrap="square" lIns="0" tIns="0" rIns="0" bIns="0" rtlCol="0" anchor="t"/>
-          <a:lstStyle/>
-          <a:p>
-            <a:pPr marL="0" indent="0">
-              <a:spcAft>
-                <a:spcPts val="400"/>
-              </a:spcAft>
-              <a:buNone/>
-            </a:pPr>
-            <a:r>
-              <a:rPr lang="en-US" sz="1800" b="1" dirty="0">
-                <a:solidFill>
-                  <a:srgbClr val="1F2A44"/>
-                </a:solidFill>
-                <a:latin typeface="Cambria" pitchFamily="34" charset="0"/>
-                <a:ea typeface="Cambria" pitchFamily="34" charset="-122"/>
-                <a:cs typeface="Cambria" pitchFamily="34" charset="-120"/>
-              </a:rPr>
-              <a:t>Prove</a:t>
-            </a:r>
-            <a:endParaRPr lang="en-US" sz="1400" dirty="0"/>
-          </a:p>
-          <a:p>
-            <a:pPr marL="0" indent="0">
-              <a:spcAft>
-                <a:spcPts val="400"/>
-              </a:spcAft>
-              <a:buNone/>
-            </a:pPr>
-            <a:r>
-              <a:rPr lang="en-US" sz="1350" dirty="0">
-                <a:solidFill>
-                  <a:schemeClr val="tx2"/>
-                </a:solidFill>
-              </a:rPr>
-              <a:t>Drift checks and an evidence bundle for the AO</a:t>
-            </a:r>
-            <a:endParaRPr lang="en-US" sz="1400" dirty="0"/>
-          </a:p>
-          <a:p>
-            <a:pPr marL="0" indent="0">
-              <a:spcAft>
-                <a:spcPts val="400"/>
-              </a:spcAft>
-              <a:buNone/>
-            </a:pPr>
-            <a:r>
-              <a:rPr lang="en-US" sz="1200" i="1" dirty="0">
-                <a:solidFill>
-                  <a:srgbClr val="64748B"/>
-                </a:solidFill>
-              </a:rPr>
-              <a:t>Ch 10–11</a:t>
-            </a:r>
-            <a:endParaRPr lang="en-US" sz="1400" dirty="0"/>
-          </a:p>
-        </p:txBody>
-      </p:sp>
-      <p:sp>
-        <p:nvSpPr>
-          <p:cNvPr id="20" name="Rules">
-            <a:extLst>
-              <a:ext uri="{C183D7F6-B498-43B3-948B-1728B52AA6E4}">
-                <adec:decorative xmlns:adec="http://schemas.microsoft.com/office/drawing/2017/decorative" val="1"/>
-              </a:ext>
-            </a:extLst>
-          </p:cNvPr>
-          <p:cNvSpPr/>
-          <p:nvPr/>
-        </p:nvSpPr>
-        <p:spPr>
-          <a:xfrm>
-            <a:off x="548640" y="4343400"/>
-            <a:ext cx="11109960" cy="1600200"/>
-          </a:xfrm>
-          <a:prstGeom prst="roundRect">
-            <a:avLst>
-              <a:gd name="adj" fmla="val 4571"/>
-            </a:avLst>
-          </a:prstGeom>
-          <a:solidFill>
-            <a:srgbClr val="FFFFFF"/>
-          </a:solidFill>
-          <a:ln w="12700">
-            <a:solidFill>
-              <a:srgbClr val="B45309"/>
-            </a:solidFill>
-            <a:prstDash val="solid"/>
-          </a:ln>
-          <a:effectLst>
-            <a:outerShdw blurRad="76200" dist="25400" dir="5400000" algn="bl" rotWithShape="0">
-              <a:srgbClr val="64748B">
-                <a:alpha val="22000"/>
-              </a:srgbClr>
-            </a:outerShdw>
-          </a:effectLst>
-        </p:spPr>
-      </p:sp>
-      <p:sp>
-        <p:nvSpPr>
-          <p:cNvPr id="21" name="Icon FaClipboardCheck">
-            <a:extLst>
-              <a:ext uri="{C183D7F6-B498-43B3-948B-1728B52AA6E4}">
-                <adec:decorative xmlns:adec="http://schemas.microsoft.com/office/drawing/2017/decorative" val="1"/>
-              </a:ext>
-            </a:extLst>
-          </p:cNvPr>
-          <p:cNvSpPr/>
-          <p:nvPr/>
-        </p:nvSpPr>
-        <p:spPr>
-          <a:xfrm>
-            <a:off x="777240" y="4777740"/>
-            <a:ext cx="731520" cy="731520"/>
-          </a:xfrm>
-          <a:prstGeom prst="ellipse">
-            <a:avLst/>
-          </a:prstGeom>
-          <a:solidFill>
-            <a:srgbClr val="B45309"/>
-          </a:solidFill>
-          <a:ln w="12700">
-            <a:solidFill>
-              <a:srgbClr val="B45309"/>
-            </a:solidFill>
-            <a:prstDash val="solid"/>
-          </a:ln>
-        </p:spPr>
-      </p:sp>
-      <p:pic>
-        <p:nvPicPr>
-          <p:cNvPr id="22" name="Image 0">
-            <a:extLst>
-              <a:ext uri="{C183D7F6-B498-43B3-948B-1728B52AA6E4}">
-                <adec:decorative xmlns:adec="http://schemas.microsoft.com/office/drawing/2017/decorative" val="1"/>
-              </a:ext>
-            </a:extLst>
-          </p:cNvPr>
-          <p:cNvPicPr>
-            <a:picLocks noChangeAspect="1"/>
-          </p:cNvPicPr>
-          <p:nvPr/>
-        </p:nvPicPr>
-        <p:blipFill>
-          <a:blip r:embed="rId5"/>
-          <a:stretch>
-            <a:fillRect/>
-          </a:stretch>
-        </p:blipFill>
-        <p:spPr>
-          <a:xfrm>
-            <a:off x="952805" y="4953305"/>
-            <a:ext cx="380390" cy="380390"/>
-          </a:xfrm>
-          <a:prstGeom prst="rect">
-            <a:avLst/>
-          </a:prstGeom>
-        </p:spPr>
-      </p:pic>
-      <p:sp>
-        <p:nvSpPr>
-          <p:cNvPr id="23" name="Rules text"/>
-          <p:cNvSpPr txBox="1"/>
-          <p:nvPr/>
-        </p:nvSpPr>
-        <p:spPr>
-          <a:xfrm>
-            <a:off x="1737360" y="4389120"/>
-            <a:ext cx="9738360" cy="1508760"/>
-          </a:xfrm>
-          <a:prstGeom prst="rect">
-            <a:avLst/>
-          </a:prstGeom>
-          <a:noFill/>
-          <a:ln/>
-        </p:spPr>
-        <p:txBody>
-          <a:bodyPr wrap="square" lIns="0" tIns="0" rIns="0" bIns="0" rtlCol="0" anchor="ctr"/>
-          <a:lstStyle/>
-          <a:p>
-            <a:pPr marL="0" indent="0">
-              <a:buNone/>
-            </a:pPr>
-            <a:r>
-              <a:rPr lang="en-US" sz="1650" b="1" dirty="0">
-                <a:solidFill>
-                  <a:srgbClr val="B45309"/>
-                </a:solidFill>
-              </a:rPr>
-              <a:t>Rules that hold every wave: </a:t>
-            </a:r>
-            <a:r>
-              <a:rPr lang="en-US" sz="1650" dirty="0">
-                <a:solidFill>
-                  <a:schemeClr val="tx2"/>
-                </a:solidFill>
-              </a:rPr>
-              <a:t>never enforce an untested policy on all users; keep two cloud-only break-glass accounts on phishing-resistant credentials; convert service accounts to managed or workload identities; and treat every closure as unproven until it carries its evidence.</a:t>
-            </a:r>
-            <a:endParaRPr lang="en-US" sz="1650" dirty="0"/>
-          </a:p>
-        </p:txBody>
-      </p:sp>
-      <p:sp>
-        <p:nvSpPr>
-          <p:cNvPr id="24" name="Sources"/>
-          <p:cNvSpPr txBox="1"/>
-          <p:nvPr/>
-        </p:nvSpPr>
-        <p:spPr>
-          <a:xfrm>
-            <a:off x="548640" y="6053328"/>
-            <a:ext cx="10424160" cy="292608"/>
-          </a:xfrm>
-          <a:prstGeom prst="rect">
-            <a:avLst/>
-          </a:prstGeom>
-          <a:noFill/>
-          <a:ln/>
-        </p:spPr>
-        <p:txBody>
-          <a:bodyPr wrap="square" lIns="0" tIns="0" rIns="0" bIns="0" rtlCol="0" anchor="t"/>
-          <a:lstStyle/>
-          <a:p>
-            <a:pPr marL="0" indent="0">
-              <a:buNone/>
-            </a:pPr>
-            <a:r>
-              <a:rPr lang="en-US" sz="1000" i="1" dirty="0">
-                <a:solidFill>
-                  <a:srgbClr val="64748B"/>
-                </a:solidFill>
-              </a:rPr>
-              <a:t>Sources: Microsoft Learn — Cloud Sync, PHS, PIM, emergency access accounts, CBA, workload identity federation. Book 02, Chapters 07–11.</a:t>
-            </a:r>
-            <a:endParaRPr lang="en-US" sz="1000" dirty="0"/>
-          </a:p>
-        </p:txBody>
-      </p:sp>
-      <p:sp>
-        <p:nvSpPr>
-          <p:cNvPr id="25" name="Slide Number Placeholder 0"/>
-          <p:cNvSpPr>
-            <a:spLocks noGrp="1"/>
-          </p:cNvSpPr>
-          <p:nvPr>
-            <p:ph type="sldNum" sz="quarter" idx="4294967295"/>
-          </p:nvPr>
-        </p:nvSpPr>
-        <p:spPr>
-          <a:xfrm>
-            <a:off x="11155680" y="6400800"/>
-            <a:ext cx="457200" cy="274320"/>
-          </a:xfrm>
-          <a:prstGeom prst="rect">
-            <a:avLst/>
-          </a:prstGeom>
-          <a:extLst>
-            <a:ext uri="{C572A759-6A51-4108-AA02-DFA0A04FC94B}">
-              <ma14:wrappingTextBoxFlag xmlns:ma14="http://schemas.microsoft.com/office/mac/drawingml/2011/main" xmlns="" val="0"/>
-            </a:ext>
-          </a:extLst>
-        </p:spPr>
-        <p:txBody>
-          <a:bodyPr/>
-          <a:lstStyle>
-            <a:lvl1pPr>
-              <a:defRPr sz="1000">
-                <a:solidFill>
-                  <a:schemeClr val="accent5"/>
-                </a:solidFill>
-              </a:defRPr>
-            </a:lvl1pPr>
-          </a:lstStyle>
-          <a:p>
-            <a:pPr algn="r"/>
-            <a:fld id="{F7021451-1387-4CA6-816F-3879F97B5CBC}" type="slidenum">
-              <a:rPr lang="en-US" b="0"/>
-              <a:t>9</a:t>
-            </a:fld>
-            <a:endParaRPr lang="en-US"/>
-          </a:p>
-        </p:txBody>
-      </p:sp>
-      <p:pic>
-        <p:nvPicPr>
-          <p:cNvPr id="26" name="Narration" descr="Narration for this slide; captions available">
-            <a:hlinkClick r:id="" action="ppaction://media"/>
-            <a:extLst>
-              <a:ext uri="{FF2B5EF4-FFF2-40B4-BE49-F238E27FC236}">
-                <a16:creationId xmlns:a16="http://schemas.microsoft.com/office/drawing/2014/main" id="{8307B499-8D47-69D4-23B5-D9748AEE33A5}"/>
-              </a:ext>
-            </a:extLst>
-          </p:cNvPr>
-          <p:cNvPicPr>
-            <a:picLocks noChangeAspect="1"/>
-          </p:cNvPicPr>
-          <p:nvPr>
-            <a:audioFile r:link="rId2"/>
-            <p:extLst>
-              <p:ext uri="{DAA4B4D4-6D71-4841-9C94-3DE7FCFB9230}">
-                <p14:media xmlns:p14="http://schemas.microsoft.com/office/powerpoint/2010/main" r:embed="rId1">
-                  <p14:extLst>
-                    <p:ext uri="{3AFAAA56-56D3-431D-BCD4-E75A35582382}">
-                      <p173:tracksInfo xmlns:p173="http://schemas.microsoft.com/office/powerpoint/2017/3/main" displayLoc="slide">
-                        <p173:trackLst>
-                          <p173:track id="{3B47940D-0898-417F-9F90-DED94D03D569}" label="English (captions)" lang="en-US" r:embed="rId7"/>
-                        </p173:trackLst>
-                      </p173:tracksInfo>
-                    </p:ext>
-                  </p14:extLst>
-                </p14:media>
-              </p:ext>
-            </p:extLst>
-          </p:nvPr>
-        </p:nvPicPr>
-        <p:blipFill>
-          <a:blip r:embed="rId6"/>
-          <a:stretch>
-            <a:fillRect/>
-          </a:stretch>
-        </p:blipFill>
-        <p:spPr>
-          <a:xfrm>
-            <a:off x="12446000" y="127000"/>
-            <a:ext cx="304800" cy="304800"/>
-          </a:xfrm>
-          <a:prstGeom prst="rect">
-            <a:avLst/>
-          </a:prstGeom>
-        </p:spPr>
-      </p:pic>
-    </p:spTree>
-  </p:cSld>
-  <p:clrMapOvr>
-    <a:masterClrMapping/>
-  </p:clrMapOvr>
-  <mc:AlternateContent xmlns:mc="http://schemas.openxmlformats.org/markup-compatibility/2006">
-    <mc:Choice xmlns:p14="http://schemas.microsoft.com/office/powerpoint/2010/main" Requires="p14">
-      <p:transition spd="slow" p14:dur="2000" advTm="60230"/>
-    </mc:Choice>
-    <mc:Fallback>
-      <p:transition spd="slow" advTm="60230"/>
-    </mc:Fallback>
-  </mc:AlternateContent>
-  <p:timing>
-    <p:tnLst>
-      <p:par>
-        <p:cTn id="1" dur="indefinite" restart="never" nodeType="tmRoot">
-          <p:childTnLst>
-            <p:seq concurrent="1" nextAc="seek">
-              <p:cTn id="2" dur="indefinite" nodeType="mainSeq">
-                <p:childTnLst>
-                  <p:par>
-                    <p:cTn id="3" fill="hold">
-                      <p:stCondLst>
-                        <p:cond delay="indefinite"/>
-                        <p:cond evt="onBegin" delay="0">
-                          <p:tn val="2"/>
-                        </p:cond>
-                      </p:stCondLst>
-                      <p:childTnLst>
-                        <p:par>
-                          <p:cTn id="4" fill="hold">
-                            <p:stCondLst>
-                              <p:cond delay="0"/>
-                            </p:stCondLst>
-                            <p:childTnLst>
-                              <p:par>
-                                <p:cTn id="5" presetID="1" presetClass="mediacall" presetSubtype="0" fill="hold" nodeType="withEffect">
-                                  <p:stCondLst>
-                                    <p:cond delay="0"/>
-                                  </p:stCondLst>
-                                  <p:childTnLst>
-                                    <p:cmd type="call" cmd="playFrom(0.0)">
-                                      <p:cBhvr>
-                                        <p:cTn id="6" dur="56232" fill="hold"/>
                                         <p:tgtEl>
                                           <p:spTgt spid="26"/>
                                         </p:tgtEl>
